--- a/presentation/presentation_new.pptx
+++ b/presentation/presentation_new.pptx
@@ -5,7 +5,7 @@
     <p:sldMasterId id="2147483725" r:id="rId1"/>
   </p:sldMasterIdLst>
   <p:notesMasterIdLst>
-    <p:notesMasterId r:id="rId14"/>
+    <p:notesMasterId r:id="rId15"/>
   </p:notesMasterIdLst>
   <p:sldIdLst>
     <p:sldId id="256" r:id="rId2"/>
@@ -18,8 +18,9 @@
     <p:sldId id="273" r:id="rId9"/>
     <p:sldId id="268" r:id="rId10"/>
     <p:sldId id="271" r:id="rId11"/>
-    <p:sldId id="269" r:id="rId12"/>
-    <p:sldId id="270" r:id="rId13"/>
+    <p:sldId id="274" r:id="rId12"/>
+    <p:sldId id="269" r:id="rId13"/>
+    <p:sldId id="270" r:id="rId14"/>
   </p:sldIdLst>
   <p:sldSz cx="12192000" cy="6858000"/>
   <p:notesSz cx="6858000" cy="9144000"/>
@@ -6078,7 +6079,7 @@
           <a:p>
             <a:fld id="{8C2B2B0A-079C-4124-945D-718AC739D4B0}" type="datetimeFigureOut">
               <a:rPr lang="en-US" smtClean="0"/>
-              <a:t>10/19/2024</a:t>
+              <a:t>10/21/2024</a:t>
             </a:fld>
             <a:endParaRPr lang="en-US"/>
           </a:p>
@@ -7082,7 +7083,7 @@
           <a:p>
             <a:fld id="{E902F998-B1F7-47BC-8C47-CDA4AD149044}" type="slidenum">
               <a:rPr lang="en-US" smtClean="0"/>
-              <a:t>11</a:t>
+              <a:t>12</a:t>
             </a:fld>
             <a:endParaRPr lang="en-US"/>
           </a:p>
@@ -7339,7 +7340,7 @@
           <a:p>
             <a:fld id="{ED291B17-9318-49DB-B28B-6E5994AE9581}" type="datetime1">
               <a:rPr lang="en-US" smtClean="0"/>
-              <a:t>10/19/2024</a:t>
+              <a:t>10/21/2024</a:t>
             </a:fld>
             <a:endParaRPr lang="en-US" dirty="0"/>
           </a:p>
@@ -7542,7 +7543,7 @@
           <a:p>
             <a:fld id="{2CED4963-E985-44C4-B8C4-FDD613B7C2F8}" type="datetime1">
               <a:rPr lang="en-US" smtClean="0"/>
-              <a:t>10/19/2024</a:t>
+              <a:t>10/21/2024</a:t>
             </a:fld>
             <a:endParaRPr lang="en-US" dirty="0"/>
           </a:p>
@@ -7904,7 +7905,7 @@
           <a:p>
             <a:fld id="{ED291B17-9318-49DB-B28B-6E5994AE9581}" type="datetime1">
               <a:rPr lang="en-US" smtClean="0"/>
-              <a:t>10/19/2024</a:t>
+              <a:t>10/21/2024</a:t>
             </a:fld>
             <a:endParaRPr lang="en-US" dirty="0"/>
           </a:p>
@@ -8102,7 +8103,7 @@
           <a:p>
             <a:fld id="{78DD82B9-B8EE-4375-B6FF-88FA6ABB15D9}" type="datetime1">
               <a:rPr lang="en-US" smtClean="0"/>
-              <a:t>10/19/2024</a:t>
+              <a:t>10/21/2024</a:t>
             </a:fld>
             <a:endParaRPr lang="en-US" dirty="0"/>
           </a:p>
@@ -8414,7 +8415,7 @@
           <a:p>
             <a:fld id="{B2497495-0637-405E-AE64-5CC7506D51F5}" type="datetime1">
               <a:rPr lang="en-US" smtClean="0"/>
-              <a:t>10/19/2024</a:t>
+              <a:t>10/21/2024</a:t>
             </a:fld>
             <a:endParaRPr lang="en-US" dirty="0"/>
           </a:p>
@@ -8667,7 +8668,7 @@
           <a:p>
             <a:fld id="{7BFFD690-9426-415D-8B65-26881E07B2D4}" type="datetime1">
               <a:rPr lang="en-US" smtClean="0"/>
-              <a:t>10/19/2024</a:t>
+              <a:t>10/21/2024</a:t>
             </a:fld>
             <a:endParaRPr lang="en-US" dirty="0"/>
           </a:p>
@@ -9089,7 +9090,7 @@
           <a:p>
             <a:fld id="{04C4989A-474C-40DE-95B9-011C28B71673}" type="datetime1">
               <a:rPr lang="en-US" smtClean="0"/>
-              <a:t>10/19/2024</a:t>
+              <a:t>10/21/2024</a:t>
             </a:fld>
             <a:endParaRPr lang="en-US" dirty="0"/>
           </a:p>
@@ -9212,7 +9213,7 @@
           <a:p>
             <a:fld id="{5DB4ED54-5B5E-4A04-93D3-5772E3CE3818}" type="datetime1">
               <a:rPr lang="en-US" smtClean="0"/>
-              <a:t>10/19/2024</a:t>
+              <a:t>10/21/2024</a:t>
             </a:fld>
             <a:endParaRPr lang="en-US" dirty="0"/>
           </a:p>
@@ -9307,7 +9308,7 @@
           <a:p>
             <a:fld id="{4EDE50D6-574B-40AF-946F-D52A04ADE379}" type="datetime1">
               <a:rPr lang="en-US" smtClean="0"/>
-              <a:t>10/19/2024</a:t>
+              <a:t>10/21/2024</a:t>
             </a:fld>
             <a:endParaRPr lang="en-US" dirty="0"/>
           </a:p>
@@ -9684,7 +9685,7 @@
           <a:p>
             <a:fld id="{D82884F1-FFEA-405F-9602-3DCA865EDA4E}" type="datetime1">
               <a:rPr lang="en-US" smtClean="0"/>
-              <a:t>10/19/2024</a:t>
+              <a:t>10/21/2024</a:t>
             </a:fld>
             <a:endParaRPr lang="en-US" dirty="0"/>
           </a:p>
@@ -9977,7 +9978,7 @@
           <a:p>
             <a:fld id="{7E18DB4A-8810-4A10-AD5C-D5E2C667F5B3}" type="datetime1">
               <a:rPr lang="en-US" smtClean="0"/>
-              <a:t>10/19/2024</a:t>
+              <a:t>10/21/2024</a:t>
             </a:fld>
             <a:endParaRPr lang="en-US" dirty="0"/>
           </a:p>
@@ -10192,7 +10193,7 @@
           <a:p>
             <a:fld id="{ED291B17-9318-49DB-B28B-6E5994AE9581}" type="datetime1">
               <a:rPr lang="en-US" smtClean="0"/>
-              <a:t>10/19/2024</a:t>
+              <a:t>10/21/2024</a:t>
             </a:fld>
             <a:endParaRPr lang="en-US" dirty="0"/>
           </a:p>
@@ -12098,6 +12099,713 @@
       </p:grpSpPr>
       <p:sp>
         <p:nvSpPr>
+          <p:cNvPr id="28" name="Rectangle 27">
+            <a:extLst>
+              <a:ext uri="{FF2B5EF4-FFF2-40B4-BE49-F238E27FC236}">
+                <a16:creationId xmlns:a16="http://schemas.microsoft.com/office/drawing/2014/main" id="{DD651B61-325E-4E73-8445-38B0DE8AAAB6}"/>
+              </a:ext>
+              <a:ext uri="{C183D7F6-B498-43B3-948B-1728B52AA6E4}">
+                <adec:decorative xmlns:adec="http://schemas.microsoft.com/office/drawing/2017/decorative" val="1"/>
+              </a:ext>
+            </a:extLst>
+          </p:cNvPr>
+          <p:cNvSpPr>
+            <a:spLocks noGrp="1" noRot="1" noChangeAspect="1" noMove="1" noResize="1" noEditPoints="1" noAdjustHandles="1" noChangeArrowheads="1" noChangeShapeType="1" noTextEdit="1"/>
+          </p:cNvSpPr>
+          <p:nvPr>
+            <p:extLst>
+              <p:ext uri="{386F3935-93C4-4BCD-93E2-E3B085C9AB24}">
+                <p16:designElem xmlns:p16="http://schemas.microsoft.com/office/powerpoint/2015/main" val="1"/>
+              </p:ext>
+            </p:extLst>
+          </p:nvPr>
+        </p:nvSpPr>
+        <p:spPr>
+          <a:xfrm>
+            <a:off x="446534" y="457200"/>
+            <a:ext cx="3703320" cy="94997"/>
+          </a:xfrm>
+          <a:prstGeom prst="rect">
+            <a:avLst/>
+          </a:prstGeom>
+          <a:solidFill>
+            <a:srgbClr val="465359"/>
+          </a:solidFill>
+          <a:ln>
+            <a:noFill/>
+          </a:ln>
+          <a:effectLst/>
+        </p:spPr>
+        <p:style>
+          <a:lnRef idx="1">
+            <a:schemeClr val="accent1"/>
+          </a:lnRef>
+          <a:fillRef idx="3">
+            <a:schemeClr val="accent1"/>
+          </a:fillRef>
+          <a:effectRef idx="2">
+            <a:schemeClr val="accent1"/>
+          </a:effectRef>
+          <a:fontRef idx="minor">
+            <a:schemeClr val="lt1"/>
+          </a:fontRef>
+        </p:style>
+        <p:txBody>
+          <a:bodyPr/>
+          <a:lstStyle/>
+          <a:p>
+            <a:endParaRPr lang="en-US"/>
+          </a:p>
+        </p:txBody>
+      </p:sp>
+      <p:sp>
+        <p:nvSpPr>
+          <p:cNvPr id="30" name="Rectangle 29">
+            <a:extLst>
+              <a:ext uri="{FF2B5EF4-FFF2-40B4-BE49-F238E27FC236}">
+                <a16:creationId xmlns:a16="http://schemas.microsoft.com/office/drawing/2014/main" id="{B42E5253-D3AC-4AC2-B766-8B34F13C2F5E}"/>
+              </a:ext>
+              <a:ext uri="{C183D7F6-B498-43B3-948B-1728B52AA6E4}">
+                <adec:decorative xmlns:adec="http://schemas.microsoft.com/office/drawing/2017/decorative" val="1"/>
+              </a:ext>
+            </a:extLst>
+          </p:cNvPr>
+          <p:cNvSpPr>
+            <a:spLocks noGrp="1" noRot="1" noChangeAspect="1" noMove="1" noResize="1" noEditPoints="1" noAdjustHandles="1" noChangeArrowheads="1" noChangeShapeType="1" noTextEdit="1"/>
+          </p:cNvSpPr>
+          <p:nvPr>
+            <p:extLst>
+              <p:ext uri="{386F3935-93C4-4BCD-93E2-E3B085C9AB24}">
+                <p16:designElem xmlns:p16="http://schemas.microsoft.com/office/powerpoint/2015/main" val="1"/>
+              </p:ext>
+            </p:extLst>
+          </p:nvPr>
+        </p:nvSpPr>
+        <p:spPr>
+          <a:xfrm>
+            <a:off x="8042147" y="453643"/>
+            <a:ext cx="3703320" cy="98554"/>
+          </a:xfrm>
+          <a:prstGeom prst="rect">
+            <a:avLst/>
+          </a:prstGeom>
+          <a:solidFill>
+            <a:srgbClr val="969FA7"/>
+          </a:solidFill>
+          <a:ln>
+            <a:noFill/>
+          </a:ln>
+          <a:effectLst/>
+        </p:spPr>
+        <p:style>
+          <a:lnRef idx="1">
+            <a:schemeClr val="accent1"/>
+          </a:lnRef>
+          <a:fillRef idx="3">
+            <a:schemeClr val="accent1"/>
+          </a:fillRef>
+          <a:effectRef idx="2">
+            <a:schemeClr val="accent1"/>
+          </a:effectRef>
+          <a:fontRef idx="minor">
+            <a:schemeClr val="lt1"/>
+          </a:fontRef>
+        </p:style>
+        <p:txBody>
+          <a:bodyPr/>
+          <a:lstStyle/>
+          <a:p>
+            <a:endParaRPr lang="en-US"/>
+          </a:p>
+        </p:txBody>
+      </p:sp>
+      <p:sp>
+        <p:nvSpPr>
+          <p:cNvPr id="27" name="Rectangle 26">
+            <a:extLst>
+              <a:ext uri="{FF2B5EF4-FFF2-40B4-BE49-F238E27FC236}">
+                <a16:creationId xmlns:a16="http://schemas.microsoft.com/office/drawing/2014/main" id="{10AE8D57-436A-4073-9A75-15BB5949F8B4}"/>
+              </a:ext>
+              <a:ext uri="{C183D7F6-B498-43B3-948B-1728B52AA6E4}">
+                <adec:decorative xmlns:adec="http://schemas.microsoft.com/office/drawing/2017/decorative" val="1"/>
+              </a:ext>
+            </a:extLst>
+          </p:cNvPr>
+          <p:cNvSpPr>
+            <a:spLocks noGrp="1" noRot="1" noChangeAspect="1" noMove="1" noResize="1" noEditPoints="1" noAdjustHandles="1" noChangeArrowheads="1" noChangeShapeType="1" noTextEdit="1"/>
+          </p:cNvSpPr>
+          <p:nvPr>
+            <p:extLst>
+              <p:ext uri="{386F3935-93C4-4BCD-93E2-E3B085C9AB24}">
+                <p16:designElem xmlns:p16="http://schemas.microsoft.com/office/powerpoint/2015/main" val="1"/>
+              </p:ext>
+            </p:extLst>
+          </p:nvPr>
+        </p:nvSpPr>
+        <p:spPr>
+          <a:xfrm>
+            <a:off x="4241830" y="457200"/>
+            <a:ext cx="3703320" cy="91440"/>
+          </a:xfrm>
+          <a:prstGeom prst="rect">
+            <a:avLst/>
+          </a:prstGeom>
+          <a:solidFill>
+            <a:schemeClr val="accent1"/>
+          </a:solidFill>
+          <a:ln>
+            <a:noFill/>
+          </a:ln>
+          <a:effectLst/>
+        </p:spPr>
+        <p:style>
+          <a:lnRef idx="1">
+            <a:schemeClr val="accent1"/>
+          </a:lnRef>
+          <a:fillRef idx="3">
+            <a:schemeClr val="accent1"/>
+          </a:fillRef>
+          <a:effectRef idx="2">
+            <a:schemeClr val="accent1"/>
+          </a:effectRef>
+          <a:fontRef idx="minor">
+            <a:schemeClr val="lt1"/>
+          </a:fontRef>
+        </p:style>
+        <p:txBody>
+          <a:bodyPr/>
+          <a:lstStyle/>
+          <a:p>
+            <a:endParaRPr lang="en-US"/>
+          </a:p>
+        </p:txBody>
+      </p:sp>
+      <p:sp>
+        <p:nvSpPr>
+          <p:cNvPr id="29" name="Rectangle 28">
+            <a:extLst>
+              <a:ext uri="{FF2B5EF4-FFF2-40B4-BE49-F238E27FC236}">
+                <a16:creationId xmlns:a16="http://schemas.microsoft.com/office/drawing/2014/main" id="{E2852671-8EB6-4EAF-8AF8-65CF3FD66456}"/>
+              </a:ext>
+              <a:ext uri="{C183D7F6-B498-43B3-948B-1728B52AA6E4}">
+                <adec:decorative xmlns:adec="http://schemas.microsoft.com/office/drawing/2017/decorative" val="1"/>
+              </a:ext>
+            </a:extLst>
+          </p:cNvPr>
+          <p:cNvSpPr>
+            <a:spLocks noGrp="1" noRot="1" noChangeAspect="1" noMove="1" noResize="1" noEditPoints="1" noAdjustHandles="1" noChangeArrowheads="1" noChangeShapeType="1" noTextEdit="1"/>
+          </p:cNvSpPr>
+          <p:nvPr>
+            <p:extLst>
+              <p:ext uri="{386F3935-93C4-4BCD-93E2-E3B085C9AB24}">
+                <p16:designElem xmlns:p16="http://schemas.microsoft.com/office/powerpoint/2015/main" val="1"/>
+              </p:ext>
+            </p:extLst>
+          </p:nvPr>
+        </p:nvSpPr>
+        <p:spPr>
+          <a:xfrm>
+            <a:off x="446534" y="3085764"/>
+            <a:ext cx="11298932" cy="3338149"/>
+          </a:xfrm>
+          <a:prstGeom prst="rect">
+            <a:avLst/>
+          </a:prstGeom>
+          <a:solidFill>
+            <a:srgbClr val="465359"/>
+          </a:solidFill>
+          <a:ln>
+            <a:noFill/>
+          </a:ln>
+          <a:effectLst/>
+        </p:spPr>
+        <p:style>
+          <a:lnRef idx="1">
+            <a:schemeClr val="accent1"/>
+          </a:lnRef>
+          <a:fillRef idx="3">
+            <a:schemeClr val="accent1"/>
+          </a:fillRef>
+          <a:effectRef idx="2">
+            <a:schemeClr val="accent1"/>
+          </a:effectRef>
+          <a:fontRef idx="minor">
+            <a:schemeClr val="lt1"/>
+          </a:fontRef>
+        </p:style>
+        <p:txBody>
+          <a:bodyPr/>
+          <a:lstStyle/>
+          <a:p>
+            <a:endParaRPr lang="en-US"/>
+          </a:p>
+        </p:txBody>
+      </p:sp>
+      <p:sp useBgFill="1">
+        <p:nvSpPr>
+          <p:cNvPr id="31" name="Rectangle 30">
+            <a:extLst>
+              <a:ext uri="{FF2B5EF4-FFF2-40B4-BE49-F238E27FC236}">
+                <a16:creationId xmlns:a16="http://schemas.microsoft.com/office/drawing/2014/main" id="{7C427EA3-1645-4B27-A5C2-55E8E24C665F}"/>
+              </a:ext>
+              <a:ext uri="{C183D7F6-B498-43B3-948B-1728B52AA6E4}">
+                <adec:decorative xmlns:adec="http://schemas.microsoft.com/office/drawing/2017/decorative" val="1"/>
+              </a:ext>
+            </a:extLst>
+          </p:cNvPr>
+          <p:cNvSpPr>
+            <a:spLocks noGrp="1" noRot="1" noChangeAspect="1" noMove="1" noResize="1" noEditPoints="1" noAdjustHandles="1" noChangeArrowheads="1" noChangeShapeType="1" noTextEdit="1"/>
+          </p:cNvSpPr>
+          <p:nvPr>
+            <p:extLst>
+              <p:ext uri="{386F3935-93C4-4BCD-93E2-E3B085C9AB24}">
+                <p16:designElem xmlns:p16="http://schemas.microsoft.com/office/powerpoint/2015/main" val="1"/>
+              </p:ext>
+            </p:extLst>
+          </p:nvPr>
+        </p:nvSpPr>
+        <p:spPr>
+          <a:xfrm>
+            <a:off x="0" y="0"/>
+            <a:ext cx="12192000" cy="6858000"/>
+          </a:xfrm>
+          <a:prstGeom prst="rect">
+            <a:avLst/>
+          </a:prstGeom>
+          <a:ln>
+            <a:noFill/>
+          </a:ln>
+        </p:spPr>
+        <p:style>
+          <a:lnRef idx="2">
+            <a:schemeClr val="accent1">
+              <a:shade val="50000"/>
+            </a:schemeClr>
+          </a:lnRef>
+          <a:fillRef idx="1">
+            <a:schemeClr val="accent1"/>
+          </a:fillRef>
+          <a:effectRef idx="0">
+            <a:schemeClr val="accent1"/>
+          </a:effectRef>
+          <a:fontRef idx="minor">
+            <a:schemeClr val="lt1"/>
+          </a:fontRef>
+        </p:style>
+        <p:txBody>
+          <a:bodyPr rtlCol="0" anchor="ctr"/>
+          <a:lstStyle/>
+          <a:p>
+            <a:pPr algn="ctr"/>
+            <a:endParaRPr lang="en-US"/>
+          </a:p>
+        </p:txBody>
+      </p:sp>
+      <p:sp>
+        <p:nvSpPr>
+          <p:cNvPr id="33" name="Rectangle 32">
+            <a:extLst>
+              <a:ext uri="{FF2B5EF4-FFF2-40B4-BE49-F238E27FC236}">
+                <a16:creationId xmlns:a16="http://schemas.microsoft.com/office/drawing/2014/main" id="{885CDBF6-7B87-4A58-92CA-E887CA36AF04}"/>
+              </a:ext>
+              <a:ext uri="{C183D7F6-B498-43B3-948B-1728B52AA6E4}">
+                <adec:decorative xmlns:adec="http://schemas.microsoft.com/office/drawing/2017/decorative" val="1"/>
+              </a:ext>
+            </a:extLst>
+          </p:cNvPr>
+          <p:cNvSpPr>
+            <a:spLocks noGrp="1" noRot="1" noChangeAspect="1" noMove="1" noResize="1" noEditPoints="1" noAdjustHandles="1" noChangeArrowheads="1" noChangeShapeType="1" noTextEdit="1"/>
+          </p:cNvSpPr>
+          <p:nvPr>
+            <p:extLst>
+              <p:ext uri="{386F3935-93C4-4BCD-93E2-E3B085C9AB24}">
+                <p16:designElem xmlns:p16="http://schemas.microsoft.com/office/powerpoint/2015/main" val="1"/>
+              </p:ext>
+            </p:extLst>
+          </p:nvPr>
+        </p:nvSpPr>
+        <p:spPr>
+          <a:xfrm>
+            <a:off x="446534" y="457200"/>
+            <a:ext cx="3703320" cy="94997"/>
+          </a:xfrm>
+          <a:prstGeom prst="rect">
+            <a:avLst/>
+          </a:prstGeom>
+          <a:solidFill>
+            <a:srgbClr val="465359"/>
+          </a:solidFill>
+          <a:ln>
+            <a:noFill/>
+          </a:ln>
+          <a:effectLst/>
+        </p:spPr>
+        <p:style>
+          <a:lnRef idx="1">
+            <a:schemeClr val="accent1"/>
+          </a:lnRef>
+          <a:fillRef idx="3">
+            <a:schemeClr val="accent1"/>
+          </a:fillRef>
+          <a:effectRef idx="2">
+            <a:schemeClr val="accent1"/>
+          </a:effectRef>
+          <a:fontRef idx="minor">
+            <a:schemeClr val="lt1"/>
+          </a:fontRef>
+        </p:style>
+        <p:txBody>
+          <a:bodyPr/>
+          <a:lstStyle/>
+          <a:p>
+            <a:endParaRPr lang="en-US"/>
+          </a:p>
+        </p:txBody>
+      </p:sp>
+      <p:sp>
+        <p:nvSpPr>
+          <p:cNvPr id="35" name="Rectangle 34">
+            <a:extLst>
+              <a:ext uri="{FF2B5EF4-FFF2-40B4-BE49-F238E27FC236}">
+                <a16:creationId xmlns:a16="http://schemas.microsoft.com/office/drawing/2014/main" id="{6BFF2B2E-1CF1-403F-BB44-3F9C3E7F67FF}"/>
+              </a:ext>
+              <a:ext uri="{C183D7F6-B498-43B3-948B-1728B52AA6E4}">
+                <adec:decorative xmlns:adec="http://schemas.microsoft.com/office/drawing/2017/decorative" val="1"/>
+              </a:ext>
+            </a:extLst>
+          </p:cNvPr>
+          <p:cNvSpPr>
+            <a:spLocks noGrp="1" noRot="1" noChangeAspect="1" noMove="1" noResize="1" noEditPoints="1" noAdjustHandles="1" noChangeArrowheads="1" noChangeShapeType="1" noTextEdit="1"/>
+          </p:cNvSpPr>
+          <p:nvPr>
+            <p:extLst>
+              <p:ext uri="{386F3935-93C4-4BCD-93E2-E3B085C9AB24}">
+                <p16:designElem xmlns:p16="http://schemas.microsoft.com/office/powerpoint/2015/main" val="1"/>
+              </p:ext>
+            </p:extLst>
+          </p:nvPr>
+        </p:nvSpPr>
+        <p:spPr>
+          <a:xfrm>
+            <a:off x="4241830" y="457200"/>
+            <a:ext cx="3703320" cy="91440"/>
+          </a:xfrm>
+          <a:prstGeom prst="rect">
+            <a:avLst/>
+          </a:prstGeom>
+          <a:solidFill>
+            <a:schemeClr val="accent1"/>
+          </a:solidFill>
+          <a:ln>
+            <a:noFill/>
+          </a:ln>
+          <a:effectLst/>
+        </p:spPr>
+        <p:style>
+          <a:lnRef idx="1">
+            <a:schemeClr val="accent1"/>
+          </a:lnRef>
+          <a:fillRef idx="3">
+            <a:schemeClr val="accent1"/>
+          </a:fillRef>
+          <a:effectRef idx="2">
+            <a:schemeClr val="accent1"/>
+          </a:effectRef>
+          <a:fontRef idx="minor">
+            <a:schemeClr val="lt1"/>
+          </a:fontRef>
+        </p:style>
+        <p:txBody>
+          <a:bodyPr/>
+          <a:lstStyle/>
+          <a:p>
+            <a:endParaRPr lang="en-US"/>
+          </a:p>
+        </p:txBody>
+      </p:sp>
+      <p:sp>
+        <p:nvSpPr>
+          <p:cNvPr id="37" name="Rectangle 36">
+            <a:extLst>
+              <a:ext uri="{FF2B5EF4-FFF2-40B4-BE49-F238E27FC236}">
+                <a16:creationId xmlns:a16="http://schemas.microsoft.com/office/drawing/2014/main" id="{9D8B4D3C-0DE0-43B9-B032-32B536B96D02}"/>
+              </a:ext>
+              <a:ext uri="{C183D7F6-B498-43B3-948B-1728B52AA6E4}">
+                <adec:decorative xmlns:adec="http://schemas.microsoft.com/office/drawing/2017/decorative" val="1"/>
+              </a:ext>
+            </a:extLst>
+          </p:cNvPr>
+          <p:cNvSpPr>
+            <a:spLocks noGrp="1" noRot="1" noChangeAspect="1" noMove="1" noResize="1" noEditPoints="1" noAdjustHandles="1" noChangeArrowheads="1" noChangeShapeType="1" noTextEdit="1"/>
+          </p:cNvSpPr>
+          <p:nvPr>
+            <p:extLst>
+              <p:ext uri="{386F3935-93C4-4BCD-93E2-E3B085C9AB24}">
+                <p16:designElem xmlns:p16="http://schemas.microsoft.com/office/powerpoint/2015/main" val="1"/>
+              </p:ext>
+            </p:extLst>
+          </p:nvPr>
+        </p:nvSpPr>
+        <p:spPr>
+          <a:xfrm>
+            <a:off x="8042147" y="453643"/>
+            <a:ext cx="3703320" cy="98554"/>
+          </a:xfrm>
+          <a:prstGeom prst="rect">
+            <a:avLst/>
+          </a:prstGeom>
+          <a:solidFill>
+            <a:srgbClr val="969FA7"/>
+          </a:solidFill>
+          <a:ln>
+            <a:noFill/>
+          </a:ln>
+          <a:effectLst/>
+        </p:spPr>
+        <p:style>
+          <a:lnRef idx="1">
+            <a:schemeClr val="accent1"/>
+          </a:lnRef>
+          <a:fillRef idx="3">
+            <a:schemeClr val="accent1"/>
+          </a:fillRef>
+          <a:effectRef idx="2">
+            <a:schemeClr val="accent1"/>
+          </a:effectRef>
+          <a:fontRef idx="minor">
+            <a:schemeClr val="lt1"/>
+          </a:fontRef>
+        </p:style>
+        <p:txBody>
+          <a:bodyPr/>
+          <a:lstStyle/>
+          <a:p>
+            <a:endParaRPr lang="en-US"/>
+          </a:p>
+        </p:txBody>
+      </p:sp>
+      <p:pic>
+        <p:nvPicPr>
+          <p:cNvPr id="5" name="Content Placeholder 4" descr="A graph of a graph showing the growth of a school&#10;&#10;Description automatically generated with medium confidence">
+            <a:extLst>
+              <a:ext uri="{FF2B5EF4-FFF2-40B4-BE49-F238E27FC236}">
+                <a16:creationId xmlns:a16="http://schemas.microsoft.com/office/drawing/2014/main" id="{E6F007C4-9A16-A163-4BC9-129A06B713D8}"/>
+              </a:ext>
+            </a:extLst>
+          </p:cNvPr>
+          <p:cNvPicPr>
+            <a:picLocks noChangeAspect="1"/>
+          </p:cNvPicPr>
+          <p:nvPr/>
+        </p:nvPicPr>
+        <p:blipFill>
+          <a:blip r:embed="rId2">
+            <a:extLst>
+              <a:ext uri="{28A0092B-C50C-407E-A947-70E740481C1C}">
+                <a14:useLocalDpi xmlns:a14="http://schemas.microsoft.com/office/drawing/2010/main" val="0"/>
+              </a:ext>
+            </a:extLst>
+          </a:blip>
+          <a:srcRect l="209" r="1" b="1"/>
+          <a:stretch/>
+        </p:blipFill>
+        <p:spPr>
+          <a:xfrm>
+            <a:off x="954147" y="1208531"/>
+            <a:ext cx="6472838" cy="4735069"/>
+          </a:xfrm>
+          <a:prstGeom prst="rect">
+            <a:avLst/>
+          </a:prstGeom>
+        </p:spPr>
+      </p:pic>
+      <p:sp>
+        <p:nvSpPr>
+          <p:cNvPr id="39" name="Rectangle 38">
+            <a:extLst>
+              <a:ext uri="{FF2B5EF4-FFF2-40B4-BE49-F238E27FC236}">
+                <a16:creationId xmlns:a16="http://schemas.microsoft.com/office/drawing/2014/main" id="{707788D3-E467-4E25-A5E9-FD41795BD551}"/>
+              </a:ext>
+              <a:ext uri="{C183D7F6-B498-43B3-948B-1728B52AA6E4}">
+                <adec:decorative xmlns:adec="http://schemas.microsoft.com/office/drawing/2017/decorative" val="1"/>
+              </a:ext>
+            </a:extLst>
+          </p:cNvPr>
+          <p:cNvSpPr>
+            <a:spLocks noGrp="1" noRot="1" noChangeAspect="1" noMove="1" noResize="1" noEditPoints="1" noAdjustHandles="1" noChangeArrowheads="1" noChangeShapeType="1" noTextEdit="1"/>
+          </p:cNvSpPr>
+          <p:nvPr>
+            <p:extLst>
+              <p:ext uri="{386F3935-93C4-4BCD-93E2-E3B085C9AB24}">
+                <p16:designElem xmlns:p16="http://schemas.microsoft.com/office/powerpoint/2015/main" val="1"/>
+              </p:ext>
+            </p:extLst>
+          </p:nvPr>
+        </p:nvSpPr>
+        <p:spPr>
+          <a:xfrm>
+            <a:off x="8042147" y="601200"/>
+            <a:ext cx="3703320" cy="5789365"/>
+          </a:xfrm>
+          <a:prstGeom prst="rect">
+            <a:avLst/>
+          </a:prstGeom>
+          <a:solidFill>
+            <a:srgbClr val="465359"/>
+          </a:solidFill>
+          <a:ln>
+            <a:noFill/>
+          </a:ln>
+          <a:effectLst/>
+        </p:spPr>
+        <p:style>
+          <a:lnRef idx="1">
+            <a:schemeClr val="accent1"/>
+          </a:lnRef>
+          <a:fillRef idx="3">
+            <a:schemeClr val="accent1"/>
+          </a:fillRef>
+          <a:effectRef idx="2">
+            <a:schemeClr val="accent1"/>
+          </a:effectRef>
+          <a:fontRef idx="minor">
+            <a:schemeClr val="lt1"/>
+          </a:fontRef>
+        </p:style>
+        <p:txBody>
+          <a:bodyPr/>
+          <a:lstStyle/>
+          <a:p>
+            <a:endParaRPr lang="en-US"/>
+          </a:p>
+        </p:txBody>
+      </p:sp>
+      <p:sp>
+        <p:nvSpPr>
+          <p:cNvPr id="2" name="Title 1">
+            <a:extLst>
+              <a:ext uri="{FF2B5EF4-FFF2-40B4-BE49-F238E27FC236}">
+                <a16:creationId xmlns:a16="http://schemas.microsoft.com/office/drawing/2014/main" id="{9C80DD40-9D60-A500-15A6-FC02DB1C663B}"/>
+              </a:ext>
+            </a:extLst>
+          </p:cNvPr>
+          <p:cNvSpPr>
+            <a:spLocks noGrp="1"/>
+          </p:cNvSpPr>
+          <p:nvPr>
+            <p:ph type="title"/>
+          </p:nvPr>
+        </p:nvSpPr>
+        <p:spPr>
+          <a:xfrm>
+            <a:off x="8296275" y="1419225"/>
+            <a:ext cx="3081576" cy="2085869"/>
+          </a:xfrm>
+        </p:spPr>
+        <p:txBody>
+          <a:bodyPr vert="horz" lIns="91440" tIns="45720" rIns="91440" bIns="45720" rtlCol="0" anchor="b">
+            <a:normAutofit/>
+          </a:bodyPr>
+          <a:lstStyle/>
+          <a:p>
+            <a:r>
+              <a:rPr lang="en-US" sz="3600" dirty="0">
+                <a:solidFill>
+                  <a:srgbClr val="FFFFFF"/>
+                </a:solidFill>
+              </a:rPr>
+              <a:t>MNPS Budget vs graduation rates</a:t>
+            </a:r>
+          </a:p>
+        </p:txBody>
+      </p:sp>
+      <p:sp>
+        <p:nvSpPr>
+          <p:cNvPr id="9" name="Content Placeholder 8">
+            <a:extLst>
+              <a:ext uri="{FF2B5EF4-FFF2-40B4-BE49-F238E27FC236}">
+                <a16:creationId xmlns:a16="http://schemas.microsoft.com/office/drawing/2014/main" id="{4D453874-0CFD-DC8E-5406-0499D3FBDB12}"/>
+              </a:ext>
+            </a:extLst>
+          </p:cNvPr>
+          <p:cNvSpPr>
+            <a:spLocks noGrp="1"/>
+          </p:cNvSpPr>
+          <p:nvPr>
+            <p:ph idx="1"/>
+          </p:nvPr>
+        </p:nvSpPr>
+        <p:spPr>
+          <a:xfrm>
+            <a:off x="8296275" y="3505095"/>
+            <a:ext cx="3081576" cy="1733655"/>
+          </a:xfrm>
+        </p:spPr>
+        <p:txBody>
+          <a:bodyPr vert="horz" lIns="91440" tIns="45720" rIns="91440" bIns="45720" rtlCol="0" anchor="t">
+            <a:normAutofit/>
+          </a:bodyPr>
+          <a:lstStyle/>
+          <a:p>
+            <a:pPr marL="0" indent="0">
+              <a:buNone/>
+            </a:pPr>
+            <a:r>
+              <a:rPr lang="en-US" sz="1600" kern="1200" cap="all">
+                <a:solidFill>
+                  <a:srgbClr val="FFFFFF">
+                    <a:alpha val="75000"/>
+                  </a:srgbClr>
+                </a:solidFill>
+                <a:latin typeface="+mn-lt"/>
+                <a:ea typeface="+mn-ea"/>
+                <a:cs typeface="+mn-cs"/>
+              </a:rPr>
+              <a:t>The higher the budget, the better the graduation rate?</a:t>
+            </a:r>
+          </a:p>
+        </p:txBody>
+      </p:sp>
+    </p:spTree>
+    <p:extLst>
+      <p:ext uri="{BB962C8B-B14F-4D97-AF65-F5344CB8AC3E}">
+        <p14:creationId xmlns:p14="http://schemas.microsoft.com/office/powerpoint/2010/main" val="3594092534"/>
+      </p:ext>
+    </p:extLst>
+  </p:cSld>
+  <p:clrMapOvr>
+    <a:masterClrMapping/>
+  </p:clrMapOvr>
+</p:sld>
+</file>
+
+<file path=ppt/slides/slide12.xml><?xml version="1.0" encoding="utf-8"?>
+<p:sld xmlns:a="http://schemas.openxmlformats.org/drawingml/2006/main" xmlns:r="http://schemas.openxmlformats.org/officeDocument/2006/relationships" xmlns:p="http://schemas.openxmlformats.org/presentationml/2006/main">
+  <p:cSld>
+    <p:bg>
+      <p:bgPr>
+        <a:solidFill>
+          <a:schemeClr val="bg1"/>
+        </a:solidFill>
+        <a:effectLst/>
+      </p:bgPr>
+    </p:bg>
+    <p:spTree>
+      <p:nvGrpSpPr>
+        <p:cNvPr id="1" name=""/>
+        <p:cNvGrpSpPr/>
+        <p:nvPr/>
+      </p:nvGrpSpPr>
+      <p:grpSpPr>
+        <a:xfrm>
+          <a:off x="0" y="0"/>
+          <a:ext cx="0" cy="0"/>
+          <a:chOff x="0" y="0"/>
+          <a:chExt cx="0" cy="0"/>
+        </a:xfrm>
+      </p:grpSpPr>
+      <p:sp>
+        <p:nvSpPr>
           <p:cNvPr id="10" name="Rectangle 9">
             <a:extLst>
               <a:ext uri="{FF2B5EF4-FFF2-40B4-BE49-F238E27FC236}">
@@ -12476,7 +13184,7 @@
                   <a:srgbClr val="FFFFFF"/>
                 </a:solidFill>
               </a:rPr>
-              <a:t>37013 crime seems to impact graduation rates</a:t>
+              <a:t>High crime rates seem to impact everyday factors, such as graduation rates</a:t>
             </a:r>
           </a:p>
           <a:p>
@@ -12486,17 +13194,7 @@
                   <a:srgbClr val="FFFFFF"/>
                 </a:solidFill>
               </a:rPr>
-              <a:t>37206 graduation rates were the greatest for high schools overall</a:t>
-            </a:r>
-          </a:p>
-          <a:p>
-            <a:r>
-              <a:rPr lang="en-US" dirty="0">
-                <a:solidFill>
-                  <a:srgbClr val="FFFFFF"/>
-                </a:solidFill>
-              </a:rPr>
-              <a:t>More data is needed to gain further insight into whether more correlations exist.</a:t>
+              <a:t>School budgets and graduation rates have a correlation</a:t>
             </a:r>
           </a:p>
           <a:p>
@@ -12567,7 +13265,7 @@
 </p:sld>
 </file>
 
-<file path=ppt/slides/slide12.xml><?xml version="1.0" encoding="utf-8"?>
+<file path=ppt/slides/slide13.xml><?xml version="1.0" encoding="utf-8"?>
 <p:sld xmlns:a="http://schemas.openxmlformats.org/drawingml/2006/main" xmlns:r="http://schemas.openxmlformats.org/officeDocument/2006/relationships" xmlns:p="http://schemas.openxmlformats.org/presentationml/2006/main">
   <p:cSld>
     <p:bg>
@@ -13963,17 +14661,7 @@
                   <a:srgbClr val="FFFFFF"/>
                 </a:solidFill>
               </a:rPr>
-              <a:t>To discover which public schools have the highest graduation rates</a:t>
-            </a:r>
-          </a:p>
-          <a:p>
-            <a:r>
-              <a:rPr lang="en-US" dirty="0">
-                <a:solidFill>
-                  <a:srgbClr val="FFFFFF"/>
-                </a:solidFill>
-              </a:rPr>
-              <a:t>To discover which public schools have the lowest graduation rates</a:t>
+              <a:t>To discover which public schools have the highest &amp; lowest graduation rates</a:t>
             </a:r>
           </a:p>
           <a:p>
@@ -13984,6 +14672,16 @@
                 </a:solidFill>
               </a:rPr>
               <a:t>To discover if crime rates seem to impact these statistics</a:t>
+            </a:r>
+          </a:p>
+          <a:p>
+            <a:r>
+              <a:rPr lang="en-US" dirty="0">
+                <a:solidFill>
+                  <a:srgbClr val="FFFFFF"/>
+                </a:solidFill>
+              </a:rPr>
+              <a:t>To see if any other factors found within the data could impact graduation rates</a:t>
             </a:r>
           </a:p>
           <a:p>

--- a/presentation/presentation_new.pptx
+++ b/presentation/presentation_new.pptx
@@ -5,7 +5,7 @@
     <p:sldMasterId id="2147483725" r:id="rId1"/>
   </p:sldMasterIdLst>
   <p:notesMasterIdLst>
-    <p:notesMasterId r:id="rId15"/>
+    <p:notesMasterId r:id="rId16"/>
   </p:notesMasterIdLst>
   <p:sldIdLst>
     <p:sldId id="256" r:id="rId2"/>
@@ -18,9 +18,10 @@
     <p:sldId id="273" r:id="rId9"/>
     <p:sldId id="268" r:id="rId10"/>
     <p:sldId id="271" r:id="rId11"/>
-    <p:sldId id="274" r:id="rId12"/>
-    <p:sldId id="269" r:id="rId13"/>
-    <p:sldId id="270" r:id="rId14"/>
+    <p:sldId id="275" r:id="rId12"/>
+    <p:sldId id="274" r:id="rId13"/>
+    <p:sldId id="269" r:id="rId14"/>
+    <p:sldId id="270" r:id="rId15"/>
   </p:sldIdLst>
   <p:sldSz cx="12192000" cy="6858000"/>
   <p:notesSz cx="6858000" cy="9144000"/>
@@ -6079,7 +6080,7 @@
           <a:p>
             <a:fld id="{8C2B2B0A-079C-4124-945D-718AC739D4B0}" type="datetimeFigureOut">
               <a:rPr lang="en-US" smtClean="0"/>
-              <a:t>10/21/2024</a:t>
+              <a:t>10/22/2024</a:t>
             </a:fld>
             <a:endParaRPr lang="en-US"/>
           </a:p>
@@ -7083,7 +7084,7 @@
           <a:p>
             <a:fld id="{E902F998-B1F7-47BC-8C47-CDA4AD149044}" type="slidenum">
               <a:rPr lang="en-US" smtClean="0"/>
-              <a:t>12</a:t>
+              <a:t>13</a:t>
             </a:fld>
             <a:endParaRPr lang="en-US"/>
           </a:p>
@@ -7340,7 +7341,7 @@
           <a:p>
             <a:fld id="{ED291B17-9318-49DB-B28B-6E5994AE9581}" type="datetime1">
               <a:rPr lang="en-US" smtClean="0"/>
-              <a:t>10/21/2024</a:t>
+              <a:t>10/22/2024</a:t>
             </a:fld>
             <a:endParaRPr lang="en-US" dirty="0"/>
           </a:p>
@@ -7543,7 +7544,7 @@
           <a:p>
             <a:fld id="{2CED4963-E985-44C4-B8C4-FDD613B7C2F8}" type="datetime1">
               <a:rPr lang="en-US" smtClean="0"/>
-              <a:t>10/21/2024</a:t>
+              <a:t>10/22/2024</a:t>
             </a:fld>
             <a:endParaRPr lang="en-US" dirty="0"/>
           </a:p>
@@ -7905,7 +7906,7 @@
           <a:p>
             <a:fld id="{ED291B17-9318-49DB-B28B-6E5994AE9581}" type="datetime1">
               <a:rPr lang="en-US" smtClean="0"/>
-              <a:t>10/21/2024</a:t>
+              <a:t>10/22/2024</a:t>
             </a:fld>
             <a:endParaRPr lang="en-US" dirty="0"/>
           </a:p>
@@ -8103,7 +8104,7 @@
           <a:p>
             <a:fld id="{78DD82B9-B8EE-4375-B6FF-88FA6ABB15D9}" type="datetime1">
               <a:rPr lang="en-US" smtClean="0"/>
-              <a:t>10/21/2024</a:t>
+              <a:t>10/22/2024</a:t>
             </a:fld>
             <a:endParaRPr lang="en-US" dirty="0"/>
           </a:p>
@@ -8415,7 +8416,7 @@
           <a:p>
             <a:fld id="{B2497495-0637-405E-AE64-5CC7506D51F5}" type="datetime1">
               <a:rPr lang="en-US" smtClean="0"/>
-              <a:t>10/21/2024</a:t>
+              <a:t>10/22/2024</a:t>
             </a:fld>
             <a:endParaRPr lang="en-US" dirty="0"/>
           </a:p>
@@ -8668,7 +8669,7 @@
           <a:p>
             <a:fld id="{7BFFD690-9426-415D-8B65-26881E07B2D4}" type="datetime1">
               <a:rPr lang="en-US" smtClean="0"/>
-              <a:t>10/21/2024</a:t>
+              <a:t>10/22/2024</a:t>
             </a:fld>
             <a:endParaRPr lang="en-US" dirty="0"/>
           </a:p>
@@ -9090,7 +9091,7 @@
           <a:p>
             <a:fld id="{04C4989A-474C-40DE-95B9-011C28B71673}" type="datetime1">
               <a:rPr lang="en-US" smtClean="0"/>
-              <a:t>10/21/2024</a:t>
+              <a:t>10/22/2024</a:t>
             </a:fld>
             <a:endParaRPr lang="en-US" dirty="0"/>
           </a:p>
@@ -9213,7 +9214,7 @@
           <a:p>
             <a:fld id="{5DB4ED54-5B5E-4A04-93D3-5772E3CE3818}" type="datetime1">
               <a:rPr lang="en-US" smtClean="0"/>
-              <a:t>10/21/2024</a:t>
+              <a:t>10/22/2024</a:t>
             </a:fld>
             <a:endParaRPr lang="en-US" dirty="0"/>
           </a:p>
@@ -9308,7 +9309,7 @@
           <a:p>
             <a:fld id="{4EDE50D6-574B-40AF-946F-D52A04ADE379}" type="datetime1">
               <a:rPr lang="en-US" smtClean="0"/>
-              <a:t>10/21/2024</a:t>
+              <a:t>10/22/2024</a:t>
             </a:fld>
             <a:endParaRPr lang="en-US" dirty="0"/>
           </a:p>
@@ -9685,7 +9686,7 @@
           <a:p>
             <a:fld id="{D82884F1-FFEA-405F-9602-3DCA865EDA4E}" type="datetime1">
               <a:rPr lang="en-US" smtClean="0"/>
-              <a:t>10/21/2024</a:t>
+              <a:t>10/22/2024</a:t>
             </a:fld>
             <a:endParaRPr lang="en-US" dirty="0"/>
           </a:p>
@@ -9978,7 +9979,7 @@
           <a:p>
             <a:fld id="{7E18DB4A-8810-4A10-AD5C-D5E2C667F5B3}" type="datetime1">
               <a:rPr lang="en-US" smtClean="0"/>
-              <a:t>10/21/2024</a:t>
+              <a:t>10/22/2024</a:t>
             </a:fld>
             <a:endParaRPr lang="en-US" dirty="0"/>
           </a:p>
@@ -10193,7 +10194,7 @@
           <a:p>
             <a:fld id="{ED291B17-9318-49DB-B28B-6E5994AE9581}" type="datetime1">
               <a:rPr lang="en-US" smtClean="0"/>
-              <a:t>10/21/2024</a:t>
+              <a:t>10/22/2024</a:t>
             </a:fld>
             <a:endParaRPr lang="en-US" dirty="0"/>
           </a:p>
@@ -11436,7 +11437,7 @@
       </p:grpSpPr>
       <p:sp>
         <p:nvSpPr>
-          <p:cNvPr id="79" name="Rectangle 78">
+          <p:cNvPr id="139" name="Rectangle 138">
             <a:extLst>
               <a:ext uri="{FF2B5EF4-FFF2-40B4-BE49-F238E27FC236}">
                 <a16:creationId xmlns:a16="http://schemas.microsoft.com/office/drawing/2014/main" id="{DD651B61-325E-4E73-8445-38B0DE8AAAB6}"/>
@@ -11497,7 +11498,7 @@
       </p:sp>
       <p:sp>
         <p:nvSpPr>
-          <p:cNvPr id="81" name="Rectangle 80">
+          <p:cNvPr id="140" name="Rectangle 139">
             <a:extLst>
               <a:ext uri="{FF2B5EF4-FFF2-40B4-BE49-F238E27FC236}">
                 <a16:creationId xmlns:a16="http://schemas.microsoft.com/office/drawing/2014/main" id="{B42E5253-D3AC-4AC2-B766-8B34F13C2F5E}"/>
@@ -11558,7 +11559,7 @@
       </p:sp>
       <p:sp>
         <p:nvSpPr>
-          <p:cNvPr id="83" name="Rectangle 82">
+          <p:cNvPr id="141" name="Rectangle 140">
             <a:extLst>
               <a:ext uri="{FF2B5EF4-FFF2-40B4-BE49-F238E27FC236}">
                 <a16:creationId xmlns:a16="http://schemas.microsoft.com/office/drawing/2014/main" id="{10AE8D57-436A-4073-9A75-15BB5949F8B4}"/>
@@ -11619,7 +11620,7 @@
       </p:sp>
       <p:sp>
         <p:nvSpPr>
-          <p:cNvPr id="85" name="Rectangle 84">
+          <p:cNvPr id="142" name="Rectangle 141">
             <a:extLst>
               <a:ext uri="{FF2B5EF4-FFF2-40B4-BE49-F238E27FC236}">
                 <a16:creationId xmlns:a16="http://schemas.microsoft.com/office/drawing/2014/main" id="{E2852671-8EB6-4EAF-8AF8-65CF3FD66456}"/>
@@ -11680,7 +11681,7 @@
       </p:sp>
       <p:sp useBgFill="1">
         <p:nvSpPr>
-          <p:cNvPr id="87" name="Rectangle 86">
+          <p:cNvPr id="143" name="Rectangle 142">
             <a:extLst>
               <a:ext uri="{FF2B5EF4-FFF2-40B4-BE49-F238E27FC236}">
                 <a16:creationId xmlns:a16="http://schemas.microsoft.com/office/drawing/2014/main" id="{7C427EA3-1645-4B27-A5C2-55E8E24C665F}"/>
@@ -11740,7 +11741,7 @@
       </p:sp>
       <p:sp>
         <p:nvSpPr>
-          <p:cNvPr id="89" name="Rectangle 88">
+          <p:cNvPr id="144" name="Rectangle 143">
             <a:extLst>
               <a:ext uri="{FF2B5EF4-FFF2-40B4-BE49-F238E27FC236}">
                 <a16:creationId xmlns:a16="http://schemas.microsoft.com/office/drawing/2014/main" id="{885CDBF6-7B87-4A58-92CA-E887CA36AF04}"/>
@@ -11801,7 +11802,7 @@
       </p:sp>
       <p:sp>
         <p:nvSpPr>
-          <p:cNvPr id="91" name="Rectangle 90">
+          <p:cNvPr id="145" name="Rectangle 144">
             <a:extLst>
               <a:ext uri="{FF2B5EF4-FFF2-40B4-BE49-F238E27FC236}">
                 <a16:creationId xmlns:a16="http://schemas.microsoft.com/office/drawing/2014/main" id="{6BFF2B2E-1CF1-403F-BB44-3F9C3E7F67FF}"/>
@@ -11862,7 +11863,7 @@
       </p:sp>
       <p:sp>
         <p:nvSpPr>
-          <p:cNvPr id="93" name="Rectangle 92">
+          <p:cNvPr id="146" name="Rectangle 145">
             <a:extLst>
               <a:ext uri="{FF2B5EF4-FFF2-40B4-BE49-F238E27FC236}">
                 <a16:creationId xmlns:a16="http://schemas.microsoft.com/office/drawing/2014/main" id="{9D8B4D3C-0DE0-43B9-B032-32B536B96D02}"/>
@@ -11961,7 +11962,7 @@
       </p:pic>
       <p:sp>
         <p:nvSpPr>
-          <p:cNvPr id="95" name="Rectangle 94">
+          <p:cNvPr id="147" name="Rectangle 146">
             <a:extLst>
               <a:ext uri="{FF2B5EF4-FFF2-40B4-BE49-F238E27FC236}">
                 <a16:creationId xmlns:a16="http://schemas.microsoft.com/office/drawing/2014/main" id="{707788D3-E467-4E25-A5E9-FD41795BD551}"/>
@@ -12056,6 +12057,76 @@
               </a:rPr>
               <a:t>Crime rates in 37013 vs 37206</a:t>
             </a:r>
+            <a:endParaRPr lang="en-US" sz="3600" dirty="0">
+              <a:solidFill>
+                <a:srgbClr val="FFFFFF"/>
+              </a:solidFill>
+            </a:endParaRPr>
+          </a:p>
+        </p:txBody>
+      </p:sp>
+      <p:sp>
+        <p:nvSpPr>
+          <p:cNvPr id="3" name="TextBox 2">
+            <a:extLst>
+              <a:ext uri="{FF2B5EF4-FFF2-40B4-BE49-F238E27FC236}">
+                <a16:creationId xmlns:a16="http://schemas.microsoft.com/office/drawing/2014/main" id="{497247AA-622C-A77D-0386-A4F747D85B5E}"/>
+              </a:ext>
+            </a:extLst>
+          </p:cNvPr>
+          <p:cNvSpPr txBox="1"/>
+          <p:nvPr/>
+        </p:nvSpPr>
+        <p:spPr>
+          <a:xfrm>
+            <a:off x="8296275" y="3505095"/>
+            <a:ext cx="3081576" cy="1733655"/>
+          </a:xfrm>
+          <a:prstGeom prst="rect">
+            <a:avLst/>
+          </a:prstGeom>
+        </p:spPr>
+        <p:txBody>
+          <a:bodyPr vert="horz" lIns="91440" tIns="45720" rIns="91440" bIns="45720" rtlCol="0" anchor="t">
+            <a:normAutofit/>
+          </a:bodyPr>
+          <a:lstStyle/>
+          <a:p>
+            <a:pPr defTabSz="457200">
+              <a:spcBef>
+                <a:spcPct val="20000"/>
+              </a:spcBef>
+              <a:spcAft>
+                <a:spcPts val="600"/>
+              </a:spcAft>
+              <a:buClr>
+                <a:schemeClr val="accent1"/>
+              </a:buClr>
+              <a:buSzPct val="92000"/>
+            </a:pPr>
+            <a:r>
+              <a:rPr lang="en-US" sz="1600" kern="1200" cap="all">
+                <a:solidFill>
+                  <a:srgbClr val="FFFFFF">
+                    <a:alpha val="75000"/>
+                  </a:srgbClr>
+                </a:solidFill>
+                <a:latin typeface="+mn-lt"/>
+                <a:ea typeface="+mn-ea"/>
+                <a:cs typeface="+mn-cs"/>
+              </a:rPr>
+              <a:t>Highest graduation rate zip code vs lowest graduation rate zip code</a:t>
+            </a:r>
+            <a:endParaRPr lang="en-US" sz="1600" kern="1200" cap="all" dirty="0">
+              <a:solidFill>
+                <a:srgbClr val="FFFFFF">
+                  <a:alpha val="75000"/>
+                </a:srgbClr>
+              </a:solidFill>
+              <a:latin typeface="+mn-lt"/>
+              <a:ea typeface="+mn-ea"/>
+              <a:cs typeface="+mn-cs"/>
+            </a:endParaRPr>
           </a:p>
         </p:txBody>
       </p:sp>
@@ -12097,256 +12168,12 @@
           <a:chExt cx="0" cy="0"/>
         </a:xfrm>
       </p:grpSpPr>
-      <p:sp>
-        <p:nvSpPr>
-          <p:cNvPr id="28" name="Rectangle 27">
+      <p:sp useBgFill="1">
+        <p:nvSpPr>
+          <p:cNvPr id="20" name="Rectangle 19">
             <a:extLst>
               <a:ext uri="{FF2B5EF4-FFF2-40B4-BE49-F238E27FC236}">
-                <a16:creationId xmlns:a16="http://schemas.microsoft.com/office/drawing/2014/main" id="{DD651B61-325E-4E73-8445-38B0DE8AAAB6}"/>
-              </a:ext>
-              <a:ext uri="{C183D7F6-B498-43B3-948B-1728B52AA6E4}">
-                <adec:decorative xmlns:adec="http://schemas.microsoft.com/office/drawing/2017/decorative" val="1"/>
-              </a:ext>
-            </a:extLst>
-          </p:cNvPr>
-          <p:cNvSpPr>
-            <a:spLocks noGrp="1" noRot="1" noChangeAspect="1" noMove="1" noResize="1" noEditPoints="1" noAdjustHandles="1" noChangeArrowheads="1" noChangeShapeType="1" noTextEdit="1"/>
-          </p:cNvSpPr>
-          <p:nvPr>
-            <p:extLst>
-              <p:ext uri="{386F3935-93C4-4BCD-93E2-E3B085C9AB24}">
-                <p16:designElem xmlns:p16="http://schemas.microsoft.com/office/powerpoint/2015/main" val="1"/>
-              </p:ext>
-            </p:extLst>
-          </p:nvPr>
-        </p:nvSpPr>
-        <p:spPr>
-          <a:xfrm>
-            <a:off x="446534" y="457200"/>
-            <a:ext cx="3703320" cy="94997"/>
-          </a:xfrm>
-          <a:prstGeom prst="rect">
-            <a:avLst/>
-          </a:prstGeom>
-          <a:solidFill>
-            <a:srgbClr val="465359"/>
-          </a:solidFill>
-          <a:ln>
-            <a:noFill/>
-          </a:ln>
-          <a:effectLst/>
-        </p:spPr>
-        <p:style>
-          <a:lnRef idx="1">
-            <a:schemeClr val="accent1"/>
-          </a:lnRef>
-          <a:fillRef idx="3">
-            <a:schemeClr val="accent1"/>
-          </a:fillRef>
-          <a:effectRef idx="2">
-            <a:schemeClr val="accent1"/>
-          </a:effectRef>
-          <a:fontRef idx="minor">
-            <a:schemeClr val="lt1"/>
-          </a:fontRef>
-        </p:style>
-        <p:txBody>
-          <a:bodyPr/>
-          <a:lstStyle/>
-          <a:p>
-            <a:endParaRPr lang="en-US"/>
-          </a:p>
-        </p:txBody>
-      </p:sp>
-      <p:sp>
-        <p:nvSpPr>
-          <p:cNvPr id="30" name="Rectangle 29">
-            <a:extLst>
-              <a:ext uri="{FF2B5EF4-FFF2-40B4-BE49-F238E27FC236}">
-                <a16:creationId xmlns:a16="http://schemas.microsoft.com/office/drawing/2014/main" id="{B42E5253-D3AC-4AC2-B766-8B34F13C2F5E}"/>
-              </a:ext>
-              <a:ext uri="{C183D7F6-B498-43B3-948B-1728B52AA6E4}">
-                <adec:decorative xmlns:adec="http://schemas.microsoft.com/office/drawing/2017/decorative" val="1"/>
-              </a:ext>
-            </a:extLst>
-          </p:cNvPr>
-          <p:cNvSpPr>
-            <a:spLocks noGrp="1" noRot="1" noChangeAspect="1" noMove="1" noResize="1" noEditPoints="1" noAdjustHandles="1" noChangeArrowheads="1" noChangeShapeType="1" noTextEdit="1"/>
-          </p:cNvSpPr>
-          <p:nvPr>
-            <p:extLst>
-              <p:ext uri="{386F3935-93C4-4BCD-93E2-E3B085C9AB24}">
-                <p16:designElem xmlns:p16="http://schemas.microsoft.com/office/powerpoint/2015/main" val="1"/>
-              </p:ext>
-            </p:extLst>
-          </p:nvPr>
-        </p:nvSpPr>
-        <p:spPr>
-          <a:xfrm>
-            <a:off x="8042147" y="453643"/>
-            <a:ext cx="3703320" cy="98554"/>
-          </a:xfrm>
-          <a:prstGeom prst="rect">
-            <a:avLst/>
-          </a:prstGeom>
-          <a:solidFill>
-            <a:srgbClr val="969FA7"/>
-          </a:solidFill>
-          <a:ln>
-            <a:noFill/>
-          </a:ln>
-          <a:effectLst/>
-        </p:spPr>
-        <p:style>
-          <a:lnRef idx="1">
-            <a:schemeClr val="accent1"/>
-          </a:lnRef>
-          <a:fillRef idx="3">
-            <a:schemeClr val="accent1"/>
-          </a:fillRef>
-          <a:effectRef idx="2">
-            <a:schemeClr val="accent1"/>
-          </a:effectRef>
-          <a:fontRef idx="minor">
-            <a:schemeClr val="lt1"/>
-          </a:fontRef>
-        </p:style>
-        <p:txBody>
-          <a:bodyPr/>
-          <a:lstStyle/>
-          <a:p>
-            <a:endParaRPr lang="en-US"/>
-          </a:p>
-        </p:txBody>
-      </p:sp>
-      <p:sp>
-        <p:nvSpPr>
-          <p:cNvPr id="27" name="Rectangle 26">
-            <a:extLst>
-              <a:ext uri="{FF2B5EF4-FFF2-40B4-BE49-F238E27FC236}">
-                <a16:creationId xmlns:a16="http://schemas.microsoft.com/office/drawing/2014/main" id="{10AE8D57-436A-4073-9A75-15BB5949F8B4}"/>
-              </a:ext>
-              <a:ext uri="{C183D7F6-B498-43B3-948B-1728B52AA6E4}">
-                <adec:decorative xmlns:adec="http://schemas.microsoft.com/office/drawing/2017/decorative" val="1"/>
-              </a:ext>
-            </a:extLst>
-          </p:cNvPr>
-          <p:cNvSpPr>
-            <a:spLocks noGrp="1" noRot="1" noChangeAspect="1" noMove="1" noResize="1" noEditPoints="1" noAdjustHandles="1" noChangeArrowheads="1" noChangeShapeType="1" noTextEdit="1"/>
-          </p:cNvSpPr>
-          <p:nvPr>
-            <p:extLst>
-              <p:ext uri="{386F3935-93C4-4BCD-93E2-E3B085C9AB24}">
-                <p16:designElem xmlns:p16="http://schemas.microsoft.com/office/powerpoint/2015/main" val="1"/>
-              </p:ext>
-            </p:extLst>
-          </p:nvPr>
-        </p:nvSpPr>
-        <p:spPr>
-          <a:xfrm>
-            <a:off x="4241830" y="457200"/>
-            <a:ext cx="3703320" cy="91440"/>
-          </a:xfrm>
-          <a:prstGeom prst="rect">
-            <a:avLst/>
-          </a:prstGeom>
-          <a:solidFill>
-            <a:schemeClr val="accent1"/>
-          </a:solidFill>
-          <a:ln>
-            <a:noFill/>
-          </a:ln>
-          <a:effectLst/>
-        </p:spPr>
-        <p:style>
-          <a:lnRef idx="1">
-            <a:schemeClr val="accent1"/>
-          </a:lnRef>
-          <a:fillRef idx="3">
-            <a:schemeClr val="accent1"/>
-          </a:fillRef>
-          <a:effectRef idx="2">
-            <a:schemeClr val="accent1"/>
-          </a:effectRef>
-          <a:fontRef idx="minor">
-            <a:schemeClr val="lt1"/>
-          </a:fontRef>
-        </p:style>
-        <p:txBody>
-          <a:bodyPr/>
-          <a:lstStyle/>
-          <a:p>
-            <a:endParaRPr lang="en-US"/>
-          </a:p>
-        </p:txBody>
-      </p:sp>
-      <p:sp>
-        <p:nvSpPr>
-          <p:cNvPr id="29" name="Rectangle 28">
-            <a:extLst>
-              <a:ext uri="{FF2B5EF4-FFF2-40B4-BE49-F238E27FC236}">
-                <a16:creationId xmlns:a16="http://schemas.microsoft.com/office/drawing/2014/main" id="{E2852671-8EB6-4EAF-8AF8-65CF3FD66456}"/>
-              </a:ext>
-              <a:ext uri="{C183D7F6-B498-43B3-948B-1728B52AA6E4}">
-                <adec:decorative xmlns:adec="http://schemas.microsoft.com/office/drawing/2017/decorative" val="1"/>
-              </a:ext>
-            </a:extLst>
-          </p:cNvPr>
-          <p:cNvSpPr>
-            <a:spLocks noGrp="1" noRot="1" noChangeAspect="1" noMove="1" noResize="1" noEditPoints="1" noAdjustHandles="1" noChangeArrowheads="1" noChangeShapeType="1" noTextEdit="1"/>
-          </p:cNvSpPr>
-          <p:nvPr>
-            <p:extLst>
-              <p:ext uri="{386F3935-93C4-4BCD-93E2-E3B085C9AB24}">
-                <p16:designElem xmlns:p16="http://schemas.microsoft.com/office/powerpoint/2015/main" val="1"/>
-              </p:ext>
-            </p:extLst>
-          </p:nvPr>
-        </p:nvSpPr>
-        <p:spPr>
-          <a:xfrm>
-            <a:off x="446534" y="3085764"/>
-            <a:ext cx="11298932" cy="3338149"/>
-          </a:xfrm>
-          <a:prstGeom prst="rect">
-            <a:avLst/>
-          </a:prstGeom>
-          <a:solidFill>
-            <a:srgbClr val="465359"/>
-          </a:solidFill>
-          <a:ln>
-            <a:noFill/>
-          </a:ln>
-          <a:effectLst/>
-        </p:spPr>
-        <p:style>
-          <a:lnRef idx="1">
-            <a:schemeClr val="accent1"/>
-          </a:lnRef>
-          <a:fillRef idx="3">
-            <a:schemeClr val="accent1"/>
-          </a:fillRef>
-          <a:effectRef idx="2">
-            <a:schemeClr val="accent1"/>
-          </a:effectRef>
-          <a:fontRef idx="minor">
-            <a:schemeClr val="lt1"/>
-          </a:fontRef>
-        </p:style>
-        <p:txBody>
-          <a:bodyPr/>
-          <a:lstStyle/>
-          <a:p>
-            <a:endParaRPr lang="en-US"/>
-          </a:p>
-        </p:txBody>
-      </p:sp>
-      <p:sp useBgFill="1">
-        <p:nvSpPr>
-          <p:cNvPr id="31" name="Rectangle 30">
-            <a:extLst>
-              <a:ext uri="{FF2B5EF4-FFF2-40B4-BE49-F238E27FC236}">
-                <a16:creationId xmlns:a16="http://schemas.microsoft.com/office/drawing/2014/main" id="{7C427EA3-1645-4B27-A5C2-55E8E24C665F}"/>
+                <a16:creationId xmlns:a16="http://schemas.microsoft.com/office/drawing/2014/main" id="{26B4480E-B7FF-4481-890E-043A69AE6FE2}"/>
               </a:ext>
               <a:ext uri="{C183D7F6-B498-43B3-948B-1728B52AA6E4}">
                 <adec:decorative xmlns:adec="http://schemas.microsoft.com/office/drawing/2017/decorative" val="1"/>
@@ -12401,3344 +12228,9 @@
           </a:p>
         </p:txBody>
       </p:sp>
-      <p:sp>
-        <p:nvSpPr>
-          <p:cNvPr id="33" name="Rectangle 32">
-            <a:extLst>
-              <a:ext uri="{FF2B5EF4-FFF2-40B4-BE49-F238E27FC236}">
-                <a16:creationId xmlns:a16="http://schemas.microsoft.com/office/drawing/2014/main" id="{885CDBF6-7B87-4A58-92CA-E887CA36AF04}"/>
-              </a:ext>
-              <a:ext uri="{C183D7F6-B498-43B3-948B-1728B52AA6E4}">
-                <adec:decorative xmlns:adec="http://schemas.microsoft.com/office/drawing/2017/decorative" val="1"/>
-              </a:ext>
-            </a:extLst>
-          </p:cNvPr>
-          <p:cNvSpPr>
-            <a:spLocks noGrp="1" noRot="1" noChangeAspect="1" noMove="1" noResize="1" noEditPoints="1" noAdjustHandles="1" noChangeArrowheads="1" noChangeShapeType="1" noTextEdit="1"/>
-          </p:cNvSpPr>
-          <p:nvPr>
-            <p:extLst>
-              <p:ext uri="{386F3935-93C4-4BCD-93E2-E3B085C9AB24}">
-                <p16:designElem xmlns:p16="http://schemas.microsoft.com/office/powerpoint/2015/main" val="1"/>
-              </p:ext>
-            </p:extLst>
-          </p:nvPr>
-        </p:nvSpPr>
-        <p:spPr>
-          <a:xfrm>
-            <a:off x="446534" y="457200"/>
-            <a:ext cx="3703320" cy="94997"/>
-          </a:xfrm>
-          <a:prstGeom prst="rect">
-            <a:avLst/>
-          </a:prstGeom>
-          <a:solidFill>
-            <a:srgbClr val="465359"/>
-          </a:solidFill>
-          <a:ln>
-            <a:noFill/>
-          </a:ln>
-          <a:effectLst/>
-        </p:spPr>
-        <p:style>
-          <a:lnRef idx="1">
-            <a:schemeClr val="accent1"/>
-          </a:lnRef>
-          <a:fillRef idx="3">
-            <a:schemeClr val="accent1"/>
-          </a:fillRef>
-          <a:effectRef idx="2">
-            <a:schemeClr val="accent1"/>
-          </a:effectRef>
-          <a:fontRef idx="minor">
-            <a:schemeClr val="lt1"/>
-          </a:fontRef>
-        </p:style>
-        <p:txBody>
-          <a:bodyPr/>
-          <a:lstStyle/>
-          <a:p>
-            <a:endParaRPr lang="en-US"/>
-          </a:p>
-        </p:txBody>
-      </p:sp>
-      <p:sp>
-        <p:nvSpPr>
-          <p:cNvPr id="35" name="Rectangle 34">
-            <a:extLst>
-              <a:ext uri="{FF2B5EF4-FFF2-40B4-BE49-F238E27FC236}">
-                <a16:creationId xmlns:a16="http://schemas.microsoft.com/office/drawing/2014/main" id="{6BFF2B2E-1CF1-403F-BB44-3F9C3E7F67FF}"/>
-              </a:ext>
-              <a:ext uri="{C183D7F6-B498-43B3-948B-1728B52AA6E4}">
-                <adec:decorative xmlns:adec="http://schemas.microsoft.com/office/drawing/2017/decorative" val="1"/>
-              </a:ext>
-            </a:extLst>
-          </p:cNvPr>
-          <p:cNvSpPr>
-            <a:spLocks noGrp="1" noRot="1" noChangeAspect="1" noMove="1" noResize="1" noEditPoints="1" noAdjustHandles="1" noChangeArrowheads="1" noChangeShapeType="1" noTextEdit="1"/>
-          </p:cNvSpPr>
-          <p:nvPr>
-            <p:extLst>
-              <p:ext uri="{386F3935-93C4-4BCD-93E2-E3B085C9AB24}">
-                <p16:designElem xmlns:p16="http://schemas.microsoft.com/office/powerpoint/2015/main" val="1"/>
-              </p:ext>
-            </p:extLst>
-          </p:nvPr>
-        </p:nvSpPr>
-        <p:spPr>
-          <a:xfrm>
-            <a:off x="4241830" y="457200"/>
-            <a:ext cx="3703320" cy="91440"/>
-          </a:xfrm>
-          <a:prstGeom prst="rect">
-            <a:avLst/>
-          </a:prstGeom>
-          <a:solidFill>
-            <a:schemeClr val="accent1"/>
-          </a:solidFill>
-          <a:ln>
-            <a:noFill/>
-          </a:ln>
-          <a:effectLst/>
-        </p:spPr>
-        <p:style>
-          <a:lnRef idx="1">
-            <a:schemeClr val="accent1"/>
-          </a:lnRef>
-          <a:fillRef idx="3">
-            <a:schemeClr val="accent1"/>
-          </a:fillRef>
-          <a:effectRef idx="2">
-            <a:schemeClr val="accent1"/>
-          </a:effectRef>
-          <a:fontRef idx="minor">
-            <a:schemeClr val="lt1"/>
-          </a:fontRef>
-        </p:style>
-        <p:txBody>
-          <a:bodyPr/>
-          <a:lstStyle/>
-          <a:p>
-            <a:endParaRPr lang="en-US"/>
-          </a:p>
-        </p:txBody>
-      </p:sp>
-      <p:sp>
-        <p:nvSpPr>
-          <p:cNvPr id="37" name="Rectangle 36">
-            <a:extLst>
-              <a:ext uri="{FF2B5EF4-FFF2-40B4-BE49-F238E27FC236}">
-                <a16:creationId xmlns:a16="http://schemas.microsoft.com/office/drawing/2014/main" id="{9D8B4D3C-0DE0-43B9-B032-32B536B96D02}"/>
-              </a:ext>
-              <a:ext uri="{C183D7F6-B498-43B3-948B-1728B52AA6E4}">
-                <adec:decorative xmlns:adec="http://schemas.microsoft.com/office/drawing/2017/decorative" val="1"/>
-              </a:ext>
-            </a:extLst>
-          </p:cNvPr>
-          <p:cNvSpPr>
-            <a:spLocks noGrp="1" noRot="1" noChangeAspect="1" noMove="1" noResize="1" noEditPoints="1" noAdjustHandles="1" noChangeArrowheads="1" noChangeShapeType="1" noTextEdit="1"/>
-          </p:cNvSpPr>
-          <p:nvPr>
-            <p:extLst>
-              <p:ext uri="{386F3935-93C4-4BCD-93E2-E3B085C9AB24}">
-                <p16:designElem xmlns:p16="http://schemas.microsoft.com/office/powerpoint/2015/main" val="1"/>
-              </p:ext>
-            </p:extLst>
-          </p:nvPr>
-        </p:nvSpPr>
-        <p:spPr>
-          <a:xfrm>
-            <a:off x="8042147" y="453643"/>
-            <a:ext cx="3703320" cy="98554"/>
-          </a:xfrm>
-          <a:prstGeom prst="rect">
-            <a:avLst/>
-          </a:prstGeom>
-          <a:solidFill>
-            <a:srgbClr val="969FA7"/>
-          </a:solidFill>
-          <a:ln>
-            <a:noFill/>
-          </a:ln>
-          <a:effectLst/>
-        </p:spPr>
-        <p:style>
-          <a:lnRef idx="1">
-            <a:schemeClr val="accent1"/>
-          </a:lnRef>
-          <a:fillRef idx="3">
-            <a:schemeClr val="accent1"/>
-          </a:fillRef>
-          <a:effectRef idx="2">
-            <a:schemeClr val="accent1"/>
-          </a:effectRef>
-          <a:fontRef idx="minor">
-            <a:schemeClr val="lt1"/>
-          </a:fontRef>
-        </p:style>
-        <p:txBody>
-          <a:bodyPr/>
-          <a:lstStyle/>
-          <a:p>
-            <a:endParaRPr lang="en-US"/>
-          </a:p>
-        </p:txBody>
-      </p:sp>
-      <p:pic>
-        <p:nvPicPr>
-          <p:cNvPr id="5" name="Content Placeholder 4" descr="A graph of a graph showing the growth of a school&#10;&#10;Description automatically generated with medium confidence">
-            <a:extLst>
-              <a:ext uri="{FF2B5EF4-FFF2-40B4-BE49-F238E27FC236}">
-                <a16:creationId xmlns:a16="http://schemas.microsoft.com/office/drawing/2014/main" id="{E6F007C4-9A16-A163-4BC9-129A06B713D8}"/>
-              </a:ext>
-            </a:extLst>
-          </p:cNvPr>
-          <p:cNvPicPr>
-            <a:picLocks noChangeAspect="1"/>
-          </p:cNvPicPr>
-          <p:nvPr/>
-        </p:nvPicPr>
-        <p:blipFill>
-          <a:blip r:embed="rId2">
-            <a:extLst>
-              <a:ext uri="{28A0092B-C50C-407E-A947-70E740481C1C}">
-                <a14:useLocalDpi xmlns:a14="http://schemas.microsoft.com/office/drawing/2010/main" val="0"/>
-              </a:ext>
-            </a:extLst>
-          </a:blip>
-          <a:srcRect l="209" r="1" b="1"/>
-          <a:stretch/>
-        </p:blipFill>
-        <p:spPr>
-          <a:xfrm>
-            <a:off x="954147" y="1208531"/>
-            <a:ext cx="6472838" cy="4735069"/>
-          </a:xfrm>
-          <a:prstGeom prst="rect">
-            <a:avLst/>
-          </a:prstGeom>
-        </p:spPr>
-      </p:pic>
-      <p:sp>
-        <p:nvSpPr>
-          <p:cNvPr id="39" name="Rectangle 38">
-            <a:extLst>
-              <a:ext uri="{FF2B5EF4-FFF2-40B4-BE49-F238E27FC236}">
-                <a16:creationId xmlns:a16="http://schemas.microsoft.com/office/drawing/2014/main" id="{707788D3-E467-4E25-A5E9-FD41795BD551}"/>
-              </a:ext>
-              <a:ext uri="{C183D7F6-B498-43B3-948B-1728B52AA6E4}">
-                <adec:decorative xmlns:adec="http://schemas.microsoft.com/office/drawing/2017/decorative" val="1"/>
-              </a:ext>
-            </a:extLst>
-          </p:cNvPr>
-          <p:cNvSpPr>
-            <a:spLocks noGrp="1" noRot="1" noChangeAspect="1" noMove="1" noResize="1" noEditPoints="1" noAdjustHandles="1" noChangeArrowheads="1" noChangeShapeType="1" noTextEdit="1"/>
-          </p:cNvSpPr>
-          <p:nvPr>
-            <p:extLst>
-              <p:ext uri="{386F3935-93C4-4BCD-93E2-E3B085C9AB24}">
-                <p16:designElem xmlns:p16="http://schemas.microsoft.com/office/powerpoint/2015/main" val="1"/>
-              </p:ext>
-            </p:extLst>
-          </p:nvPr>
-        </p:nvSpPr>
-        <p:spPr>
-          <a:xfrm>
-            <a:off x="8042147" y="601200"/>
-            <a:ext cx="3703320" cy="5789365"/>
-          </a:xfrm>
-          <a:prstGeom prst="rect">
-            <a:avLst/>
-          </a:prstGeom>
-          <a:solidFill>
-            <a:srgbClr val="465359"/>
-          </a:solidFill>
-          <a:ln>
-            <a:noFill/>
-          </a:ln>
-          <a:effectLst/>
-        </p:spPr>
-        <p:style>
-          <a:lnRef idx="1">
-            <a:schemeClr val="accent1"/>
-          </a:lnRef>
-          <a:fillRef idx="3">
-            <a:schemeClr val="accent1"/>
-          </a:fillRef>
-          <a:effectRef idx="2">
-            <a:schemeClr val="accent1"/>
-          </a:effectRef>
-          <a:fontRef idx="minor">
-            <a:schemeClr val="lt1"/>
-          </a:fontRef>
-        </p:style>
-        <p:txBody>
-          <a:bodyPr/>
-          <a:lstStyle/>
-          <a:p>
-            <a:endParaRPr lang="en-US"/>
-          </a:p>
-        </p:txBody>
-      </p:sp>
-      <p:sp>
-        <p:nvSpPr>
-          <p:cNvPr id="2" name="Title 1">
-            <a:extLst>
-              <a:ext uri="{FF2B5EF4-FFF2-40B4-BE49-F238E27FC236}">
-                <a16:creationId xmlns:a16="http://schemas.microsoft.com/office/drawing/2014/main" id="{9C80DD40-9D60-A500-15A6-FC02DB1C663B}"/>
-              </a:ext>
-            </a:extLst>
-          </p:cNvPr>
-          <p:cNvSpPr>
-            <a:spLocks noGrp="1"/>
-          </p:cNvSpPr>
-          <p:nvPr>
-            <p:ph type="title"/>
-          </p:nvPr>
-        </p:nvSpPr>
-        <p:spPr>
-          <a:xfrm>
-            <a:off x="8296275" y="1419225"/>
-            <a:ext cx="3081576" cy="2085869"/>
-          </a:xfrm>
-        </p:spPr>
-        <p:txBody>
-          <a:bodyPr vert="horz" lIns="91440" tIns="45720" rIns="91440" bIns="45720" rtlCol="0" anchor="b">
-            <a:normAutofit/>
-          </a:bodyPr>
-          <a:lstStyle/>
-          <a:p>
-            <a:r>
-              <a:rPr lang="en-US" sz="3600" dirty="0">
-                <a:solidFill>
-                  <a:srgbClr val="FFFFFF"/>
-                </a:solidFill>
-              </a:rPr>
-              <a:t>MNPS Budget vs graduation rates</a:t>
-            </a:r>
-          </a:p>
-        </p:txBody>
-      </p:sp>
-      <p:sp>
-        <p:nvSpPr>
-          <p:cNvPr id="9" name="Content Placeholder 8">
-            <a:extLst>
-              <a:ext uri="{FF2B5EF4-FFF2-40B4-BE49-F238E27FC236}">
-                <a16:creationId xmlns:a16="http://schemas.microsoft.com/office/drawing/2014/main" id="{4D453874-0CFD-DC8E-5406-0499D3FBDB12}"/>
-              </a:ext>
-            </a:extLst>
-          </p:cNvPr>
-          <p:cNvSpPr>
-            <a:spLocks noGrp="1"/>
-          </p:cNvSpPr>
-          <p:nvPr>
-            <p:ph idx="1"/>
-          </p:nvPr>
-        </p:nvSpPr>
-        <p:spPr>
-          <a:xfrm>
-            <a:off x="8296275" y="3505095"/>
-            <a:ext cx="3081576" cy="1733655"/>
-          </a:xfrm>
-        </p:spPr>
-        <p:txBody>
-          <a:bodyPr vert="horz" lIns="91440" tIns="45720" rIns="91440" bIns="45720" rtlCol="0" anchor="t">
-            <a:normAutofit/>
-          </a:bodyPr>
-          <a:lstStyle/>
-          <a:p>
-            <a:pPr marL="0" indent="0">
-              <a:buNone/>
-            </a:pPr>
-            <a:r>
-              <a:rPr lang="en-US" sz="1600" kern="1200" cap="all">
-                <a:solidFill>
-                  <a:srgbClr val="FFFFFF">
-                    <a:alpha val="75000"/>
-                  </a:srgbClr>
-                </a:solidFill>
-                <a:latin typeface="+mn-lt"/>
-                <a:ea typeface="+mn-ea"/>
-                <a:cs typeface="+mn-cs"/>
-              </a:rPr>
-              <a:t>The higher the budget, the better the graduation rate?</a:t>
-            </a:r>
-          </a:p>
-        </p:txBody>
-      </p:sp>
-    </p:spTree>
-    <p:extLst>
-      <p:ext uri="{BB962C8B-B14F-4D97-AF65-F5344CB8AC3E}">
-        <p14:creationId xmlns:p14="http://schemas.microsoft.com/office/powerpoint/2010/main" val="3594092534"/>
-      </p:ext>
-    </p:extLst>
-  </p:cSld>
-  <p:clrMapOvr>
-    <a:masterClrMapping/>
-  </p:clrMapOvr>
-</p:sld>
-</file>
-
-<file path=ppt/slides/slide12.xml><?xml version="1.0" encoding="utf-8"?>
-<p:sld xmlns:a="http://schemas.openxmlformats.org/drawingml/2006/main" xmlns:r="http://schemas.openxmlformats.org/officeDocument/2006/relationships" xmlns:p="http://schemas.openxmlformats.org/presentationml/2006/main">
-  <p:cSld>
-    <p:bg>
-      <p:bgPr>
-        <a:solidFill>
-          <a:schemeClr val="bg1"/>
-        </a:solidFill>
-        <a:effectLst/>
-      </p:bgPr>
-    </p:bg>
-    <p:spTree>
-      <p:nvGrpSpPr>
-        <p:cNvPr id="1" name=""/>
-        <p:cNvGrpSpPr/>
-        <p:nvPr/>
-      </p:nvGrpSpPr>
-      <p:grpSpPr>
-        <a:xfrm>
-          <a:off x="0" y="0"/>
-          <a:ext cx="0" cy="0"/>
-          <a:chOff x="0" y="0"/>
-          <a:chExt cx="0" cy="0"/>
-        </a:xfrm>
-      </p:grpSpPr>
-      <p:sp>
-        <p:nvSpPr>
-          <p:cNvPr id="10" name="Rectangle 9">
-            <a:extLst>
-              <a:ext uri="{FF2B5EF4-FFF2-40B4-BE49-F238E27FC236}">
-                <a16:creationId xmlns:a16="http://schemas.microsoft.com/office/drawing/2014/main" id="{E9751CB9-7B25-4EB8-9A6F-82F822549F12}"/>
-              </a:ext>
-              <a:ext uri="{C183D7F6-B498-43B3-948B-1728B52AA6E4}">
-                <adec:decorative xmlns:adec="http://schemas.microsoft.com/office/drawing/2017/decorative" val="1"/>
-              </a:ext>
-            </a:extLst>
-          </p:cNvPr>
-          <p:cNvSpPr>
-            <a:spLocks noGrp="1" noRot="1" noChangeAspect="1" noMove="1" noResize="1" noEditPoints="1" noAdjustHandles="1" noChangeArrowheads="1" noChangeShapeType="1" noTextEdit="1"/>
-          </p:cNvSpPr>
-          <p:nvPr>
-            <p:extLst>
-              <p:ext uri="{386F3935-93C4-4BCD-93E2-E3B085C9AB24}">
-                <p16:designElem xmlns:p16="http://schemas.microsoft.com/office/powerpoint/2015/main" val="1"/>
-              </p:ext>
-            </p:extLst>
-          </p:nvPr>
-        </p:nvSpPr>
-        <p:spPr>
-          <a:xfrm>
-            <a:off x="0" y="0"/>
-            <a:ext cx="12192000" cy="6858000"/>
-          </a:xfrm>
-          <a:prstGeom prst="rect">
-            <a:avLst/>
-          </a:prstGeom>
-          <a:solidFill>
-            <a:srgbClr val="FFFFFF"/>
-          </a:solidFill>
-          <a:ln>
-            <a:noFill/>
-          </a:ln>
-        </p:spPr>
-        <p:style>
-          <a:lnRef idx="2">
-            <a:schemeClr val="accent1">
-              <a:shade val="50000"/>
-            </a:schemeClr>
-          </a:lnRef>
-          <a:fillRef idx="1">
-            <a:schemeClr val="accent1"/>
-          </a:fillRef>
-          <a:effectRef idx="0">
-            <a:schemeClr val="accent1"/>
-          </a:effectRef>
-          <a:fontRef idx="minor">
-            <a:schemeClr val="lt1"/>
-          </a:fontRef>
-        </p:style>
-        <p:txBody>
-          <a:bodyPr rtlCol="0" anchor="ctr"/>
-          <a:lstStyle/>
-          <a:p>
-            <a:pPr algn="ctr"/>
-            <a:endParaRPr lang="en-US"/>
-          </a:p>
-        </p:txBody>
-      </p:sp>
-      <p:sp>
-        <p:nvSpPr>
-          <p:cNvPr id="12" name="Rectangle 11">
-            <a:extLst>
-              <a:ext uri="{FF2B5EF4-FFF2-40B4-BE49-F238E27FC236}">
-                <a16:creationId xmlns:a16="http://schemas.microsoft.com/office/drawing/2014/main" id="{E1317383-CF3B-4B02-9512-BECBEF6362A4}"/>
-              </a:ext>
-              <a:ext uri="{C183D7F6-B498-43B3-948B-1728B52AA6E4}">
-                <adec:decorative xmlns:adec="http://schemas.microsoft.com/office/drawing/2017/decorative" val="1"/>
-              </a:ext>
-            </a:extLst>
-          </p:cNvPr>
-          <p:cNvSpPr>
-            <a:spLocks noGrp="1" noRot="1" noChangeAspect="1" noMove="1" noResize="1" noEditPoints="1" noAdjustHandles="1" noChangeArrowheads="1" noChangeShapeType="1" noTextEdit="1"/>
-          </p:cNvSpPr>
-          <p:nvPr>
-            <p:extLst>
-              <p:ext uri="{386F3935-93C4-4BCD-93E2-E3B085C9AB24}">
-                <p16:designElem xmlns:p16="http://schemas.microsoft.com/office/powerpoint/2015/main" val="1"/>
-              </p:ext>
-            </p:extLst>
-          </p:nvPr>
-        </p:nvSpPr>
-        <p:spPr>
-          <a:xfrm>
-            <a:off x="446534" y="457200"/>
-            <a:ext cx="3703320" cy="94997"/>
-          </a:xfrm>
-          <a:prstGeom prst="rect">
-            <a:avLst/>
-          </a:prstGeom>
-          <a:solidFill>
-            <a:srgbClr val="465359"/>
-          </a:solidFill>
-          <a:ln>
-            <a:noFill/>
-          </a:ln>
-          <a:effectLst/>
-        </p:spPr>
-        <p:style>
-          <a:lnRef idx="1">
-            <a:schemeClr val="accent1"/>
-          </a:lnRef>
-          <a:fillRef idx="3">
-            <a:schemeClr val="accent1"/>
-          </a:fillRef>
-          <a:effectRef idx="2">
-            <a:schemeClr val="accent1"/>
-          </a:effectRef>
-          <a:fontRef idx="minor">
-            <a:schemeClr val="lt1"/>
-          </a:fontRef>
-        </p:style>
-        <p:txBody>
-          <a:bodyPr/>
-          <a:lstStyle/>
-          <a:p>
-            <a:endParaRPr lang="en-US"/>
-          </a:p>
-        </p:txBody>
-      </p:sp>
-      <p:sp>
-        <p:nvSpPr>
-          <p:cNvPr id="14" name="Rectangle 13">
-            <a:extLst>
-              <a:ext uri="{FF2B5EF4-FFF2-40B4-BE49-F238E27FC236}">
-                <a16:creationId xmlns:a16="http://schemas.microsoft.com/office/drawing/2014/main" id="{B1D4C7A0-6DF2-4F2D-A45D-F111582974C7}"/>
-              </a:ext>
-              <a:ext uri="{C183D7F6-B498-43B3-948B-1728B52AA6E4}">
-                <adec:decorative xmlns:adec="http://schemas.microsoft.com/office/drawing/2017/decorative" val="1"/>
-              </a:ext>
-            </a:extLst>
-          </p:cNvPr>
-          <p:cNvSpPr>
-            <a:spLocks noGrp="1" noRot="1" noChangeAspect="1" noMove="1" noResize="1" noEditPoints="1" noAdjustHandles="1" noChangeArrowheads="1" noChangeShapeType="1" noTextEdit="1"/>
-          </p:cNvSpPr>
-          <p:nvPr>
-            <p:extLst>
-              <p:ext uri="{386F3935-93C4-4BCD-93E2-E3B085C9AB24}">
-                <p16:designElem xmlns:p16="http://schemas.microsoft.com/office/powerpoint/2015/main" val="1"/>
-              </p:ext>
-            </p:extLst>
-          </p:nvPr>
-        </p:nvSpPr>
-        <p:spPr>
-          <a:xfrm>
-            <a:off x="4241830" y="457200"/>
-            <a:ext cx="3703320" cy="91440"/>
-          </a:xfrm>
-          <a:prstGeom prst="rect">
-            <a:avLst/>
-          </a:prstGeom>
-          <a:solidFill>
-            <a:schemeClr val="accent1"/>
-          </a:solidFill>
-          <a:ln>
-            <a:noFill/>
-          </a:ln>
-          <a:effectLst/>
-        </p:spPr>
-        <p:style>
-          <a:lnRef idx="1">
-            <a:schemeClr val="accent1"/>
-          </a:lnRef>
-          <a:fillRef idx="3">
-            <a:schemeClr val="accent1"/>
-          </a:fillRef>
-          <a:effectRef idx="2">
-            <a:schemeClr val="accent1"/>
-          </a:effectRef>
-          <a:fontRef idx="minor">
-            <a:schemeClr val="lt1"/>
-          </a:fontRef>
-        </p:style>
-        <p:txBody>
-          <a:bodyPr/>
-          <a:lstStyle/>
-          <a:p>
-            <a:endParaRPr lang="en-US"/>
-          </a:p>
-        </p:txBody>
-      </p:sp>
-      <p:sp>
-        <p:nvSpPr>
-          <p:cNvPr id="16" name="Rectangle 15">
-            <a:extLst>
-              <a:ext uri="{FF2B5EF4-FFF2-40B4-BE49-F238E27FC236}">
-                <a16:creationId xmlns:a16="http://schemas.microsoft.com/office/drawing/2014/main" id="{DBF3943D-BCB6-4B31-809D-A005686483B4}"/>
-              </a:ext>
-              <a:ext uri="{C183D7F6-B498-43B3-948B-1728B52AA6E4}">
-                <adec:decorative xmlns:adec="http://schemas.microsoft.com/office/drawing/2017/decorative" val="1"/>
-              </a:ext>
-            </a:extLst>
-          </p:cNvPr>
-          <p:cNvSpPr>
-            <a:spLocks noGrp="1" noRot="1" noChangeAspect="1" noMove="1" noResize="1" noEditPoints="1" noAdjustHandles="1" noChangeArrowheads="1" noChangeShapeType="1" noTextEdit="1"/>
-          </p:cNvSpPr>
-          <p:nvPr>
-            <p:extLst>
-              <p:ext uri="{386F3935-93C4-4BCD-93E2-E3B085C9AB24}">
-                <p16:designElem xmlns:p16="http://schemas.microsoft.com/office/powerpoint/2015/main" val="1"/>
-              </p:ext>
-            </p:extLst>
-          </p:nvPr>
-        </p:nvSpPr>
-        <p:spPr>
-          <a:xfrm>
-            <a:off x="8042147" y="453643"/>
-            <a:ext cx="3703320" cy="98554"/>
-          </a:xfrm>
-          <a:prstGeom prst="rect">
-            <a:avLst/>
-          </a:prstGeom>
-          <a:solidFill>
-            <a:srgbClr val="969FA7"/>
-          </a:solidFill>
-          <a:ln>
-            <a:noFill/>
-          </a:ln>
-          <a:effectLst/>
-        </p:spPr>
-        <p:style>
-          <a:lnRef idx="1">
-            <a:schemeClr val="accent1"/>
-          </a:lnRef>
-          <a:fillRef idx="3">
-            <a:schemeClr val="accent1"/>
-          </a:fillRef>
-          <a:effectRef idx="2">
-            <a:schemeClr val="accent1"/>
-          </a:effectRef>
-          <a:fontRef idx="minor">
-            <a:schemeClr val="lt1"/>
-          </a:fontRef>
-        </p:style>
-        <p:txBody>
-          <a:bodyPr/>
-          <a:lstStyle/>
-          <a:p>
-            <a:endParaRPr lang="en-US"/>
-          </a:p>
-        </p:txBody>
-      </p:sp>
-      <p:sp>
-        <p:nvSpPr>
-          <p:cNvPr id="18" name="Rectangle 17">
-            <a:extLst>
-              <a:ext uri="{FF2B5EF4-FFF2-40B4-BE49-F238E27FC236}">
-                <a16:creationId xmlns:a16="http://schemas.microsoft.com/office/drawing/2014/main" id="{39373A6F-2E1F-4613-8E1D-D68057D29F31}"/>
-              </a:ext>
-              <a:ext uri="{C183D7F6-B498-43B3-948B-1728B52AA6E4}">
-                <adec:decorative xmlns:adec="http://schemas.microsoft.com/office/drawing/2017/decorative" val="1"/>
-              </a:ext>
-            </a:extLst>
-          </p:cNvPr>
-          <p:cNvSpPr>
-            <a:spLocks noGrp="1" noRot="1" noChangeAspect="1" noMove="1" noResize="1" noEditPoints="1" noAdjustHandles="1" noChangeArrowheads="1" noChangeShapeType="1" noTextEdit="1"/>
-          </p:cNvSpPr>
-          <p:nvPr>
-            <p:extLst>
-              <p:ext uri="{386F3935-93C4-4BCD-93E2-E3B085C9AB24}">
-                <p16:designElem xmlns:p16="http://schemas.microsoft.com/office/powerpoint/2015/main" val="1"/>
-              </p:ext>
-            </p:extLst>
-          </p:nvPr>
-        </p:nvSpPr>
-        <p:spPr>
-          <a:xfrm>
-            <a:off x="442377" y="601200"/>
-            <a:ext cx="3707477" cy="5624979"/>
-          </a:xfrm>
-          <a:prstGeom prst="rect">
-            <a:avLst/>
-          </a:prstGeom>
-          <a:solidFill>
-            <a:srgbClr val="465359"/>
-          </a:solidFill>
-          <a:ln>
-            <a:noFill/>
-          </a:ln>
-          <a:effectLst/>
-        </p:spPr>
-        <p:style>
-          <a:lnRef idx="1">
-            <a:schemeClr val="accent1"/>
-          </a:lnRef>
-          <a:fillRef idx="3">
-            <a:schemeClr val="accent1"/>
-          </a:fillRef>
-          <a:effectRef idx="2">
-            <a:schemeClr val="accent1"/>
-          </a:effectRef>
-          <a:fontRef idx="minor">
-            <a:schemeClr val="lt1"/>
-          </a:fontRef>
-        </p:style>
-        <p:txBody>
-          <a:bodyPr/>
-          <a:lstStyle/>
-          <a:p>
-            <a:endParaRPr lang="en-US"/>
-          </a:p>
-        </p:txBody>
-      </p:sp>
-      <p:sp>
-        <p:nvSpPr>
-          <p:cNvPr id="2" name="Title 1">
-            <a:extLst>
-              <a:ext uri="{FF2B5EF4-FFF2-40B4-BE49-F238E27FC236}">
-                <a16:creationId xmlns:a16="http://schemas.microsoft.com/office/drawing/2014/main" id="{2C25FACA-46F1-2FF6-BF24-DF4098B9F960}"/>
-              </a:ext>
-            </a:extLst>
-          </p:cNvPr>
-          <p:cNvSpPr>
-            <a:spLocks noGrp="1"/>
-          </p:cNvSpPr>
-          <p:nvPr>
-            <p:ph type="title"/>
-          </p:nvPr>
-        </p:nvSpPr>
-        <p:spPr>
-          <a:xfrm>
-            <a:off x="601255" y="702155"/>
-            <a:ext cx="3409783" cy="1300365"/>
-          </a:xfrm>
-        </p:spPr>
-        <p:txBody>
-          <a:bodyPr>
-            <a:normAutofit/>
-          </a:bodyPr>
-          <a:lstStyle/>
-          <a:p>
-            <a:r>
-              <a:rPr lang="en-US">
-                <a:solidFill>
-                  <a:srgbClr val="FFFFFF"/>
-                </a:solidFill>
-              </a:rPr>
-              <a:t>Insights</a:t>
-            </a:r>
-          </a:p>
-        </p:txBody>
-      </p:sp>
-      <p:sp>
-        <p:nvSpPr>
-          <p:cNvPr id="3" name="Content Placeholder 2">
-            <a:extLst>
-              <a:ext uri="{FF2B5EF4-FFF2-40B4-BE49-F238E27FC236}">
-                <a16:creationId xmlns:a16="http://schemas.microsoft.com/office/drawing/2014/main" id="{DE87A645-8FC4-E20C-85CA-9B9483C7A2AE}"/>
-              </a:ext>
-            </a:extLst>
-          </p:cNvPr>
-          <p:cNvSpPr>
-            <a:spLocks noGrp="1"/>
-          </p:cNvSpPr>
-          <p:nvPr>
-            <p:ph idx="1"/>
-          </p:nvPr>
-        </p:nvSpPr>
-        <p:spPr>
-          <a:xfrm>
-            <a:off x="601255" y="2177142"/>
-            <a:ext cx="3409782" cy="3823607"/>
-          </a:xfrm>
-        </p:spPr>
-        <p:txBody>
-          <a:bodyPr>
-            <a:normAutofit/>
-          </a:bodyPr>
-          <a:lstStyle/>
-          <a:p>
-            <a:r>
-              <a:rPr lang="en-US" dirty="0">
-                <a:solidFill>
-                  <a:srgbClr val="FFFFFF"/>
-                </a:solidFill>
-              </a:rPr>
-              <a:t>High crime rates seem to impact everyday factors, such as graduation rates</a:t>
-            </a:r>
-          </a:p>
-          <a:p>
-            <a:r>
-              <a:rPr lang="en-US" dirty="0">
-                <a:solidFill>
-                  <a:srgbClr val="FFFFFF"/>
-                </a:solidFill>
-              </a:rPr>
-              <a:t>School budgets and graduation rates have a correlation</a:t>
-            </a:r>
-          </a:p>
-          <a:p>
-            <a:endParaRPr lang="en-US" dirty="0">
-              <a:solidFill>
-                <a:srgbClr val="FFFFFF"/>
-              </a:solidFill>
-            </a:endParaRPr>
-          </a:p>
-          <a:p>
-            <a:endParaRPr lang="en-US" dirty="0">
-              <a:solidFill>
-                <a:srgbClr val="FFFFFF"/>
-              </a:solidFill>
-            </a:endParaRPr>
-          </a:p>
-        </p:txBody>
-      </p:sp>
-      <p:pic>
-        <p:nvPicPr>
-          <p:cNvPr id="7" name="Graphic 6" descr="Statistics">
-            <a:extLst>
-              <a:ext uri="{FF2B5EF4-FFF2-40B4-BE49-F238E27FC236}">
-                <a16:creationId xmlns:a16="http://schemas.microsoft.com/office/drawing/2014/main" id="{BA318F57-2144-2B0B-5672-77883B08F6F8}"/>
-              </a:ext>
-            </a:extLst>
-          </p:cNvPr>
-          <p:cNvPicPr>
-            <a:picLocks noChangeAspect="1"/>
-          </p:cNvPicPr>
-          <p:nvPr/>
-        </p:nvPicPr>
-        <p:blipFill>
-          <a:blip r:embed="rId3">
-            <a:extLst>
-              <a:ext uri="{28A0092B-C50C-407E-A947-70E740481C1C}">
-                <a14:useLocalDpi xmlns:a14="http://schemas.microsoft.com/office/drawing/2010/main" val="0"/>
-              </a:ext>
-              <a:ext uri="{96DAC541-7B7A-43D3-8B79-37D633B846F1}">
-                <asvg:svgBlip xmlns:asvg="http://schemas.microsoft.com/office/drawing/2016/SVG/main" r:embed="rId4"/>
-              </a:ext>
-            </a:extLst>
-          </a:blip>
-          <a:stretch>
-            <a:fillRect/>
-          </a:stretch>
-        </p:blipFill>
-        <p:spPr>
-          <a:xfrm>
-            <a:off x="5523830" y="936141"/>
-            <a:ext cx="4968305" cy="4968305"/>
-          </a:xfrm>
-          <a:prstGeom prst="rect">
-            <a:avLst/>
-          </a:prstGeom>
-        </p:spPr>
-      </p:pic>
-    </p:spTree>
-    <p:extLst>
-      <p:ext uri="{BB962C8B-B14F-4D97-AF65-F5344CB8AC3E}">
-        <p14:creationId xmlns:p14="http://schemas.microsoft.com/office/powerpoint/2010/main" val="2019857754"/>
-      </p:ext>
-    </p:extLst>
-  </p:cSld>
-  <p:clrMapOvr>
-    <a:overrideClrMapping bg1="dk1" tx1="lt1" bg2="dk2" tx2="lt2" accent1="accent1" accent2="accent2" accent3="accent3" accent4="accent4" accent5="accent5" accent6="accent6" hlink="hlink" folHlink="folHlink"/>
-  </p:clrMapOvr>
-</p:sld>
-</file>
-
-<file path=ppt/slides/slide13.xml><?xml version="1.0" encoding="utf-8"?>
-<p:sld xmlns:a="http://schemas.openxmlformats.org/drawingml/2006/main" xmlns:r="http://schemas.openxmlformats.org/officeDocument/2006/relationships" xmlns:p="http://schemas.openxmlformats.org/presentationml/2006/main">
-  <p:cSld>
-    <p:bg>
-      <p:bgPr>
-        <a:solidFill>
-          <a:schemeClr val="bg2"/>
-        </a:solidFill>
-        <a:effectLst/>
-      </p:bgPr>
-    </p:bg>
-    <p:spTree>
-      <p:nvGrpSpPr>
-        <p:cNvPr id="1" name=""/>
-        <p:cNvGrpSpPr/>
-        <p:nvPr/>
-      </p:nvGrpSpPr>
-      <p:grpSpPr>
-        <a:xfrm>
-          <a:off x="0" y="0"/>
-          <a:ext cx="0" cy="0"/>
-          <a:chOff x="0" y="0"/>
-          <a:chExt cx="0" cy="0"/>
-        </a:xfrm>
-      </p:grpSpPr>
-      <p:sp>
-        <p:nvSpPr>
-          <p:cNvPr id="96" name="Rectangle 95">
-            <a:extLst>
-              <a:ext uri="{FF2B5EF4-FFF2-40B4-BE49-F238E27FC236}">
-                <a16:creationId xmlns:a16="http://schemas.microsoft.com/office/drawing/2014/main" id="{88C97474-5879-4DB5-B4F3-F0357104BC8E}"/>
-              </a:ext>
-              <a:ext uri="{C183D7F6-B498-43B3-948B-1728B52AA6E4}">
-                <adec:decorative xmlns:adec="http://schemas.microsoft.com/office/drawing/2017/decorative" val="1"/>
-              </a:ext>
-            </a:extLst>
-          </p:cNvPr>
-          <p:cNvSpPr>
-            <a:spLocks noGrp="1" noRot="1" noChangeAspect="1" noMove="1" noResize="1" noEditPoints="1" noAdjustHandles="1" noChangeArrowheads="1" noChangeShapeType="1" noTextEdit="1"/>
-          </p:cNvSpPr>
-          <p:nvPr>
-            <p:extLst>
-              <p:ext uri="{386F3935-93C4-4BCD-93E2-E3B085C9AB24}">
-                <p16:designElem xmlns:p16="http://schemas.microsoft.com/office/powerpoint/2015/main" val="1"/>
-              </p:ext>
-            </p:extLst>
-          </p:nvPr>
-        </p:nvSpPr>
-        <p:spPr>
-          <a:xfrm>
-            <a:off x="0" y="0"/>
-            <a:ext cx="12192000" cy="6858000"/>
-          </a:xfrm>
-          <a:prstGeom prst="rect">
-            <a:avLst/>
-          </a:prstGeom>
-          <a:solidFill>
-            <a:schemeClr val="tx1"/>
-          </a:solidFill>
-          <a:ln>
-            <a:noFill/>
-          </a:ln>
-        </p:spPr>
-        <p:style>
-          <a:lnRef idx="2">
-            <a:schemeClr val="accent1">
-              <a:shade val="50000"/>
-            </a:schemeClr>
-          </a:lnRef>
-          <a:fillRef idx="1">
-            <a:schemeClr val="accent1"/>
-          </a:fillRef>
-          <a:effectRef idx="0">
-            <a:schemeClr val="accent1"/>
-          </a:effectRef>
-          <a:fontRef idx="minor">
-            <a:schemeClr val="lt1"/>
-          </a:fontRef>
-        </p:style>
-        <p:txBody>
-          <a:bodyPr rtlCol="0" anchor="ctr"/>
-          <a:lstStyle/>
-          <a:p>
-            <a:pPr algn="ctr"/>
-            <a:endParaRPr lang="en-US"/>
-          </a:p>
-        </p:txBody>
-      </p:sp>
-      <p:sp>
-        <p:nvSpPr>
-          <p:cNvPr id="98" name="Rectangle 97">
-            <a:extLst>
-              <a:ext uri="{FF2B5EF4-FFF2-40B4-BE49-F238E27FC236}">
-                <a16:creationId xmlns:a16="http://schemas.microsoft.com/office/drawing/2014/main" id="{7D2AF00E-D433-4047-863F-BCB69CEC3C35}"/>
-              </a:ext>
-              <a:ext uri="{C183D7F6-B498-43B3-948B-1728B52AA6E4}">
-                <adec:decorative xmlns:adec="http://schemas.microsoft.com/office/drawing/2017/decorative" val="1"/>
-              </a:ext>
-            </a:extLst>
-          </p:cNvPr>
-          <p:cNvSpPr>
-            <a:spLocks noGrp="1" noRot="1" noChangeAspect="1" noMove="1" noResize="1" noEditPoints="1" noAdjustHandles="1" noChangeArrowheads="1" noChangeShapeType="1" noTextEdit="1"/>
-          </p:cNvSpPr>
-          <p:nvPr>
-            <p:extLst>
-              <p:ext uri="{386F3935-93C4-4BCD-93E2-E3B085C9AB24}">
-                <p16:designElem xmlns:p16="http://schemas.microsoft.com/office/powerpoint/2015/main" val="1"/>
-              </p:ext>
-            </p:extLst>
-          </p:nvPr>
-        </p:nvSpPr>
-        <p:spPr>
-          <a:xfrm>
-            <a:off x="451588" y="601200"/>
-            <a:ext cx="7498616" cy="5789365"/>
-          </a:xfrm>
-          <a:prstGeom prst="rect">
-            <a:avLst/>
-          </a:prstGeom>
-          <a:solidFill>
-            <a:srgbClr val="465359"/>
-          </a:solidFill>
-          <a:ln>
-            <a:noFill/>
-          </a:ln>
-          <a:effectLst/>
-        </p:spPr>
-        <p:style>
-          <a:lnRef idx="1">
-            <a:schemeClr val="accent1"/>
-          </a:lnRef>
-          <a:fillRef idx="3">
-            <a:schemeClr val="accent1"/>
-          </a:fillRef>
-          <a:effectRef idx="2">
-            <a:schemeClr val="accent1"/>
-          </a:effectRef>
-          <a:fontRef idx="minor">
-            <a:schemeClr val="lt1"/>
-          </a:fontRef>
-        </p:style>
-        <p:txBody>
-          <a:bodyPr/>
-          <a:lstStyle/>
-          <a:p>
-            <a:endParaRPr lang="en-US"/>
-          </a:p>
-        </p:txBody>
-      </p:sp>
-      <p:sp>
-        <p:nvSpPr>
-          <p:cNvPr id="2" name="Title 1">
-            <a:extLst>
-              <a:ext uri="{FF2B5EF4-FFF2-40B4-BE49-F238E27FC236}">
-                <a16:creationId xmlns:a16="http://schemas.microsoft.com/office/drawing/2014/main" id="{F06B1E98-B9C9-B918-51BC-154E1DBCC268}"/>
-              </a:ext>
-            </a:extLst>
-          </p:cNvPr>
-          <p:cNvSpPr>
-            <a:spLocks noGrp="1"/>
-          </p:cNvSpPr>
-          <p:nvPr>
-            <p:ph type="title"/>
-          </p:nvPr>
-        </p:nvSpPr>
-        <p:spPr>
-          <a:xfrm>
-            <a:off x="807559" y="938022"/>
-            <a:ext cx="6647905" cy="1188720"/>
-          </a:xfrm>
-        </p:spPr>
-        <p:txBody>
-          <a:bodyPr vert="horz" lIns="91440" tIns="45720" rIns="91440" bIns="45720" rtlCol="0" anchor="b">
-            <a:normAutofit/>
-          </a:bodyPr>
-          <a:lstStyle/>
-          <a:p>
-            <a:r>
-              <a:rPr lang="en-US" sz="2800">
-                <a:solidFill>
-                  <a:srgbClr val="FFFFFF"/>
-                </a:solidFill>
-              </a:rPr>
-              <a:t>Questions?</a:t>
-            </a:r>
-          </a:p>
-        </p:txBody>
-      </p:sp>
-      <p:sp>
-        <p:nvSpPr>
-          <p:cNvPr id="100" name="Rectangle 99">
-            <a:extLst>
-              <a:ext uri="{FF2B5EF4-FFF2-40B4-BE49-F238E27FC236}">
-                <a16:creationId xmlns:a16="http://schemas.microsoft.com/office/drawing/2014/main" id="{0997DBEA-6DFC-457A-9850-E535053549D6}"/>
-              </a:ext>
-              <a:ext uri="{C183D7F6-B498-43B3-948B-1728B52AA6E4}">
-                <adec:decorative xmlns:adec="http://schemas.microsoft.com/office/drawing/2017/decorative" val="1"/>
-              </a:ext>
-            </a:extLst>
-          </p:cNvPr>
-          <p:cNvSpPr>
-            <a:spLocks noGrp="1" noRot="1" noChangeAspect="1" noMove="1" noResize="1" noEditPoints="1" noAdjustHandles="1" noChangeArrowheads="1" noChangeShapeType="1" noTextEdit="1"/>
-          </p:cNvSpPr>
-          <p:nvPr>
-            <p:extLst>
-              <p:ext uri="{386F3935-93C4-4BCD-93E2-E3B085C9AB24}">
-                <p16:designElem xmlns:p16="http://schemas.microsoft.com/office/powerpoint/2015/main" val="1"/>
-              </p:ext>
-            </p:extLst>
-          </p:nvPr>
-        </p:nvSpPr>
-        <p:spPr>
-          <a:xfrm>
-            <a:off x="446534" y="457200"/>
-            <a:ext cx="3703320" cy="94997"/>
-          </a:xfrm>
-          <a:prstGeom prst="rect">
-            <a:avLst/>
-          </a:prstGeom>
-          <a:solidFill>
-            <a:srgbClr val="465359"/>
-          </a:solidFill>
-          <a:ln>
-            <a:noFill/>
-          </a:ln>
-          <a:effectLst/>
-        </p:spPr>
-        <p:style>
-          <a:lnRef idx="1">
-            <a:schemeClr val="accent1"/>
-          </a:lnRef>
-          <a:fillRef idx="3">
-            <a:schemeClr val="accent1"/>
-          </a:fillRef>
-          <a:effectRef idx="2">
-            <a:schemeClr val="accent1"/>
-          </a:effectRef>
-          <a:fontRef idx="minor">
-            <a:schemeClr val="lt1"/>
-          </a:fontRef>
-        </p:style>
-        <p:txBody>
-          <a:bodyPr/>
-          <a:lstStyle/>
-          <a:p>
-            <a:endParaRPr lang="en-US"/>
-          </a:p>
-        </p:txBody>
-      </p:sp>
-      <p:sp>
-        <p:nvSpPr>
-          <p:cNvPr id="102" name="Rectangle 101">
-            <a:extLst>
-              <a:ext uri="{FF2B5EF4-FFF2-40B4-BE49-F238E27FC236}">
-                <a16:creationId xmlns:a16="http://schemas.microsoft.com/office/drawing/2014/main" id="{79446CF5-953A-4916-BFF4-F5558E5C2359}"/>
-              </a:ext>
-              <a:ext uri="{C183D7F6-B498-43B3-948B-1728B52AA6E4}">
-                <adec:decorative xmlns:adec="http://schemas.microsoft.com/office/drawing/2017/decorative" val="1"/>
-              </a:ext>
-            </a:extLst>
-          </p:cNvPr>
-          <p:cNvSpPr>
-            <a:spLocks noGrp="1" noRot="1" noChangeAspect="1" noMove="1" noResize="1" noEditPoints="1" noAdjustHandles="1" noChangeArrowheads="1" noChangeShapeType="1" noTextEdit="1"/>
-          </p:cNvSpPr>
-          <p:nvPr>
-            <p:extLst>
-              <p:ext uri="{386F3935-93C4-4BCD-93E2-E3B085C9AB24}">
-                <p16:designElem xmlns:p16="http://schemas.microsoft.com/office/powerpoint/2015/main" val="1"/>
-              </p:ext>
-            </p:extLst>
-          </p:nvPr>
-        </p:nvSpPr>
-        <p:spPr>
-          <a:xfrm>
-            <a:off x="4241830" y="457200"/>
-            <a:ext cx="3703320" cy="91440"/>
-          </a:xfrm>
-          <a:prstGeom prst="rect">
-            <a:avLst/>
-          </a:prstGeom>
-          <a:solidFill>
-            <a:schemeClr val="accent1"/>
-          </a:solidFill>
-          <a:ln>
-            <a:noFill/>
-          </a:ln>
-          <a:effectLst/>
-        </p:spPr>
-        <p:style>
-          <a:lnRef idx="1">
-            <a:schemeClr val="accent1"/>
-          </a:lnRef>
-          <a:fillRef idx="3">
-            <a:schemeClr val="accent1"/>
-          </a:fillRef>
-          <a:effectRef idx="2">
-            <a:schemeClr val="accent1"/>
-          </a:effectRef>
-          <a:fontRef idx="minor">
-            <a:schemeClr val="lt1"/>
-          </a:fontRef>
-        </p:style>
-        <p:txBody>
-          <a:bodyPr/>
-          <a:lstStyle/>
-          <a:p>
-            <a:endParaRPr lang="en-US"/>
-          </a:p>
-        </p:txBody>
-      </p:sp>
-      <p:sp>
-        <p:nvSpPr>
-          <p:cNvPr id="104" name="Rectangle 103">
-            <a:extLst>
-              <a:ext uri="{FF2B5EF4-FFF2-40B4-BE49-F238E27FC236}">
-                <a16:creationId xmlns:a16="http://schemas.microsoft.com/office/drawing/2014/main" id="{477B945C-B433-4DFF-9A67-A5C9257E471C}"/>
-              </a:ext>
-              <a:ext uri="{C183D7F6-B498-43B3-948B-1728B52AA6E4}">
-                <adec:decorative xmlns:adec="http://schemas.microsoft.com/office/drawing/2017/decorative" val="1"/>
-              </a:ext>
-            </a:extLst>
-          </p:cNvPr>
-          <p:cNvSpPr>
-            <a:spLocks noGrp="1" noRot="1" noChangeAspect="1" noMove="1" noResize="1" noEditPoints="1" noAdjustHandles="1" noChangeArrowheads="1" noChangeShapeType="1" noTextEdit="1"/>
-          </p:cNvSpPr>
-          <p:nvPr>
-            <p:extLst>
-              <p:ext uri="{386F3935-93C4-4BCD-93E2-E3B085C9AB24}">
-                <p16:designElem xmlns:p16="http://schemas.microsoft.com/office/powerpoint/2015/main" val="1"/>
-              </p:ext>
-            </p:extLst>
-          </p:nvPr>
-        </p:nvSpPr>
-        <p:spPr>
-          <a:xfrm>
-            <a:off x="8042147" y="453643"/>
-            <a:ext cx="3703320" cy="98554"/>
-          </a:xfrm>
-          <a:prstGeom prst="rect">
-            <a:avLst/>
-          </a:prstGeom>
-          <a:solidFill>
-            <a:srgbClr val="969FA7"/>
-          </a:solidFill>
-          <a:ln>
-            <a:noFill/>
-          </a:ln>
-          <a:effectLst/>
-        </p:spPr>
-        <p:style>
-          <a:lnRef idx="1">
-            <a:schemeClr val="accent1"/>
-          </a:lnRef>
-          <a:fillRef idx="3">
-            <a:schemeClr val="accent1"/>
-          </a:fillRef>
-          <a:effectRef idx="2">
-            <a:schemeClr val="accent1"/>
-          </a:effectRef>
-          <a:fontRef idx="minor">
-            <a:schemeClr val="lt1"/>
-          </a:fontRef>
-        </p:style>
-        <p:txBody>
-          <a:bodyPr/>
-          <a:lstStyle/>
-          <a:p>
-            <a:endParaRPr lang="en-US"/>
-          </a:p>
-        </p:txBody>
-      </p:sp>
-      <p:sp>
-        <p:nvSpPr>
-          <p:cNvPr id="3" name="TextBox 2">
-            <a:extLst>
-              <a:ext uri="{FF2B5EF4-FFF2-40B4-BE49-F238E27FC236}">
-                <a16:creationId xmlns:a16="http://schemas.microsoft.com/office/drawing/2014/main" id="{D5D51A80-8BF3-5444-B770-60636C05F9DB}"/>
-              </a:ext>
-            </a:extLst>
-          </p:cNvPr>
-          <p:cNvSpPr txBox="1"/>
-          <p:nvPr/>
-        </p:nvSpPr>
-        <p:spPr>
-          <a:xfrm>
-            <a:off x="807559" y="2340864"/>
-            <a:ext cx="6690843" cy="3793237"/>
-          </a:xfrm>
-          <a:prstGeom prst="rect">
-            <a:avLst/>
-          </a:prstGeom>
-        </p:spPr>
-        <p:txBody>
-          <a:bodyPr vert="horz" lIns="91440" tIns="45720" rIns="91440" bIns="45720" rtlCol="0" anchor="ctr">
-            <a:normAutofit/>
-          </a:bodyPr>
-          <a:lstStyle/>
-          <a:p>
-            <a:pPr defTabSz="457200">
-              <a:spcBef>
-                <a:spcPct val="20000"/>
-              </a:spcBef>
-              <a:spcAft>
-                <a:spcPts val="600"/>
-              </a:spcAft>
-              <a:buClr>
-                <a:schemeClr val="accent1"/>
-              </a:buClr>
-              <a:buSzPct val="92000"/>
-            </a:pPr>
-            <a:r>
-              <a:rPr lang="en-US" dirty="0">
-                <a:solidFill>
-                  <a:srgbClr val="FFFFFF"/>
-                </a:solidFill>
-              </a:rPr>
-              <a:t>Thank you for your time!</a:t>
-            </a:r>
-          </a:p>
-          <a:p>
-            <a:pPr defTabSz="457200">
-              <a:spcBef>
-                <a:spcPct val="20000"/>
-              </a:spcBef>
-              <a:spcAft>
-                <a:spcPts val="600"/>
-              </a:spcAft>
-              <a:buClr>
-                <a:schemeClr val="accent1"/>
-              </a:buClr>
-              <a:buSzPct val="92000"/>
-            </a:pPr>
-            <a:r>
-              <a:rPr lang="en-US" dirty="0">
-                <a:solidFill>
-                  <a:srgbClr val="FFFFFF"/>
-                </a:solidFill>
-              </a:rPr>
-              <a:t>Please feel free to reach out with any follow-up questions</a:t>
-            </a:r>
-          </a:p>
-          <a:p>
-            <a:pPr defTabSz="457200">
-              <a:spcBef>
-                <a:spcPct val="20000"/>
-              </a:spcBef>
-              <a:spcAft>
-                <a:spcPts val="600"/>
-              </a:spcAft>
-              <a:buClr>
-                <a:schemeClr val="accent1"/>
-              </a:buClr>
-              <a:buSzPct val="92000"/>
-            </a:pPr>
-            <a:endParaRPr lang="en-US" dirty="0">
-              <a:solidFill>
-                <a:srgbClr val="FFFFFF"/>
-              </a:solidFill>
-            </a:endParaRPr>
-          </a:p>
-          <a:p>
-            <a:pPr defTabSz="457200">
-              <a:spcBef>
-                <a:spcPct val="20000"/>
-              </a:spcBef>
-              <a:spcAft>
-                <a:spcPts val="600"/>
-              </a:spcAft>
-              <a:buClr>
-                <a:schemeClr val="accent1"/>
-              </a:buClr>
-              <a:buSzPct val="92000"/>
-            </a:pPr>
-            <a:r>
-              <a:rPr lang="en-US" dirty="0">
-                <a:solidFill>
-                  <a:srgbClr val="FFFFFF"/>
-                </a:solidFill>
-              </a:rPr>
-              <a:t>Contact Info:</a:t>
-            </a:r>
-          </a:p>
-          <a:p>
-            <a:pPr defTabSz="457200">
-              <a:spcBef>
-                <a:spcPct val="20000"/>
-              </a:spcBef>
-              <a:spcAft>
-                <a:spcPts val="600"/>
-              </a:spcAft>
-              <a:buClr>
-                <a:schemeClr val="accent1"/>
-              </a:buClr>
-              <a:buSzPct val="92000"/>
-            </a:pPr>
-            <a:r>
-              <a:rPr lang="en-US" dirty="0">
-                <a:solidFill>
-                  <a:srgbClr val="FFFFFF"/>
-                </a:solidFill>
-              </a:rPr>
-              <a:t>Erica Henley</a:t>
-            </a:r>
-          </a:p>
-          <a:p>
-            <a:pPr defTabSz="457200">
-              <a:spcBef>
-                <a:spcPct val="20000"/>
-              </a:spcBef>
-              <a:spcAft>
-                <a:spcPts val="600"/>
-              </a:spcAft>
-              <a:buClr>
-                <a:schemeClr val="accent1"/>
-              </a:buClr>
-              <a:buSzPct val="92000"/>
-            </a:pPr>
-            <a:r>
-              <a:rPr lang="en-US" dirty="0">
-                <a:solidFill>
-                  <a:srgbClr val="FFFFFF"/>
-                </a:solidFill>
-              </a:rPr>
-              <a:t>henley.er@gmail.com</a:t>
-            </a:r>
-          </a:p>
-          <a:p>
-            <a:pPr defTabSz="457200">
-              <a:spcBef>
-                <a:spcPct val="20000"/>
-              </a:spcBef>
-              <a:spcAft>
-                <a:spcPts val="600"/>
-              </a:spcAft>
-              <a:buClr>
-                <a:schemeClr val="accent1"/>
-              </a:buClr>
-              <a:buSzPct val="92000"/>
-            </a:pPr>
-            <a:r>
-              <a:rPr lang="en-US" dirty="0">
-                <a:solidFill>
-                  <a:srgbClr val="FFFFFF"/>
-                </a:solidFill>
-              </a:rPr>
-              <a:t>870-560-8192</a:t>
-            </a:r>
-          </a:p>
-        </p:txBody>
-      </p:sp>
-      <p:pic>
-        <p:nvPicPr>
-          <p:cNvPr id="20" name="Graphic 19" descr="Question mark">
-            <a:extLst>
-              <a:ext uri="{FF2B5EF4-FFF2-40B4-BE49-F238E27FC236}">
-                <a16:creationId xmlns:a16="http://schemas.microsoft.com/office/drawing/2014/main" id="{3C1CB461-ECED-48F4-BE1D-66E16AF92F07}"/>
-              </a:ext>
-            </a:extLst>
-          </p:cNvPr>
-          <p:cNvPicPr>
-            <a:picLocks noChangeAspect="1"/>
-          </p:cNvPicPr>
-          <p:nvPr/>
-        </p:nvPicPr>
-        <p:blipFill>
-          <a:blip r:embed="rId2">
-            <a:extLst>
-              <a:ext uri="{28A0092B-C50C-407E-A947-70E740481C1C}">
-                <a14:useLocalDpi xmlns:a14="http://schemas.microsoft.com/office/drawing/2010/main" val="0"/>
-              </a:ext>
-              <a:ext uri="{96DAC541-7B7A-43D3-8B79-37D633B846F1}">
-                <asvg:svgBlip xmlns:asvg="http://schemas.microsoft.com/office/drawing/2016/SVG/main" r:embed="rId3"/>
-              </a:ext>
-            </a:extLst>
-          </a:blip>
-          <a:stretch>
-            <a:fillRect/>
-          </a:stretch>
-        </p:blipFill>
-        <p:spPr>
-          <a:xfrm>
-            <a:off x="8476761" y="2049354"/>
-            <a:ext cx="3053422" cy="3053422"/>
-          </a:xfrm>
-          <a:prstGeom prst="rect">
-            <a:avLst/>
-          </a:prstGeom>
-        </p:spPr>
-      </p:pic>
-    </p:spTree>
-    <p:extLst>
-      <p:ext uri="{BB962C8B-B14F-4D97-AF65-F5344CB8AC3E}">
-        <p14:creationId xmlns:p14="http://schemas.microsoft.com/office/powerpoint/2010/main" val="2936329483"/>
-      </p:ext>
-    </p:extLst>
-  </p:cSld>
-  <p:clrMapOvr>
-    <a:overrideClrMapping bg1="dk1" tx1="lt1" bg2="dk2" tx2="lt2" accent1="accent1" accent2="accent2" accent3="accent3" accent4="accent4" accent5="accent5" accent6="accent6" hlink="hlink" folHlink="folHlink"/>
-  </p:clrMapOvr>
-</p:sld>
-</file>
-
-<file path=ppt/slides/slide2.xml><?xml version="1.0" encoding="utf-8"?>
-<p:sld xmlns:a="http://schemas.openxmlformats.org/drawingml/2006/main" xmlns:r="http://schemas.openxmlformats.org/officeDocument/2006/relationships" xmlns:p="http://schemas.openxmlformats.org/presentationml/2006/main">
-  <p:cSld>
-    <p:bg>
-      <p:bgPr>
-        <a:solidFill>
-          <a:schemeClr val="bg1"/>
-        </a:solidFill>
-        <a:effectLst/>
-      </p:bgPr>
-    </p:bg>
-    <p:spTree>
-      <p:nvGrpSpPr>
-        <p:cNvPr id="1" name=""/>
-        <p:cNvGrpSpPr/>
-        <p:nvPr/>
-      </p:nvGrpSpPr>
-      <p:grpSpPr>
-        <a:xfrm>
-          <a:off x="0" y="0"/>
-          <a:ext cx="0" cy="0"/>
-          <a:chOff x="0" y="0"/>
-          <a:chExt cx="0" cy="0"/>
-        </a:xfrm>
-      </p:grpSpPr>
-      <p:sp>
-        <p:nvSpPr>
-          <p:cNvPr id="20" name="Rectangle 19">
-            <a:extLst>
-              <a:ext uri="{FF2B5EF4-FFF2-40B4-BE49-F238E27FC236}">
-                <a16:creationId xmlns:a16="http://schemas.microsoft.com/office/drawing/2014/main" id="{BFABBCE0-E08C-4BBE-9FD2-E2B253D4D5F2}"/>
-              </a:ext>
-              <a:ext uri="{C183D7F6-B498-43B3-948B-1728B52AA6E4}">
-                <adec:decorative xmlns:adec="http://schemas.microsoft.com/office/drawing/2017/decorative" val="1"/>
-              </a:ext>
-            </a:extLst>
-          </p:cNvPr>
-          <p:cNvSpPr>
-            <a:spLocks noGrp="1" noRot="1" noChangeAspect="1" noMove="1" noResize="1" noEditPoints="1" noAdjustHandles="1" noChangeArrowheads="1" noChangeShapeType="1" noTextEdit="1"/>
-          </p:cNvSpPr>
-          <p:nvPr>
-            <p:extLst>
-              <p:ext uri="{386F3935-93C4-4BCD-93E2-E3B085C9AB24}">
-                <p16:designElem xmlns:p16="http://schemas.microsoft.com/office/powerpoint/2015/main" val="1"/>
-              </p:ext>
-            </p:extLst>
-          </p:nvPr>
-        </p:nvSpPr>
-        <p:spPr>
-          <a:xfrm>
-            <a:off x="0" y="0"/>
-            <a:ext cx="12192000" cy="6857999"/>
-          </a:xfrm>
-          <a:prstGeom prst="rect">
-            <a:avLst/>
-          </a:prstGeom>
-          <a:solidFill>
-            <a:schemeClr val="bg1">
-              <a:lumMod val="75000"/>
-              <a:lumOff val="25000"/>
-            </a:schemeClr>
-          </a:solidFill>
-          <a:ln>
-            <a:noFill/>
-          </a:ln>
-        </p:spPr>
-        <p:style>
-          <a:lnRef idx="2">
-            <a:schemeClr val="accent1">
-              <a:shade val="50000"/>
-            </a:schemeClr>
-          </a:lnRef>
-          <a:fillRef idx="1">
-            <a:schemeClr val="accent1"/>
-          </a:fillRef>
-          <a:effectRef idx="0">
-            <a:schemeClr val="accent1"/>
-          </a:effectRef>
-          <a:fontRef idx="minor">
-            <a:schemeClr val="lt1"/>
-          </a:fontRef>
-        </p:style>
-        <p:txBody>
-          <a:bodyPr rtlCol="0" anchor="ctr"/>
-          <a:lstStyle/>
-          <a:p>
-            <a:pPr marL="0" marR="0" lvl="0" indent="0" algn="ctr" defTabSz="457200" rtl="0" eaLnBrk="1" fontAlgn="auto" latinLnBrk="0" hangingPunct="1">
-              <a:lnSpc>
-                <a:spcPct val="100000"/>
-              </a:lnSpc>
-              <a:spcBef>
-                <a:spcPts val="0"/>
-              </a:spcBef>
-              <a:spcAft>
-                <a:spcPts val="0"/>
-              </a:spcAft>
-              <a:buClrTx/>
-              <a:buSzTx/>
-              <a:buFontTx/>
-              <a:buNone/>
-              <a:tabLst/>
-              <a:defRPr/>
-            </a:pPr>
-            <a:endParaRPr kumimoji="0" lang="en-US" sz="1800" b="0" i="0" u="none" strike="noStrike" kern="1200" cap="none" spc="0" normalizeH="0" baseline="0" noProof="0">
-              <a:ln>
-                <a:noFill/>
-              </a:ln>
-              <a:solidFill>
-                <a:prstClr val="white"/>
-              </a:solidFill>
-              <a:effectLst/>
-              <a:uLnTx/>
-              <a:uFillTx/>
-              <a:latin typeface="Gill Sans MT" panose="020B0502020104020203"/>
-              <a:ea typeface="+mn-ea"/>
-              <a:cs typeface="+mn-cs"/>
-            </a:endParaRPr>
-          </a:p>
-        </p:txBody>
-      </p:sp>
-      <p:sp>
-        <p:nvSpPr>
-          <p:cNvPr id="2" name="Title 1">
-            <a:extLst>
-              <a:ext uri="{FF2B5EF4-FFF2-40B4-BE49-F238E27FC236}">
-                <a16:creationId xmlns:a16="http://schemas.microsoft.com/office/drawing/2014/main" id="{FEFE0BA4-9678-F095-3217-56F61AF64BD2}"/>
-              </a:ext>
-            </a:extLst>
-          </p:cNvPr>
-          <p:cNvSpPr>
-            <a:spLocks noGrp="1"/>
-          </p:cNvSpPr>
-          <p:nvPr>
-            <p:ph type="title"/>
-          </p:nvPr>
-        </p:nvSpPr>
-        <p:spPr>
-          <a:xfrm>
-            <a:off x="581192" y="702156"/>
-            <a:ext cx="11029616" cy="1188720"/>
-          </a:xfrm>
-        </p:spPr>
-        <p:txBody>
-          <a:bodyPr>
-            <a:normAutofit/>
-          </a:bodyPr>
-          <a:lstStyle/>
-          <a:p>
-            <a:r>
-              <a:rPr lang="en-US">
-                <a:solidFill>
-                  <a:schemeClr val="tx1">
-                    <a:lumMod val="85000"/>
-                    <a:lumOff val="15000"/>
-                  </a:schemeClr>
-                </a:solidFill>
-              </a:rPr>
-              <a:t>About the project</a:t>
-            </a:r>
-          </a:p>
-        </p:txBody>
-      </p:sp>
-      <p:sp>
-        <p:nvSpPr>
-          <p:cNvPr id="22" name="Rectangle 21">
-            <a:extLst>
-              <a:ext uri="{FF2B5EF4-FFF2-40B4-BE49-F238E27FC236}">
-                <a16:creationId xmlns:a16="http://schemas.microsoft.com/office/drawing/2014/main" id="{FF426BAC-43D6-468E-B6FF-167034D5CE43}"/>
-              </a:ext>
-              <a:ext uri="{C183D7F6-B498-43B3-948B-1728B52AA6E4}">
-                <adec:decorative xmlns:adec="http://schemas.microsoft.com/office/drawing/2017/decorative" val="1"/>
-              </a:ext>
-            </a:extLst>
-          </p:cNvPr>
-          <p:cNvSpPr>
-            <a:spLocks noGrp="1" noRot="1" noChangeAspect="1" noMove="1" noResize="1" noEditPoints="1" noAdjustHandles="1" noChangeArrowheads="1" noChangeShapeType="1" noTextEdit="1"/>
-          </p:cNvSpPr>
-          <p:nvPr>
-            <p:extLst>
-              <p:ext uri="{386F3935-93C4-4BCD-93E2-E3B085C9AB24}">
-                <p16:designElem xmlns:p16="http://schemas.microsoft.com/office/powerpoint/2015/main" val="1"/>
-              </p:ext>
-            </p:extLst>
-          </p:nvPr>
-        </p:nvSpPr>
-        <p:spPr>
-          <a:xfrm>
-            <a:off x="446534" y="457200"/>
-            <a:ext cx="3703320" cy="94997"/>
-          </a:xfrm>
-          <a:prstGeom prst="rect">
-            <a:avLst/>
-          </a:prstGeom>
-          <a:solidFill>
-            <a:srgbClr val="60727A"/>
-          </a:solidFill>
-          <a:ln>
-            <a:noFill/>
-          </a:ln>
-          <a:effectLst/>
-        </p:spPr>
-        <p:style>
-          <a:lnRef idx="1">
-            <a:schemeClr val="accent1"/>
-          </a:lnRef>
-          <a:fillRef idx="3">
-            <a:schemeClr val="accent1"/>
-          </a:fillRef>
-          <a:effectRef idx="2">
-            <a:schemeClr val="accent1"/>
-          </a:effectRef>
-          <a:fontRef idx="minor">
-            <a:schemeClr val="lt1"/>
-          </a:fontRef>
-        </p:style>
-        <p:txBody>
-          <a:bodyPr/>
-          <a:lstStyle/>
-          <a:p>
-            <a:endParaRPr lang="en-US"/>
-          </a:p>
-        </p:txBody>
-      </p:sp>
-      <p:sp>
-        <p:nvSpPr>
-          <p:cNvPr id="24" name="Rectangle 23">
-            <a:extLst>
-              <a:ext uri="{FF2B5EF4-FFF2-40B4-BE49-F238E27FC236}">
-                <a16:creationId xmlns:a16="http://schemas.microsoft.com/office/drawing/2014/main" id="{FB02D80E-5995-4C54-8387-5893C2C89473}"/>
-              </a:ext>
-              <a:ext uri="{C183D7F6-B498-43B3-948B-1728B52AA6E4}">
-                <adec:decorative xmlns:adec="http://schemas.microsoft.com/office/drawing/2017/decorative" val="1"/>
-              </a:ext>
-            </a:extLst>
-          </p:cNvPr>
-          <p:cNvSpPr>
-            <a:spLocks noGrp="1" noRot="1" noChangeAspect="1" noMove="1" noResize="1" noEditPoints="1" noAdjustHandles="1" noChangeArrowheads="1" noChangeShapeType="1" noTextEdit="1"/>
-          </p:cNvSpPr>
-          <p:nvPr>
-            <p:extLst>
-              <p:ext uri="{386F3935-93C4-4BCD-93E2-E3B085C9AB24}">
-                <p16:designElem xmlns:p16="http://schemas.microsoft.com/office/powerpoint/2015/main" val="1"/>
-              </p:ext>
-            </p:extLst>
-          </p:nvPr>
-        </p:nvSpPr>
-        <p:spPr>
-          <a:xfrm>
-            <a:off x="4241830" y="457200"/>
-            <a:ext cx="3703320" cy="91440"/>
-          </a:xfrm>
-          <a:prstGeom prst="rect">
-            <a:avLst/>
-          </a:prstGeom>
-          <a:solidFill>
-            <a:schemeClr val="accent1"/>
-          </a:solidFill>
-          <a:ln>
-            <a:noFill/>
-          </a:ln>
-          <a:effectLst/>
-        </p:spPr>
-        <p:style>
-          <a:lnRef idx="1">
-            <a:schemeClr val="accent1"/>
-          </a:lnRef>
-          <a:fillRef idx="3">
-            <a:schemeClr val="accent1"/>
-          </a:fillRef>
-          <a:effectRef idx="2">
-            <a:schemeClr val="accent1"/>
-          </a:effectRef>
-          <a:fontRef idx="minor">
-            <a:schemeClr val="lt1"/>
-          </a:fontRef>
-        </p:style>
-        <p:txBody>
-          <a:bodyPr/>
-          <a:lstStyle/>
-          <a:p>
-            <a:endParaRPr lang="en-US"/>
-          </a:p>
-        </p:txBody>
-      </p:sp>
-      <p:sp>
-        <p:nvSpPr>
-          <p:cNvPr id="26" name="Rectangle 25">
-            <a:extLst>
-              <a:ext uri="{FF2B5EF4-FFF2-40B4-BE49-F238E27FC236}">
-                <a16:creationId xmlns:a16="http://schemas.microsoft.com/office/drawing/2014/main" id="{896083C8-1401-4950-AF56-E2FAFE42D656}"/>
-              </a:ext>
-              <a:ext uri="{C183D7F6-B498-43B3-948B-1728B52AA6E4}">
-                <adec:decorative xmlns:adec="http://schemas.microsoft.com/office/drawing/2017/decorative" val="1"/>
-              </a:ext>
-            </a:extLst>
-          </p:cNvPr>
-          <p:cNvSpPr>
-            <a:spLocks noGrp="1" noRot="1" noChangeAspect="1" noMove="1" noResize="1" noEditPoints="1" noAdjustHandles="1" noChangeArrowheads="1" noChangeShapeType="1" noTextEdit="1"/>
-          </p:cNvSpPr>
-          <p:nvPr>
-            <p:extLst>
-              <p:ext uri="{386F3935-93C4-4BCD-93E2-E3B085C9AB24}">
-                <p16:designElem xmlns:p16="http://schemas.microsoft.com/office/powerpoint/2015/main" val="1"/>
-              </p:ext>
-            </p:extLst>
-          </p:nvPr>
-        </p:nvSpPr>
-        <p:spPr>
-          <a:xfrm>
-            <a:off x="8042147" y="453643"/>
-            <a:ext cx="3703320" cy="98554"/>
-          </a:xfrm>
-          <a:prstGeom prst="rect">
-            <a:avLst/>
-          </a:prstGeom>
-          <a:solidFill>
-            <a:srgbClr val="969FA7"/>
-          </a:solidFill>
-          <a:ln>
-            <a:noFill/>
-          </a:ln>
-          <a:effectLst/>
-        </p:spPr>
-        <p:style>
-          <a:lnRef idx="1">
-            <a:schemeClr val="accent1"/>
-          </a:lnRef>
-          <a:fillRef idx="3">
-            <a:schemeClr val="accent1"/>
-          </a:fillRef>
-          <a:effectRef idx="2">
-            <a:schemeClr val="accent1"/>
-          </a:effectRef>
-          <a:fontRef idx="minor">
-            <a:schemeClr val="lt1"/>
-          </a:fontRef>
-        </p:style>
-        <p:txBody>
-          <a:bodyPr/>
-          <a:lstStyle/>
-          <a:p>
-            <a:endParaRPr lang="en-US"/>
-          </a:p>
-        </p:txBody>
-      </p:sp>
-      <p:graphicFrame>
-        <p:nvGraphicFramePr>
-          <p:cNvPr id="5" name="Content Placeholder 2">
-            <a:extLst>
-              <a:ext uri="{FF2B5EF4-FFF2-40B4-BE49-F238E27FC236}">
-                <a16:creationId xmlns:a16="http://schemas.microsoft.com/office/drawing/2014/main" id="{3FCD7204-BFB7-2BAA-B9EC-145B02CC73B6}"/>
-              </a:ext>
-            </a:extLst>
-          </p:cNvPr>
-          <p:cNvGraphicFramePr>
-            <a:graphicFrameLocks noGrp="1"/>
-          </p:cNvGraphicFramePr>
-          <p:nvPr>
-            <p:ph idx="1"/>
-            <p:extLst>
-              <p:ext uri="{D42A27DB-BD31-4B8C-83A1-F6EECF244321}">
-                <p14:modId xmlns:p14="http://schemas.microsoft.com/office/powerpoint/2010/main" val="1870561451"/>
-              </p:ext>
-            </p:extLst>
-          </p:nvPr>
-        </p:nvGraphicFramePr>
-        <p:xfrm>
-          <a:off x="581025" y="2341563"/>
-          <a:ext cx="11029950" cy="3814281"/>
-        </p:xfrm>
-        <a:graphic>
-          <a:graphicData uri="http://schemas.openxmlformats.org/drawingml/2006/diagram">
-            <dgm:relIds xmlns:dgm="http://schemas.openxmlformats.org/drawingml/2006/diagram" xmlns:r="http://schemas.openxmlformats.org/officeDocument/2006/relationships" r:dm="rId3" r:lo="rId4" r:qs="rId5" r:cs="rId6"/>
-          </a:graphicData>
-        </a:graphic>
-      </p:graphicFrame>
-    </p:spTree>
-    <p:extLst>
-      <p:ext uri="{BB962C8B-B14F-4D97-AF65-F5344CB8AC3E}">
-        <p14:creationId xmlns:p14="http://schemas.microsoft.com/office/powerpoint/2010/main" val="2879480226"/>
-      </p:ext>
-    </p:extLst>
-  </p:cSld>
-  <p:clrMapOvr>
-    <a:overrideClrMapping bg1="dk1" tx1="lt1" bg2="dk2" tx2="lt2" accent1="accent1" accent2="accent2" accent3="accent3" accent4="accent4" accent5="accent5" accent6="accent6" hlink="hlink" folHlink="folHlink"/>
-  </p:clrMapOvr>
-</p:sld>
-</file>
-
-<file path=ppt/slides/slide3.xml><?xml version="1.0" encoding="utf-8"?>
-<p:sld xmlns:a="http://schemas.openxmlformats.org/drawingml/2006/main" xmlns:r="http://schemas.openxmlformats.org/officeDocument/2006/relationships" xmlns:p="http://schemas.openxmlformats.org/presentationml/2006/main">
-  <p:cSld>
-    <p:bg>
-      <p:bgPr>
-        <a:solidFill>
-          <a:schemeClr val="bg1"/>
-        </a:solidFill>
-        <a:effectLst/>
-      </p:bgPr>
-    </p:bg>
-    <p:spTree>
-      <p:nvGrpSpPr>
-        <p:cNvPr id="1" name=""/>
-        <p:cNvGrpSpPr/>
-        <p:nvPr/>
-      </p:nvGrpSpPr>
-      <p:grpSpPr>
-        <a:xfrm>
-          <a:off x="0" y="0"/>
-          <a:ext cx="0" cy="0"/>
-          <a:chOff x="0" y="0"/>
-          <a:chExt cx="0" cy="0"/>
-        </a:xfrm>
-      </p:grpSpPr>
-      <p:sp>
-        <p:nvSpPr>
-          <p:cNvPr id="23" name="Rectangle 22">
-            <a:extLst>
-              <a:ext uri="{FF2B5EF4-FFF2-40B4-BE49-F238E27FC236}">
-                <a16:creationId xmlns:a16="http://schemas.microsoft.com/office/drawing/2014/main" id="{E9751CB9-7B25-4EB8-9A6F-82F822549F12}"/>
-              </a:ext>
-              <a:ext uri="{C183D7F6-B498-43B3-948B-1728B52AA6E4}">
-                <adec:decorative xmlns:adec="http://schemas.microsoft.com/office/drawing/2017/decorative" val="1"/>
-              </a:ext>
-            </a:extLst>
-          </p:cNvPr>
-          <p:cNvSpPr>
-            <a:spLocks noGrp="1" noRot="1" noChangeAspect="1" noMove="1" noResize="1" noEditPoints="1" noAdjustHandles="1" noChangeArrowheads="1" noChangeShapeType="1" noTextEdit="1"/>
-          </p:cNvSpPr>
-          <p:nvPr>
-            <p:extLst>
-              <p:ext uri="{386F3935-93C4-4BCD-93E2-E3B085C9AB24}">
-                <p16:designElem xmlns:p16="http://schemas.microsoft.com/office/powerpoint/2015/main" val="1"/>
-              </p:ext>
-            </p:extLst>
-          </p:nvPr>
-        </p:nvSpPr>
-        <p:spPr>
-          <a:xfrm>
-            <a:off x="0" y="0"/>
-            <a:ext cx="12192000" cy="6858000"/>
-          </a:xfrm>
-          <a:prstGeom prst="rect">
-            <a:avLst/>
-          </a:prstGeom>
-          <a:solidFill>
-            <a:srgbClr val="FFFFFF"/>
-          </a:solidFill>
-          <a:ln>
-            <a:noFill/>
-          </a:ln>
-        </p:spPr>
-        <p:style>
-          <a:lnRef idx="2">
-            <a:schemeClr val="accent1">
-              <a:shade val="50000"/>
-            </a:schemeClr>
-          </a:lnRef>
-          <a:fillRef idx="1">
-            <a:schemeClr val="accent1"/>
-          </a:fillRef>
-          <a:effectRef idx="0">
-            <a:schemeClr val="accent1"/>
-          </a:effectRef>
-          <a:fontRef idx="minor">
-            <a:schemeClr val="lt1"/>
-          </a:fontRef>
-        </p:style>
-        <p:txBody>
-          <a:bodyPr rtlCol="0" anchor="ctr"/>
-          <a:lstStyle/>
-          <a:p>
-            <a:pPr algn="ctr"/>
-            <a:endParaRPr lang="en-US"/>
-          </a:p>
-        </p:txBody>
-      </p:sp>
-      <p:sp>
-        <p:nvSpPr>
-          <p:cNvPr id="25" name="Rectangle 24">
-            <a:extLst>
-              <a:ext uri="{FF2B5EF4-FFF2-40B4-BE49-F238E27FC236}">
-                <a16:creationId xmlns:a16="http://schemas.microsoft.com/office/drawing/2014/main" id="{E1317383-CF3B-4B02-9512-BECBEF6362A4}"/>
-              </a:ext>
-              <a:ext uri="{C183D7F6-B498-43B3-948B-1728B52AA6E4}">
-                <adec:decorative xmlns:adec="http://schemas.microsoft.com/office/drawing/2017/decorative" val="1"/>
-              </a:ext>
-            </a:extLst>
-          </p:cNvPr>
-          <p:cNvSpPr>
-            <a:spLocks noGrp="1" noRot="1" noChangeAspect="1" noMove="1" noResize="1" noEditPoints="1" noAdjustHandles="1" noChangeArrowheads="1" noChangeShapeType="1" noTextEdit="1"/>
-          </p:cNvSpPr>
-          <p:nvPr>
-            <p:extLst>
-              <p:ext uri="{386F3935-93C4-4BCD-93E2-E3B085C9AB24}">
-                <p16:designElem xmlns:p16="http://schemas.microsoft.com/office/powerpoint/2015/main" val="1"/>
-              </p:ext>
-            </p:extLst>
-          </p:nvPr>
-        </p:nvSpPr>
-        <p:spPr>
-          <a:xfrm>
-            <a:off x="446534" y="457200"/>
-            <a:ext cx="3703320" cy="94997"/>
-          </a:xfrm>
-          <a:prstGeom prst="rect">
-            <a:avLst/>
-          </a:prstGeom>
-          <a:solidFill>
-            <a:srgbClr val="465359"/>
-          </a:solidFill>
-          <a:ln>
-            <a:noFill/>
-          </a:ln>
-          <a:effectLst/>
-        </p:spPr>
-        <p:style>
-          <a:lnRef idx="1">
-            <a:schemeClr val="accent1"/>
-          </a:lnRef>
-          <a:fillRef idx="3">
-            <a:schemeClr val="accent1"/>
-          </a:fillRef>
-          <a:effectRef idx="2">
-            <a:schemeClr val="accent1"/>
-          </a:effectRef>
-          <a:fontRef idx="minor">
-            <a:schemeClr val="lt1"/>
-          </a:fontRef>
-        </p:style>
-        <p:txBody>
-          <a:bodyPr/>
-          <a:lstStyle/>
-          <a:p>
-            <a:endParaRPr lang="en-US"/>
-          </a:p>
-        </p:txBody>
-      </p:sp>
-      <p:sp>
-        <p:nvSpPr>
-          <p:cNvPr id="27" name="Rectangle 26">
-            <a:extLst>
-              <a:ext uri="{FF2B5EF4-FFF2-40B4-BE49-F238E27FC236}">
-                <a16:creationId xmlns:a16="http://schemas.microsoft.com/office/drawing/2014/main" id="{B1D4C7A0-6DF2-4F2D-A45D-F111582974C7}"/>
-              </a:ext>
-              <a:ext uri="{C183D7F6-B498-43B3-948B-1728B52AA6E4}">
-                <adec:decorative xmlns:adec="http://schemas.microsoft.com/office/drawing/2017/decorative" val="1"/>
-              </a:ext>
-            </a:extLst>
-          </p:cNvPr>
-          <p:cNvSpPr>
-            <a:spLocks noGrp="1" noRot="1" noChangeAspect="1" noMove="1" noResize="1" noEditPoints="1" noAdjustHandles="1" noChangeArrowheads="1" noChangeShapeType="1" noTextEdit="1"/>
-          </p:cNvSpPr>
-          <p:nvPr>
-            <p:extLst>
-              <p:ext uri="{386F3935-93C4-4BCD-93E2-E3B085C9AB24}">
-                <p16:designElem xmlns:p16="http://schemas.microsoft.com/office/powerpoint/2015/main" val="1"/>
-              </p:ext>
-            </p:extLst>
-          </p:nvPr>
-        </p:nvSpPr>
-        <p:spPr>
-          <a:xfrm>
-            <a:off x="4241830" y="457200"/>
-            <a:ext cx="3703320" cy="91440"/>
-          </a:xfrm>
-          <a:prstGeom prst="rect">
-            <a:avLst/>
-          </a:prstGeom>
-          <a:solidFill>
-            <a:schemeClr val="accent1"/>
-          </a:solidFill>
-          <a:ln>
-            <a:noFill/>
-          </a:ln>
-          <a:effectLst/>
-        </p:spPr>
-        <p:style>
-          <a:lnRef idx="1">
-            <a:schemeClr val="accent1"/>
-          </a:lnRef>
-          <a:fillRef idx="3">
-            <a:schemeClr val="accent1"/>
-          </a:fillRef>
-          <a:effectRef idx="2">
-            <a:schemeClr val="accent1"/>
-          </a:effectRef>
-          <a:fontRef idx="minor">
-            <a:schemeClr val="lt1"/>
-          </a:fontRef>
-        </p:style>
-        <p:txBody>
-          <a:bodyPr/>
-          <a:lstStyle/>
-          <a:p>
-            <a:endParaRPr lang="en-US"/>
-          </a:p>
-        </p:txBody>
-      </p:sp>
-      <p:sp>
-        <p:nvSpPr>
-          <p:cNvPr id="29" name="Rectangle 28">
-            <a:extLst>
-              <a:ext uri="{FF2B5EF4-FFF2-40B4-BE49-F238E27FC236}">
-                <a16:creationId xmlns:a16="http://schemas.microsoft.com/office/drawing/2014/main" id="{DBF3943D-BCB6-4B31-809D-A005686483B4}"/>
-              </a:ext>
-              <a:ext uri="{C183D7F6-B498-43B3-948B-1728B52AA6E4}">
-                <adec:decorative xmlns:adec="http://schemas.microsoft.com/office/drawing/2017/decorative" val="1"/>
-              </a:ext>
-            </a:extLst>
-          </p:cNvPr>
-          <p:cNvSpPr>
-            <a:spLocks noGrp="1" noRot="1" noChangeAspect="1" noMove="1" noResize="1" noEditPoints="1" noAdjustHandles="1" noChangeArrowheads="1" noChangeShapeType="1" noTextEdit="1"/>
-          </p:cNvSpPr>
-          <p:nvPr>
-            <p:extLst>
-              <p:ext uri="{386F3935-93C4-4BCD-93E2-E3B085C9AB24}">
-                <p16:designElem xmlns:p16="http://schemas.microsoft.com/office/powerpoint/2015/main" val="1"/>
-              </p:ext>
-            </p:extLst>
-          </p:nvPr>
-        </p:nvSpPr>
-        <p:spPr>
-          <a:xfrm>
-            <a:off x="8042147" y="453643"/>
-            <a:ext cx="3703320" cy="98554"/>
-          </a:xfrm>
-          <a:prstGeom prst="rect">
-            <a:avLst/>
-          </a:prstGeom>
-          <a:solidFill>
-            <a:srgbClr val="969FA7"/>
-          </a:solidFill>
-          <a:ln>
-            <a:noFill/>
-          </a:ln>
-          <a:effectLst/>
-        </p:spPr>
-        <p:style>
-          <a:lnRef idx="1">
-            <a:schemeClr val="accent1"/>
-          </a:lnRef>
-          <a:fillRef idx="3">
-            <a:schemeClr val="accent1"/>
-          </a:fillRef>
-          <a:effectRef idx="2">
-            <a:schemeClr val="accent1"/>
-          </a:effectRef>
-          <a:fontRef idx="minor">
-            <a:schemeClr val="lt1"/>
-          </a:fontRef>
-        </p:style>
-        <p:txBody>
-          <a:bodyPr/>
-          <a:lstStyle/>
-          <a:p>
-            <a:endParaRPr lang="en-US"/>
-          </a:p>
-        </p:txBody>
-      </p:sp>
-      <p:sp>
-        <p:nvSpPr>
-          <p:cNvPr id="31" name="Rectangle 30">
-            <a:extLst>
-              <a:ext uri="{FF2B5EF4-FFF2-40B4-BE49-F238E27FC236}">
-                <a16:creationId xmlns:a16="http://schemas.microsoft.com/office/drawing/2014/main" id="{39373A6F-2E1F-4613-8E1D-D68057D29F31}"/>
-              </a:ext>
-              <a:ext uri="{C183D7F6-B498-43B3-948B-1728B52AA6E4}">
-                <adec:decorative xmlns:adec="http://schemas.microsoft.com/office/drawing/2017/decorative" val="1"/>
-              </a:ext>
-            </a:extLst>
-          </p:cNvPr>
-          <p:cNvSpPr>
-            <a:spLocks noGrp="1" noRot="1" noChangeAspect="1" noMove="1" noResize="1" noEditPoints="1" noAdjustHandles="1" noChangeArrowheads="1" noChangeShapeType="1" noTextEdit="1"/>
-          </p:cNvSpPr>
-          <p:nvPr>
-            <p:extLst>
-              <p:ext uri="{386F3935-93C4-4BCD-93E2-E3B085C9AB24}">
-                <p16:designElem xmlns:p16="http://schemas.microsoft.com/office/powerpoint/2015/main" val="1"/>
-              </p:ext>
-            </p:extLst>
-          </p:nvPr>
-        </p:nvSpPr>
-        <p:spPr>
-          <a:xfrm>
-            <a:off x="442377" y="601200"/>
-            <a:ext cx="3707477" cy="5624979"/>
-          </a:xfrm>
-          <a:prstGeom prst="rect">
-            <a:avLst/>
-          </a:prstGeom>
-          <a:solidFill>
-            <a:srgbClr val="465359"/>
-          </a:solidFill>
-          <a:ln>
-            <a:noFill/>
-          </a:ln>
-          <a:effectLst/>
-        </p:spPr>
-        <p:style>
-          <a:lnRef idx="1">
-            <a:schemeClr val="accent1"/>
-          </a:lnRef>
-          <a:fillRef idx="3">
-            <a:schemeClr val="accent1"/>
-          </a:fillRef>
-          <a:effectRef idx="2">
-            <a:schemeClr val="accent1"/>
-          </a:effectRef>
-          <a:fontRef idx="minor">
-            <a:schemeClr val="lt1"/>
-          </a:fontRef>
-        </p:style>
-        <p:txBody>
-          <a:bodyPr/>
-          <a:lstStyle/>
-          <a:p>
-            <a:endParaRPr lang="en-US"/>
-          </a:p>
-        </p:txBody>
-      </p:sp>
-      <p:sp>
-        <p:nvSpPr>
-          <p:cNvPr id="2" name="Title 1">
-            <a:extLst>
-              <a:ext uri="{FF2B5EF4-FFF2-40B4-BE49-F238E27FC236}">
-                <a16:creationId xmlns:a16="http://schemas.microsoft.com/office/drawing/2014/main" id="{01B052D1-C683-8D99-94DE-D0C671246F1F}"/>
-              </a:ext>
-            </a:extLst>
-          </p:cNvPr>
-          <p:cNvSpPr>
-            <a:spLocks noGrp="1"/>
-          </p:cNvSpPr>
-          <p:nvPr>
-            <p:ph type="title"/>
-          </p:nvPr>
-        </p:nvSpPr>
-        <p:spPr>
-          <a:xfrm>
-            <a:off x="601255" y="702155"/>
-            <a:ext cx="3409783" cy="1300365"/>
-          </a:xfrm>
-        </p:spPr>
-        <p:txBody>
-          <a:bodyPr>
-            <a:normAutofit/>
-          </a:bodyPr>
-          <a:lstStyle/>
-          <a:p>
-            <a:r>
-              <a:rPr lang="en-US">
-                <a:solidFill>
-                  <a:srgbClr val="FFFFFF"/>
-                </a:solidFill>
-              </a:rPr>
-              <a:t>Goals</a:t>
-            </a:r>
-          </a:p>
-        </p:txBody>
-      </p:sp>
-      <p:sp>
-        <p:nvSpPr>
-          <p:cNvPr id="3" name="Content Placeholder 2">
-            <a:extLst>
-              <a:ext uri="{FF2B5EF4-FFF2-40B4-BE49-F238E27FC236}">
-                <a16:creationId xmlns:a16="http://schemas.microsoft.com/office/drawing/2014/main" id="{9AA20466-457A-8CB9-2D38-94AF28781054}"/>
-              </a:ext>
-            </a:extLst>
-          </p:cNvPr>
-          <p:cNvSpPr>
-            <a:spLocks noGrp="1"/>
-          </p:cNvSpPr>
-          <p:nvPr>
-            <p:ph idx="1"/>
-          </p:nvPr>
-        </p:nvSpPr>
-        <p:spPr>
-          <a:xfrm>
-            <a:off x="601255" y="2177142"/>
-            <a:ext cx="3409782" cy="3823607"/>
-          </a:xfrm>
-        </p:spPr>
-        <p:txBody>
-          <a:bodyPr>
-            <a:normAutofit/>
-          </a:bodyPr>
-          <a:lstStyle/>
-          <a:p>
-            <a:r>
-              <a:rPr lang="en-US" dirty="0">
-                <a:solidFill>
-                  <a:srgbClr val="FFFFFF"/>
-                </a:solidFill>
-              </a:rPr>
-              <a:t>To discover which public schools have the highest &amp; lowest graduation rates</a:t>
-            </a:r>
-          </a:p>
-          <a:p>
-            <a:r>
-              <a:rPr lang="en-US" dirty="0">
-                <a:solidFill>
-                  <a:srgbClr val="FFFFFF"/>
-                </a:solidFill>
-              </a:rPr>
-              <a:t>To discover if crime rates seem to impact these statistics</a:t>
-            </a:r>
-          </a:p>
-          <a:p>
-            <a:r>
-              <a:rPr lang="en-US" dirty="0">
-                <a:solidFill>
-                  <a:srgbClr val="FFFFFF"/>
-                </a:solidFill>
-              </a:rPr>
-              <a:t>To see if any other factors found within the data could impact graduation rates</a:t>
-            </a:r>
-          </a:p>
-          <a:p>
-            <a:endParaRPr lang="en-US" dirty="0">
-              <a:solidFill>
-                <a:srgbClr val="FFFFFF"/>
-              </a:solidFill>
-            </a:endParaRPr>
-          </a:p>
-        </p:txBody>
-      </p:sp>
-      <p:pic>
-        <p:nvPicPr>
-          <p:cNvPr id="20" name="Graphic 19" descr="Books">
-            <a:extLst>
-              <a:ext uri="{FF2B5EF4-FFF2-40B4-BE49-F238E27FC236}">
-                <a16:creationId xmlns:a16="http://schemas.microsoft.com/office/drawing/2014/main" id="{2CA39A1E-CD8C-DF2E-D583-92EA5FEF28FB}"/>
-              </a:ext>
-            </a:extLst>
-          </p:cNvPr>
-          <p:cNvPicPr>
-            <a:picLocks noChangeAspect="1"/>
-          </p:cNvPicPr>
-          <p:nvPr/>
-        </p:nvPicPr>
-        <p:blipFill>
-          <a:blip r:embed="rId3">
-            <a:extLst>
-              <a:ext uri="{28A0092B-C50C-407E-A947-70E740481C1C}">
-                <a14:useLocalDpi xmlns:a14="http://schemas.microsoft.com/office/drawing/2010/main" val="0"/>
-              </a:ext>
-              <a:ext uri="{96DAC541-7B7A-43D3-8B79-37D633B846F1}">
-                <asvg:svgBlip xmlns:asvg="http://schemas.microsoft.com/office/drawing/2016/SVG/main" r:embed="rId4"/>
-              </a:ext>
-            </a:extLst>
-          </a:blip>
-          <a:stretch>
-            <a:fillRect/>
-          </a:stretch>
-        </p:blipFill>
-        <p:spPr>
-          <a:xfrm>
-            <a:off x="5523830" y="936141"/>
-            <a:ext cx="4968305" cy="4968305"/>
-          </a:xfrm>
-          <a:prstGeom prst="rect">
-            <a:avLst/>
-          </a:prstGeom>
-        </p:spPr>
-      </p:pic>
-    </p:spTree>
-    <p:extLst>
-      <p:ext uri="{BB962C8B-B14F-4D97-AF65-F5344CB8AC3E}">
-        <p14:creationId xmlns:p14="http://schemas.microsoft.com/office/powerpoint/2010/main" val="3723583622"/>
-      </p:ext>
-    </p:extLst>
-  </p:cSld>
-  <p:clrMapOvr>
-    <a:overrideClrMapping bg1="dk1" tx1="lt1" bg2="dk2" tx2="lt2" accent1="accent1" accent2="accent2" accent3="accent3" accent4="accent4" accent5="accent5" accent6="accent6" hlink="hlink" folHlink="folHlink"/>
-  </p:clrMapOvr>
-</p:sld>
-</file>
-
-<file path=ppt/slides/slide4.xml><?xml version="1.0" encoding="utf-8"?>
-<p:sld xmlns:a="http://schemas.openxmlformats.org/drawingml/2006/main" xmlns:r="http://schemas.openxmlformats.org/officeDocument/2006/relationships" xmlns:p="http://schemas.openxmlformats.org/presentationml/2006/main">
-  <p:cSld>
-    <p:bg>
-      <p:bgPr>
-        <a:solidFill>
-          <a:schemeClr val="bg1"/>
-        </a:solidFill>
-        <a:effectLst/>
-      </p:bgPr>
-    </p:bg>
-    <p:spTree>
-      <p:nvGrpSpPr>
-        <p:cNvPr id="1" name=""/>
-        <p:cNvGrpSpPr/>
-        <p:nvPr/>
-      </p:nvGrpSpPr>
-      <p:grpSpPr>
-        <a:xfrm>
-          <a:off x="0" y="0"/>
-          <a:ext cx="0" cy="0"/>
-          <a:chOff x="0" y="0"/>
-          <a:chExt cx="0" cy="0"/>
-        </a:xfrm>
-      </p:grpSpPr>
-      <p:sp>
-        <p:nvSpPr>
-          <p:cNvPr id="49" name="Rectangle 48">
-            <a:extLst>
-              <a:ext uri="{FF2B5EF4-FFF2-40B4-BE49-F238E27FC236}">
-                <a16:creationId xmlns:a16="http://schemas.microsoft.com/office/drawing/2014/main" id="{307E802C-4568-43AB-9F37-2A48E02B3B75}"/>
-              </a:ext>
-              <a:ext uri="{C183D7F6-B498-43B3-948B-1728B52AA6E4}">
-                <adec:decorative xmlns:adec="http://schemas.microsoft.com/office/drawing/2017/decorative" val="1"/>
-              </a:ext>
-            </a:extLst>
-          </p:cNvPr>
-          <p:cNvSpPr>
-            <a:spLocks noGrp="1" noRot="1" noChangeAspect="1" noMove="1" noResize="1" noEditPoints="1" noAdjustHandles="1" noChangeArrowheads="1" noChangeShapeType="1" noTextEdit="1"/>
-          </p:cNvSpPr>
-          <p:nvPr>
-            <p:extLst>
-              <p:ext uri="{386F3935-93C4-4BCD-93E2-E3B085C9AB24}">
-                <p16:designElem xmlns:p16="http://schemas.microsoft.com/office/powerpoint/2015/main" val="1"/>
-              </p:ext>
-            </p:extLst>
-          </p:nvPr>
-        </p:nvSpPr>
-        <p:spPr>
-          <a:xfrm>
-            <a:off x="0" y="0"/>
-            <a:ext cx="12192000" cy="6858000"/>
-          </a:xfrm>
-          <a:prstGeom prst="rect">
-            <a:avLst/>
-          </a:prstGeom>
-          <a:solidFill>
-            <a:schemeClr val="tx1"/>
-          </a:solidFill>
-          <a:ln>
-            <a:noFill/>
-          </a:ln>
-        </p:spPr>
-        <p:style>
-          <a:lnRef idx="2">
-            <a:schemeClr val="accent1">
-              <a:shade val="50000"/>
-            </a:schemeClr>
-          </a:lnRef>
-          <a:fillRef idx="1">
-            <a:schemeClr val="accent1"/>
-          </a:fillRef>
-          <a:effectRef idx="0">
-            <a:schemeClr val="accent1"/>
-          </a:effectRef>
-          <a:fontRef idx="minor">
-            <a:schemeClr val="lt1"/>
-          </a:fontRef>
-        </p:style>
-        <p:txBody>
-          <a:bodyPr rtlCol="0" anchor="ctr"/>
-          <a:lstStyle/>
-          <a:p>
-            <a:pPr algn="ctr"/>
-            <a:endParaRPr lang="en-US"/>
-          </a:p>
-        </p:txBody>
-      </p:sp>
-      <p:pic>
-        <p:nvPicPr>
-          <p:cNvPr id="7" name="Picture 6" descr="A logo with a red and blue square&#10;&#10;Description automatically generated">
-            <a:extLst>
-              <a:ext uri="{FF2B5EF4-FFF2-40B4-BE49-F238E27FC236}">
-                <a16:creationId xmlns:a16="http://schemas.microsoft.com/office/drawing/2014/main" id="{C31553AF-9E30-59FD-CB77-83E7D5AFC5AF}"/>
-              </a:ext>
-            </a:extLst>
-          </p:cNvPr>
-          <p:cNvPicPr>
-            <a:picLocks noChangeAspect="1"/>
-          </p:cNvPicPr>
-          <p:nvPr/>
-        </p:nvPicPr>
-        <p:blipFill>
-          <a:blip r:embed="rId2">
-            <a:extLst>
-              <a:ext uri="{28A0092B-C50C-407E-A947-70E740481C1C}">
-                <a14:useLocalDpi xmlns:a14="http://schemas.microsoft.com/office/drawing/2010/main" val="0"/>
-              </a:ext>
-            </a:extLst>
-          </a:blip>
-          <a:stretch>
-            <a:fillRect/>
-          </a:stretch>
-        </p:blipFill>
-        <p:spPr>
-          <a:xfrm>
-            <a:off x="703491" y="598713"/>
-            <a:ext cx="3506108" cy="3298604"/>
-          </a:xfrm>
-          <a:prstGeom prst="rect">
-            <a:avLst/>
-          </a:prstGeom>
-        </p:spPr>
-      </p:pic>
-      <p:pic>
-        <p:nvPicPr>
-          <p:cNvPr id="5" name="Picture 4" descr="A logo for a public schools&#10;&#10;Description automatically generated">
-            <a:extLst>
-              <a:ext uri="{FF2B5EF4-FFF2-40B4-BE49-F238E27FC236}">
-                <a16:creationId xmlns:a16="http://schemas.microsoft.com/office/drawing/2014/main" id="{18F6DC9E-0AE1-E2D8-7FB3-9C42887AF172}"/>
-              </a:ext>
-            </a:extLst>
-          </p:cNvPr>
-          <p:cNvPicPr>
-            <a:picLocks noChangeAspect="1"/>
-          </p:cNvPicPr>
-          <p:nvPr/>
-        </p:nvPicPr>
-        <p:blipFill>
-          <a:blip r:embed="rId3">
-            <a:extLst>
-              <a:ext uri="{28A0092B-C50C-407E-A947-70E740481C1C}">
-                <a14:useLocalDpi xmlns:a14="http://schemas.microsoft.com/office/drawing/2010/main" val="0"/>
-              </a:ext>
-            </a:extLst>
-          </a:blip>
-          <a:stretch>
-            <a:fillRect/>
-          </a:stretch>
-        </p:blipFill>
-        <p:spPr>
-          <a:xfrm>
-            <a:off x="5910792" y="598712"/>
-            <a:ext cx="4729182" cy="3298605"/>
-          </a:xfrm>
-          <a:prstGeom prst="rect">
-            <a:avLst/>
-          </a:prstGeom>
-        </p:spPr>
-      </p:pic>
-      <p:pic>
-        <p:nvPicPr>
-          <p:cNvPr id="6" name="Picture 5" descr="A black text on a white background&#10;&#10;Description automatically generated">
-            <a:extLst>
-              <a:ext uri="{FF2B5EF4-FFF2-40B4-BE49-F238E27FC236}">
-                <a16:creationId xmlns:a16="http://schemas.microsoft.com/office/drawing/2014/main" id="{3E348BF7-7628-4941-5C46-0BB8EC7E4E1D}"/>
-              </a:ext>
-            </a:extLst>
-          </p:cNvPr>
-          <p:cNvPicPr>
-            <a:picLocks noChangeAspect="1"/>
-          </p:cNvPicPr>
-          <p:nvPr/>
-        </p:nvPicPr>
-        <p:blipFill>
-          <a:blip r:embed="rId4">
-            <a:extLst>
-              <a:ext uri="{28A0092B-C50C-407E-A947-70E740481C1C}">
-                <a14:useLocalDpi xmlns:a14="http://schemas.microsoft.com/office/drawing/2010/main" val="0"/>
-              </a:ext>
-            </a:extLst>
-          </a:blip>
-          <a:stretch>
-            <a:fillRect/>
-          </a:stretch>
-        </p:blipFill>
-        <p:spPr>
-          <a:xfrm>
-            <a:off x="643467" y="5098750"/>
-            <a:ext cx="3626158" cy="642234"/>
-          </a:xfrm>
-          <a:prstGeom prst="rect">
-            <a:avLst/>
-          </a:prstGeom>
-        </p:spPr>
-      </p:pic>
-      <p:sp>
-        <p:nvSpPr>
-          <p:cNvPr id="51" name="Rectangle 50">
-            <a:extLst>
-              <a:ext uri="{FF2B5EF4-FFF2-40B4-BE49-F238E27FC236}">
-                <a16:creationId xmlns:a16="http://schemas.microsoft.com/office/drawing/2014/main" id="{BFFCF698-CE31-43F1-AC88-064CB81A652C}"/>
-              </a:ext>
-              <a:ext uri="{C183D7F6-B498-43B3-948B-1728B52AA6E4}">
-                <adec:decorative xmlns:adec="http://schemas.microsoft.com/office/drawing/2017/decorative" val="1"/>
-              </a:ext>
-            </a:extLst>
-          </p:cNvPr>
-          <p:cNvSpPr>
-            <a:spLocks noGrp="1" noRot="1" noChangeAspect="1" noMove="1" noResize="1" noEditPoints="1" noAdjustHandles="1" noChangeArrowheads="1" noChangeShapeType="1" noTextEdit="1"/>
-          </p:cNvSpPr>
-          <p:nvPr>
-            <p:extLst>
-              <p:ext uri="{386F3935-93C4-4BCD-93E2-E3B085C9AB24}">
-                <p16:designElem xmlns:p16="http://schemas.microsoft.com/office/powerpoint/2015/main" val="1"/>
-              </p:ext>
-            </p:extLst>
-          </p:nvPr>
-        </p:nvSpPr>
-        <p:spPr>
-          <a:xfrm>
-            <a:off x="4639498" y="4267831"/>
-            <a:ext cx="7552502" cy="2590169"/>
-          </a:xfrm>
-          <a:prstGeom prst="rect">
-            <a:avLst/>
-          </a:prstGeom>
-          <a:solidFill>
-            <a:srgbClr val="465359"/>
-          </a:solidFill>
-          <a:ln w="6350" cmpd="sng">
-            <a:noFill/>
-          </a:ln>
-          <a:effectLst/>
-        </p:spPr>
-        <p:style>
-          <a:lnRef idx="1">
-            <a:schemeClr val="accent1"/>
-          </a:lnRef>
-          <a:fillRef idx="3">
-            <a:schemeClr val="accent1"/>
-          </a:fillRef>
-          <a:effectRef idx="2">
-            <a:schemeClr val="accent1"/>
-          </a:effectRef>
-          <a:fontRef idx="minor">
-            <a:schemeClr val="lt1"/>
-          </a:fontRef>
-        </p:style>
-        <p:txBody>
-          <a:bodyPr/>
-          <a:lstStyle/>
-          <a:p>
-            <a:endParaRPr lang="en-US"/>
-          </a:p>
-        </p:txBody>
-      </p:sp>
-      <p:sp>
-        <p:nvSpPr>
-          <p:cNvPr id="53" name="Rectangle 52">
-            <a:extLst>
-              <a:ext uri="{FF2B5EF4-FFF2-40B4-BE49-F238E27FC236}">
-                <a16:creationId xmlns:a16="http://schemas.microsoft.com/office/drawing/2014/main" id="{30289482-ACA3-49AE-9A29-CF97A76DF57E}"/>
-              </a:ext>
-              <a:ext uri="{C183D7F6-B498-43B3-948B-1728B52AA6E4}">
-                <adec:decorative xmlns:adec="http://schemas.microsoft.com/office/drawing/2017/decorative" val="1"/>
-              </a:ext>
-            </a:extLst>
-          </p:cNvPr>
-          <p:cNvSpPr>
-            <a:spLocks noGrp="1" noRot="1" noChangeAspect="1" noMove="1" noResize="1" noEditPoints="1" noAdjustHandles="1" noChangeArrowheads="1" noChangeShapeType="1" noTextEdit="1"/>
-          </p:cNvSpPr>
-          <p:nvPr>
-            <p:extLst>
-              <p:ext uri="{386F3935-93C4-4BCD-93E2-E3B085C9AB24}">
-                <p16:designElem xmlns:p16="http://schemas.microsoft.com/office/powerpoint/2015/main" val="1"/>
-              </p:ext>
-            </p:extLst>
-          </p:nvPr>
-        </p:nvSpPr>
-        <p:spPr>
-          <a:xfrm>
-            <a:off x="0" y="4220158"/>
-            <a:ext cx="12188952" cy="91440"/>
-          </a:xfrm>
-          <a:prstGeom prst="rect">
-            <a:avLst/>
-          </a:prstGeom>
-          <a:solidFill>
-            <a:srgbClr val="465359"/>
-          </a:solidFill>
-          <a:ln>
-            <a:noFill/>
-          </a:ln>
-          <a:effectLst/>
-        </p:spPr>
-        <p:style>
-          <a:lnRef idx="1">
-            <a:schemeClr val="accent1"/>
-          </a:lnRef>
-          <a:fillRef idx="3">
-            <a:schemeClr val="accent1"/>
-          </a:fillRef>
-          <a:effectRef idx="2">
-            <a:schemeClr val="accent1"/>
-          </a:effectRef>
-          <a:fontRef idx="minor">
-            <a:schemeClr val="lt1"/>
-          </a:fontRef>
-        </p:style>
-        <p:txBody>
-          <a:bodyPr/>
-          <a:lstStyle/>
-          <a:p>
-            <a:endParaRPr lang="en-US"/>
-          </a:p>
-        </p:txBody>
-      </p:sp>
-      <p:sp>
-        <p:nvSpPr>
-          <p:cNvPr id="2" name="Title 1">
-            <a:extLst>
-              <a:ext uri="{FF2B5EF4-FFF2-40B4-BE49-F238E27FC236}">
-                <a16:creationId xmlns:a16="http://schemas.microsoft.com/office/drawing/2014/main" id="{D4BA2EA6-75E8-C8F0-CA96-941BCCD6CE59}"/>
-              </a:ext>
-            </a:extLst>
-          </p:cNvPr>
-          <p:cNvSpPr>
-            <a:spLocks noGrp="1"/>
-          </p:cNvSpPr>
-          <p:nvPr>
-            <p:ph type="title"/>
-          </p:nvPr>
-        </p:nvSpPr>
-        <p:spPr>
-          <a:xfrm>
-            <a:off x="4810836" y="4311403"/>
-            <a:ext cx="6737697" cy="731446"/>
-          </a:xfrm>
-        </p:spPr>
-        <p:txBody>
-          <a:bodyPr>
-            <a:normAutofit/>
-          </a:bodyPr>
-          <a:lstStyle/>
-          <a:p>
-            <a:r>
-              <a:rPr lang="en-US" sz="2400">
-                <a:solidFill>
-                  <a:srgbClr val="FFFFFF"/>
-                </a:solidFill>
-              </a:rPr>
-              <a:t>Data sources</a:t>
-            </a:r>
-          </a:p>
-        </p:txBody>
-      </p:sp>
-      <p:sp>
-        <p:nvSpPr>
-          <p:cNvPr id="55" name="Rectangle 54">
-            <a:extLst>
-              <a:ext uri="{FF2B5EF4-FFF2-40B4-BE49-F238E27FC236}">
-                <a16:creationId xmlns:a16="http://schemas.microsoft.com/office/drawing/2014/main" id="{0F399B11-F777-4211-ADD0-979A91BCDB9E}"/>
-              </a:ext>
-              <a:ext uri="{C183D7F6-B498-43B3-948B-1728B52AA6E4}">
-                <adec:decorative xmlns:adec="http://schemas.microsoft.com/office/drawing/2017/decorative" val="1"/>
-              </a:ext>
-            </a:extLst>
-          </p:cNvPr>
-          <p:cNvSpPr>
-            <a:spLocks noGrp="1" noRot="1" noChangeAspect="1" noMove="1" noResize="1" noEditPoints="1" noAdjustHandles="1" noChangeArrowheads="1" noChangeShapeType="1" noTextEdit="1"/>
-          </p:cNvSpPr>
-          <p:nvPr>
-            <p:extLst>
-              <p:ext uri="{386F3935-93C4-4BCD-93E2-E3B085C9AB24}">
-                <p16:designElem xmlns:p16="http://schemas.microsoft.com/office/powerpoint/2015/main" val="1"/>
-              </p:ext>
-            </p:extLst>
-          </p:nvPr>
-        </p:nvSpPr>
-        <p:spPr>
-          <a:xfrm>
-            <a:off x="4591359" y="-460"/>
-            <a:ext cx="91440" cy="6858000"/>
-          </a:xfrm>
-          <a:prstGeom prst="rect">
-            <a:avLst/>
-          </a:prstGeom>
-          <a:solidFill>
-            <a:srgbClr val="465359"/>
-          </a:solidFill>
-          <a:ln>
-            <a:noFill/>
-          </a:ln>
-          <a:effectLst/>
-        </p:spPr>
-        <p:style>
-          <a:lnRef idx="1">
-            <a:schemeClr val="accent1"/>
-          </a:lnRef>
-          <a:fillRef idx="3">
-            <a:schemeClr val="accent1"/>
-          </a:fillRef>
-          <a:effectRef idx="2">
-            <a:schemeClr val="accent1"/>
-          </a:effectRef>
-          <a:fontRef idx="minor">
-            <a:schemeClr val="lt1"/>
-          </a:fontRef>
-        </p:style>
-        <p:txBody>
-          <a:bodyPr rtlCol="0" anchor="ctr"/>
-          <a:lstStyle/>
-          <a:p>
-            <a:pPr algn="ctr"/>
-            <a:endParaRPr lang="en-US"/>
-          </a:p>
-        </p:txBody>
-      </p:sp>
-      <p:sp>
-        <p:nvSpPr>
-          <p:cNvPr id="3" name="Content Placeholder 2">
-            <a:extLst>
-              <a:ext uri="{FF2B5EF4-FFF2-40B4-BE49-F238E27FC236}">
-                <a16:creationId xmlns:a16="http://schemas.microsoft.com/office/drawing/2014/main" id="{C269E53F-3DD5-0333-F437-EBCAB31AC65B}"/>
-              </a:ext>
-            </a:extLst>
-          </p:cNvPr>
-          <p:cNvSpPr>
-            <a:spLocks noGrp="1"/>
-          </p:cNvSpPr>
-          <p:nvPr>
-            <p:ph idx="1"/>
-          </p:nvPr>
-        </p:nvSpPr>
-        <p:spPr>
-          <a:xfrm>
-            <a:off x="4810836" y="5247563"/>
-            <a:ext cx="6799972" cy="1011725"/>
-          </a:xfrm>
-        </p:spPr>
-        <p:txBody>
-          <a:bodyPr>
-            <a:normAutofit/>
-          </a:bodyPr>
-          <a:lstStyle/>
-          <a:p>
-            <a:pPr>
-              <a:lnSpc>
-                <a:spcPct val="110000"/>
-              </a:lnSpc>
-            </a:pPr>
-            <a:endParaRPr lang="en-US" sz="600" dirty="0">
-              <a:solidFill>
-                <a:srgbClr val="FFFFFF"/>
-              </a:solidFill>
-            </a:endParaRPr>
-          </a:p>
-          <a:p>
-            <a:pPr>
-              <a:lnSpc>
-                <a:spcPct val="110000"/>
-              </a:lnSpc>
-            </a:pPr>
-            <a:r>
-              <a:rPr lang="en-US" sz="600" dirty="0">
-                <a:solidFill>
-                  <a:srgbClr val="FFFFFF"/>
-                </a:solidFill>
-              </a:rPr>
-              <a:t>Metro Nashville Public School Open Data: </a:t>
-            </a:r>
-            <a:r>
-              <a:rPr lang="en-US" sz="600" dirty="0">
-                <a:solidFill>
-                  <a:srgbClr val="FFFFFF"/>
-                </a:solidFill>
-                <a:hlinkClick r:id="rId5"/>
-              </a:rPr>
-              <a:t>https://www.mnps.org/about/communications/opendata</a:t>
-            </a:r>
-            <a:endParaRPr lang="en-US" sz="600" dirty="0">
-              <a:solidFill>
-                <a:srgbClr val="FFFFFF"/>
-              </a:solidFill>
-            </a:endParaRPr>
-          </a:p>
-          <a:p>
-            <a:pPr>
-              <a:lnSpc>
-                <a:spcPct val="110000"/>
-              </a:lnSpc>
-            </a:pPr>
-            <a:r>
-              <a:rPr lang="en-US" sz="600" dirty="0">
-                <a:solidFill>
-                  <a:srgbClr val="FFFFFF"/>
-                </a:solidFill>
-              </a:rPr>
-              <a:t>Tennessee Dept. of Education </a:t>
-            </a:r>
-            <a:r>
-              <a:rPr lang="en-US" sz="600" dirty="0">
-                <a:solidFill>
-                  <a:srgbClr val="FFFFFF"/>
-                </a:solidFill>
-                <a:hlinkClick r:id="rId6"/>
-              </a:rPr>
-              <a:t>https://www.tn.gov/education/districts/federal-programs-and-oversight/data/data-downloads.html</a:t>
-            </a:r>
-            <a:endParaRPr lang="en-US" sz="600" dirty="0">
-              <a:solidFill>
-                <a:srgbClr val="FFFFFF"/>
-              </a:solidFill>
-            </a:endParaRPr>
-          </a:p>
-          <a:p>
-            <a:pPr>
-              <a:lnSpc>
-                <a:spcPct val="110000"/>
-              </a:lnSpc>
-            </a:pPr>
-            <a:r>
-              <a:rPr lang="en-US" sz="600" dirty="0">
-                <a:solidFill>
-                  <a:srgbClr val="FFFFFF"/>
-                </a:solidFill>
-              </a:rPr>
-              <a:t>Nashville Open Data https://datanashvillegov-nashville.hub.arcgis.com/datasets/d747436243e9439e968fce056545016a_0/explore?location=35.885029%2C-86.948355%2C7.34</a:t>
-            </a:r>
-          </a:p>
-          <a:p>
-            <a:pPr>
-              <a:lnSpc>
-                <a:spcPct val="110000"/>
-              </a:lnSpc>
-            </a:pPr>
-            <a:endParaRPr lang="en-US" sz="600" dirty="0">
-              <a:solidFill>
-                <a:srgbClr val="FFFFFF"/>
-              </a:solidFill>
-            </a:endParaRPr>
-          </a:p>
-        </p:txBody>
-      </p:sp>
-    </p:spTree>
-    <p:extLst>
-      <p:ext uri="{BB962C8B-B14F-4D97-AF65-F5344CB8AC3E}">
-        <p14:creationId xmlns:p14="http://schemas.microsoft.com/office/powerpoint/2010/main" val="3502945966"/>
-      </p:ext>
-    </p:extLst>
-  </p:cSld>
-  <p:clrMapOvr>
-    <a:overrideClrMapping bg1="dk1" tx1="lt1" bg2="dk2" tx2="lt2" accent1="accent1" accent2="accent2" accent3="accent3" accent4="accent4" accent5="accent5" accent6="accent6" hlink="hlink" folHlink="folHlink"/>
-  </p:clrMapOvr>
-</p:sld>
-</file>
-
-<file path=ppt/slides/slide5.xml><?xml version="1.0" encoding="utf-8"?>
-<p:sld xmlns:a="http://schemas.openxmlformats.org/drawingml/2006/main" xmlns:r="http://schemas.openxmlformats.org/officeDocument/2006/relationships" xmlns:p="http://schemas.openxmlformats.org/presentationml/2006/main">
-  <p:cSld>
-    <p:bg>
-      <p:bgPr>
-        <a:solidFill>
-          <a:schemeClr val="bg1"/>
-        </a:solidFill>
-        <a:effectLst/>
-      </p:bgPr>
-    </p:bg>
-    <p:spTree>
-      <p:nvGrpSpPr>
-        <p:cNvPr id="1" name=""/>
-        <p:cNvGrpSpPr/>
-        <p:nvPr/>
-      </p:nvGrpSpPr>
-      <p:grpSpPr>
-        <a:xfrm>
-          <a:off x="0" y="0"/>
-          <a:ext cx="0" cy="0"/>
-          <a:chOff x="0" y="0"/>
-          <a:chExt cx="0" cy="0"/>
-        </a:xfrm>
-      </p:grpSpPr>
-      <p:sp>
-        <p:nvSpPr>
-          <p:cNvPr id="2" name="Title 1">
-            <a:extLst>
-              <a:ext uri="{FF2B5EF4-FFF2-40B4-BE49-F238E27FC236}">
-                <a16:creationId xmlns:a16="http://schemas.microsoft.com/office/drawing/2014/main" id="{9B920EEE-CB07-9243-D73C-93F5A9A5B83F}"/>
-              </a:ext>
-            </a:extLst>
-          </p:cNvPr>
-          <p:cNvSpPr>
-            <a:spLocks noGrp="1"/>
-          </p:cNvSpPr>
-          <p:nvPr>
-            <p:ph type="title"/>
-          </p:nvPr>
-        </p:nvSpPr>
-        <p:spPr>
-          <a:xfrm>
-            <a:off x="581192" y="702156"/>
-            <a:ext cx="11029616" cy="1188720"/>
-          </a:xfrm>
-        </p:spPr>
-        <p:txBody>
-          <a:bodyPr>
-            <a:normAutofit/>
-          </a:bodyPr>
-          <a:lstStyle/>
-          <a:p>
-            <a:r>
-              <a:rPr lang="en-US" dirty="0"/>
-              <a:t>Issues encountered</a:t>
-            </a:r>
-          </a:p>
-        </p:txBody>
-      </p:sp>
-      <p:graphicFrame>
-        <p:nvGraphicFramePr>
-          <p:cNvPr id="5" name="Content Placeholder 2">
-            <a:extLst>
-              <a:ext uri="{FF2B5EF4-FFF2-40B4-BE49-F238E27FC236}">
-                <a16:creationId xmlns:a16="http://schemas.microsoft.com/office/drawing/2014/main" id="{D4EDF90C-3FAF-A70C-EA45-7796E72E6F29}"/>
-              </a:ext>
-            </a:extLst>
-          </p:cNvPr>
-          <p:cNvGraphicFramePr>
-            <a:graphicFrameLocks noGrp="1"/>
-          </p:cNvGraphicFramePr>
-          <p:nvPr>
-            <p:ph idx="1"/>
-            <p:extLst>
-              <p:ext uri="{D42A27DB-BD31-4B8C-83A1-F6EECF244321}">
-                <p14:modId xmlns:p14="http://schemas.microsoft.com/office/powerpoint/2010/main" val="4231511922"/>
-              </p:ext>
-            </p:extLst>
-          </p:nvPr>
-        </p:nvGraphicFramePr>
-        <p:xfrm>
-          <a:off x="581025" y="2341563"/>
-          <a:ext cx="11029950" cy="3814281"/>
-        </p:xfrm>
-        <a:graphic>
-          <a:graphicData uri="http://schemas.openxmlformats.org/drawingml/2006/diagram">
-            <dgm:relIds xmlns:dgm="http://schemas.openxmlformats.org/drawingml/2006/diagram" xmlns:r="http://schemas.openxmlformats.org/officeDocument/2006/relationships" r:dm="rId3" r:lo="rId4" r:qs="rId5" r:cs="rId6"/>
-          </a:graphicData>
-        </a:graphic>
-      </p:graphicFrame>
-    </p:spTree>
-    <p:extLst>
-      <p:ext uri="{BB962C8B-B14F-4D97-AF65-F5344CB8AC3E}">
-        <p14:creationId xmlns:p14="http://schemas.microsoft.com/office/powerpoint/2010/main" val="1351500608"/>
-      </p:ext>
-    </p:extLst>
-  </p:cSld>
-  <p:clrMapOvr>
-    <a:masterClrMapping/>
-  </p:clrMapOvr>
-</p:sld>
-</file>
-
-<file path=ppt/slides/slide6.xml><?xml version="1.0" encoding="utf-8"?>
-<p:sld xmlns:a="http://schemas.openxmlformats.org/drawingml/2006/main" xmlns:r="http://schemas.openxmlformats.org/officeDocument/2006/relationships" xmlns:p="http://schemas.openxmlformats.org/presentationml/2006/main">
-  <p:cSld>
-    <p:bg>
-      <p:bgPr>
-        <a:solidFill>
-          <a:schemeClr val="bg1"/>
-        </a:solidFill>
-        <a:effectLst/>
-      </p:bgPr>
-    </p:bg>
-    <p:spTree>
-      <p:nvGrpSpPr>
-        <p:cNvPr id="1" name=""/>
-        <p:cNvGrpSpPr/>
-        <p:nvPr/>
-      </p:nvGrpSpPr>
-      <p:grpSpPr>
-        <a:xfrm>
-          <a:off x="0" y="0"/>
-          <a:ext cx="0" cy="0"/>
-          <a:chOff x="0" y="0"/>
-          <a:chExt cx="0" cy="0"/>
-        </a:xfrm>
-      </p:grpSpPr>
-      <p:sp>
-        <p:nvSpPr>
-          <p:cNvPr id="44" name="Rectangle 43">
-            <a:extLst>
-              <a:ext uri="{FF2B5EF4-FFF2-40B4-BE49-F238E27FC236}">
-                <a16:creationId xmlns:a16="http://schemas.microsoft.com/office/drawing/2014/main" id="{DD651B61-325E-4E73-8445-38B0DE8AAAB6}"/>
-              </a:ext>
-              <a:ext uri="{C183D7F6-B498-43B3-948B-1728B52AA6E4}">
-                <adec:decorative xmlns:adec="http://schemas.microsoft.com/office/drawing/2017/decorative" val="1"/>
-              </a:ext>
-            </a:extLst>
-          </p:cNvPr>
-          <p:cNvSpPr>
-            <a:spLocks noGrp="1" noRot="1" noChangeAspect="1" noMove="1" noResize="1" noEditPoints="1" noAdjustHandles="1" noChangeArrowheads="1" noChangeShapeType="1" noTextEdit="1"/>
-          </p:cNvSpPr>
-          <p:nvPr>
-            <p:extLst>
-              <p:ext uri="{386F3935-93C4-4BCD-93E2-E3B085C9AB24}">
-                <p16:designElem xmlns:p16="http://schemas.microsoft.com/office/powerpoint/2015/main" val="1"/>
-              </p:ext>
-            </p:extLst>
-          </p:nvPr>
-        </p:nvSpPr>
-        <p:spPr>
-          <a:xfrm>
-            <a:off x="446534" y="457200"/>
-            <a:ext cx="3703320" cy="94997"/>
-          </a:xfrm>
-          <a:prstGeom prst="rect">
-            <a:avLst/>
-          </a:prstGeom>
-          <a:solidFill>
-            <a:srgbClr val="465359"/>
-          </a:solidFill>
-          <a:ln>
-            <a:noFill/>
-          </a:ln>
-          <a:effectLst/>
-        </p:spPr>
-        <p:style>
-          <a:lnRef idx="1">
-            <a:schemeClr val="accent1"/>
-          </a:lnRef>
-          <a:fillRef idx="3">
-            <a:schemeClr val="accent1"/>
-          </a:fillRef>
-          <a:effectRef idx="2">
-            <a:schemeClr val="accent1"/>
-          </a:effectRef>
-          <a:fontRef idx="minor">
-            <a:schemeClr val="lt1"/>
-          </a:fontRef>
-        </p:style>
-        <p:txBody>
-          <a:bodyPr/>
-          <a:lstStyle/>
-          <a:p>
-            <a:endParaRPr lang="en-US"/>
-          </a:p>
-        </p:txBody>
-      </p:sp>
-      <p:sp>
-        <p:nvSpPr>
-          <p:cNvPr id="46" name="Rectangle 45">
-            <a:extLst>
-              <a:ext uri="{FF2B5EF4-FFF2-40B4-BE49-F238E27FC236}">
-                <a16:creationId xmlns:a16="http://schemas.microsoft.com/office/drawing/2014/main" id="{B42E5253-D3AC-4AC2-B766-8B34F13C2F5E}"/>
-              </a:ext>
-              <a:ext uri="{C183D7F6-B498-43B3-948B-1728B52AA6E4}">
-                <adec:decorative xmlns:adec="http://schemas.microsoft.com/office/drawing/2017/decorative" val="1"/>
-              </a:ext>
-            </a:extLst>
-          </p:cNvPr>
-          <p:cNvSpPr>
-            <a:spLocks noGrp="1" noRot="1" noChangeAspect="1" noMove="1" noResize="1" noEditPoints="1" noAdjustHandles="1" noChangeArrowheads="1" noChangeShapeType="1" noTextEdit="1"/>
-          </p:cNvSpPr>
-          <p:nvPr>
-            <p:extLst>
-              <p:ext uri="{386F3935-93C4-4BCD-93E2-E3B085C9AB24}">
-                <p16:designElem xmlns:p16="http://schemas.microsoft.com/office/powerpoint/2015/main" val="1"/>
-              </p:ext>
-            </p:extLst>
-          </p:nvPr>
-        </p:nvSpPr>
-        <p:spPr>
-          <a:xfrm>
-            <a:off x="8042147" y="453643"/>
-            <a:ext cx="3703320" cy="98554"/>
-          </a:xfrm>
-          <a:prstGeom prst="rect">
-            <a:avLst/>
-          </a:prstGeom>
-          <a:solidFill>
-            <a:srgbClr val="969FA7"/>
-          </a:solidFill>
-          <a:ln>
-            <a:noFill/>
-          </a:ln>
-          <a:effectLst/>
-        </p:spPr>
-        <p:style>
-          <a:lnRef idx="1">
-            <a:schemeClr val="accent1"/>
-          </a:lnRef>
-          <a:fillRef idx="3">
-            <a:schemeClr val="accent1"/>
-          </a:fillRef>
-          <a:effectRef idx="2">
-            <a:schemeClr val="accent1"/>
-          </a:effectRef>
-          <a:fontRef idx="minor">
-            <a:schemeClr val="lt1"/>
-          </a:fontRef>
-        </p:style>
-        <p:txBody>
-          <a:bodyPr/>
-          <a:lstStyle/>
-          <a:p>
-            <a:endParaRPr lang="en-US"/>
-          </a:p>
-        </p:txBody>
-      </p:sp>
-      <p:sp>
-        <p:nvSpPr>
-          <p:cNvPr id="48" name="Rectangle 47">
-            <a:extLst>
-              <a:ext uri="{FF2B5EF4-FFF2-40B4-BE49-F238E27FC236}">
-                <a16:creationId xmlns:a16="http://schemas.microsoft.com/office/drawing/2014/main" id="{10AE8D57-436A-4073-9A75-15BB5949F8B4}"/>
-              </a:ext>
-              <a:ext uri="{C183D7F6-B498-43B3-948B-1728B52AA6E4}">
-                <adec:decorative xmlns:adec="http://schemas.microsoft.com/office/drawing/2017/decorative" val="1"/>
-              </a:ext>
-            </a:extLst>
-          </p:cNvPr>
-          <p:cNvSpPr>
-            <a:spLocks noGrp="1" noRot="1" noChangeAspect="1" noMove="1" noResize="1" noEditPoints="1" noAdjustHandles="1" noChangeArrowheads="1" noChangeShapeType="1" noTextEdit="1"/>
-          </p:cNvSpPr>
-          <p:nvPr>
-            <p:extLst>
-              <p:ext uri="{386F3935-93C4-4BCD-93E2-E3B085C9AB24}">
-                <p16:designElem xmlns:p16="http://schemas.microsoft.com/office/powerpoint/2015/main" val="1"/>
-              </p:ext>
-            </p:extLst>
-          </p:nvPr>
-        </p:nvSpPr>
-        <p:spPr>
-          <a:xfrm>
-            <a:off x="4241830" y="457200"/>
-            <a:ext cx="3703320" cy="91440"/>
-          </a:xfrm>
-          <a:prstGeom prst="rect">
-            <a:avLst/>
-          </a:prstGeom>
-          <a:solidFill>
-            <a:schemeClr val="accent1"/>
-          </a:solidFill>
-          <a:ln>
-            <a:noFill/>
-          </a:ln>
-          <a:effectLst/>
-        </p:spPr>
-        <p:style>
-          <a:lnRef idx="1">
-            <a:schemeClr val="accent1"/>
-          </a:lnRef>
-          <a:fillRef idx="3">
-            <a:schemeClr val="accent1"/>
-          </a:fillRef>
-          <a:effectRef idx="2">
-            <a:schemeClr val="accent1"/>
-          </a:effectRef>
-          <a:fontRef idx="minor">
-            <a:schemeClr val="lt1"/>
-          </a:fontRef>
-        </p:style>
-        <p:txBody>
-          <a:bodyPr/>
-          <a:lstStyle/>
-          <a:p>
-            <a:endParaRPr lang="en-US"/>
-          </a:p>
-        </p:txBody>
-      </p:sp>
-      <p:sp>
-        <p:nvSpPr>
-          <p:cNvPr id="50" name="Rectangle 49">
-            <a:extLst>
-              <a:ext uri="{FF2B5EF4-FFF2-40B4-BE49-F238E27FC236}">
-                <a16:creationId xmlns:a16="http://schemas.microsoft.com/office/drawing/2014/main" id="{E2852671-8EB6-4EAF-8AF8-65CF3FD66456}"/>
-              </a:ext>
-              <a:ext uri="{C183D7F6-B498-43B3-948B-1728B52AA6E4}">
-                <adec:decorative xmlns:adec="http://schemas.microsoft.com/office/drawing/2017/decorative" val="1"/>
-              </a:ext>
-            </a:extLst>
-          </p:cNvPr>
-          <p:cNvSpPr>
-            <a:spLocks noGrp="1" noRot="1" noChangeAspect="1" noMove="1" noResize="1" noEditPoints="1" noAdjustHandles="1" noChangeArrowheads="1" noChangeShapeType="1" noTextEdit="1"/>
-          </p:cNvSpPr>
-          <p:nvPr>
-            <p:extLst>
-              <p:ext uri="{386F3935-93C4-4BCD-93E2-E3B085C9AB24}">
-                <p16:designElem xmlns:p16="http://schemas.microsoft.com/office/powerpoint/2015/main" val="1"/>
-              </p:ext>
-            </p:extLst>
-          </p:nvPr>
-        </p:nvSpPr>
-        <p:spPr>
-          <a:xfrm>
-            <a:off x="446534" y="3085764"/>
-            <a:ext cx="11298932" cy="3338149"/>
-          </a:xfrm>
-          <a:prstGeom prst="rect">
-            <a:avLst/>
-          </a:prstGeom>
-          <a:solidFill>
-            <a:srgbClr val="465359"/>
-          </a:solidFill>
-          <a:ln>
-            <a:noFill/>
-          </a:ln>
-          <a:effectLst/>
-        </p:spPr>
-        <p:style>
-          <a:lnRef idx="1">
-            <a:schemeClr val="accent1"/>
-          </a:lnRef>
-          <a:fillRef idx="3">
-            <a:schemeClr val="accent1"/>
-          </a:fillRef>
-          <a:effectRef idx="2">
-            <a:schemeClr val="accent1"/>
-          </a:effectRef>
-          <a:fontRef idx="minor">
-            <a:schemeClr val="lt1"/>
-          </a:fontRef>
-        </p:style>
-        <p:txBody>
-          <a:bodyPr/>
-          <a:lstStyle/>
-          <a:p>
-            <a:endParaRPr lang="en-US"/>
-          </a:p>
-        </p:txBody>
-      </p:sp>
-      <p:sp useBgFill="1">
-        <p:nvSpPr>
-          <p:cNvPr id="52" name="Rectangle 51">
-            <a:extLst>
-              <a:ext uri="{FF2B5EF4-FFF2-40B4-BE49-F238E27FC236}">
-                <a16:creationId xmlns:a16="http://schemas.microsoft.com/office/drawing/2014/main" id="{26B4480E-B7FF-4481-890E-043A69AE6FE2}"/>
-              </a:ext>
-              <a:ext uri="{C183D7F6-B498-43B3-948B-1728B52AA6E4}">
-                <adec:decorative xmlns:adec="http://schemas.microsoft.com/office/drawing/2017/decorative" val="1"/>
-              </a:ext>
-            </a:extLst>
-          </p:cNvPr>
-          <p:cNvSpPr>
-            <a:spLocks noGrp="1" noRot="1" noChangeAspect="1" noMove="1" noResize="1" noEditPoints="1" noAdjustHandles="1" noChangeArrowheads="1" noChangeShapeType="1" noTextEdit="1"/>
-          </p:cNvSpPr>
-          <p:nvPr>
-            <p:extLst>
-              <p:ext uri="{386F3935-93C4-4BCD-93E2-E3B085C9AB24}">
-                <p16:designElem xmlns:p16="http://schemas.microsoft.com/office/powerpoint/2015/main" val="1"/>
-              </p:ext>
-            </p:extLst>
-          </p:nvPr>
-        </p:nvSpPr>
-        <p:spPr>
-          <a:xfrm>
-            <a:off x="0" y="0"/>
-            <a:ext cx="12192000" cy="6858000"/>
-          </a:xfrm>
-          <a:prstGeom prst="rect">
-            <a:avLst/>
-          </a:prstGeom>
-          <a:ln>
-            <a:noFill/>
-          </a:ln>
-        </p:spPr>
-        <p:style>
-          <a:lnRef idx="2">
-            <a:schemeClr val="accent1">
-              <a:shade val="50000"/>
-            </a:schemeClr>
-          </a:lnRef>
-          <a:fillRef idx="1">
-            <a:schemeClr val="accent1"/>
-          </a:fillRef>
-          <a:effectRef idx="0">
-            <a:schemeClr val="accent1"/>
-          </a:effectRef>
-          <a:fontRef idx="minor">
-            <a:schemeClr val="lt1"/>
-          </a:fontRef>
-        </p:style>
-        <p:txBody>
-          <a:bodyPr rtlCol="0" anchor="ctr"/>
-          <a:lstStyle/>
-          <a:p>
-            <a:pPr algn="ctr"/>
-            <a:endParaRPr lang="en-US"/>
-          </a:p>
-        </p:txBody>
-      </p:sp>
       <p:grpSp>
         <p:nvGrpSpPr>
-          <p:cNvPr id="54" name="Group 53">
+          <p:cNvPr id="21" name="Group 20">
             <a:extLst>
               <a:ext uri="{FF2B5EF4-FFF2-40B4-BE49-F238E27FC236}">
                 <a16:creationId xmlns:a16="http://schemas.microsoft.com/office/drawing/2014/main" id="{79394E1F-0B5F-497D-B2A6-8383A2A54834}"/>
@@ -15769,7 +12261,7 @@
         </p:grpSpPr>
         <p:sp>
           <p:nvSpPr>
-            <p:cNvPr id="55" name="Rectangle 54">
+            <p:cNvPr id="13" name="Rectangle 12">
               <a:extLst>
                 <a:ext uri="{FF2B5EF4-FFF2-40B4-BE49-F238E27FC236}">
                   <a16:creationId xmlns:a16="http://schemas.microsoft.com/office/drawing/2014/main" id="{1F1FF39A-AC3C-4066-9D4C-519AA22812EA}"/>
@@ -15830,7 +12322,7 @@
         </p:sp>
         <p:sp>
           <p:nvSpPr>
-            <p:cNvPr id="56" name="Rectangle 55">
+            <p:cNvPr id="22" name="Rectangle 21">
               <a:extLst>
                 <a:ext uri="{FF2B5EF4-FFF2-40B4-BE49-F238E27FC236}">
                   <a16:creationId xmlns:a16="http://schemas.microsoft.com/office/drawing/2014/main" id="{64C13BAB-7C00-4D21-A857-E3D41C0A2A66}"/>
@@ -15893,6 +12385,3911 @@
           <p:cNvPr id="2" name="Title 1">
             <a:extLst>
               <a:ext uri="{FF2B5EF4-FFF2-40B4-BE49-F238E27FC236}">
+                <a16:creationId xmlns:a16="http://schemas.microsoft.com/office/drawing/2014/main" id="{6F2B2C97-5186-7028-D780-FF0121682503}"/>
+              </a:ext>
+            </a:extLst>
+          </p:cNvPr>
+          <p:cNvSpPr>
+            <a:spLocks noGrp="1"/>
+          </p:cNvSpPr>
+          <p:nvPr>
+            <p:ph type="ctrTitle"/>
+          </p:nvPr>
+        </p:nvSpPr>
+        <p:spPr>
+          <a:xfrm>
+            <a:off x="584200" y="1524001"/>
+            <a:ext cx="3412067" cy="3478384"/>
+          </a:xfrm>
+        </p:spPr>
+        <p:txBody>
+          <a:bodyPr>
+            <a:normAutofit/>
+          </a:bodyPr>
+          <a:lstStyle/>
+          <a:p>
+            <a:r>
+              <a:rPr lang="en-US" dirty="0">
+                <a:solidFill>
+                  <a:srgbClr val="FFFFFF"/>
+                </a:solidFill>
+              </a:rPr>
+              <a:t>Metro Nashville public school budget</a:t>
+            </a:r>
+          </a:p>
+        </p:txBody>
+      </p:sp>
+      <p:pic>
+        <p:nvPicPr>
+          <p:cNvPr id="5" name="Picture 4" descr="A graph of a graph with blue lines&#10;&#10;Description automatically generated with medium confidence">
+            <a:extLst>
+              <a:ext uri="{FF2B5EF4-FFF2-40B4-BE49-F238E27FC236}">
+                <a16:creationId xmlns:a16="http://schemas.microsoft.com/office/drawing/2014/main" id="{BCF71BFC-C8FB-4D8D-0BD8-B3C3B134D0F2}"/>
+              </a:ext>
+            </a:extLst>
+          </p:cNvPr>
+          <p:cNvPicPr>
+            <a:picLocks noChangeAspect="1"/>
+          </p:cNvPicPr>
+          <p:nvPr/>
+        </p:nvPicPr>
+        <p:blipFill>
+          <a:blip r:embed="rId2">
+            <a:extLst>
+              <a:ext uri="{28A0092B-C50C-407E-A947-70E740481C1C}">
+                <a14:useLocalDpi xmlns:a14="http://schemas.microsoft.com/office/drawing/2010/main" val="0"/>
+              </a:ext>
+            </a:extLst>
+          </a:blip>
+          <a:stretch>
+            <a:fillRect/>
+          </a:stretch>
+        </p:blipFill>
+        <p:spPr>
+          <a:xfrm>
+            <a:off x="4765053" y="778849"/>
+            <a:ext cx="6764864" cy="5276593"/>
+          </a:xfrm>
+          <a:prstGeom prst="rect">
+            <a:avLst/>
+          </a:prstGeom>
+        </p:spPr>
+      </p:pic>
+    </p:spTree>
+    <p:extLst>
+      <p:ext uri="{BB962C8B-B14F-4D97-AF65-F5344CB8AC3E}">
+        <p14:creationId xmlns:p14="http://schemas.microsoft.com/office/powerpoint/2010/main" val="1438599671"/>
+      </p:ext>
+    </p:extLst>
+  </p:cSld>
+  <p:clrMapOvr>
+    <a:masterClrMapping/>
+  </p:clrMapOvr>
+</p:sld>
+</file>
+
+<file path=ppt/slides/slide12.xml><?xml version="1.0" encoding="utf-8"?>
+<p:sld xmlns:a="http://schemas.openxmlformats.org/drawingml/2006/main" xmlns:r="http://schemas.openxmlformats.org/officeDocument/2006/relationships" xmlns:p="http://schemas.openxmlformats.org/presentationml/2006/main">
+  <p:cSld>
+    <p:bg>
+      <p:bgPr>
+        <a:solidFill>
+          <a:schemeClr val="bg1"/>
+        </a:solidFill>
+        <a:effectLst/>
+      </p:bgPr>
+    </p:bg>
+    <p:spTree>
+      <p:nvGrpSpPr>
+        <p:cNvPr id="1" name=""/>
+        <p:cNvGrpSpPr/>
+        <p:nvPr/>
+      </p:nvGrpSpPr>
+      <p:grpSpPr>
+        <a:xfrm>
+          <a:off x="0" y="0"/>
+          <a:ext cx="0" cy="0"/>
+          <a:chOff x="0" y="0"/>
+          <a:chExt cx="0" cy="0"/>
+        </a:xfrm>
+      </p:grpSpPr>
+      <p:sp>
+        <p:nvSpPr>
+          <p:cNvPr id="44" name="Rectangle 43">
+            <a:extLst>
+              <a:ext uri="{FF2B5EF4-FFF2-40B4-BE49-F238E27FC236}">
+                <a16:creationId xmlns:a16="http://schemas.microsoft.com/office/drawing/2014/main" id="{DD651B61-325E-4E73-8445-38B0DE8AAAB6}"/>
+              </a:ext>
+              <a:ext uri="{C183D7F6-B498-43B3-948B-1728B52AA6E4}">
+                <adec:decorative xmlns:adec="http://schemas.microsoft.com/office/drawing/2017/decorative" val="1"/>
+              </a:ext>
+            </a:extLst>
+          </p:cNvPr>
+          <p:cNvSpPr>
+            <a:spLocks noGrp="1" noRot="1" noChangeAspect="1" noMove="1" noResize="1" noEditPoints="1" noAdjustHandles="1" noChangeArrowheads="1" noChangeShapeType="1" noTextEdit="1"/>
+          </p:cNvSpPr>
+          <p:nvPr>
+            <p:extLst>
+              <p:ext uri="{386F3935-93C4-4BCD-93E2-E3B085C9AB24}">
+                <p16:designElem xmlns:p16="http://schemas.microsoft.com/office/powerpoint/2015/main" val="1"/>
+              </p:ext>
+            </p:extLst>
+          </p:nvPr>
+        </p:nvSpPr>
+        <p:spPr>
+          <a:xfrm>
+            <a:off x="446534" y="457200"/>
+            <a:ext cx="3703320" cy="94997"/>
+          </a:xfrm>
+          <a:prstGeom prst="rect">
+            <a:avLst/>
+          </a:prstGeom>
+          <a:solidFill>
+            <a:srgbClr val="465359"/>
+          </a:solidFill>
+          <a:ln>
+            <a:noFill/>
+          </a:ln>
+          <a:effectLst/>
+        </p:spPr>
+        <p:style>
+          <a:lnRef idx="1">
+            <a:schemeClr val="accent1"/>
+          </a:lnRef>
+          <a:fillRef idx="3">
+            <a:schemeClr val="accent1"/>
+          </a:fillRef>
+          <a:effectRef idx="2">
+            <a:schemeClr val="accent1"/>
+          </a:effectRef>
+          <a:fontRef idx="minor">
+            <a:schemeClr val="lt1"/>
+          </a:fontRef>
+        </p:style>
+        <p:txBody>
+          <a:bodyPr/>
+          <a:lstStyle/>
+          <a:p>
+            <a:endParaRPr lang="en-US"/>
+          </a:p>
+        </p:txBody>
+      </p:sp>
+      <p:sp>
+        <p:nvSpPr>
+          <p:cNvPr id="46" name="Rectangle 45">
+            <a:extLst>
+              <a:ext uri="{FF2B5EF4-FFF2-40B4-BE49-F238E27FC236}">
+                <a16:creationId xmlns:a16="http://schemas.microsoft.com/office/drawing/2014/main" id="{B42E5253-D3AC-4AC2-B766-8B34F13C2F5E}"/>
+              </a:ext>
+              <a:ext uri="{C183D7F6-B498-43B3-948B-1728B52AA6E4}">
+                <adec:decorative xmlns:adec="http://schemas.microsoft.com/office/drawing/2017/decorative" val="1"/>
+              </a:ext>
+            </a:extLst>
+          </p:cNvPr>
+          <p:cNvSpPr>
+            <a:spLocks noGrp="1" noRot="1" noChangeAspect="1" noMove="1" noResize="1" noEditPoints="1" noAdjustHandles="1" noChangeArrowheads="1" noChangeShapeType="1" noTextEdit="1"/>
+          </p:cNvSpPr>
+          <p:nvPr>
+            <p:extLst>
+              <p:ext uri="{386F3935-93C4-4BCD-93E2-E3B085C9AB24}">
+                <p16:designElem xmlns:p16="http://schemas.microsoft.com/office/powerpoint/2015/main" val="1"/>
+              </p:ext>
+            </p:extLst>
+          </p:nvPr>
+        </p:nvSpPr>
+        <p:spPr>
+          <a:xfrm>
+            <a:off x="8042147" y="453643"/>
+            <a:ext cx="3703320" cy="98554"/>
+          </a:xfrm>
+          <a:prstGeom prst="rect">
+            <a:avLst/>
+          </a:prstGeom>
+          <a:solidFill>
+            <a:srgbClr val="969FA7"/>
+          </a:solidFill>
+          <a:ln>
+            <a:noFill/>
+          </a:ln>
+          <a:effectLst/>
+        </p:spPr>
+        <p:style>
+          <a:lnRef idx="1">
+            <a:schemeClr val="accent1"/>
+          </a:lnRef>
+          <a:fillRef idx="3">
+            <a:schemeClr val="accent1"/>
+          </a:fillRef>
+          <a:effectRef idx="2">
+            <a:schemeClr val="accent1"/>
+          </a:effectRef>
+          <a:fontRef idx="minor">
+            <a:schemeClr val="lt1"/>
+          </a:fontRef>
+        </p:style>
+        <p:txBody>
+          <a:bodyPr/>
+          <a:lstStyle/>
+          <a:p>
+            <a:endParaRPr lang="en-US"/>
+          </a:p>
+        </p:txBody>
+      </p:sp>
+      <p:sp>
+        <p:nvSpPr>
+          <p:cNvPr id="48" name="Rectangle 47">
+            <a:extLst>
+              <a:ext uri="{FF2B5EF4-FFF2-40B4-BE49-F238E27FC236}">
+                <a16:creationId xmlns:a16="http://schemas.microsoft.com/office/drawing/2014/main" id="{10AE8D57-436A-4073-9A75-15BB5949F8B4}"/>
+              </a:ext>
+              <a:ext uri="{C183D7F6-B498-43B3-948B-1728B52AA6E4}">
+                <adec:decorative xmlns:adec="http://schemas.microsoft.com/office/drawing/2017/decorative" val="1"/>
+              </a:ext>
+            </a:extLst>
+          </p:cNvPr>
+          <p:cNvSpPr>
+            <a:spLocks noGrp="1" noRot="1" noChangeAspect="1" noMove="1" noResize="1" noEditPoints="1" noAdjustHandles="1" noChangeArrowheads="1" noChangeShapeType="1" noTextEdit="1"/>
+          </p:cNvSpPr>
+          <p:nvPr>
+            <p:extLst>
+              <p:ext uri="{386F3935-93C4-4BCD-93E2-E3B085C9AB24}">
+                <p16:designElem xmlns:p16="http://schemas.microsoft.com/office/powerpoint/2015/main" val="1"/>
+              </p:ext>
+            </p:extLst>
+          </p:nvPr>
+        </p:nvSpPr>
+        <p:spPr>
+          <a:xfrm>
+            <a:off x="4241830" y="457200"/>
+            <a:ext cx="3703320" cy="91440"/>
+          </a:xfrm>
+          <a:prstGeom prst="rect">
+            <a:avLst/>
+          </a:prstGeom>
+          <a:solidFill>
+            <a:schemeClr val="accent1"/>
+          </a:solidFill>
+          <a:ln>
+            <a:noFill/>
+          </a:ln>
+          <a:effectLst/>
+        </p:spPr>
+        <p:style>
+          <a:lnRef idx="1">
+            <a:schemeClr val="accent1"/>
+          </a:lnRef>
+          <a:fillRef idx="3">
+            <a:schemeClr val="accent1"/>
+          </a:fillRef>
+          <a:effectRef idx="2">
+            <a:schemeClr val="accent1"/>
+          </a:effectRef>
+          <a:fontRef idx="minor">
+            <a:schemeClr val="lt1"/>
+          </a:fontRef>
+        </p:style>
+        <p:txBody>
+          <a:bodyPr/>
+          <a:lstStyle/>
+          <a:p>
+            <a:endParaRPr lang="en-US"/>
+          </a:p>
+        </p:txBody>
+      </p:sp>
+      <p:sp>
+        <p:nvSpPr>
+          <p:cNvPr id="50" name="Rectangle 49">
+            <a:extLst>
+              <a:ext uri="{FF2B5EF4-FFF2-40B4-BE49-F238E27FC236}">
+                <a16:creationId xmlns:a16="http://schemas.microsoft.com/office/drawing/2014/main" id="{E2852671-8EB6-4EAF-8AF8-65CF3FD66456}"/>
+              </a:ext>
+              <a:ext uri="{C183D7F6-B498-43B3-948B-1728B52AA6E4}">
+                <adec:decorative xmlns:adec="http://schemas.microsoft.com/office/drawing/2017/decorative" val="1"/>
+              </a:ext>
+            </a:extLst>
+          </p:cNvPr>
+          <p:cNvSpPr>
+            <a:spLocks noGrp="1" noRot="1" noChangeAspect="1" noMove="1" noResize="1" noEditPoints="1" noAdjustHandles="1" noChangeArrowheads="1" noChangeShapeType="1" noTextEdit="1"/>
+          </p:cNvSpPr>
+          <p:nvPr>
+            <p:extLst>
+              <p:ext uri="{386F3935-93C4-4BCD-93E2-E3B085C9AB24}">
+                <p16:designElem xmlns:p16="http://schemas.microsoft.com/office/powerpoint/2015/main" val="1"/>
+              </p:ext>
+            </p:extLst>
+          </p:nvPr>
+        </p:nvSpPr>
+        <p:spPr>
+          <a:xfrm>
+            <a:off x="446534" y="3085764"/>
+            <a:ext cx="11298932" cy="3338149"/>
+          </a:xfrm>
+          <a:prstGeom prst="rect">
+            <a:avLst/>
+          </a:prstGeom>
+          <a:solidFill>
+            <a:srgbClr val="465359"/>
+          </a:solidFill>
+          <a:ln>
+            <a:noFill/>
+          </a:ln>
+          <a:effectLst/>
+        </p:spPr>
+        <p:style>
+          <a:lnRef idx="1">
+            <a:schemeClr val="accent1"/>
+          </a:lnRef>
+          <a:fillRef idx="3">
+            <a:schemeClr val="accent1"/>
+          </a:fillRef>
+          <a:effectRef idx="2">
+            <a:schemeClr val="accent1"/>
+          </a:effectRef>
+          <a:fontRef idx="minor">
+            <a:schemeClr val="lt1"/>
+          </a:fontRef>
+        </p:style>
+        <p:txBody>
+          <a:bodyPr/>
+          <a:lstStyle/>
+          <a:p>
+            <a:endParaRPr lang="en-US"/>
+          </a:p>
+        </p:txBody>
+      </p:sp>
+      <p:sp useBgFill="1">
+        <p:nvSpPr>
+          <p:cNvPr id="52" name="Rectangle 51">
+            <a:extLst>
+              <a:ext uri="{FF2B5EF4-FFF2-40B4-BE49-F238E27FC236}">
+                <a16:creationId xmlns:a16="http://schemas.microsoft.com/office/drawing/2014/main" id="{7C427EA3-1645-4B27-A5C2-55E8E24C665F}"/>
+              </a:ext>
+              <a:ext uri="{C183D7F6-B498-43B3-948B-1728B52AA6E4}">
+                <adec:decorative xmlns:adec="http://schemas.microsoft.com/office/drawing/2017/decorative" val="1"/>
+              </a:ext>
+            </a:extLst>
+          </p:cNvPr>
+          <p:cNvSpPr>
+            <a:spLocks noGrp="1" noRot="1" noChangeAspect="1" noMove="1" noResize="1" noEditPoints="1" noAdjustHandles="1" noChangeArrowheads="1" noChangeShapeType="1" noTextEdit="1"/>
+          </p:cNvSpPr>
+          <p:nvPr>
+            <p:extLst>
+              <p:ext uri="{386F3935-93C4-4BCD-93E2-E3B085C9AB24}">
+                <p16:designElem xmlns:p16="http://schemas.microsoft.com/office/powerpoint/2015/main" val="1"/>
+              </p:ext>
+            </p:extLst>
+          </p:nvPr>
+        </p:nvSpPr>
+        <p:spPr>
+          <a:xfrm>
+            <a:off x="0" y="0"/>
+            <a:ext cx="12192000" cy="6858000"/>
+          </a:xfrm>
+          <a:prstGeom prst="rect">
+            <a:avLst/>
+          </a:prstGeom>
+          <a:ln>
+            <a:noFill/>
+          </a:ln>
+        </p:spPr>
+        <p:style>
+          <a:lnRef idx="2">
+            <a:schemeClr val="accent1">
+              <a:shade val="50000"/>
+            </a:schemeClr>
+          </a:lnRef>
+          <a:fillRef idx="1">
+            <a:schemeClr val="accent1"/>
+          </a:fillRef>
+          <a:effectRef idx="0">
+            <a:schemeClr val="accent1"/>
+          </a:effectRef>
+          <a:fontRef idx="minor">
+            <a:schemeClr val="lt1"/>
+          </a:fontRef>
+        </p:style>
+        <p:txBody>
+          <a:bodyPr rtlCol="0" anchor="ctr"/>
+          <a:lstStyle/>
+          <a:p>
+            <a:pPr algn="ctr"/>
+            <a:endParaRPr lang="en-US"/>
+          </a:p>
+        </p:txBody>
+      </p:sp>
+      <p:sp>
+        <p:nvSpPr>
+          <p:cNvPr id="54" name="Rectangle 53">
+            <a:extLst>
+              <a:ext uri="{FF2B5EF4-FFF2-40B4-BE49-F238E27FC236}">
+                <a16:creationId xmlns:a16="http://schemas.microsoft.com/office/drawing/2014/main" id="{885CDBF6-7B87-4A58-92CA-E887CA36AF04}"/>
+              </a:ext>
+              <a:ext uri="{C183D7F6-B498-43B3-948B-1728B52AA6E4}">
+                <adec:decorative xmlns:adec="http://schemas.microsoft.com/office/drawing/2017/decorative" val="1"/>
+              </a:ext>
+            </a:extLst>
+          </p:cNvPr>
+          <p:cNvSpPr>
+            <a:spLocks noGrp="1" noRot="1" noChangeAspect="1" noMove="1" noResize="1" noEditPoints="1" noAdjustHandles="1" noChangeArrowheads="1" noChangeShapeType="1" noTextEdit="1"/>
+          </p:cNvSpPr>
+          <p:nvPr>
+            <p:extLst>
+              <p:ext uri="{386F3935-93C4-4BCD-93E2-E3B085C9AB24}">
+                <p16:designElem xmlns:p16="http://schemas.microsoft.com/office/powerpoint/2015/main" val="1"/>
+              </p:ext>
+            </p:extLst>
+          </p:nvPr>
+        </p:nvSpPr>
+        <p:spPr>
+          <a:xfrm>
+            <a:off x="446534" y="457200"/>
+            <a:ext cx="3703320" cy="94997"/>
+          </a:xfrm>
+          <a:prstGeom prst="rect">
+            <a:avLst/>
+          </a:prstGeom>
+          <a:solidFill>
+            <a:srgbClr val="465359"/>
+          </a:solidFill>
+          <a:ln>
+            <a:noFill/>
+          </a:ln>
+          <a:effectLst/>
+        </p:spPr>
+        <p:style>
+          <a:lnRef idx="1">
+            <a:schemeClr val="accent1"/>
+          </a:lnRef>
+          <a:fillRef idx="3">
+            <a:schemeClr val="accent1"/>
+          </a:fillRef>
+          <a:effectRef idx="2">
+            <a:schemeClr val="accent1"/>
+          </a:effectRef>
+          <a:fontRef idx="minor">
+            <a:schemeClr val="lt1"/>
+          </a:fontRef>
+        </p:style>
+        <p:txBody>
+          <a:bodyPr/>
+          <a:lstStyle/>
+          <a:p>
+            <a:endParaRPr lang="en-US"/>
+          </a:p>
+        </p:txBody>
+      </p:sp>
+      <p:sp>
+        <p:nvSpPr>
+          <p:cNvPr id="56" name="Rectangle 55">
+            <a:extLst>
+              <a:ext uri="{FF2B5EF4-FFF2-40B4-BE49-F238E27FC236}">
+                <a16:creationId xmlns:a16="http://schemas.microsoft.com/office/drawing/2014/main" id="{6BFF2B2E-1CF1-403F-BB44-3F9C3E7F67FF}"/>
+              </a:ext>
+              <a:ext uri="{C183D7F6-B498-43B3-948B-1728B52AA6E4}">
+                <adec:decorative xmlns:adec="http://schemas.microsoft.com/office/drawing/2017/decorative" val="1"/>
+              </a:ext>
+            </a:extLst>
+          </p:cNvPr>
+          <p:cNvSpPr>
+            <a:spLocks noGrp="1" noRot="1" noChangeAspect="1" noMove="1" noResize="1" noEditPoints="1" noAdjustHandles="1" noChangeArrowheads="1" noChangeShapeType="1" noTextEdit="1"/>
+          </p:cNvSpPr>
+          <p:nvPr>
+            <p:extLst>
+              <p:ext uri="{386F3935-93C4-4BCD-93E2-E3B085C9AB24}">
+                <p16:designElem xmlns:p16="http://schemas.microsoft.com/office/powerpoint/2015/main" val="1"/>
+              </p:ext>
+            </p:extLst>
+          </p:nvPr>
+        </p:nvSpPr>
+        <p:spPr>
+          <a:xfrm>
+            <a:off x="4241830" y="457200"/>
+            <a:ext cx="3703320" cy="91440"/>
+          </a:xfrm>
+          <a:prstGeom prst="rect">
+            <a:avLst/>
+          </a:prstGeom>
+          <a:solidFill>
+            <a:schemeClr val="accent1"/>
+          </a:solidFill>
+          <a:ln>
+            <a:noFill/>
+          </a:ln>
+          <a:effectLst/>
+        </p:spPr>
+        <p:style>
+          <a:lnRef idx="1">
+            <a:schemeClr val="accent1"/>
+          </a:lnRef>
+          <a:fillRef idx="3">
+            <a:schemeClr val="accent1"/>
+          </a:fillRef>
+          <a:effectRef idx="2">
+            <a:schemeClr val="accent1"/>
+          </a:effectRef>
+          <a:fontRef idx="minor">
+            <a:schemeClr val="lt1"/>
+          </a:fontRef>
+        </p:style>
+        <p:txBody>
+          <a:bodyPr/>
+          <a:lstStyle/>
+          <a:p>
+            <a:endParaRPr lang="en-US"/>
+          </a:p>
+        </p:txBody>
+      </p:sp>
+      <p:sp>
+        <p:nvSpPr>
+          <p:cNvPr id="58" name="Rectangle 57">
+            <a:extLst>
+              <a:ext uri="{FF2B5EF4-FFF2-40B4-BE49-F238E27FC236}">
+                <a16:creationId xmlns:a16="http://schemas.microsoft.com/office/drawing/2014/main" id="{9D8B4D3C-0DE0-43B9-B032-32B536B96D02}"/>
+              </a:ext>
+              <a:ext uri="{C183D7F6-B498-43B3-948B-1728B52AA6E4}">
+                <adec:decorative xmlns:adec="http://schemas.microsoft.com/office/drawing/2017/decorative" val="1"/>
+              </a:ext>
+            </a:extLst>
+          </p:cNvPr>
+          <p:cNvSpPr>
+            <a:spLocks noGrp="1" noRot="1" noChangeAspect="1" noMove="1" noResize="1" noEditPoints="1" noAdjustHandles="1" noChangeArrowheads="1" noChangeShapeType="1" noTextEdit="1"/>
+          </p:cNvSpPr>
+          <p:nvPr>
+            <p:extLst>
+              <p:ext uri="{386F3935-93C4-4BCD-93E2-E3B085C9AB24}">
+                <p16:designElem xmlns:p16="http://schemas.microsoft.com/office/powerpoint/2015/main" val="1"/>
+              </p:ext>
+            </p:extLst>
+          </p:nvPr>
+        </p:nvSpPr>
+        <p:spPr>
+          <a:xfrm>
+            <a:off x="8042147" y="453643"/>
+            <a:ext cx="3703320" cy="98554"/>
+          </a:xfrm>
+          <a:prstGeom prst="rect">
+            <a:avLst/>
+          </a:prstGeom>
+          <a:solidFill>
+            <a:srgbClr val="969FA7"/>
+          </a:solidFill>
+          <a:ln>
+            <a:noFill/>
+          </a:ln>
+          <a:effectLst/>
+        </p:spPr>
+        <p:style>
+          <a:lnRef idx="1">
+            <a:schemeClr val="accent1"/>
+          </a:lnRef>
+          <a:fillRef idx="3">
+            <a:schemeClr val="accent1"/>
+          </a:fillRef>
+          <a:effectRef idx="2">
+            <a:schemeClr val="accent1"/>
+          </a:effectRef>
+          <a:fontRef idx="minor">
+            <a:schemeClr val="lt1"/>
+          </a:fontRef>
+        </p:style>
+        <p:txBody>
+          <a:bodyPr/>
+          <a:lstStyle/>
+          <a:p>
+            <a:endParaRPr lang="en-US"/>
+          </a:p>
+        </p:txBody>
+      </p:sp>
+      <p:pic>
+        <p:nvPicPr>
+          <p:cNvPr id="7" name="Picture 6" descr="A graph of a graph with blue dots&#10;&#10;Description automatically generated">
+            <a:extLst>
+              <a:ext uri="{FF2B5EF4-FFF2-40B4-BE49-F238E27FC236}">
+                <a16:creationId xmlns:a16="http://schemas.microsoft.com/office/drawing/2014/main" id="{53C37A1F-D1F7-165D-CE94-A4648F432A9E}"/>
+              </a:ext>
+            </a:extLst>
+          </p:cNvPr>
+          <p:cNvPicPr>
+            <a:picLocks noChangeAspect="1"/>
+          </p:cNvPicPr>
+          <p:nvPr/>
+        </p:nvPicPr>
+        <p:blipFill>
+          <a:blip r:embed="rId2">
+            <a:extLst>
+              <a:ext uri="{28A0092B-C50C-407E-A947-70E740481C1C}">
+                <a14:useLocalDpi xmlns:a14="http://schemas.microsoft.com/office/drawing/2010/main" val="0"/>
+              </a:ext>
+            </a:extLst>
+          </a:blip>
+          <a:stretch>
+            <a:fillRect/>
+          </a:stretch>
+        </p:blipFill>
+        <p:spPr>
+          <a:xfrm>
+            <a:off x="931166" y="1286337"/>
+            <a:ext cx="6518800" cy="4579457"/>
+          </a:xfrm>
+          <a:prstGeom prst="rect">
+            <a:avLst/>
+          </a:prstGeom>
+        </p:spPr>
+      </p:pic>
+      <p:sp>
+        <p:nvSpPr>
+          <p:cNvPr id="60" name="Rectangle 59">
+            <a:extLst>
+              <a:ext uri="{FF2B5EF4-FFF2-40B4-BE49-F238E27FC236}">
+                <a16:creationId xmlns:a16="http://schemas.microsoft.com/office/drawing/2014/main" id="{707788D3-E467-4E25-A5E9-FD41795BD551}"/>
+              </a:ext>
+              <a:ext uri="{C183D7F6-B498-43B3-948B-1728B52AA6E4}">
+                <adec:decorative xmlns:adec="http://schemas.microsoft.com/office/drawing/2017/decorative" val="1"/>
+              </a:ext>
+            </a:extLst>
+          </p:cNvPr>
+          <p:cNvSpPr>
+            <a:spLocks noGrp="1" noRot="1" noChangeAspect="1" noMove="1" noResize="1" noEditPoints="1" noAdjustHandles="1" noChangeArrowheads="1" noChangeShapeType="1" noTextEdit="1"/>
+          </p:cNvSpPr>
+          <p:nvPr>
+            <p:extLst>
+              <p:ext uri="{386F3935-93C4-4BCD-93E2-E3B085C9AB24}">
+                <p16:designElem xmlns:p16="http://schemas.microsoft.com/office/powerpoint/2015/main" val="1"/>
+              </p:ext>
+            </p:extLst>
+          </p:nvPr>
+        </p:nvSpPr>
+        <p:spPr>
+          <a:xfrm>
+            <a:off x="8042147" y="601200"/>
+            <a:ext cx="3703320" cy="5789365"/>
+          </a:xfrm>
+          <a:prstGeom prst="rect">
+            <a:avLst/>
+          </a:prstGeom>
+          <a:solidFill>
+            <a:srgbClr val="465359"/>
+          </a:solidFill>
+          <a:ln>
+            <a:noFill/>
+          </a:ln>
+          <a:effectLst/>
+        </p:spPr>
+        <p:style>
+          <a:lnRef idx="1">
+            <a:schemeClr val="accent1"/>
+          </a:lnRef>
+          <a:fillRef idx="3">
+            <a:schemeClr val="accent1"/>
+          </a:fillRef>
+          <a:effectRef idx="2">
+            <a:schemeClr val="accent1"/>
+          </a:effectRef>
+          <a:fontRef idx="minor">
+            <a:schemeClr val="lt1"/>
+          </a:fontRef>
+        </p:style>
+        <p:txBody>
+          <a:bodyPr/>
+          <a:lstStyle/>
+          <a:p>
+            <a:endParaRPr lang="en-US"/>
+          </a:p>
+        </p:txBody>
+      </p:sp>
+      <p:sp>
+        <p:nvSpPr>
+          <p:cNvPr id="2" name="Title 1">
+            <a:extLst>
+              <a:ext uri="{FF2B5EF4-FFF2-40B4-BE49-F238E27FC236}">
+                <a16:creationId xmlns:a16="http://schemas.microsoft.com/office/drawing/2014/main" id="{9C80DD40-9D60-A500-15A6-FC02DB1C663B}"/>
+              </a:ext>
+            </a:extLst>
+          </p:cNvPr>
+          <p:cNvSpPr>
+            <a:spLocks noGrp="1"/>
+          </p:cNvSpPr>
+          <p:nvPr>
+            <p:ph type="title"/>
+          </p:nvPr>
+        </p:nvSpPr>
+        <p:spPr>
+          <a:xfrm>
+            <a:off x="8296275" y="1419225"/>
+            <a:ext cx="3081576" cy="2085869"/>
+          </a:xfrm>
+        </p:spPr>
+        <p:txBody>
+          <a:bodyPr vert="horz" lIns="91440" tIns="45720" rIns="91440" bIns="45720" rtlCol="0" anchor="b">
+            <a:normAutofit/>
+          </a:bodyPr>
+          <a:lstStyle/>
+          <a:p>
+            <a:r>
+              <a:rPr lang="en-US" sz="3600" dirty="0">
+                <a:solidFill>
+                  <a:srgbClr val="FFFFFF"/>
+                </a:solidFill>
+              </a:rPr>
+              <a:t>MNPS Budget vs graduation rates</a:t>
+            </a:r>
+          </a:p>
+        </p:txBody>
+      </p:sp>
+      <p:sp>
+        <p:nvSpPr>
+          <p:cNvPr id="9" name="Content Placeholder 8">
+            <a:extLst>
+              <a:ext uri="{FF2B5EF4-FFF2-40B4-BE49-F238E27FC236}">
+                <a16:creationId xmlns:a16="http://schemas.microsoft.com/office/drawing/2014/main" id="{4D453874-0CFD-DC8E-5406-0499D3FBDB12}"/>
+              </a:ext>
+            </a:extLst>
+          </p:cNvPr>
+          <p:cNvSpPr>
+            <a:spLocks noGrp="1"/>
+          </p:cNvSpPr>
+          <p:nvPr>
+            <p:ph idx="1"/>
+          </p:nvPr>
+        </p:nvSpPr>
+        <p:spPr>
+          <a:xfrm>
+            <a:off x="8296275" y="3505095"/>
+            <a:ext cx="3081576" cy="1733655"/>
+          </a:xfrm>
+        </p:spPr>
+        <p:txBody>
+          <a:bodyPr vert="horz" lIns="91440" tIns="45720" rIns="91440" bIns="45720" rtlCol="0" anchor="t">
+            <a:normAutofit/>
+          </a:bodyPr>
+          <a:lstStyle/>
+          <a:p>
+            <a:pPr marL="0" indent="0">
+              <a:buNone/>
+            </a:pPr>
+            <a:r>
+              <a:rPr lang="en-US" sz="1600" kern="1200" cap="all">
+                <a:solidFill>
+                  <a:srgbClr val="FFFFFF">
+                    <a:alpha val="75000"/>
+                  </a:srgbClr>
+                </a:solidFill>
+                <a:latin typeface="+mn-lt"/>
+                <a:ea typeface="+mn-ea"/>
+                <a:cs typeface="+mn-cs"/>
+              </a:rPr>
+              <a:t>The higher the budget, the better the graduation rate?</a:t>
+            </a:r>
+          </a:p>
+        </p:txBody>
+      </p:sp>
+    </p:spTree>
+    <p:extLst>
+      <p:ext uri="{BB962C8B-B14F-4D97-AF65-F5344CB8AC3E}">
+        <p14:creationId xmlns:p14="http://schemas.microsoft.com/office/powerpoint/2010/main" val="3594092534"/>
+      </p:ext>
+    </p:extLst>
+  </p:cSld>
+  <p:clrMapOvr>
+    <a:masterClrMapping/>
+  </p:clrMapOvr>
+</p:sld>
+</file>
+
+<file path=ppt/slides/slide13.xml><?xml version="1.0" encoding="utf-8"?>
+<p:sld xmlns:a="http://schemas.openxmlformats.org/drawingml/2006/main" xmlns:r="http://schemas.openxmlformats.org/officeDocument/2006/relationships" xmlns:p="http://schemas.openxmlformats.org/presentationml/2006/main">
+  <p:cSld>
+    <p:bg>
+      <p:bgPr>
+        <a:solidFill>
+          <a:schemeClr val="bg1"/>
+        </a:solidFill>
+        <a:effectLst/>
+      </p:bgPr>
+    </p:bg>
+    <p:spTree>
+      <p:nvGrpSpPr>
+        <p:cNvPr id="1" name=""/>
+        <p:cNvGrpSpPr/>
+        <p:nvPr/>
+      </p:nvGrpSpPr>
+      <p:grpSpPr>
+        <a:xfrm>
+          <a:off x="0" y="0"/>
+          <a:ext cx="0" cy="0"/>
+          <a:chOff x="0" y="0"/>
+          <a:chExt cx="0" cy="0"/>
+        </a:xfrm>
+      </p:grpSpPr>
+      <p:sp>
+        <p:nvSpPr>
+          <p:cNvPr id="10" name="Rectangle 9">
+            <a:extLst>
+              <a:ext uri="{FF2B5EF4-FFF2-40B4-BE49-F238E27FC236}">
+                <a16:creationId xmlns:a16="http://schemas.microsoft.com/office/drawing/2014/main" id="{E9751CB9-7B25-4EB8-9A6F-82F822549F12}"/>
+              </a:ext>
+              <a:ext uri="{C183D7F6-B498-43B3-948B-1728B52AA6E4}">
+                <adec:decorative xmlns:adec="http://schemas.microsoft.com/office/drawing/2017/decorative" val="1"/>
+              </a:ext>
+            </a:extLst>
+          </p:cNvPr>
+          <p:cNvSpPr>
+            <a:spLocks noGrp="1" noRot="1" noChangeAspect="1" noMove="1" noResize="1" noEditPoints="1" noAdjustHandles="1" noChangeArrowheads="1" noChangeShapeType="1" noTextEdit="1"/>
+          </p:cNvSpPr>
+          <p:nvPr>
+            <p:extLst>
+              <p:ext uri="{386F3935-93C4-4BCD-93E2-E3B085C9AB24}">
+                <p16:designElem xmlns:p16="http://schemas.microsoft.com/office/powerpoint/2015/main" val="1"/>
+              </p:ext>
+            </p:extLst>
+          </p:nvPr>
+        </p:nvSpPr>
+        <p:spPr>
+          <a:xfrm>
+            <a:off x="0" y="0"/>
+            <a:ext cx="12192000" cy="6858000"/>
+          </a:xfrm>
+          <a:prstGeom prst="rect">
+            <a:avLst/>
+          </a:prstGeom>
+          <a:solidFill>
+            <a:srgbClr val="FFFFFF"/>
+          </a:solidFill>
+          <a:ln>
+            <a:noFill/>
+          </a:ln>
+        </p:spPr>
+        <p:style>
+          <a:lnRef idx="2">
+            <a:schemeClr val="accent1">
+              <a:shade val="50000"/>
+            </a:schemeClr>
+          </a:lnRef>
+          <a:fillRef idx="1">
+            <a:schemeClr val="accent1"/>
+          </a:fillRef>
+          <a:effectRef idx="0">
+            <a:schemeClr val="accent1"/>
+          </a:effectRef>
+          <a:fontRef idx="minor">
+            <a:schemeClr val="lt1"/>
+          </a:fontRef>
+        </p:style>
+        <p:txBody>
+          <a:bodyPr rtlCol="0" anchor="ctr"/>
+          <a:lstStyle/>
+          <a:p>
+            <a:pPr algn="ctr"/>
+            <a:endParaRPr lang="en-US"/>
+          </a:p>
+        </p:txBody>
+      </p:sp>
+      <p:sp>
+        <p:nvSpPr>
+          <p:cNvPr id="12" name="Rectangle 11">
+            <a:extLst>
+              <a:ext uri="{FF2B5EF4-FFF2-40B4-BE49-F238E27FC236}">
+                <a16:creationId xmlns:a16="http://schemas.microsoft.com/office/drawing/2014/main" id="{E1317383-CF3B-4B02-9512-BECBEF6362A4}"/>
+              </a:ext>
+              <a:ext uri="{C183D7F6-B498-43B3-948B-1728B52AA6E4}">
+                <adec:decorative xmlns:adec="http://schemas.microsoft.com/office/drawing/2017/decorative" val="1"/>
+              </a:ext>
+            </a:extLst>
+          </p:cNvPr>
+          <p:cNvSpPr>
+            <a:spLocks noGrp="1" noRot="1" noChangeAspect="1" noMove="1" noResize="1" noEditPoints="1" noAdjustHandles="1" noChangeArrowheads="1" noChangeShapeType="1" noTextEdit="1"/>
+          </p:cNvSpPr>
+          <p:nvPr>
+            <p:extLst>
+              <p:ext uri="{386F3935-93C4-4BCD-93E2-E3B085C9AB24}">
+                <p16:designElem xmlns:p16="http://schemas.microsoft.com/office/powerpoint/2015/main" val="1"/>
+              </p:ext>
+            </p:extLst>
+          </p:nvPr>
+        </p:nvSpPr>
+        <p:spPr>
+          <a:xfrm>
+            <a:off x="446534" y="457200"/>
+            <a:ext cx="3703320" cy="94997"/>
+          </a:xfrm>
+          <a:prstGeom prst="rect">
+            <a:avLst/>
+          </a:prstGeom>
+          <a:solidFill>
+            <a:srgbClr val="465359"/>
+          </a:solidFill>
+          <a:ln>
+            <a:noFill/>
+          </a:ln>
+          <a:effectLst/>
+        </p:spPr>
+        <p:style>
+          <a:lnRef idx="1">
+            <a:schemeClr val="accent1"/>
+          </a:lnRef>
+          <a:fillRef idx="3">
+            <a:schemeClr val="accent1"/>
+          </a:fillRef>
+          <a:effectRef idx="2">
+            <a:schemeClr val="accent1"/>
+          </a:effectRef>
+          <a:fontRef idx="minor">
+            <a:schemeClr val="lt1"/>
+          </a:fontRef>
+        </p:style>
+        <p:txBody>
+          <a:bodyPr/>
+          <a:lstStyle/>
+          <a:p>
+            <a:endParaRPr lang="en-US"/>
+          </a:p>
+        </p:txBody>
+      </p:sp>
+      <p:sp>
+        <p:nvSpPr>
+          <p:cNvPr id="14" name="Rectangle 13">
+            <a:extLst>
+              <a:ext uri="{FF2B5EF4-FFF2-40B4-BE49-F238E27FC236}">
+                <a16:creationId xmlns:a16="http://schemas.microsoft.com/office/drawing/2014/main" id="{B1D4C7A0-6DF2-4F2D-A45D-F111582974C7}"/>
+              </a:ext>
+              <a:ext uri="{C183D7F6-B498-43B3-948B-1728B52AA6E4}">
+                <adec:decorative xmlns:adec="http://schemas.microsoft.com/office/drawing/2017/decorative" val="1"/>
+              </a:ext>
+            </a:extLst>
+          </p:cNvPr>
+          <p:cNvSpPr>
+            <a:spLocks noGrp="1" noRot="1" noChangeAspect="1" noMove="1" noResize="1" noEditPoints="1" noAdjustHandles="1" noChangeArrowheads="1" noChangeShapeType="1" noTextEdit="1"/>
+          </p:cNvSpPr>
+          <p:nvPr>
+            <p:extLst>
+              <p:ext uri="{386F3935-93C4-4BCD-93E2-E3B085C9AB24}">
+                <p16:designElem xmlns:p16="http://schemas.microsoft.com/office/powerpoint/2015/main" val="1"/>
+              </p:ext>
+            </p:extLst>
+          </p:nvPr>
+        </p:nvSpPr>
+        <p:spPr>
+          <a:xfrm>
+            <a:off x="4241830" y="457200"/>
+            <a:ext cx="3703320" cy="91440"/>
+          </a:xfrm>
+          <a:prstGeom prst="rect">
+            <a:avLst/>
+          </a:prstGeom>
+          <a:solidFill>
+            <a:schemeClr val="accent1"/>
+          </a:solidFill>
+          <a:ln>
+            <a:noFill/>
+          </a:ln>
+          <a:effectLst/>
+        </p:spPr>
+        <p:style>
+          <a:lnRef idx="1">
+            <a:schemeClr val="accent1"/>
+          </a:lnRef>
+          <a:fillRef idx="3">
+            <a:schemeClr val="accent1"/>
+          </a:fillRef>
+          <a:effectRef idx="2">
+            <a:schemeClr val="accent1"/>
+          </a:effectRef>
+          <a:fontRef idx="minor">
+            <a:schemeClr val="lt1"/>
+          </a:fontRef>
+        </p:style>
+        <p:txBody>
+          <a:bodyPr/>
+          <a:lstStyle/>
+          <a:p>
+            <a:endParaRPr lang="en-US"/>
+          </a:p>
+        </p:txBody>
+      </p:sp>
+      <p:sp>
+        <p:nvSpPr>
+          <p:cNvPr id="16" name="Rectangle 15">
+            <a:extLst>
+              <a:ext uri="{FF2B5EF4-FFF2-40B4-BE49-F238E27FC236}">
+                <a16:creationId xmlns:a16="http://schemas.microsoft.com/office/drawing/2014/main" id="{DBF3943D-BCB6-4B31-809D-A005686483B4}"/>
+              </a:ext>
+              <a:ext uri="{C183D7F6-B498-43B3-948B-1728B52AA6E4}">
+                <adec:decorative xmlns:adec="http://schemas.microsoft.com/office/drawing/2017/decorative" val="1"/>
+              </a:ext>
+            </a:extLst>
+          </p:cNvPr>
+          <p:cNvSpPr>
+            <a:spLocks noGrp="1" noRot="1" noChangeAspect="1" noMove="1" noResize="1" noEditPoints="1" noAdjustHandles="1" noChangeArrowheads="1" noChangeShapeType="1" noTextEdit="1"/>
+          </p:cNvSpPr>
+          <p:nvPr>
+            <p:extLst>
+              <p:ext uri="{386F3935-93C4-4BCD-93E2-E3B085C9AB24}">
+                <p16:designElem xmlns:p16="http://schemas.microsoft.com/office/powerpoint/2015/main" val="1"/>
+              </p:ext>
+            </p:extLst>
+          </p:nvPr>
+        </p:nvSpPr>
+        <p:spPr>
+          <a:xfrm>
+            <a:off x="8042147" y="453643"/>
+            <a:ext cx="3703320" cy="98554"/>
+          </a:xfrm>
+          <a:prstGeom prst="rect">
+            <a:avLst/>
+          </a:prstGeom>
+          <a:solidFill>
+            <a:srgbClr val="969FA7"/>
+          </a:solidFill>
+          <a:ln>
+            <a:noFill/>
+          </a:ln>
+          <a:effectLst/>
+        </p:spPr>
+        <p:style>
+          <a:lnRef idx="1">
+            <a:schemeClr val="accent1"/>
+          </a:lnRef>
+          <a:fillRef idx="3">
+            <a:schemeClr val="accent1"/>
+          </a:fillRef>
+          <a:effectRef idx="2">
+            <a:schemeClr val="accent1"/>
+          </a:effectRef>
+          <a:fontRef idx="minor">
+            <a:schemeClr val="lt1"/>
+          </a:fontRef>
+        </p:style>
+        <p:txBody>
+          <a:bodyPr/>
+          <a:lstStyle/>
+          <a:p>
+            <a:endParaRPr lang="en-US"/>
+          </a:p>
+        </p:txBody>
+      </p:sp>
+      <p:sp>
+        <p:nvSpPr>
+          <p:cNvPr id="18" name="Rectangle 17">
+            <a:extLst>
+              <a:ext uri="{FF2B5EF4-FFF2-40B4-BE49-F238E27FC236}">
+                <a16:creationId xmlns:a16="http://schemas.microsoft.com/office/drawing/2014/main" id="{39373A6F-2E1F-4613-8E1D-D68057D29F31}"/>
+              </a:ext>
+              <a:ext uri="{C183D7F6-B498-43B3-948B-1728B52AA6E4}">
+                <adec:decorative xmlns:adec="http://schemas.microsoft.com/office/drawing/2017/decorative" val="1"/>
+              </a:ext>
+            </a:extLst>
+          </p:cNvPr>
+          <p:cNvSpPr>
+            <a:spLocks noGrp="1" noRot="1" noChangeAspect="1" noMove="1" noResize="1" noEditPoints="1" noAdjustHandles="1" noChangeArrowheads="1" noChangeShapeType="1" noTextEdit="1"/>
+          </p:cNvSpPr>
+          <p:nvPr>
+            <p:extLst>
+              <p:ext uri="{386F3935-93C4-4BCD-93E2-E3B085C9AB24}">
+                <p16:designElem xmlns:p16="http://schemas.microsoft.com/office/powerpoint/2015/main" val="1"/>
+              </p:ext>
+            </p:extLst>
+          </p:nvPr>
+        </p:nvSpPr>
+        <p:spPr>
+          <a:xfrm>
+            <a:off x="442377" y="601200"/>
+            <a:ext cx="3707477" cy="5624979"/>
+          </a:xfrm>
+          <a:prstGeom prst="rect">
+            <a:avLst/>
+          </a:prstGeom>
+          <a:solidFill>
+            <a:srgbClr val="465359"/>
+          </a:solidFill>
+          <a:ln>
+            <a:noFill/>
+          </a:ln>
+          <a:effectLst/>
+        </p:spPr>
+        <p:style>
+          <a:lnRef idx="1">
+            <a:schemeClr val="accent1"/>
+          </a:lnRef>
+          <a:fillRef idx="3">
+            <a:schemeClr val="accent1"/>
+          </a:fillRef>
+          <a:effectRef idx="2">
+            <a:schemeClr val="accent1"/>
+          </a:effectRef>
+          <a:fontRef idx="minor">
+            <a:schemeClr val="lt1"/>
+          </a:fontRef>
+        </p:style>
+        <p:txBody>
+          <a:bodyPr/>
+          <a:lstStyle/>
+          <a:p>
+            <a:endParaRPr lang="en-US"/>
+          </a:p>
+        </p:txBody>
+      </p:sp>
+      <p:sp>
+        <p:nvSpPr>
+          <p:cNvPr id="2" name="Title 1">
+            <a:extLst>
+              <a:ext uri="{FF2B5EF4-FFF2-40B4-BE49-F238E27FC236}">
+                <a16:creationId xmlns:a16="http://schemas.microsoft.com/office/drawing/2014/main" id="{2C25FACA-46F1-2FF6-BF24-DF4098B9F960}"/>
+              </a:ext>
+            </a:extLst>
+          </p:cNvPr>
+          <p:cNvSpPr>
+            <a:spLocks noGrp="1"/>
+          </p:cNvSpPr>
+          <p:nvPr>
+            <p:ph type="title"/>
+          </p:nvPr>
+        </p:nvSpPr>
+        <p:spPr>
+          <a:xfrm>
+            <a:off x="601255" y="702155"/>
+            <a:ext cx="3409783" cy="1300365"/>
+          </a:xfrm>
+        </p:spPr>
+        <p:txBody>
+          <a:bodyPr>
+            <a:normAutofit/>
+          </a:bodyPr>
+          <a:lstStyle/>
+          <a:p>
+            <a:r>
+              <a:rPr lang="en-US">
+                <a:solidFill>
+                  <a:srgbClr val="FFFFFF"/>
+                </a:solidFill>
+              </a:rPr>
+              <a:t>Insights</a:t>
+            </a:r>
+          </a:p>
+        </p:txBody>
+      </p:sp>
+      <p:sp>
+        <p:nvSpPr>
+          <p:cNvPr id="3" name="Content Placeholder 2">
+            <a:extLst>
+              <a:ext uri="{FF2B5EF4-FFF2-40B4-BE49-F238E27FC236}">
+                <a16:creationId xmlns:a16="http://schemas.microsoft.com/office/drawing/2014/main" id="{DE87A645-8FC4-E20C-85CA-9B9483C7A2AE}"/>
+              </a:ext>
+            </a:extLst>
+          </p:cNvPr>
+          <p:cNvSpPr>
+            <a:spLocks noGrp="1"/>
+          </p:cNvSpPr>
+          <p:nvPr>
+            <p:ph idx="1"/>
+          </p:nvPr>
+        </p:nvSpPr>
+        <p:spPr>
+          <a:xfrm>
+            <a:off x="601255" y="2177142"/>
+            <a:ext cx="3409782" cy="3823607"/>
+          </a:xfrm>
+        </p:spPr>
+        <p:txBody>
+          <a:bodyPr>
+            <a:normAutofit/>
+          </a:bodyPr>
+          <a:lstStyle/>
+          <a:p>
+            <a:r>
+              <a:rPr lang="en-US" dirty="0">
+                <a:solidFill>
+                  <a:srgbClr val="FFFFFF"/>
+                </a:solidFill>
+              </a:rPr>
+              <a:t>High crime rates seem to impact everyday factors, such as graduation rates</a:t>
+            </a:r>
+          </a:p>
+          <a:p>
+            <a:r>
+              <a:rPr lang="en-US" dirty="0">
+                <a:solidFill>
+                  <a:srgbClr val="FFFFFF"/>
+                </a:solidFill>
+              </a:rPr>
+              <a:t>School budgets and graduation rates have a correlation</a:t>
+            </a:r>
+          </a:p>
+          <a:p>
+            <a:endParaRPr lang="en-US" dirty="0">
+              <a:solidFill>
+                <a:srgbClr val="FFFFFF"/>
+              </a:solidFill>
+            </a:endParaRPr>
+          </a:p>
+          <a:p>
+            <a:endParaRPr lang="en-US" dirty="0">
+              <a:solidFill>
+                <a:srgbClr val="FFFFFF"/>
+              </a:solidFill>
+            </a:endParaRPr>
+          </a:p>
+        </p:txBody>
+      </p:sp>
+      <p:pic>
+        <p:nvPicPr>
+          <p:cNvPr id="7" name="Graphic 6" descr="Statistics">
+            <a:extLst>
+              <a:ext uri="{FF2B5EF4-FFF2-40B4-BE49-F238E27FC236}">
+                <a16:creationId xmlns:a16="http://schemas.microsoft.com/office/drawing/2014/main" id="{BA318F57-2144-2B0B-5672-77883B08F6F8}"/>
+              </a:ext>
+            </a:extLst>
+          </p:cNvPr>
+          <p:cNvPicPr>
+            <a:picLocks noChangeAspect="1"/>
+          </p:cNvPicPr>
+          <p:nvPr/>
+        </p:nvPicPr>
+        <p:blipFill>
+          <a:blip r:embed="rId3">
+            <a:extLst>
+              <a:ext uri="{28A0092B-C50C-407E-A947-70E740481C1C}">
+                <a14:useLocalDpi xmlns:a14="http://schemas.microsoft.com/office/drawing/2010/main" val="0"/>
+              </a:ext>
+              <a:ext uri="{96DAC541-7B7A-43D3-8B79-37D633B846F1}">
+                <asvg:svgBlip xmlns:asvg="http://schemas.microsoft.com/office/drawing/2016/SVG/main" r:embed="rId4"/>
+              </a:ext>
+            </a:extLst>
+          </a:blip>
+          <a:stretch>
+            <a:fillRect/>
+          </a:stretch>
+        </p:blipFill>
+        <p:spPr>
+          <a:xfrm>
+            <a:off x="5523830" y="936141"/>
+            <a:ext cx="4968305" cy="4968305"/>
+          </a:xfrm>
+          <a:prstGeom prst="rect">
+            <a:avLst/>
+          </a:prstGeom>
+        </p:spPr>
+      </p:pic>
+    </p:spTree>
+    <p:extLst>
+      <p:ext uri="{BB962C8B-B14F-4D97-AF65-F5344CB8AC3E}">
+        <p14:creationId xmlns:p14="http://schemas.microsoft.com/office/powerpoint/2010/main" val="2019857754"/>
+      </p:ext>
+    </p:extLst>
+  </p:cSld>
+  <p:clrMapOvr>
+    <a:overrideClrMapping bg1="dk1" tx1="lt1" bg2="dk2" tx2="lt2" accent1="accent1" accent2="accent2" accent3="accent3" accent4="accent4" accent5="accent5" accent6="accent6" hlink="hlink" folHlink="folHlink"/>
+  </p:clrMapOvr>
+</p:sld>
+</file>
+
+<file path=ppt/slides/slide14.xml><?xml version="1.0" encoding="utf-8"?>
+<p:sld xmlns:a="http://schemas.openxmlformats.org/drawingml/2006/main" xmlns:r="http://schemas.openxmlformats.org/officeDocument/2006/relationships" xmlns:p="http://schemas.openxmlformats.org/presentationml/2006/main">
+  <p:cSld>
+    <p:bg>
+      <p:bgPr>
+        <a:solidFill>
+          <a:schemeClr val="bg2"/>
+        </a:solidFill>
+        <a:effectLst/>
+      </p:bgPr>
+    </p:bg>
+    <p:spTree>
+      <p:nvGrpSpPr>
+        <p:cNvPr id="1" name=""/>
+        <p:cNvGrpSpPr/>
+        <p:nvPr/>
+      </p:nvGrpSpPr>
+      <p:grpSpPr>
+        <a:xfrm>
+          <a:off x="0" y="0"/>
+          <a:ext cx="0" cy="0"/>
+          <a:chOff x="0" y="0"/>
+          <a:chExt cx="0" cy="0"/>
+        </a:xfrm>
+      </p:grpSpPr>
+      <p:sp>
+        <p:nvSpPr>
+          <p:cNvPr id="96" name="Rectangle 95">
+            <a:extLst>
+              <a:ext uri="{FF2B5EF4-FFF2-40B4-BE49-F238E27FC236}">
+                <a16:creationId xmlns:a16="http://schemas.microsoft.com/office/drawing/2014/main" id="{88C97474-5879-4DB5-B4F3-F0357104BC8E}"/>
+              </a:ext>
+              <a:ext uri="{C183D7F6-B498-43B3-948B-1728B52AA6E4}">
+                <adec:decorative xmlns:adec="http://schemas.microsoft.com/office/drawing/2017/decorative" val="1"/>
+              </a:ext>
+            </a:extLst>
+          </p:cNvPr>
+          <p:cNvSpPr>
+            <a:spLocks noGrp="1" noRot="1" noChangeAspect="1" noMove="1" noResize="1" noEditPoints="1" noAdjustHandles="1" noChangeArrowheads="1" noChangeShapeType="1" noTextEdit="1"/>
+          </p:cNvSpPr>
+          <p:nvPr>
+            <p:extLst>
+              <p:ext uri="{386F3935-93C4-4BCD-93E2-E3B085C9AB24}">
+                <p16:designElem xmlns:p16="http://schemas.microsoft.com/office/powerpoint/2015/main" val="1"/>
+              </p:ext>
+            </p:extLst>
+          </p:nvPr>
+        </p:nvSpPr>
+        <p:spPr>
+          <a:xfrm>
+            <a:off x="0" y="0"/>
+            <a:ext cx="12192000" cy="6858000"/>
+          </a:xfrm>
+          <a:prstGeom prst="rect">
+            <a:avLst/>
+          </a:prstGeom>
+          <a:solidFill>
+            <a:schemeClr val="tx1"/>
+          </a:solidFill>
+          <a:ln>
+            <a:noFill/>
+          </a:ln>
+        </p:spPr>
+        <p:style>
+          <a:lnRef idx="2">
+            <a:schemeClr val="accent1">
+              <a:shade val="50000"/>
+            </a:schemeClr>
+          </a:lnRef>
+          <a:fillRef idx="1">
+            <a:schemeClr val="accent1"/>
+          </a:fillRef>
+          <a:effectRef idx="0">
+            <a:schemeClr val="accent1"/>
+          </a:effectRef>
+          <a:fontRef idx="minor">
+            <a:schemeClr val="lt1"/>
+          </a:fontRef>
+        </p:style>
+        <p:txBody>
+          <a:bodyPr rtlCol="0" anchor="ctr"/>
+          <a:lstStyle/>
+          <a:p>
+            <a:pPr algn="ctr"/>
+            <a:endParaRPr lang="en-US"/>
+          </a:p>
+        </p:txBody>
+      </p:sp>
+      <p:sp>
+        <p:nvSpPr>
+          <p:cNvPr id="98" name="Rectangle 97">
+            <a:extLst>
+              <a:ext uri="{FF2B5EF4-FFF2-40B4-BE49-F238E27FC236}">
+                <a16:creationId xmlns:a16="http://schemas.microsoft.com/office/drawing/2014/main" id="{7D2AF00E-D433-4047-863F-BCB69CEC3C35}"/>
+              </a:ext>
+              <a:ext uri="{C183D7F6-B498-43B3-948B-1728B52AA6E4}">
+                <adec:decorative xmlns:adec="http://schemas.microsoft.com/office/drawing/2017/decorative" val="1"/>
+              </a:ext>
+            </a:extLst>
+          </p:cNvPr>
+          <p:cNvSpPr>
+            <a:spLocks noGrp="1" noRot="1" noChangeAspect="1" noMove="1" noResize="1" noEditPoints="1" noAdjustHandles="1" noChangeArrowheads="1" noChangeShapeType="1" noTextEdit="1"/>
+          </p:cNvSpPr>
+          <p:nvPr>
+            <p:extLst>
+              <p:ext uri="{386F3935-93C4-4BCD-93E2-E3B085C9AB24}">
+                <p16:designElem xmlns:p16="http://schemas.microsoft.com/office/powerpoint/2015/main" val="1"/>
+              </p:ext>
+            </p:extLst>
+          </p:nvPr>
+        </p:nvSpPr>
+        <p:spPr>
+          <a:xfrm>
+            <a:off x="451588" y="601200"/>
+            <a:ext cx="7498616" cy="5789365"/>
+          </a:xfrm>
+          <a:prstGeom prst="rect">
+            <a:avLst/>
+          </a:prstGeom>
+          <a:solidFill>
+            <a:srgbClr val="465359"/>
+          </a:solidFill>
+          <a:ln>
+            <a:noFill/>
+          </a:ln>
+          <a:effectLst/>
+        </p:spPr>
+        <p:style>
+          <a:lnRef idx="1">
+            <a:schemeClr val="accent1"/>
+          </a:lnRef>
+          <a:fillRef idx="3">
+            <a:schemeClr val="accent1"/>
+          </a:fillRef>
+          <a:effectRef idx="2">
+            <a:schemeClr val="accent1"/>
+          </a:effectRef>
+          <a:fontRef idx="minor">
+            <a:schemeClr val="lt1"/>
+          </a:fontRef>
+        </p:style>
+        <p:txBody>
+          <a:bodyPr/>
+          <a:lstStyle/>
+          <a:p>
+            <a:endParaRPr lang="en-US"/>
+          </a:p>
+        </p:txBody>
+      </p:sp>
+      <p:sp>
+        <p:nvSpPr>
+          <p:cNvPr id="2" name="Title 1">
+            <a:extLst>
+              <a:ext uri="{FF2B5EF4-FFF2-40B4-BE49-F238E27FC236}">
+                <a16:creationId xmlns:a16="http://schemas.microsoft.com/office/drawing/2014/main" id="{F06B1E98-B9C9-B918-51BC-154E1DBCC268}"/>
+              </a:ext>
+            </a:extLst>
+          </p:cNvPr>
+          <p:cNvSpPr>
+            <a:spLocks noGrp="1"/>
+          </p:cNvSpPr>
+          <p:nvPr>
+            <p:ph type="title"/>
+          </p:nvPr>
+        </p:nvSpPr>
+        <p:spPr>
+          <a:xfrm>
+            <a:off x="807559" y="938022"/>
+            <a:ext cx="6647905" cy="1188720"/>
+          </a:xfrm>
+        </p:spPr>
+        <p:txBody>
+          <a:bodyPr vert="horz" lIns="91440" tIns="45720" rIns="91440" bIns="45720" rtlCol="0" anchor="b">
+            <a:normAutofit/>
+          </a:bodyPr>
+          <a:lstStyle/>
+          <a:p>
+            <a:r>
+              <a:rPr lang="en-US" sz="2800">
+                <a:solidFill>
+                  <a:srgbClr val="FFFFFF"/>
+                </a:solidFill>
+              </a:rPr>
+              <a:t>Questions?</a:t>
+            </a:r>
+          </a:p>
+        </p:txBody>
+      </p:sp>
+      <p:sp>
+        <p:nvSpPr>
+          <p:cNvPr id="100" name="Rectangle 99">
+            <a:extLst>
+              <a:ext uri="{FF2B5EF4-FFF2-40B4-BE49-F238E27FC236}">
+                <a16:creationId xmlns:a16="http://schemas.microsoft.com/office/drawing/2014/main" id="{0997DBEA-6DFC-457A-9850-E535053549D6}"/>
+              </a:ext>
+              <a:ext uri="{C183D7F6-B498-43B3-948B-1728B52AA6E4}">
+                <adec:decorative xmlns:adec="http://schemas.microsoft.com/office/drawing/2017/decorative" val="1"/>
+              </a:ext>
+            </a:extLst>
+          </p:cNvPr>
+          <p:cNvSpPr>
+            <a:spLocks noGrp="1" noRot="1" noChangeAspect="1" noMove="1" noResize="1" noEditPoints="1" noAdjustHandles="1" noChangeArrowheads="1" noChangeShapeType="1" noTextEdit="1"/>
+          </p:cNvSpPr>
+          <p:nvPr>
+            <p:extLst>
+              <p:ext uri="{386F3935-93C4-4BCD-93E2-E3B085C9AB24}">
+                <p16:designElem xmlns:p16="http://schemas.microsoft.com/office/powerpoint/2015/main" val="1"/>
+              </p:ext>
+            </p:extLst>
+          </p:nvPr>
+        </p:nvSpPr>
+        <p:spPr>
+          <a:xfrm>
+            <a:off x="446534" y="457200"/>
+            <a:ext cx="3703320" cy="94997"/>
+          </a:xfrm>
+          <a:prstGeom prst="rect">
+            <a:avLst/>
+          </a:prstGeom>
+          <a:solidFill>
+            <a:srgbClr val="465359"/>
+          </a:solidFill>
+          <a:ln>
+            <a:noFill/>
+          </a:ln>
+          <a:effectLst/>
+        </p:spPr>
+        <p:style>
+          <a:lnRef idx="1">
+            <a:schemeClr val="accent1"/>
+          </a:lnRef>
+          <a:fillRef idx="3">
+            <a:schemeClr val="accent1"/>
+          </a:fillRef>
+          <a:effectRef idx="2">
+            <a:schemeClr val="accent1"/>
+          </a:effectRef>
+          <a:fontRef idx="minor">
+            <a:schemeClr val="lt1"/>
+          </a:fontRef>
+        </p:style>
+        <p:txBody>
+          <a:bodyPr/>
+          <a:lstStyle/>
+          <a:p>
+            <a:endParaRPr lang="en-US"/>
+          </a:p>
+        </p:txBody>
+      </p:sp>
+      <p:sp>
+        <p:nvSpPr>
+          <p:cNvPr id="102" name="Rectangle 101">
+            <a:extLst>
+              <a:ext uri="{FF2B5EF4-FFF2-40B4-BE49-F238E27FC236}">
+                <a16:creationId xmlns:a16="http://schemas.microsoft.com/office/drawing/2014/main" id="{79446CF5-953A-4916-BFF4-F5558E5C2359}"/>
+              </a:ext>
+              <a:ext uri="{C183D7F6-B498-43B3-948B-1728B52AA6E4}">
+                <adec:decorative xmlns:adec="http://schemas.microsoft.com/office/drawing/2017/decorative" val="1"/>
+              </a:ext>
+            </a:extLst>
+          </p:cNvPr>
+          <p:cNvSpPr>
+            <a:spLocks noGrp="1" noRot="1" noChangeAspect="1" noMove="1" noResize="1" noEditPoints="1" noAdjustHandles="1" noChangeArrowheads="1" noChangeShapeType="1" noTextEdit="1"/>
+          </p:cNvSpPr>
+          <p:nvPr>
+            <p:extLst>
+              <p:ext uri="{386F3935-93C4-4BCD-93E2-E3B085C9AB24}">
+                <p16:designElem xmlns:p16="http://schemas.microsoft.com/office/powerpoint/2015/main" val="1"/>
+              </p:ext>
+            </p:extLst>
+          </p:nvPr>
+        </p:nvSpPr>
+        <p:spPr>
+          <a:xfrm>
+            <a:off x="4241830" y="457200"/>
+            <a:ext cx="3703320" cy="91440"/>
+          </a:xfrm>
+          <a:prstGeom prst="rect">
+            <a:avLst/>
+          </a:prstGeom>
+          <a:solidFill>
+            <a:schemeClr val="accent1"/>
+          </a:solidFill>
+          <a:ln>
+            <a:noFill/>
+          </a:ln>
+          <a:effectLst/>
+        </p:spPr>
+        <p:style>
+          <a:lnRef idx="1">
+            <a:schemeClr val="accent1"/>
+          </a:lnRef>
+          <a:fillRef idx="3">
+            <a:schemeClr val="accent1"/>
+          </a:fillRef>
+          <a:effectRef idx="2">
+            <a:schemeClr val="accent1"/>
+          </a:effectRef>
+          <a:fontRef idx="minor">
+            <a:schemeClr val="lt1"/>
+          </a:fontRef>
+        </p:style>
+        <p:txBody>
+          <a:bodyPr/>
+          <a:lstStyle/>
+          <a:p>
+            <a:endParaRPr lang="en-US"/>
+          </a:p>
+        </p:txBody>
+      </p:sp>
+      <p:sp>
+        <p:nvSpPr>
+          <p:cNvPr id="104" name="Rectangle 103">
+            <a:extLst>
+              <a:ext uri="{FF2B5EF4-FFF2-40B4-BE49-F238E27FC236}">
+                <a16:creationId xmlns:a16="http://schemas.microsoft.com/office/drawing/2014/main" id="{477B945C-B433-4DFF-9A67-A5C9257E471C}"/>
+              </a:ext>
+              <a:ext uri="{C183D7F6-B498-43B3-948B-1728B52AA6E4}">
+                <adec:decorative xmlns:adec="http://schemas.microsoft.com/office/drawing/2017/decorative" val="1"/>
+              </a:ext>
+            </a:extLst>
+          </p:cNvPr>
+          <p:cNvSpPr>
+            <a:spLocks noGrp="1" noRot="1" noChangeAspect="1" noMove="1" noResize="1" noEditPoints="1" noAdjustHandles="1" noChangeArrowheads="1" noChangeShapeType="1" noTextEdit="1"/>
+          </p:cNvSpPr>
+          <p:nvPr>
+            <p:extLst>
+              <p:ext uri="{386F3935-93C4-4BCD-93E2-E3B085C9AB24}">
+                <p16:designElem xmlns:p16="http://schemas.microsoft.com/office/powerpoint/2015/main" val="1"/>
+              </p:ext>
+            </p:extLst>
+          </p:nvPr>
+        </p:nvSpPr>
+        <p:spPr>
+          <a:xfrm>
+            <a:off x="8042147" y="453643"/>
+            <a:ext cx="3703320" cy="98554"/>
+          </a:xfrm>
+          <a:prstGeom prst="rect">
+            <a:avLst/>
+          </a:prstGeom>
+          <a:solidFill>
+            <a:srgbClr val="969FA7"/>
+          </a:solidFill>
+          <a:ln>
+            <a:noFill/>
+          </a:ln>
+          <a:effectLst/>
+        </p:spPr>
+        <p:style>
+          <a:lnRef idx="1">
+            <a:schemeClr val="accent1"/>
+          </a:lnRef>
+          <a:fillRef idx="3">
+            <a:schemeClr val="accent1"/>
+          </a:fillRef>
+          <a:effectRef idx="2">
+            <a:schemeClr val="accent1"/>
+          </a:effectRef>
+          <a:fontRef idx="minor">
+            <a:schemeClr val="lt1"/>
+          </a:fontRef>
+        </p:style>
+        <p:txBody>
+          <a:bodyPr/>
+          <a:lstStyle/>
+          <a:p>
+            <a:endParaRPr lang="en-US"/>
+          </a:p>
+        </p:txBody>
+      </p:sp>
+      <p:sp>
+        <p:nvSpPr>
+          <p:cNvPr id="3" name="TextBox 2">
+            <a:extLst>
+              <a:ext uri="{FF2B5EF4-FFF2-40B4-BE49-F238E27FC236}">
+                <a16:creationId xmlns:a16="http://schemas.microsoft.com/office/drawing/2014/main" id="{D5D51A80-8BF3-5444-B770-60636C05F9DB}"/>
+              </a:ext>
+            </a:extLst>
+          </p:cNvPr>
+          <p:cNvSpPr txBox="1"/>
+          <p:nvPr/>
+        </p:nvSpPr>
+        <p:spPr>
+          <a:xfrm>
+            <a:off x="807559" y="2340864"/>
+            <a:ext cx="6690843" cy="3793237"/>
+          </a:xfrm>
+          <a:prstGeom prst="rect">
+            <a:avLst/>
+          </a:prstGeom>
+        </p:spPr>
+        <p:txBody>
+          <a:bodyPr vert="horz" lIns="91440" tIns="45720" rIns="91440" bIns="45720" rtlCol="0" anchor="ctr">
+            <a:normAutofit/>
+          </a:bodyPr>
+          <a:lstStyle/>
+          <a:p>
+            <a:pPr defTabSz="457200">
+              <a:spcBef>
+                <a:spcPct val="20000"/>
+              </a:spcBef>
+              <a:spcAft>
+                <a:spcPts val="600"/>
+              </a:spcAft>
+              <a:buClr>
+                <a:schemeClr val="accent1"/>
+              </a:buClr>
+              <a:buSzPct val="92000"/>
+            </a:pPr>
+            <a:r>
+              <a:rPr lang="en-US" dirty="0">
+                <a:solidFill>
+                  <a:srgbClr val="FFFFFF"/>
+                </a:solidFill>
+              </a:rPr>
+              <a:t>Thank you for your time!</a:t>
+            </a:r>
+          </a:p>
+          <a:p>
+            <a:pPr defTabSz="457200">
+              <a:spcBef>
+                <a:spcPct val="20000"/>
+              </a:spcBef>
+              <a:spcAft>
+                <a:spcPts val="600"/>
+              </a:spcAft>
+              <a:buClr>
+                <a:schemeClr val="accent1"/>
+              </a:buClr>
+              <a:buSzPct val="92000"/>
+            </a:pPr>
+            <a:r>
+              <a:rPr lang="en-US" dirty="0">
+                <a:solidFill>
+                  <a:srgbClr val="FFFFFF"/>
+                </a:solidFill>
+              </a:rPr>
+              <a:t>Please feel free to reach out with any follow-up questions</a:t>
+            </a:r>
+          </a:p>
+          <a:p>
+            <a:pPr defTabSz="457200">
+              <a:spcBef>
+                <a:spcPct val="20000"/>
+              </a:spcBef>
+              <a:spcAft>
+                <a:spcPts val="600"/>
+              </a:spcAft>
+              <a:buClr>
+                <a:schemeClr val="accent1"/>
+              </a:buClr>
+              <a:buSzPct val="92000"/>
+            </a:pPr>
+            <a:endParaRPr lang="en-US" dirty="0">
+              <a:solidFill>
+                <a:srgbClr val="FFFFFF"/>
+              </a:solidFill>
+            </a:endParaRPr>
+          </a:p>
+          <a:p>
+            <a:pPr defTabSz="457200">
+              <a:spcBef>
+                <a:spcPct val="20000"/>
+              </a:spcBef>
+              <a:spcAft>
+                <a:spcPts val="600"/>
+              </a:spcAft>
+              <a:buClr>
+                <a:schemeClr val="accent1"/>
+              </a:buClr>
+              <a:buSzPct val="92000"/>
+            </a:pPr>
+            <a:r>
+              <a:rPr lang="en-US" dirty="0">
+                <a:solidFill>
+                  <a:srgbClr val="FFFFFF"/>
+                </a:solidFill>
+              </a:rPr>
+              <a:t>Contact Info:</a:t>
+            </a:r>
+          </a:p>
+          <a:p>
+            <a:pPr defTabSz="457200">
+              <a:spcBef>
+                <a:spcPct val="20000"/>
+              </a:spcBef>
+              <a:spcAft>
+                <a:spcPts val="600"/>
+              </a:spcAft>
+              <a:buClr>
+                <a:schemeClr val="accent1"/>
+              </a:buClr>
+              <a:buSzPct val="92000"/>
+            </a:pPr>
+            <a:r>
+              <a:rPr lang="en-US" dirty="0">
+                <a:solidFill>
+                  <a:srgbClr val="FFFFFF"/>
+                </a:solidFill>
+              </a:rPr>
+              <a:t>Erica Henley</a:t>
+            </a:r>
+          </a:p>
+          <a:p>
+            <a:pPr defTabSz="457200">
+              <a:spcBef>
+                <a:spcPct val="20000"/>
+              </a:spcBef>
+              <a:spcAft>
+                <a:spcPts val="600"/>
+              </a:spcAft>
+              <a:buClr>
+                <a:schemeClr val="accent1"/>
+              </a:buClr>
+              <a:buSzPct val="92000"/>
+            </a:pPr>
+            <a:r>
+              <a:rPr lang="en-US" dirty="0">
+                <a:solidFill>
+                  <a:srgbClr val="FFFFFF"/>
+                </a:solidFill>
+              </a:rPr>
+              <a:t>henley.er@gmail.com</a:t>
+            </a:r>
+          </a:p>
+          <a:p>
+            <a:pPr defTabSz="457200">
+              <a:spcBef>
+                <a:spcPct val="20000"/>
+              </a:spcBef>
+              <a:spcAft>
+                <a:spcPts val="600"/>
+              </a:spcAft>
+              <a:buClr>
+                <a:schemeClr val="accent1"/>
+              </a:buClr>
+              <a:buSzPct val="92000"/>
+            </a:pPr>
+            <a:r>
+              <a:rPr lang="en-US" dirty="0">
+                <a:solidFill>
+                  <a:srgbClr val="FFFFFF"/>
+                </a:solidFill>
+              </a:rPr>
+              <a:t>870-560-8192</a:t>
+            </a:r>
+          </a:p>
+        </p:txBody>
+      </p:sp>
+      <p:pic>
+        <p:nvPicPr>
+          <p:cNvPr id="20" name="Graphic 19" descr="Question mark">
+            <a:extLst>
+              <a:ext uri="{FF2B5EF4-FFF2-40B4-BE49-F238E27FC236}">
+                <a16:creationId xmlns:a16="http://schemas.microsoft.com/office/drawing/2014/main" id="{3C1CB461-ECED-48F4-BE1D-66E16AF92F07}"/>
+              </a:ext>
+            </a:extLst>
+          </p:cNvPr>
+          <p:cNvPicPr>
+            <a:picLocks noChangeAspect="1"/>
+          </p:cNvPicPr>
+          <p:nvPr/>
+        </p:nvPicPr>
+        <p:blipFill>
+          <a:blip r:embed="rId2">
+            <a:extLst>
+              <a:ext uri="{28A0092B-C50C-407E-A947-70E740481C1C}">
+                <a14:useLocalDpi xmlns:a14="http://schemas.microsoft.com/office/drawing/2010/main" val="0"/>
+              </a:ext>
+              <a:ext uri="{96DAC541-7B7A-43D3-8B79-37D633B846F1}">
+                <asvg:svgBlip xmlns:asvg="http://schemas.microsoft.com/office/drawing/2016/SVG/main" r:embed="rId3"/>
+              </a:ext>
+            </a:extLst>
+          </a:blip>
+          <a:stretch>
+            <a:fillRect/>
+          </a:stretch>
+        </p:blipFill>
+        <p:spPr>
+          <a:xfrm>
+            <a:off x="8476761" y="2049354"/>
+            <a:ext cx="3053422" cy="3053422"/>
+          </a:xfrm>
+          <a:prstGeom prst="rect">
+            <a:avLst/>
+          </a:prstGeom>
+        </p:spPr>
+      </p:pic>
+    </p:spTree>
+    <p:extLst>
+      <p:ext uri="{BB962C8B-B14F-4D97-AF65-F5344CB8AC3E}">
+        <p14:creationId xmlns:p14="http://schemas.microsoft.com/office/powerpoint/2010/main" val="2936329483"/>
+      </p:ext>
+    </p:extLst>
+  </p:cSld>
+  <p:clrMapOvr>
+    <a:overrideClrMapping bg1="dk1" tx1="lt1" bg2="dk2" tx2="lt2" accent1="accent1" accent2="accent2" accent3="accent3" accent4="accent4" accent5="accent5" accent6="accent6" hlink="hlink" folHlink="folHlink"/>
+  </p:clrMapOvr>
+</p:sld>
+</file>
+
+<file path=ppt/slides/slide2.xml><?xml version="1.0" encoding="utf-8"?>
+<p:sld xmlns:a="http://schemas.openxmlformats.org/drawingml/2006/main" xmlns:r="http://schemas.openxmlformats.org/officeDocument/2006/relationships" xmlns:p="http://schemas.openxmlformats.org/presentationml/2006/main">
+  <p:cSld>
+    <p:bg>
+      <p:bgPr>
+        <a:solidFill>
+          <a:schemeClr val="bg1"/>
+        </a:solidFill>
+        <a:effectLst/>
+      </p:bgPr>
+    </p:bg>
+    <p:spTree>
+      <p:nvGrpSpPr>
+        <p:cNvPr id="1" name=""/>
+        <p:cNvGrpSpPr/>
+        <p:nvPr/>
+      </p:nvGrpSpPr>
+      <p:grpSpPr>
+        <a:xfrm>
+          <a:off x="0" y="0"/>
+          <a:ext cx="0" cy="0"/>
+          <a:chOff x="0" y="0"/>
+          <a:chExt cx="0" cy="0"/>
+        </a:xfrm>
+      </p:grpSpPr>
+      <p:sp>
+        <p:nvSpPr>
+          <p:cNvPr id="20" name="Rectangle 19">
+            <a:extLst>
+              <a:ext uri="{FF2B5EF4-FFF2-40B4-BE49-F238E27FC236}">
+                <a16:creationId xmlns:a16="http://schemas.microsoft.com/office/drawing/2014/main" id="{BFABBCE0-E08C-4BBE-9FD2-E2B253D4D5F2}"/>
+              </a:ext>
+              <a:ext uri="{C183D7F6-B498-43B3-948B-1728B52AA6E4}">
+                <adec:decorative xmlns:adec="http://schemas.microsoft.com/office/drawing/2017/decorative" val="1"/>
+              </a:ext>
+            </a:extLst>
+          </p:cNvPr>
+          <p:cNvSpPr>
+            <a:spLocks noGrp="1" noRot="1" noChangeAspect="1" noMove="1" noResize="1" noEditPoints="1" noAdjustHandles="1" noChangeArrowheads="1" noChangeShapeType="1" noTextEdit="1"/>
+          </p:cNvSpPr>
+          <p:nvPr>
+            <p:extLst>
+              <p:ext uri="{386F3935-93C4-4BCD-93E2-E3B085C9AB24}">
+                <p16:designElem xmlns:p16="http://schemas.microsoft.com/office/powerpoint/2015/main" val="1"/>
+              </p:ext>
+            </p:extLst>
+          </p:nvPr>
+        </p:nvSpPr>
+        <p:spPr>
+          <a:xfrm>
+            <a:off x="0" y="0"/>
+            <a:ext cx="12192000" cy="6857999"/>
+          </a:xfrm>
+          <a:prstGeom prst="rect">
+            <a:avLst/>
+          </a:prstGeom>
+          <a:solidFill>
+            <a:schemeClr val="bg1">
+              <a:lumMod val="75000"/>
+              <a:lumOff val="25000"/>
+            </a:schemeClr>
+          </a:solidFill>
+          <a:ln>
+            <a:noFill/>
+          </a:ln>
+        </p:spPr>
+        <p:style>
+          <a:lnRef idx="2">
+            <a:schemeClr val="accent1">
+              <a:shade val="50000"/>
+            </a:schemeClr>
+          </a:lnRef>
+          <a:fillRef idx="1">
+            <a:schemeClr val="accent1"/>
+          </a:fillRef>
+          <a:effectRef idx="0">
+            <a:schemeClr val="accent1"/>
+          </a:effectRef>
+          <a:fontRef idx="minor">
+            <a:schemeClr val="lt1"/>
+          </a:fontRef>
+        </p:style>
+        <p:txBody>
+          <a:bodyPr rtlCol="0" anchor="ctr"/>
+          <a:lstStyle/>
+          <a:p>
+            <a:pPr marL="0" marR="0" lvl="0" indent="0" algn="ctr" defTabSz="457200" rtl="0" eaLnBrk="1" fontAlgn="auto" latinLnBrk="0" hangingPunct="1">
+              <a:lnSpc>
+                <a:spcPct val="100000"/>
+              </a:lnSpc>
+              <a:spcBef>
+                <a:spcPts val="0"/>
+              </a:spcBef>
+              <a:spcAft>
+                <a:spcPts val="0"/>
+              </a:spcAft>
+              <a:buClrTx/>
+              <a:buSzTx/>
+              <a:buFontTx/>
+              <a:buNone/>
+              <a:tabLst/>
+              <a:defRPr/>
+            </a:pPr>
+            <a:endParaRPr kumimoji="0" lang="en-US" sz="1800" b="0" i="0" u="none" strike="noStrike" kern="1200" cap="none" spc="0" normalizeH="0" baseline="0" noProof="0">
+              <a:ln>
+                <a:noFill/>
+              </a:ln>
+              <a:solidFill>
+                <a:prstClr val="white"/>
+              </a:solidFill>
+              <a:effectLst/>
+              <a:uLnTx/>
+              <a:uFillTx/>
+              <a:latin typeface="Gill Sans MT" panose="020B0502020104020203"/>
+              <a:ea typeface="+mn-ea"/>
+              <a:cs typeface="+mn-cs"/>
+            </a:endParaRPr>
+          </a:p>
+        </p:txBody>
+      </p:sp>
+      <p:sp>
+        <p:nvSpPr>
+          <p:cNvPr id="2" name="Title 1">
+            <a:extLst>
+              <a:ext uri="{FF2B5EF4-FFF2-40B4-BE49-F238E27FC236}">
+                <a16:creationId xmlns:a16="http://schemas.microsoft.com/office/drawing/2014/main" id="{FEFE0BA4-9678-F095-3217-56F61AF64BD2}"/>
+              </a:ext>
+            </a:extLst>
+          </p:cNvPr>
+          <p:cNvSpPr>
+            <a:spLocks noGrp="1"/>
+          </p:cNvSpPr>
+          <p:nvPr>
+            <p:ph type="title"/>
+          </p:nvPr>
+        </p:nvSpPr>
+        <p:spPr>
+          <a:xfrm>
+            <a:off x="581192" y="702156"/>
+            <a:ext cx="11029616" cy="1188720"/>
+          </a:xfrm>
+        </p:spPr>
+        <p:txBody>
+          <a:bodyPr>
+            <a:normAutofit/>
+          </a:bodyPr>
+          <a:lstStyle/>
+          <a:p>
+            <a:r>
+              <a:rPr lang="en-US">
+                <a:solidFill>
+                  <a:schemeClr val="tx1">
+                    <a:lumMod val="85000"/>
+                    <a:lumOff val="15000"/>
+                  </a:schemeClr>
+                </a:solidFill>
+              </a:rPr>
+              <a:t>About the project</a:t>
+            </a:r>
+          </a:p>
+        </p:txBody>
+      </p:sp>
+      <p:sp>
+        <p:nvSpPr>
+          <p:cNvPr id="22" name="Rectangle 21">
+            <a:extLst>
+              <a:ext uri="{FF2B5EF4-FFF2-40B4-BE49-F238E27FC236}">
+                <a16:creationId xmlns:a16="http://schemas.microsoft.com/office/drawing/2014/main" id="{FF426BAC-43D6-468E-B6FF-167034D5CE43}"/>
+              </a:ext>
+              <a:ext uri="{C183D7F6-B498-43B3-948B-1728B52AA6E4}">
+                <adec:decorative xmlns:adec="http://schemas.microsoft.com/office/drawing/2017/decorative" val="1"/>
+              </a:ext>
+            </a:extLst>
+          </p:cNvPr>
+          <p:cNvSpPr>
+            <a:spLocks noGrp="1" noRot="1" noChangeAspect="1" noMove="1" noResize="1" noEditPoints="1" noAdjustHandles="1" noChangeArrowheads="1" noChangeShapeType="1" noTextEdit="1"/>
+          </p:cNvSpPr>
+          <p:nvPr>
+            <p:extLst>
+              <p:ext uri="{386F3935-93C4-4BCD-93E2-E3B085C9AB24}">
+                <p16:designElem xmlns:p16="http://schemas.microsoft.com/office/powerpoint/2015/main" val="1"/>
+              </p:ext>
+            </p:extLst>
+          </p:nvPr>
+        </p:nvSpPr>
+        <p:spPr>
+          <a:xfrm>
+            <a:off x="446534" y="457200"/>
+            <a:ext cx="3703320" cy="94997"/>
+          </a:xfrm>
+          <a:prstGeom prst="rect">
+            <a:avLst/>
+          </a:prstGeom>
+          <a:solidFill>
+            <a:srgbClr val="60727A"/>
+          </a:solidFill>
+          <a:ln>
+            <a:noFill/>
+          </a:ln>
+          <a:effectLst/>
+        </p:spPr>
+        <p:style>
+          <a:lnRef idx="1">
+            <a:schemeClr val="accent1"/>
+          </a:lnRef>
+          <a:fillRef idx="3">
+            <a:schemeClr val="accent1"/>
+          </a:fillRef>
+          <a:effectRef idx="2">
+            <a:schemeClr val="accent1"/>
+          </a:effectRef>
+          <a:fontRef idx="minor">
+            <a:schemeClr val="lt1"/>
+          </a:fontRef>
+        </p:style>
+        <p:txBody>
+          <a:bodyPr/>
+          <a:lstStyle/>
+          <a:p>
+            <a:endParaRPr lang="en-US"/>
+          </a:p>
+        </p:txBody>
+      </p:sp>
+      <p:sp>
+        <p:nvSpPr>
+          <p:cNvPr id="24" name="Rectangle 23">
+            <a:extLst>
+              <a:ext uri="{FF2B5EF4-FFF2-40B4-BE49-F238E27FC236}">
+                <a16:creationId xmlns:a16="http://schemas.microsoft.com/office/drawing/2014/main" id="{FB02D80E-5995-4C54-8387-5893C2C89473}"/>
+              </a:ext>
+              <a:ext uri="{C183D7F6-B498-43B3-948B-1728B52AA6E4}">
+                <adec:decorative xmlns:adec="http://schemas.microsoft.com/office/drawing/2017/decorative" val="1"/>
+              </a:ext>
+            </a:extLst>
+          </p:cNvPr>
+          <p:cNvSpPr>
+            <a:spLocks noGrp="1" noRot="1" noChangeAspect="1" noMove="1" noResize="1" noEditPoints="1" noAdjustHandles="1" noChangeArrowheads="1" noChangeShapeType="1" noTextEdit="1"/>
+          </p:cNvSpPr>
+          <p:nvPr>
+            <p:extLst>
+              <p:ext uri="{386F3935-93C4-4BCD-93E2-E3B085C9AB24}">
+                <p16:designElem xmlns:p16="http://schemas.microsoft.com/office/powerpoint/2015/main" val="1"/>
+              </p:ext>
+            </p:extLst>
+          </p:nvPr>
+        </p:nvSpPr>
+        <p:spPr>
+          <a:xfrm>
+            <a:off x="4241830" y="457200"/>
+            <a:ext cx="3703320" cy="91440"/>
+          </a:xfrm>
+          <a:prstGeom prst="rect">
+            <a:avLst/>
+          </a:prstGeom>
+          <a:solidFill>
+            <a:schemeClr val="accent1"/>
+          </a:solidFill>
+          <a:ln>
+            <a:noFill/>
+          </a:ln>
+          <a:effectLst/>
+        </p:spPr>
+        <p:style>
+          <a:lnRef idx="1">
+            <a:schemeClr val="accent1"/>
+          </a:lnRef>
+          <a:fillRef idx="3">
+            <a:schemeClr val="accent1"/>
+          </a:fillRef>
+          <a:effectRef idx="2">
+            <a:schemeClr val="accent1"/>
+          </a:effectRef>
+          <a:fontRef idx="minor">
+            <a:schemeClr val="lt1"/>
+          </a:fontRef>
+        </p:style>
+        <p:txBody>
+          <a:bodyPr/>
+          <a:lstStyle/>
+          <a:p>
+            <a:endParaRPr lang="en-US"/>
+          </a:p>
+        </p:txBody>
+      </p:sp>
+      <p:sp>
+        <p:nvSpPr>
+          <p:cNvPr id="26" name="Rectangle 25">
+            <a:extLst>
+              <a:ext uri="{FF2B5EF4-FFF2-40B4-BE49-F238E27FC236}">
+                <a16:creationId xmlns:a16="http://schemas.microsoft.com/office/drawing/2014/main" id="{896083C8-1401-4950-AF56-E2FAFE42D656}"/>
+              </a:ext>
+              <a:ext uri="{C183D7F6-B498-43B3-948B-1728B52AA6E4}">
+                <adec:decorative xmlns:adec="http://schemas.microsoft.com/office/drawing/2017/decorative" val="1"/>
+              </a:ext>
+            </a:extLst>
+          </p:cNvPr>
+          <p:cNvSpPr>
+            <a:spLocks noGrp="1" noRot="1" noChangeAspect="1" noMove="1" noResize="1" noEditPoints="1" noAdjustHandles="1" noChangeArrowheads="1" noChangeShapeType="1" noTextEdit="1"/>
+          </p:cNvSpPr>
+          <p:nvPr>
+            <p:extLst>
+              <p:ext uri="{386F3935-93C4-4BCD-93E2-E3B085C9AB24}">
+                <p16:designElem xmlns:p16="http://schemas.microsoft.com/office/powerpoint/2015/main" val="1"/>
+              </p:ext>
+            </p:extLst>
+          </p:nvPr>
+        </p:nvSpPr>
+        <p:spPr>
+          <a:xfrm>
+            <a:off x="8042147" y="453643"/>
+            <a:ext cx="3703320" cy="98554"/>
+          </a:xfrm>
+          <a:prstGeom prst="rect">
+            <a:avLst/>
+          </a:prstGeom>
+          <a:solidFill>
+            <a:srgbClr val="969FA7"/>
+          </a:solidFill>
+          <a:ln>
+            <a:noFill/>
+          </a:ln>
+          <a:effectLst/>
+        </p:spPr>
+        <p:style>
+          <a:lnRef idx="1">
+            <a:schemeClr val="accent1"/>
+          </a:lnRef>
+          <a:fillRef idx="3">
+            <a:schemeClr val="accent1"/>
+          </a:fillRef>
+          <a:effectRef idx="2">
+            <a:schemeClr val="accent1"/>
+          </a:effectRef>
+          <a:fontRef idx="minor">
+            <a:schemeClr val="lt1"/>
+          </a:fontRef>
+        </p:style>
+        <p:txBody>
+          <a:bodyPr/>
+          <a:lstStyle/>
+          <a:p>
+            <a:endParaRPr lang="en-US"/>
+          </a:p>
+        </p:txBody>
+      </p:sp>
+      <p:graphicFrame>
+        <p:nvGraphicFramePr>
+          <p:cNvPr id="5" name="Content Placeholder 2">
+            <a:extLst>
+              <a:ext uri="{FF2B5EF4-FFF2-40B4-BE49-F238E27FC236}">
+                <a16:creationId xmlns:a16="http://schemas.microsoft.com/office/drawing/2014/main" id="{3FCD7204-BFB7-2BAA-B9EC-145B02CC73B6}"/>
+              </a:ext>
+            </a:extLst>
+          </p:cNvPr>
+          <p:cNvGraphicFramePr>
+            <a:graphicFrameLocks noGrp="1"/>
+          </p:cNvGraphicFramePr>
+          <p:nvPr>
+            <p:ph idx="1"/>
+            <p:extLst>
+              <p:ext uri="{D42A27DB-BD31-4B8C-83A1-F6EECF244321}">
+                <p14:modId xmlns:p14="http://schemas.microsoft.com/office/powerpoint/2010/main" val="1870561451"/>
+              </p:ext>
+            </p:extLst>
+          </p:nvPr>
+        </p:nvGraphicFramePr>
+        <p:xfrm>
+          <a:off x="581025" y="2341563"/>
+          <a:ext cx="11029950" cy="3814281"/>
+        </p:xfrm>
+        <a:graphic>
+          <a:graphicData uri="http://schemas.openxmlformats.org/drawingml/2006/diagram">
+            <dgm:relIds xmlns:dgm="http://schemas.openxmlformats.org/drawingml/2006/diagram" xmlns:r="http://schemas.openxmlformats.org/officeDocument/2006/relationships" r:dm="rId3" r:lo="rId4" r:qs="rId5" r:cs="rId6"/>
+          </a:graphicData>
+        </a:graphic>
+      </p:graphicFrame>
+    </p:spTree>
+    <p:extLst>
+      <p:ext uri="{BB962C8B-B14F-4D97-AF65-F5344CB8AC3E}">
+        <p14:creationId xmlns:p14="http://schemas.microsoft.com/office/powerpoint/2010/main" val="2879480226"/>
+      </p:ext>
+    </p:extLst>
+  </p:cSld>
+  <p:clrMapOvr>
+    <a:overrideClrMapping bg1="dk1" tx1="lt1" bg2="dk2" tx2="lt2" accent1="accent1" accent2="accent2" accent3="accent3" accent4="accent4" accent5="accent5" accent6="accent6" hlink="hlink" folHlink="folHlink"/>
+  </p:clrMapOvr>
+</p:sld>
+</file>
+
+<file path=ppt/slides/slide3.xml><?xml version="1.0" encoding="utf-8"?>
+<p:sld xmlns:a="http://schemas.openxmlformats.org/drawingml/2006/main" xmlns:r="http://schemas.openxmlformats.org/officeDocument/2006/relationships" xmlns:p="http://schemas.openxmlformats.org/presentationml/2006/main">
+  <p:cSld>
+    <p:bg>
+      <p:bgPr>
+        <a:solidFill>
+          <a:schemeClr val="bg1"/>
+        </a:solidFill>
+        <a:effectLst/>
+      </p:bgPr>
+    </p:bg>
+    <p:spTree>
+      <p:nvGrpSpPr>
+        <p:cNvPr id="1" name=""/>
+        <p:cNvGrpSpPr/>
+        <p:nvPr/>
+      </p:nvGrpSpPr>
+      <p:grpSpPr>
+        <a:xfrm>
+          <a:off x="0" y="0"/>
+          <a:ext cx="0" cy="0"/>
+          <a:chOff x="0" y="0"/>
+          <a:chExt cx="0" cy="0"/>
+        </a:xfrm>
+      </p:grpSpPr>
+      <p:sp>
+        <p:nvSpPr>
+          <p:cNvPr id="23" name="Rectangle 22">
+            <a:extLst>
+              <a:ext uri="{FF2B5EF4-FFF2-40B4-BE49-F238E27FC236}">
+                <a16:creationId xmlns:a16="http://schemas.microsoft.com/office/drawing/2014/main" id="{E9751CB9-7B25-4EB8-9A6F-82F822549F12}"/>
+              </a:ext>
+              <a:ext uri="{C183D7F6-B498-43B3-948B-1728B52AA6E4}">
+                <adec:decorative xmlns:adec="http://schemas.microsoft.com/office/drawing/2017/decorative" val="1"/>
+              </a:ext>
+            </a:extLst>
+          </p:cNvPr>
+          <p:cNvSpPr>
+            <a:spLocks noGrp="1" noRot="1" noChangeAspect="1" noMove="1" noResize="1" noEditPoints="1" noAdjustHandles="1" noChangeArrowheads="1" noChangeShapeType="1" noTextEdit="1"/>
+          </p:cNvSpPr>
+          <p:nvPr>
+            <p:extLst>
+              <p:ext uri="{386F3935-93C4-4BCD-93E2-E3B085C9AB24}">
+                <p16:designElem xmlns:p16="http://schemas.microsoft.com/office/powerpoint/2015/main" val="1"/>
+              </p:ext>
+            </p:extLst>
+          </p:nvPr>
+        </p:nvSpPr>
+        <p:spPr>
+          <a:xfrm>
+            <a:off x="0" y="0"/>
+            <a:ext cx="12192000" cy="6858000"/>
+          </a:xfrm>
+          <a:prstGeom prst="rect">
+            <a:avLst/>
+          </a:prstGeom>
+          <a:solidFill>
+            <a:srgbClr val="FFFFFF"/>
+          </a:solidFill>
+          <a:ln>
+            <a:noFill/>
+          </a:ln>
+        </p:spPr>
+        <p:style>
+          <a:lnRef idx="2">
+            <a:schemeClr val="accent1">
+              <a:shade val="50000"/>
+            </a:schemeClr>
+          </a:lnRef>
+          <a:fillRef idx="1">
+            <a:schemeClr val="accent1"/>
+          </a:fillRef>
+          <a:effectRef idx="0">
+            <a:schemeClr val="accent1"/>
+          </a:effectRef>
+          <a:fontRef idx="minor">
+            <a:schemeClr val="lt1"/>
+          </a:fontRef>
+        </p:style>
+        <p:txBody>
+          <a:bodyPr rtlCol="0" anchor="ctr"/>
+          <a:lstStyle/>
+          <a:p>
+            <a:pPr algn="ctr"/>
+            <a:endParaRPr lang="en-US"/>
+          </a:p>
+        </p:txBody>
+      </p:sp>
+      <p:sp>
+        <p:nvSpPr>
+          <p:cNvPr id="25" name="Rectangle 24">
+            <a:extLst>
+              <a:ext uri="{FF2B5EF4-FFF2-40B4-BE49-F238E27FC236}">
+                <a16:creationId xmlns:a16="http://schemas.microsoft.com/office/drawing/2014/main" id="{E1317383-CF3B-4B02-9512-BECBEF6362A4}"/>
+              </a:ext>
+              <a:ext uri="{C183D7F6-B498-43B3-948B-1728B52AA6E4}">
+                <adec:decorative xmlns:adec="http://schemas.microsoft.com/office/drawing/2017/decorative" val="1"/>
+              </a:ext>
+            </a:extLst>
+          </p:cNvPr>
+          <p:cNvSpPr>
+            <a:spLocks noGrp="1" noRot="1" noChangeAspect="1" noMove="1" noResize="1" noEditPoints="1" noAdjustHandles="1" noChangeArrowheads="1" noChangeShapeType="1" noTextEdit="1"/>
+          </p:cNvSpPr>
+          <p:nvPr>
+            <p:extLst>
+              <p:ext uri="{386F3935-93C4-4BCD-93E2-E3B085C9AB24}">
+                <p16:designElem xmlns:p16="http://schemas.microsoft.com/office/powerpoint/2015/main" val="1"/>
+              </p:ext>
+            </p:extLst>
+          </p:nvPr>
+        </p:nvSpPr>
+        <p:spPr>
+          <a:xfrm>
+            <a:off x="446534" y="457200"/>
+            <a:ext cx="3703320" cy="94997"/>
+          </a:xfrm>
+          <a:prstGeom prst="rect">
+            <a:avLst/>
+          </a:prstGeom>
+          <a:solidFill>
+            <a:srgbClr val="465359"/>
+          </a:solidFill>
+          <a:ln>
+            <a:noFill/>
+          </a:ln>
+          <a:effectLst/>
+        </p:spPr>
+        <p:style>
+          <a:lnRef idx="1">
+            <a:schemeClr val="accent1"/>
+          </a:lnRef>
+          <a:fillRef idx="3">
+            <a:schemeClr val="accent1"/>
+          </a:fillRef>
+          <a:effectRef idx="2">
+            <a:schemeClr val="accent1"/>
+          </a:effectRef>
+          <a:fontRef idx="minor">
+            <a:schemeClr val="lt1"/>
+          </a:fontRef>
+        </p:style>
+        <p:txBody>
+          <a:bodyPr/>
+          <a:lstStyle/>
+          <a:p>
+            <a:endParaRPr lang="en-US"/>
+          </a:p>
+        </p:txBody>
+      </p:sp>
+      <p:sp>
+        <p:nvSpPr>
+          <p:cNvPr id="27" name="Rectangle 26">
+            <a:extLst>
+              <a:ext uri="{FF2B5EF4-FFF2-40B4-BE49-F238E27FC236}">
+                <a16:creationId xmlns:a16="http://schemas.microsoft.com/office/drawing/2014/main" id="{B1D4C7A0-6DF2-4F2D-A45D-F111582974C7}"/>
+              </a:ext>
+              <a:ext uri="{C183D7F6-B498-43B3-948B-1728B52AA6E4}">
+                <adec:decorative xmlns:adec="http://schemas.microsoft.com/office/drawing/2017/decorative" val="1"/>
+              </a:ext>
+            </a:extLst>
+          </p:cNvPr>
+          <p:cNvSpPr>
+            <a:spLocks noGrp="1" noRot="1" noChangeAspect="1" noMove="1" noResize="1" noEditPoints="1" noAdjustHandles="1" noChangeArrowheads="1" noChangeShapeType="1" noTextEdit="1"/>
+          </p:cNvSpPr>
+          <p:nvPr>
+            <p:extLst>
+              <p:ext uri="{386F3935-93C4-4BCD-93E2-E3B085C9AB24}">
+                <p16:designElem xmlns:p16="http://schemas.microsoft.com/office/powerpoint/2015/main" val="1"/>
+              </p:ext>
+            </p:extLst>
+          </p:nvPr>
+        </p:nvSpPr>
+        <p:spPr>
+          <a:xfrm>
+            <a:off x="4241830" y="457200"/>
+            <a:ext cx="3703320" cy="91440"/>
+          </a:xfrm>
+          <a:prstGeom prst="rect">
+            <a:avLst/>
+          </a:prstGeom>
+          <a:solidFill>
+            <a:schemeClr val="accent1"/>
+          </a:solidFill>
+          <a:ln>
+            <a:noFill/>
+          </a:ln>
+          <a:effectLst/>
+        </p:spPr>
+        <p:style>
+          <a:lnRef idx="1">
+            <a:schemeClr val="accent1"/>
+          </a:lnRef>
+          <a:fillRef idx="3">
+            <a:schemeClr val="accent1"/>
+          </a:fillRef>
+          <a:effectRef idx="2">
+            <a:schemeClr val="accent1"/>
+          </a:effectRef>
+          <a:fontRef idx="minor">
+            <a:schemeClr val="lt1"/>
+          </a:fontRef>
+        </p:style>
+        <p:txBody>
+          <a:bodyPr/>
+          <a:lstStyle/>
+          <a:p>
+            <a:endParaRPr lang="en-US"/>
+          </a:p>
+        </p:txBody>
+      </p:sp>
+      <p:sp>
+        <p:nvSpPr>
+          <p:cNvPr id="29" name="Rectangle 28">
+            <a:extLst>
+              <a:ext uri="{FF2B5EF4-FFF2-40B4-BE49-F238E27FC236}">
+                <a16:creationId xmlns:a16="http://schemas.microsoft.com/office/drawing/2014/main" id="{DBF3943D-BCB6-4B31-809D-A005686483B4}"/>
+              </a:ext>
+              <a:ext uri="{C183D7F6-B498-43B3-948B-1728B52AA6E4}">
+                <adec:decorative xmlns:adec="http://schemas.microsoft.com/office/drawing/2017/decorative" val="1"/>
+              </a:ext>
+            </a:extLst>
+          </p:cNvPr>
+          <p:cNvSpPr>
+            <a:spLocks noGrp="1" noRot="1" noChangeAspect="1" noMove="1" noResize="1" noEditPoints="1" noAdjustHandles="1" noChangeArrowheads="1" noChangeShapeType="1" noTextEdit="1"/>
+          </p:cNvSpPr>
+          <p:nvPr>
+            <p:extLst>
+              <p:ext uri="{386F3935-93C4-4BCD-93E2-E3B085C9AB24}">
+                <p16:designElem xmlns:p16="http://schemas.microsoft.com/office/powerpoint/2015/main" val="1"/>
+              </p:ext>
+            </p:extLst>
+          </p:nvPr>
+        </p:nvSpPr>
+        <p:spPr>
+          <a:xfrm>
+            <a:off x="8042147" y="453643"/>
+            <a:ext cx="3703320" cy="98554"/>
+          </a:xfrm>
+          <a:prstGeom prst="rect">
+            <a:avLst/>
+          </a:prstGeom>
+          <a:solidFill>
+            <a:srgbClr val="969FA7"/>
+          </a:solidFill>
+          <a:ln>
+            <a:noFill/>
+          </a:ln>
+          <a:effectLst/>
+        </p:spPr>
+        <p:style>
+          <a:lnRef idx="1">
+            <a:schemeClr val="accent1"/>
+          </a:lnRef>
+          <a:fillRef idx="3">
+            <a:schemeClr val="accent1"/>
+          </a:fillRef>
+          <a:effectRef idx="2">
+            <a:schemeClr val="accent1"/>
+          </a:effectRef>
+          <a:fontRef idx="minor">
+            <a:schemeClr val="lt1"/>
+          </a:fontRef>
+        </p:style>
+        <p:txBody>
+          <a:bodyPr/>
+          <a:lstStyle/>
+          <a:p>
+            <a:endParaRPr lang="en-US"/>
+          </a:p>
+        </p:txBody>
+      </p:sp>
+      <p:sp>
+        <p:nvSpPr>
+          <p:cNvPr id="31" name="Rectangle 30">
+            <a:extLst>
+              <a:ext uri="{FF2B5EF4-FFF2-40B4-BE49-F238E27FC236}">
+                <a16:creationId xmlns:a16="http://schemas.microsoft.com/office/drawing/2014/main" id="{39373A6F-2E1F-4613-8E1D-D68057D29F31}"/>
+              </a:ext>
+              <a:ext uri="{C183D7F6-B498-43B3-948B-1728B52AA6E4}">
+                <adec:decorative xmlns:adec="http://schemas.microsoft.com/office/drawing/2017/decorative" val="1"/>
+              </a:ext>
+            </a:extLst>
+          </p:cNvPr>
+          <p:cNvSpPr>
+            <a:spLocks noGrp="1" noRot="1" noChangeAspect="1" noMove="1" noResize="1" noEditPoints="1" noAdjustHandles="1" noChangeArrowheads="1" noChangeShapeType="1" noTextEdit="1"/>
+          </p:cNvSpPr>
+          <p:nvPr>
+            <p:extLst>
+              <p:ext uri="{386F3935-93C4-4BCD-93E2-E3B085C9AB24}">
+                <p16:designElem xmlns:p16="http://schemas.microsoft.com/office/powerpoint/2015/main" val="1"/>
+              </p:ext>
+            </p:extLst>
+          </p:nvPr>
+        </p:nvSpPr>
+        <p:spPr>
+          <a:xfrm>
+            <a:off x="442377" y="601200"/>
+            <a:ext cx="3707477" cy="5624979"/>
+          </a:xfrm>
+          <a:prstGeom prst="rect">
+            <a:avLst/>
+          </a:prstGeom>
+          <a:solidFill>
+            <a:srgbClr val="465359"/>
+          </a:solidFill>
+          <a:ln>
+            <a:noFill/>
+          </a:ln>
+          <a:effectLst/>
+        </p:spPr>
+        <p:style>
+          <a:lnRef idx="1">
+            <a:schemeClr val="accent1"/>
+          </a:lnRef>
+          <a:fillRef idx="3">
+            <a:schemeClr val="accent1"/>
+          </a:fillRef>
+          <a:effectRef idx="2">
+            <a:schemeClr val="accent1"/>
+          </a:effectRef>
+          <a:fontRef idx="minor">
+            <a:schemeClr val="lt1"/>
+          </a:fontRef>
+        </p:style>
+        <p:txBody>
+          <a:bodyPr/>
+          <a:lstStyle/>
+          <a:p>
+            <a:endParaRPr lang="en-US"/>
+          </a:p>
+        </p:txBody>
+      </p:sp>
+      <p:sp>
+        <p:nvSpPr>
+          <p:cNvPr id="2" name="Title 1">
+            <a:extLst>
+              <a:ext uri="{FF2B5EF4-FFF2-40B4-BE49-F238E27FC236}">
+                <a16:creationId xmlns:a16="http://schemas.microsoft.com/office/drawing/2014/main" id="{01B052D1-C683-8D99-94DE-D0C671246F1F}"/>
+              </a:ext>
+            </a:extLst>
+          </p:cNvPr>
+          <p:cNvSpPr>
+            <a:spLocks noGrp="1"/>
+          </p:cNvSpPr>
+          <p:nvPr>
+            <p:ph type="title"/>
+          </p:nvPr>
+        </p:nvSpPr>
+        <p:spPr>
+          <a:xfrm>
+            <a:off x="601255" y="702155"/>
+            <a:ext cx="3409783" cy="1300365"/>
+          </a:xfrm>
+        </p:spPr>
+        <p:txBody>
+          <a:bodyPr>
+            <a:normAutofit/>
+          </a:bodyPr>
+          <a:lstStyle/>
+          <a:p>
+            <a:r>
+              <a:rPr lang="en-US">
+                <a:solidFill>
+                  <a:srgbClr val="FFFFFF"/>
+                </a:solidFill>
+              </a:rPr>
+              <a:t>Goals</a:t>
+            </a:r>
+          </a:p>
+        </p:txBody>
+      </p:sp>
+      <p:sp>
+        <p:nvSpPr>
+          <p:cNvPr id="3" name="Content Placeholder 2">
+            <a:extLst>
+              <a:ext uri="{FF2B5EF4-FFF2-40B4-BE49-F238E27FC236}">
+                <a16:creationId xmlns:a16="http://schemas.microsoft.com/office/drawing/2014/main" id="{9AA20466-457A-8CB9-2D38-94AF28781054}"/>
+              </a:ext>
+            </a:extLst>
+          </p:cNvPr>
+          <p:cNvSpPr>
+            <a:spLocks noGrp="1"/>
+          </p:cNvSpPr>
+          <p:nvPr>
+            <p:ph idx="1"/>
+          </p:nvPr>
+        </p:nvSpPr>
+        <p:spPr>
+          <a:xfrm>
+            <a:off x="601255" y="2177142"/>
+            <a:ext cx="3409782" cy="3823607"/>
+          </a:xfrm>
+        </p:spPr>
+        <p:txBody>
+          <a:bodyPr>
+            <a:normAutofit/>
+          </a:bodyPr>
+          <a:lstStyle/>
+          <a:p>
+            <a:r>
+              <a:rPr lang="en-US" dirty="0">
+                <a:solidFill>
+                  <a:srgbClr val="FFFFFF"/>
+                </a:solidFill>
+              </a:rPr>
+              <a:t>To discover which public schools have the highest &amp; lowest graduation rates</a:t>
+            </a:r>
+          </a:p>
+          <a:p>
+            <a:r>
+              <a:rPr lang="en-US" dirty="0">
+                <a:solidFill>
+                  <a:srgbClr val="FFFFFF"/>
+                </a:solidFill>
+              </a:rPr>
+              <a:t>To discover if crime rates seem to impact these statistics</a:t>
+            </a:r>
+          </a:p>
+          <a:p>
+            <a:r>
+              <a:rPr lang="en-US" dirty="0">
+                <a:solidFill>
+                  <a:srgbClr val="FFFFFF"/>
+                </a:solidFill>
+              </a:rPr>
+              <a:t>To see if any other factors found within the data could impact graduation rates</a:t>
+            </a:r>
+          </a:p>
+          <a:p>
+            <a:endParaRPr lang="en-US" dirty="0">
+              <a:solidFill>
+                <a:srgbClr val="FFFFFF"/>
+              </a:solidFill>
+            </a:endParaRPr>
+          </a:p>
+        </p:txBody>
+      </p:sp>
+      <p:pic>
+        <p:nvPicPr>
+          <p:cNvPr id="20" name="Graphic 19" descr="Books">
+            <a:extLst>
+              <a:ext uri="{FF2B5EF4-FFF2-40B4-BE49-F238E27FC236}">
+                <a16:creationId xmlns:a16="http://schemas.microsoft.com/office/drawing/2014/main" id="{2CA39A1E-CD8C-DF2E-D583-92EA5FEF28FB}"/>
+              </a:ext>
+            </a:extLst>
+          </p:cNvPr>
+          <p:cNvPicPr>
+            <a:picLocks noChangeAspect="1"/>
+          </p:cNvPicPr>
+          <p:nvPr/>
+        </p:nvPicPr>
+        <p:blipFill>
+          <a:blip r:embed="rId3">
+            <a:extLst>
+              <a:ext uri="{28A0092B-C50C-407E-A947-70E740481C1C}">
+                <a14:useLocalDpi xmlns:a14="http://schemas.microsoft.com/office/drawing/2010/main" val="0"/>
+              </a:ext>
+              <a:ext uri="{96DAC541-7B7A-43D3-8B79-37D633B846F1}">
+                <asvg:svgBlip xmlns:asvg="http://schemas.microsoft.com/office/drawing/2016/SVG/main" r:embed="rId4"/>
+              </a:ext>
+            </a:extLst>
+          </a:blip>
+          <a:stretch>
+            <a:fillRect/>
+          </a:stretch>
+        </p:blipFill>
+        <p:spPr>
+          <a:xfrm>
+            <a:off x="5523830" y="936141"/>
+            <a:ext cx="4968305" cy="4968305"/>
+          </a:xfrm>
+          <a:prstGeom prst="rect">
+            <a:avLst/>
+          </a:prstGeom>
+        </p:spPr>
+      </p:pic>
+    </p:spTree>
+    <p:extLst>
+      <p:ext uri="{BB962C8B-B14F-4D97-AF65-F5344CB8AC3E}">
+        <p14:creationId xmlns:p14="http://schemas.microsoft.com/office/powerpoint/2010/main" val="3723583622"/>
+      </p:ext>
+    </p:extLst>
+  </p:cSld>
+  <p:clrMapOvr>
+    <a:overrideClrMapping bg1="dk1" tx1="lt1" bg2="dk2" tx2="lt2" accent1="accent1" accent2="accent2" accent3="accent3" accent4="accent4" accent5="accent5" accent6="accent6" hlink="hlink" folHlink="folHlink"/>
+  </p:clrMapOvr>
+</p:sld>
+</file>
+
+<file path=ppt/slides/slide4.xml><?xml version="1.0" encoding="utf-8"?>
+<p:sld xmlns:a="http://schemas.openxmlformats.org/drawingml/2006/main" xmlns:r="http://schemas.openxmlformats.org/officeDocument/2006/relationships" xmlns:p="http://schemas.openxmlformats.org/presentationml/2006/main">
+  <p:cSld>
+    <p:bg>
+      <p:bgPr>
+        <a:solidFill>
+          <a:schemeClr val="bg1"/>
+        </a:solidFill>
+        <a:effectLst/>
+      </p:bgPr>
+    </p:bg>
+    <p:spTree>
+      <p:nvGrpSpPr>
+        <p:cNvPr id="1" name=""/>
+        <p:cNvGrpSpPr/>
+        <p:nvPr/>
+      </p:nvGrpSpPr>
+      <p:grpSpPr>
+        <a:xfrm>
+          <a:off x="0" y="0"/>
+          <a:ext cx="0" cy="0"/>
+          <a:chOff x="0" y="0"/>
+          <a:chExt cx="0" cy="0"/>
+        </a:xfrm>
+      </p:grpSpPr>
+      <p:sp>
+        <p:nvSpPr>
+          <p:cNvPr id="49" name="Rectangle 48">
+            <a:extLst>
+              <a:ext uri="{FF2B5EF4-FFF2-40B4-BE49-F238E27FC236}">
+                <a16:creationId xmlns:a16="http://schemas.microsoft.com/office/drawing/2014/main" id="{307E802C-4568-43AB-9F37-2A48E02B3B75}"/>
+              </a:ext>
+              <a:ext uri="{C183D7F6-B498-43B3-948B-1728B52AA6E4}">
+                <adec:decorative xmlns:adec="http://schemas.microsoft.com/office/drawing/2017/decorative" val="1"/>
+              </a:ext>
+            </a:extLst>
+          </p:cNvPr>
+          <p:cNvSpPr>
+            <a:spLocks noGrp="1" noRot="1" noChangeAspect="1" noMove="1" noResize="1" noEditPoints="1" noAdjustHandles="1" noChangeArrowheads="1" noChangeShapeType="1" noTextEdit="1"/>
+          </p:cNvSpPr>
+          <p:nvPr>
+            <p:extLst>
+              <p:ext uri="{386F3935-93C4-4BCD-93E2-E3B085C9AB24}">
+                <p16:designElem xmlns:p16="http://schemas.microsoft.com/office/powerpoint/2015/main" val="1"/>
+              </p:ext>
+            </p:extLst>
+          </p:nvPr>
+        </p:nvSpPr>
+        <p:spPr>
+          <a:xfrm>
+            <a:off x="0" y="0"/>
+            <a:ext cx="12192000" cy="6858000"/>
+          </a:xfrm>
+          <a:prstGeom prst="rect">
+            <a:avLst/>
+          </a:prstGeom>
+          <a:solidFill>
+            <a:schemeClr val="tx1"/>
+          </a:solidFill>
+          <a:ln>
+            <a:noFill/>
+          </a:ln>
+        </p:spPr>
+        <p:style>
+          <a:lnRef idx="2">
+            <a:schemeClr val="accent1">
+              <a:shade val="50000"/>
+            </a:schemeClr>
+          </a:lnRef>
+          <a:fillRef idx="1">
+            <a:schemeClr val="accent1"/>
+          </a:fillRef>
+          <a:effectRef idx="0">
+            <a:schemeClr val="accent1"/>
+          </a:effectRef>
+          <a:fontRef idx="minor">
+            <a:schemeClr val="lt1"/>
+          </a:fontRef>
+        </p:style>
+        <p:txBody>
+          <a:bodyPr rtlCol="0" anchor="ctr"/>
+          <a:lstStyle/>
+          <a:p>
+            <a:pPr algn="ctr"/>
+            <a:endParaRPr lang="en-US"/>
+          </a:p>
+        </p:txBody>
+      </p:sp>
+      <p:pic>
+        <p:nvPicPr>
+          <p:cNvPr id="7" name="Picture 6" descr="A logo with a red and blue square&#10;&#10;Description automatically generated">
+            <a:extLst>
+              <a:ext uri="{FF2B5EF4-FFF2-40B4-BE49-F238E27FC236}">
+                <a16:creationId xmlns:a16="http://schemas.microsoft.com/office/drawing/2014/main" id="{C31553AF-9E30-59FD-CB77-83E7D5AFC5AF}"/>
+              </a:ext>
+            </a:extLst>
+          </p:cNvPr>
+          <p:cNvPicPr>
+            <a:picLocks noChangeAspect="1"/>
+          </p:cNvPicPr>
+          <p:nvPr/>
+        </p:nvPicPr>
+        <p:blipFill>
+          <a:blip r:embed="rId2">
+            <a:extLst>
+              <a:ext uri="{28A0092B-C50C-407E-A947-70E740481C1C}">
+                <a14:useLocalDpi xmlns:a14="http://schemas.microsoft.com/office/drawing/2010/main" val="0"/>
+              </a:ext>
+            </a:extLst>
+          </a:blip>
+          <a:stretch>
+            <a:fillRect/>
+          </a:stretch>
+        </p:blipFill>
+        <p:spPr>
+          <a:xfrm>
+            <a:off x="703491" y="598713"/>
+            <a:ext cx="3506108" cy="3298604"/>
+          </a:xfrm>
+          <a:prstGeom prst="rect">
+            <a:avLst/>
+          </a:prstGeom>
+        </p:spPr>
+      </p:pic>
+      <p:pic>
+        <p:nvPicPr>
+          <p:cNvPr id="5" name="Picture 4" descr="A logo for a public schools&#10;&#10;Description automatically generated">
+            <a:extLst>
+              <a:ext uri="{FF2B5EF4-FFF2-40B4-BE49-F238E27FC236}">
+                <a16:creationId xmlns:a16="http://schemas.microsoft.com/office/drawing/2014/main" id="{18F6DC9E-0AE1-E2D8-7FB3-9C42887AF172}"/>
+              </a:ext>
+            </a:extLst>
+          </p:cNvPr>
+          <p:cNvPicPr>
+            <a:picLocks noChangeAspect="1"/>
+          </p:cNvPicPr>
+          <p:nvPr/>
+        </p:nvPicPr>
+        <p:blipFill>
+          <a:blip r:embed="rId3">
+            <a:extLst>
+              <a:ext uri="{28A0092B-C50C-407E-A947-70E740481C1C}">
+                <a14:useLocalDpi xmlns:a14="http://schemas.microsoft.com/office/drawing/2010/main" val="0"/>
+              </a:ext>
+            </a:extLst>
+          </a:blip>
+          <a:stretch>
+            <a:fillRect/>
+          </a:stretch>
+        </p:blipFill>
+        <p:spPr>
+          <a:xfrm>
+            <a:off x="5910792" y="598712"/>
+            <a:ext cx="4729182" cy="3298605"/>
+          </a:xfrm>
+          <a:prstGeom prst="rect">
+            <a:avLst/>
+          </a:prstGeom>
+        </p:spPr>
+      </p:pic>
+      <p:pic>
+        <p:nvPicPr>
+          <p:cNvPr id="6" name="Picture 5" descr="A black text on a white background&#10;&#10;Description automatically generated">
+            <a:extLst>
+              <a:ext uri="{FF2B5EF4-FFF2-40B4-BE49-F238E27FC236}">
+                <a16:creationId xmlns:a16="http://schemas.microsoft.com/office/drawing/2014/main" id="{3E348BF7-7628-4941-5C46-0BB8EC7E4E1D}"/>
+              </a:ext>
+            </a:extLst>
+          </p:cNvPr>
+          <p:cNvPicPr>
+            <a:picLocks noChangeAspect="1"/>
+          </p:cNvPicPr>
+          <p:nvPr/>
+        </p:nvPicPr>
+        <p:blipFill>
+          <a:blip r:embed="rId4">
+            <a:extLst>
+              <a:ext uri="{28A0092B-C50C-407E-A947-70E740481C1C}">
+                <a14:useLocalDpi xmlns:a14="http://schemas.microsoft.com/office/drawing/2010/main" val="0"/>
+              </a:ext>
+            </a:extLst>
+          </a:blip>
+          <a:stretch>
+            <a:fillRect/>
+          </a:stretch>
+        </p:blipFill>
+        <p:spPr>
+          <a:xfrm>
+            <a:off x="643467" y="5098750"/>
+            <a:ext cx="3626158" cy="642234"/>
+          </a:xfrm>
+          <a:prstGeom prst="rect">
+            <a:avLst/>
+          </a:prstGeom>
+        </p:spPr>
+      </p:pic>
+      <p:sp>
+        <p:nvSpPr>
+          <p:cNvPr id="51" name="Rectangle 50">
+            <a:extLst>
+              <a:ext uri="{FF2B5EF4-FFF2-40B4-BE49-F238E27FC236}">
+                <a16:creationId xmlns:a16="http://schemas.microsoft.com/office/drawing/2014/main" id="{BFFCF698-CE31-43F1-AC88-064CB81A652C}"/>
+              </a:ext>
+              <a:ext uri="{C183D7F6-B498-43B3-948B-1728B52AA6E4}">
+                <adec:decorative xmlns:adec="http://schemas.microsoft.com/office/drawing/2017/decorative" val="1"/>
+              </a:ext>
+            </a:extLst>
+          </p:cNvPr>
+          <p:cNvSpPr>
+            <a:spLocks noGrp="1" noRot="1" noChangeAspect="1" noMove="1" noResize="1" noEditPoints="1" noAdjustHandles="1" noChangeArrowheads="1" noChangeShapeType="1" noTextEdit="1"/>
+          </p:cNvSpPr>
+          <p:nvPr>
+            <p:extLst>
+              <p:ext uri="{386F3935-93C4-4BCD-93E2-E3B085C9AB24}">
+                <p16:designElem xmlns:p16="http://schemas.microsoft.com/office/powerpoint/2015/main" val="1"/>
+              </p:ext>
+            </p:extLst>
+          </p:nvPr>
+        </p:nvSpPr>
+        <p:spPr>
+          <a:xfrm>
+            <a:off x="4639498" y="4267831"/>
+            <a:ext cx="7552502" cy="2590169"/>
+          </a:xfrm>
+          <a:prstGeom prst="rect">
+            <a:avLst/>
+          </a:prstGeom>
+          <a:solidFill>
+            <a:srgbClr val="465359"/>
+          </a:solidFill>
+          <a:ln w="6350" cmpd="sng">
+            <a:noFill/>
+          </a:ln>
+          <a:effectLst/>
+        </p:spPr>
+        <p:style>
+          <a:lnRef idx="1">
+            <a:schemeClr val="accent1"/>
+          </a:lnRef>
+          <a:fillRef idx="3">
+            <a:schemeClr val="accent1"/>
+          </a:fillRef>
+          <a:effectRef idx="2">
+            <a:schemeClr val="accent1"/>
+          </a:effectRef>
+          <a:fontRef idx="minor">
+            <a:schemeClr val="lt1"/>
+          </a:fontRef>
+        </p:style>
+        <p:txBody>
+          <a:bodyPr/>
+          <a:lstStyle/>
+          <a:p>
+            <a:endParaRPr lang="en-US"/>
+          </a:p>
+        </p:txBody>
+      </p:sp>
+      <p:sp>
+        <p:nvSpPr>
+          <p:cNvPr id="53" name="Rectangle 52">
+            <a:extLst>
+              <a:ext uri="{FF2B5EF4-FFF2-40B4-BE49-F238E27FC236}">
+                <a16:creationId xmlns:a16="http://schemas.microsoft.com/office/drawing/2014/main" id="{30289482-ACA3-49AE-9A29-CF97A76DF57E}"/>
+              </a:ext>
+              <a:ext uri="{C183D7F6-B498-43B3-948B-1728B52AA6E4}">
+                <adec:decorative xmlns:adec="http://schemas.microsoft.com/office/drawing/2017/decorative" val="1"/>
+              </a:ext>
+            </a:extLst>
+          </p:cNvPr>
+          <p:cNvSpPr>
+            <a:spLocks noGrp="1" noRot="1" noChangeAspect="1" noMove="1" noResize="1" noEditPoints="1" noAdjustHandles="1" noChangeArrowheads="1" noChangeShapeType="1" noTextEdit="1"/>
+          </p:cNvSpPr>
+          <p:nvPr>
+            <p:extLst>
+              <p:ext uri="{386F3935-93C4-4BCD-93E2-E3B085C9AB24}">
+                <p16:designElem xmlns:p16="http://schemas.microsoft.com/office/powerpoint/2015/main" val="1"/>
+              </p:ext>
+            </p:extLst>
+          </p:nvPr>
+        </p:nvSpPr>
+        <p:spPr>
+          <a:xfrm>
+            <a:off x="0" y="4220158"/>
+            <a:ext cx="12188952" cy="91440"/>
+          </a:xfrm>
+          <a:prstGeom prst="rect">
+            <a:avLst/>
+          </a:prstGeom>
+          <a:solidFill>
+            <a:srgbClr val="465359"/>
+          </a:solidFill>
+          <a:ln>
+            <a:noFill/>
+          </a:ln>
+          <a:effectLst/>
+        </p:spPr>
+        <p:style>
+          <a:lnRef idx="1">
+            <a:schemeClr val="accent1"/>
+          </a:lnRef>
+          <a:fillRef idx="3">
+            <a:schemeClr val="accent1"/>
+          </a:fillRef>
+          <a:effectRef idx="2">
+            <a:schemeClr val="accent1"/>
+          </a:effectRef>
+          <a:fontRef idx="minor">
+            <a:schemeClr val="lt1"/>
+          </a:fontRef>
+        </p:style>
+        <p:txBody>
+          <a:bodyPr/>
+          <a:lstStyle/>
+          <a:p>
+            <a:endParaRPr lang="en-US"/>
+          </a:p>
+        </p:txBody>
+      </p:sp>
+      <p:sp>
+        <p:nvSpPr>
+          <p:cNvPr id="2" name="Title 1">
+            <a:extLst>
+              <a:ext uri="{FF2B5EF4-FFF2-40B4-BE49-F238E27FC236}">
+                <a16:creationId xmlns:a16="http://schemas.microsoft.com/office/drawing/2014/main" id="{D4BA2EA6-75E8-C8F0-CA96-941BCCD6CE59}"/>
+              </a:ext>
+            </a:extLst>
+          </p:cNvPr>
+          <p:cNvSpPr>
+            <a:spLocks noGrp="1"/>
+          </p:cNvSpPr>
+          <p:nvPr>
+            <p:ph type="title"/>
+          </p:nvPr>
+        </p:nvSpPr>
+        <p:spPr>
+          <a:xfrm>
+            <a:off x="4810836" y="4311403"/>
+            <a:ext cx="6737697" cy="731446"/>
+          </a:xfrm>
+        </p:spPr>
+        <p:txBody>
+          <a:bodyPr>
+            <a:normAutofit/>
+          </a:bodyPr>
+          <a:lstStyle/>
+          <a:p>
+            <a:r>
+              <a:rPr lang="en-US" sz="2400">
+                <a:solidFill>
+                  <a:srgbClr val="FFFFFF"/>
+                </a:solidFill>
+              </a:rPr>
+              <a:t>Data sources</a:t>
+            </a:r>
+          </a:p>
+        </p:txBody>
+      </p:sp>
+      <p:sp>
+        <p:nvSpPr>
+          <p:cNvPr id="55" name="Rectangle 54">
+            <a:extLst>
+              <a:ext uri="{FF2B5EF4-FFF2-40B4-BE49-F238E27FC236}">
+                <a16:creationId xmlns:a16="http://schemas.microsoft.com/office/drawing/2014/main" id="{0F399B11-F777-4211-ADD0-979A91BCDB9E}"/>
+              </a:ext>
+              <a:ext uri="{C183D7F6-B498-43B3-948B-1728B52AA6E4}">
+                <adec:decorative xmlns:adec="http://schemas.microsoft.com/office/drawing/2017/decorative" val="1"/>
+              </a:ext>
+            </a:extLst>
+          </p:cNvPr>
+          <p:cNvSpPr>
+            <a:spLocks noGrp="1" noRot="1" noChangeAspect="1" noMove="1" noResize="1" noEditPoints="1" noAdjustHandles="1" noChangeArrowheads="1" noChangeShapeType="1" noTextEdit="1"/>
+          </p:cNvSpPr>
+          <p:nvPr>
+            <p:extLst>
+              <p:ext uri="{386F3935-93C4-4BCD-93E2-E3B085C9AB24}">
+                <p16:designElem xmlns:p16="http://schemas.microsoft.com/office/powerpoint/2015/main" val="1"/>
+              </p:ext>
+            </p:extLst>
+          </p:nvPr>
+        </p:nvSpPr>
+        <p:spPr>
+          <a:xfrm>
+            <a:off x="4591359" y="-460"/>
+            <a:ext cx="91440" cy="6858000"/>
+          </a:xfrm>
+          <a:prstGeom prst="rect">
+            <a:avLst/>
+          </a:prstGeom>
+          <a:solidFill>
+            <a:srgbClr val="465359"/>
+          </a:solidFill>
+          <a:ln>
+            <a:noFill/>
+          </a:ln>
+          <a:effectLst/>
+        </p:spPr>
+        <p:style>
+          <a:lnRef idx="1">
+            <a:schemeClr val="accent1"/>
+          </a:lnRef>
+          <a:fillRef idx="3">
+            <a:schemeClr val="accent1"/>
+          </a:fillRef>
+          <a:effectRef idx="2">
+            <a:schemeClr val="accent1"/>
+          </a:effectRef>
+          <a:fontRef idx="minor">
+            <a:schemeClr val="lt1"/>
+          </a:fontRef>
+        </p:style>
+        <p:txBody>
+          <a:bodyPr rtlCol="0" anchor="ctr"/>
+          <a:lstStyle/>
+          <a:p>
+            <a:pPr algn="ctr"/>
+            <a:endParaRPr lang="en-US"/>
+          </a:p>
+        </p:txBody>
+      </p:sp>
+      <p:sp>
+        <p:nvSpPr>
+          <p:cNvPr id="3" name="Content Placeholder 2">
+            <a:extLst>
+              <a:ext uri="{FF2B5EF4-FFF2-40B4-BE49-F238E27FC236}">
+                <a16:creationId xmlns:a16="http://schemas.microsoft.com/office/drawing/2014/main" id="{C269E53F-3DD5-0333-F437-EBCAB31AC65B}"/>
+              </a:ext>
+            </a:extLst>
+          </p:cNvPr>
+          <p:cNvSpPr>
+            <a:spLocks noGrp="1"/>
+          </p:cNvSpPr>
+          <p:nvPr>
+            <p:ph idx="1"/>
+          </p:nvPr>
+        </p:nvSpPr>
+        <p:spPr>
+          <a:xfrm>
+            <a:off x="4810836" y="5247563"/>
+            <a:ext cx="6799972" cy="1011725"/>
+          </a:xfrm>
+        </p:spPr>
+        <p:txBody>
+          <a:bodyPr>
+            <a:normAutofit/>
+          </a:bodyPr>
+          <a:lstStyle/>
+          <a:p>
+            <a:pPr>
+              <a:lnSpc>
+                <a:spcPct val="110000"/>
+              </a:lnSpc>
+            </a:pPr>
+            <a:endParaRPr lang="en-US" sz="600" dirty="0">
+              <a:solidFill>
+                <a:srgbClr val="FFFFFF"/>
+              </a:solidFill>
+            </a:endParaRPr>
+          </a:p>
+          <a:p>
+            <a:pPr>
+              <a:lnSpc>
+                <a:spcPct val="110000"/>
+              </a:lnSpc>
+            </a:pPr>
+            <a:r>
+              <a:rPr lang="en-US" sz="600" dirty="0">
+                <a:solidFill>
+                  <a:srgbClr val="FFFFFF"/>
+                </a:solidFill>
+              </a:rPr>
+              <a:t>Metro Nashville Public School Open Data: </a:t>
+            </a:r>
+            <a:r>
+              <a:rPr lang="en-US" sz="600" dirty="0">
+                <a:solidFill>
+                  <a:srgbClr val="FFFFFF"/>
+                </a:solidFill>
+                <a:hlinkClick r:id="rId5"/>
+              </a:rPr>
+              <a:t>https://www.mnps.org/about/communications/opendata</a:t>
+            </a:r>
+            <a:endParaRPr lang="en-US" sz="600" dirty="0">
+              <a:solidFill>
+                <a:srgbClr val="FFFFFF"/>
+              </a:solidFill>
+            </a:endParaRPr>
+          </a:p>
+          <a:p>
+            <a:pPr>
+              <a:lnSpc>
+                <a:spcPct val="110000"/>
+              </a:lnSpc>
+            </a:pPr>
+            <a:r>
+              <a:rPr lang="en-US" sz="600" dirty="0">
+                <a:solidFill>
+                  <a:srgbClr val="FFFFFF"/>
+                </a:solidFill>
+              </a:rPr>
+              <a:t>Tennessee Dept. of Education </a:t>
+            </a:r>
+            <a:r>
+              <a:rPr lang="en-US" sz="600" dirty="0">
+                <a:solidFill>
+                  <a:srgbClr val="FFFFFF"/>
+                </a:solidFill>
+                <a:hlinkClick r:id="rId6"/>
+              </a:rPr>
+              <a:t>https://www.tn.gov/education/districts/federal-programs-and-oversight/data/data-downloads.html</a:t>
+            </a:r>
+            <a:endParaRPr lang="en-US" sz="600" dirty="0">
+              <a:solidFill>
+                <a:srgbClr val="FFFFFF"/>
+              </a:solidFill>
+            </a:endParaRPr>
+          </a:p>
+          <a:p>
+            <a:pPr>
+              <a:lnSpc>
+                <a:spcPct val="110000"/>
+              </a:lnSpc>
+            </a:pPr>
+            <a:r>
+              <a:rPr lang="en-US" sz="600" dirty="0">
+                <a:solidFill>
+                  <a:srgbClr val="FFFFFF"/>
+                </a:solidFill>
+              </a:rPr>
+              <a:t>Nashville Open Data https://datanashvillegov-nashville.hub.arcgis.com/datasets/d747436243e9439e968fce056545016a_0/explore?location=35.885029%2C-86.948355%2C7.34</a:t>
+            </a:r>
+          </a:p>
+          <a:p>
+            <a:pPr>
+              <a:lnSpc>
+                <a:spcPct val="110000"/>
+              </a:lnSpc>
+            </a:pPr>
+            <a:endParaRPr lang="en-US" sz="600" dirty="0">
+              <a:solidFill>
+                <a:srgbClr val="FFFFFF"/>
+              </a:solidFill>
+            </a:endParaRPr>
+          </a:p>
+        </p:txBody>
+      </p:sp>
+    </p:spTree>
+    <p:extLst>
+      <p:ext uri="{BB962C8B-B14F-4D97-AF65-F5344CB8AC3E}">
+        <p14:creationId xmlns:p14="http://schemas.microsoft.com/office/powerpoint/2010/main" val="3502945966"/>
+      </p:ext>
+    </p:extLst>
+  </p:cSld>
+  <p:clrMapOvr>
+    <a:overrideClrMapping bg1="dk1" tx1="lt1" bg2="dk2" tx2="lt2" accent1="accent1" accent2="accent2" accent3="accent3" accent4="accent4" accent5="accent5" accent6="accent6" hlink="hlink" folHlink="folHlink"/>
+  </p:clrMapOvr>
+</p:sld>
+</file>
+
+<file path=ppt/slides/slide5.xml><?xml version="1.0" encoding="utf-8"?>
+<p:sld xmlns:a="http://schemas.openxmlformats.org/drawingml/2006/main" xmlns:r="http://schemas.openxmlformats.org/officeDocument/2006/relationships" xmlns:p="http://schemas.openxmlformats.org/presentationml/2006/main">
+  <p:cSld>
+    <p:bg>
+      <p:bgPr>
+        <a:solidFill>
+          <a:schemeClr val="bg1"/>
+        </a:solidFill>
+        <a:effectLst/>
+      </p:bgPr>
+    </p:bg>
+    <p:spTree>
+      <p:nvGrpSpPr>
+        <p:cNvPr id="1" name=""/>
+        <p:cNvGrpSpPr/>
+        <p:nvPr/>
+      </p:nvGrpSpPr>
+      <p:grpSpPr>
+        <a:xfrm>
+          <a:off x="0" y="0"/>
+          <a:ext cx="0" cy="0"/>
+          <a:chOff x="0" y="0"/>
+          <a:chExt cx="0" cy="0"/>
+        </a:xfrm>
+      </p:grpSpPr>
+      <p:sp>
+        <p:nvSpPr>
+          <p:cNvPr id="2" name="Title 1">
+            <a:extLst>
+              <a:ext uri="{FF2B5EF4-FFF2-40B4-BE49-F238E27FC236}">
+                <a16:creationId xmlns:a16="http://schemas.microsoft.com/office/drawing/2014/main" id="{9B920EEE-CB07-9243-D73C-93F5A9A5B83F}"/>
+              </a:ext>
+            </a:extLst>
+          </p:cNvPr>
+          <p:cNvSpPr>
+            <a:spLocks noGrp="1"/>
+          </p:cNvSpPr>
+          <p:nvPr>
+            <p:ph type="title"/>
+          </p:nvPr>
+        </p:nvSpPr>
+        <p:spPr>
+          <a:xfrm>
+            <a:off x="581192" y="702156"/>
+            <a:ext cx="11029616" cy="1188720"/>
+          </a:xfrm>
+        </p:spPr>
+        <p:txBody>
+          <a:bodyPr>
+            <a:normAutofit/>
+          </a:bodyPr>
+          <a:lstStyle/>
+          <a:p>
+            <a:r>
+              <a:rPr lang="en-US" dirty="0"/>
+              <a:t>Issues encountered</a:t>
+            </a:r>
+          </a:p>
+        </p:txBody>
+      </p:sp>
+      <p:graphicFrame>
+        <p:nvGraphicFramePr>
+          <p:cNvPr id="5" name="Content Placeholder 2">
+            <a:extLst>
+              <a:ext uri="{FF2B5EF4-FFF2-40B4-BE49-F238E27FC236}">
+                <a16:creationId xmlns:a16="http://schemas.microsoft.com/office/drawing/2014/main" id="{D4EDF90C-3FAF-A70C-EA45-7796E72E6F29}"/>
+              </a:ext>
+            </a:extLst>
+          </p:cNvPr>
+          <p:cNvGraphicFramePr>
+            <a:graphicFrameLocks noGrp="1"/>
+          </p:cNvGraphicFramePr>
+          <p:nvPr>
+            <p:ph idx="1"/>
+            <p:extLst>
+              <p:ext uri="{D42A27DB-BD31-4B8C-83A1-F6EECF244321}">
+                <p14:modId xmlns:p14="http://schemas.microsoft.com/office/powerpoint/2010/main" val="4231511922"/>
+              </p:ext>
+            </p:extLst>
+          </p:nvPr>
+        </p:nvGraphicFramePr>
+        <p:xfrm>
+          <a:off x="581025" y="2341563"/>
+          <a:ext cx="11029950" cy="3814281"/>
+        </p:xfrm>
+        <a:graphic>
+          <a:graphicData uri="http://schemas.openxmlformats.org/drawingml/2006/diagram">
+            <dgm:relIds xmlns:dgm="http://schemas.openxmlformats.org/drawingml/2006/diagram" xmlns:r="http://schemas.openxmlformats.org/officeDocument/2006/relationships" r:dm="rId3" r:lo="rId4" r:qs="rId5" r:cs="rId6"/>
+          </a:graphicData>
+        </a:graphic>
+      </p:graphicFrame>
+    </p:spTree>
+    <p:extLst>
+      <p:ext uri="{BB962C8B-B14F-4D97-AF65-F5344CB8AC3E}">
+        <p14:creationId xmlns:p14="http://schemas.microsoft.com/office/powerpoint/2010/main" val="1351500608"/>
+      </p:ext>
+    </p:extLst>
+  </p:cSld>
+  <p:clrMapOvr>
+    <a:masterClrMapping/>
+  </p:clrMapOvr>
+</p:sld>
+</file>
+
+<file path=ppt/slides/slide6.xml><?xml version="1.0" encoding="utf-8"?>
+<p:sld xmlns:a="http://schemas.openxmlformats.org/drawingml/2006/main" xmlns:r="http://schemas.openxmlformats.org/officeDocument/2006/relationships" xmlns:p="http://schemas.openxmlformats.org/presentationml/2006/main">
+  <p:cSld>
+    <p:bg>
+      <p:bgPr>
+        <a:solidFill>
+          <a:schemeClr val="bg1"/>
+        </a:solidFill>
+        <a:effectLst/>
+      </p:bgPr>
+    </p:bg>
+    <p:spTree>
+      <p:nvGrpSpPr>
+        <p:cNvPr id="1" name=""/>
+        <p:cNvGrpSpPr/>
+        <p:nvPr/>
+      </p:nvGrpSpPr>
+      <p:grpSpPr>
+        <a:xfrm>
+          <a:off x="0" y="0"/>
+          <a:ext cx="0" cy="0"/>
+          <a:chOff x="0" y="0"/>
+          <a:chExt cx="0" cy="0"/>
+        </a:xfrm>
+      </p:grpSpPr>
+      <p:sp>
+        <p:nvSpPr>
+          <p:cNvPr id="61" name="Rectangle 60">
+            <a:extLst>
+              <a:ext uri="{FF2B5EF4-FFF2-40B4-BE49-F238E27FC236}">
+                <a16:creationId xmlns:a16="http://schemas.microsoft.com/office/drawing/2014/main" id="{DD651B61-325E-4E73-8445-38B0DE8AAAB6}"/>
+              </a:ext>
+              <a:ext uri="{C183D7F6-B498-43B3-948B-1728B52AA6E4}">
+                <adec:decorative xmlns:adec="http://schemas.microsoft.com/office/drawing/2017/decorative" val="1"/>
+              </a:ext>
+            </a:extLst>
+          </p:cNvPr>
+          <p:cNvSpPr>
+            <a:spLocks noGrp="1" noRot="1" noChangeAspect="1" noMove="1" noResize="1" noEditPoints="1" noAdjustHandles="1" noChangeArrowheads="1" noChangeShapeType="1" noTextEdit="1"/>
+          </p:cNvSpPr>
+          <p:nvPr>
+            <p:extLst>
+              <p:ext uri="{386F3935-93C4-4BCD-93E2-E3B085C9AB24}">
+                <p16:designElem xmlns:p16="http://schemas.microsoft.com/office/powerpoint/2015/main" val="1"/>
+              </p:ext>
+            </p:extLst>
+          </p:nvPr>
+        </p:nvSpPr>
+        <p:spPr>
+          <a:xfrm>
+            <a:off x="446534" y="457200"/>
+            <a:ext cx="3703320" cy="94997"/>
+          </a:xfrm>
+          <a:prstGeom prst="rect">
+            <a:avLst/>
+          </a:prstGeom>
+          <a:solidFill>
+            <a:srgbClr val="465359"/>
+          </a:solidFill>
+          <a:ln>
+            <a:noFill/>
+          </a:ln>
+          <a:effectLst/>
+        </p:spPr>
+        <p:style>
+          <a:lnRef idx="1">
+            <a:schemeClr val="accent1"/>
+          </a:lnRef>
+          <a:fillRef idx="3">
+            <a:schemeClr val="accent1"/>
+          </a:fillRef>
+          <a:effectRef idx="2">
+            <a:schemeClr val="accent1"/>
+          </a:effectRef>
+          <a:fontRef idx="minor">
+            <a:schemeClr val="lt1"/>
+          </a:fontRef>
+        </p:style>
+        <p:txBody>
+          <a:bodyPr/>
+          <a:lstStyle/>
+          <a:p>
+            <a:endParaRPr lang="en-US"/>
+          </a:p>
+        </p:txBody>
+      </p:sp>
+      <p:sp>
+        <p:nvSpPr>
+          <p:cNvPr id="63" name="Rectangle 62">
+            <a:extLst>
+              <a:ext uri="{FF2B5EF4-FFF2-40B4-BE49-F238E27FC236}">
+                <a16:creationId xmlns:a16="http://schemas.microsoft.com/office/drawing/2014/main" id="{B42E5253-D3AC-4AC2-B766-8B34F13C2F5E}"/>
+              </a:ext>
+              <a:ext uri="{C183D7F6-B498-43B3-948B-1728B52AA6E4}">
+                <adec:decorative xmlns:adec="http://schemas.microsoft.com/office/drawing/2017/decorative" val="1"/>
+              </a:ext>
+            </a:extLst>
+          </p:cNvPr>
+          <p:cNvSpPr>
+            <a:spLocks noGrp="1" noRot="1" noChangeAspect="1" noMove="1" noResize="1" noEditPoints="1" noAdjustHandles="1" noChangeArrowheads="1" noChangeShapeType="1" noTextEdit="1"/>
+          </p:cNvSpPr>
+          <p:nvPr>
+            <p:extLst>
+              <p:ext uri="{386F3935-93C4-4BCD-93E2-E3B085C9AB24}">
+                <p16:designElem xmlns:p16="http://schemas.microsoft.com/office/powerpoint/2015/main" val="1"/>
+              </p:ext>
+            </p:extLst>
+          </p:nvPr>
+        </p:nvSpPr>
+        <p:spPr>
+          <a:xfrm>
+            <a:off x="8042147" y="453643"/>
+            <a:ext cx="3703320" cy="98554"/>
+          </a:xfrm>
+          <a:prstGeom prst="rect">
+            <a:avLst/>
+          </a:prstGeom>
+          <a:solidFill>
+            <a:srgbClr val="969FA7"/>
+          </a:solidFill>
+          <a:ln>
+            <a:noFill/>
+          </a:ln>
+          <a:effectLst/>
+        </p:spPr>
+        <p:style>
+          <a:lnRef idx="1">
+            <a:schemeClr val="accent1"/>
+          </a:lnRef>
+          <a:fillRef idx="3">
+            <a:schemeClr val="accent1"/>
+          </a:fillRef>
+          <a:effectRef idx="2">
+            <a:schemeClr val="accent1"/>
+          </a:effectRef>
+          <a:fontRef idx="minor">
+            <a:schemeClr val="lt1"/>
+          </a:fontRef>
+        </p:style>
+        <p:txBody>
+          <a:bodyPr/>
+          <a:lstStyle/>
+          <a:p>
+            <a:endParaRPr lang="en-US"/>
+          </a:p>
+        </p:txBody>
+      </p:sp>
+      <p:sp>
+        <p:nvSpPr>
+          <p:cNvPr id="65" name="Rectangle 64">
+            <a:extLst>
+              <a:ext uri="{FF2B5EF4-FFF2-40B4-BE49-F238E27FC236}">
+                <a16:creationId xmlns:a16="http://schemas.microsoft.com/office/drawing/2014/main" id="{10AE8D57-436A-4073-9A75-15BB5949F8B4}"/>
+              </a:ext>
+              <a:ext uri="{C183D7F6-B498-43B3-948B-1728B52AA6E4}">
+                <adec:decorative xmlns:adec="http://schemas.microsoft.com/office/drawing/2017/decorative" val="1"/>
+              </a:ext>
+            </a:extLst>
+          </p:cNvPr>
+          <p:cNvSpPr>
+            <a:spLocks noGrp="1" noRot="1" noChangeAspect="1" noMove="1" noResize="1" noEditPoints="1" noAdjustHandles="1" noChangeArrowheads="1" noChangeShapeType="1" noTextEdit="1"/>
+          </p:cNvSpPr>
+          <p:nvPr>
+            <p:extLst>
+              <p:ext uri="{386F3935-93C4-4BCD-93E2-E3B085C9AB24}">
+                <p16:designElem xmlns:p16="http://schemas.microsoft.com/office/powerpoint/2015/main" val="1"/>
+              </p:ext>
+            </p:extLst>
+          </p:nvPr>
+        </p:nvSpPr>
+        <p:spPr>
+          <a:xfrm>
+            <a:off x="4241830" y="457200"/>
+            <a:ext cx="3703320" cy="91440"/>
+          </a:xfrm>
+          <a:prstGeom prst="rect">
+            <a:avLst/>
+          </a:prstGeom>
+          <a:solidFill>
+            <a:schemeClr val="accent1"/>
+          </a:solidFill>
+          <a:ln>
+            <a:noFill/>
+          </a:ln>
+          <a:effectLst/>
+        </p:spPr>
+        <p:style>
+          <a:lnRef idx="1">
+            <a:schemeClr val="accent1"/>
+          </a:lnRef>
+          <a:fillRef idx="3">
+            <a:schemeClr val="accent1"/>
+          </a:fillRef>
+          <a:effectRef idx="2">
+            <a:schemeClr val="accent1"/>
+          </a:effectRef>
+          <a:fontRef idx="minor">
+            <a:schemeClr val="lt1"/>
+          </a:fontRef>
+        </p:style>
+        <p:txBody>
+          <a:bodyPr/>
+          <a:lstStyle/>
+          <a:p>
+            <a:endParaRPr lang="en-US"/>
+          </a:p>
+        </p:txBody>
+      </p:sp>
+      <p:sp>
+        <p:nvSpPr>
+          <p:cNvPr id="67" name="Rectangle 66">
+            <a:extLst>
+              <a:ext uri="{FF2B5EF4-FFF2-40B4-BE49-F238E27FC236}">
+                <a16:creationId xmlns:a16="http://schemas.microsoft.com/office/drawing/2014/main" id="{E2852671-8EB6-4EAF-8AF8-65CF3FD66456}"/>
+              </a:ext>
+              <a:ext uri="{C183D7F6-B498-43B3-948B-1728B52AA6E4}">
+                <adec:decorative xmlns:adec="http://schemas.microsoft.com/office/drawing/2017/decorative" val="1"/>
+              </a:ext>
+            </a:extLst>
+          </p:cNvPr>
+          <p:cNvSpPr>
+            <a:spLocks noGrp="1" noRot="1" noChangeAspect="1" noMove="1" noResize="1" noEditPoints="1" noAdjustHandles="1" noChangeArrowheads="1" noChangeShapeType="1" noTextEdit="1"/>
+          </p:cNvSpPr>
+          <p:nvPr>
+            <p:extLst>
+              <p:ext uri="{386F3935-93C4-4BCD-93E2-E3B085C9AB24}">
+                <p16:designElem xmlns:p16="http://schemas.microsoft.com/office/powerpoint/2015/main" val="1"/>
+              </p:ext>
+            </p:extLst>
+          </p:nvPr>
+        </p:nvSpPr>
+        <p:spPr>
+          <a:xfrm>
+            <a:off x="446534" y="3085764"/>
+            <a:ext cx="11298932" cy="3338149"/>
+          </a:xfrm>
+          <a:prstGeom prst="rect">
+            <a:avLst/>
+          </a:prstGeom>
+          <a:solidFill>
+            <a:srgbClr val="465359"/>
+          </a:solidFill>
+          <a:ln>
+            <a:noFill/>
+          </a:ln>
+          <a:effectLst/>
+        </p:spPr>
+        <p:style>
+          <a:lnRef idx="1">
+            <a:schemeClr val="accent1"/>
+          </a:lnRef>
+          <a:fillRef idx="3">
+            <a:schemeClr val="accent1"/>
+          </a:fillRef>
+          <a:effectRef idx="2">
+            <a:schemeClr val="accent1"/>
+          </a:effectRef>
+          <a:fontRef idx="minor">
+            <a:schemeClr val="lt1"/>
+          </a:fontRef>
+        </p:style>
+        <p:txBody>
+          <a:bodyPr/>
+          <a:lstStyle/>
+          <a:p>
+            <a:endParaRPr lang="en-US"/>
+          </a:p>
+        </p:txBody>
+      </p:sp>
+      <p:sp useBgFill="1">
+        <p:nvSpPr>
+          <p:cNvPr id="69" name="Rectangle 68">
+            <a:extLst>
+              <a:ext uri="{FF2B5EF4-FFF2-40B4-BE49-F238E27FC236}">
+                <a16:creationId xmlns:a16="http://schemas.microsoft.com/office/drawing/2014/main" id="{26B4480E-B7FF-4481-890E-043A69AE6FE2}"/>
+              </a:ext>
+              <a:ext uri="{C183D7F6-B498-43B3-948B-1728B52AA6E4}">
+                <adec:decorative xmlns:adec="http://schemas.microsoft.com/office/drawing/2017/decorative" val="1"/>
+              </a:ext>
+            </a:extLst>
+          </p:cNvPr>
+          <p:cNvSpPr>
+            <a:spLocks noGrp="1" noRot="1" noChangeAspect="1" noMove="1" noResize="1" noEditPoints="1" noAdjustHandles="1" noChangeArrowheads="1" noChangeShapeType="1" noTextEdit="1"/>
+          </p:cNvSpPr>
+          <p:nvPr>
+            <p:extLst>
+              <p:ext uri="{386F3935-93C4-4BCD-93E2-E3B085C9AB24}">
+                <p16:designElem xmlns:p16="http://schemas.microsoft.com/office/powerpoint/2015/main" val="1"/>
+              </p:ext>
+            </p:extLst>
+          </p:nvPr>
+        </p:nvSpPr>
+        <p:spPr>
+          <a:xfrm>
+            <a:off x="0" y="0"/>
+            <a:ext cx="12192000" cy="6858000"/>
+          </a:xfrm>
+          <a:prstGeom prst="rect">
+            <a:avLst/>
+          </a:prstGeom>
+          <a:ln>
+            <a:noFill/>
+          </a:ln>
+        </p:spPr>
+        <p:style>
+          <a:lnRef idx="2">
+            <a:schemeClr val="accent1">
+              <a:shade val="50000"/>
+            </a:schemeClr>
+          </a:lnRef>
+          <a:fillRef idx="1">
+            <a:schemeClr val="accent1"/>
+          </a:fillRef>
+          <a:effectRef idx="0">
+            <a:schemeClr val="accent1"/>
+          </a:effectRef>
+          <a:fontRef idx="minor">
+            <a:schemeClr val="lt1"/>
+          </a:fontRef>
+        </p:style>
+        <p:txBody>
+          <a:bodyPr rtlCol="0" anchor="ctr"/>
+          <a:lstStyle/>
+          <a:p>
+            <a:pPr algn="ctr"/>
+            <a:endParaRPr lang="en-US"/>
+          </a:p>
+        </p:txBody>
+      </p:sp>
+      <p:grpSp>
+        <p:nvGrpSpPr>
+          <p:cNvPr id="71" name="Group 70">
+            <a:extLst>
+              <a:ext uri="{FF2B5EF4-FFF2-40B4-BE49-F238E27FC236}">
+                <a16:creationId xmlns:a16="http://schemas.microsoft.com/office/drawing/2014/main" id="{79394E1F-0B5F-497D-B2A6-8383A2A54834}"/>
+              </a:ext>
+              <a:ext uri="{C183D7F6-B498-43B3-948B-1728B52AA6E4}">
+                <adec:decorative xmlns:adec="http://schemas.microsoft.com/office/drawing/2017/decorative" val="1"/>
+              </a:ext>
+            </a:extLst>
+          </p:cNvPr>
+          <p:cNvGrpSpPr>
+            <a:grpSpLocks noGrp="1" noUngrp="1" noRot="1" noChangeAspect="1" noMove="1" noResize="1"/>
+          </p:cNvGrpSpPr>
+          <p:nvPr>
+            <p:extLst>
+              <p:ext uri="{386F3935-93C4-4BCD-93E2-E3B085C9AB24}">
+                <p16:designElem xmlns:p16="http://schemas.microsoft.com/office/powerpoint/2015/main" val="1"/>
+              </p:ext>
+            </p:extLst>
+          </p:nvPr>
+        </p:nvGrpSpPr>
+        <p:grpSpPr>
+          <a:xfrm>
+            <a:off x="438068" y="457200"/>
+            <a:ext cx="3703320" cy="5935133"/>
+            <a:chOff x="438068" y="457200"/>
+            <a:chExt cx="3703320" cy="5935133"/>
+          </a:xfrm>
+        </p:grpSpPr>
+        <p:sp>
+          <p:nvSpPr>
+            <p:cNvPr id="72" name="Rectangle 71">
+              <a:extLst>
+                <a:ext uri="{FF2B5EF4-FFF2-40B4-BE49-F238E27FC236}">
+                  <a16:creationId xmlns:a16="http://schemas.microsoft.com/office/drawing/2014/main" id="{1F1FF39A-AC3C-4066-9D4C-519AA22812EA}"/>
+                </a:ext>
+                <a:ext uri="{C183D7F6-B498-43B3-948B-1728B52AA6E4}">
+                  <adec:decorative xmlns:adec="http://schemas.microsoft.com/office/drawing/2017/decorative" val="1"/>
+                </a:ext>
+              </a:extLst>
+            </p:cNvPr>
+            <p:cNvSpPr/>
+            <p:nvPr>
+              <p:extLst>
+                <p:ext uri="{386F3935-93C4-4BCD-93E2-E3B085C9AB24}">
+                  <p16:designElem xmlns:p16="http://schemas.microsoft.com/office/powerpoint/2015/main" val="1"/>
+                </p:ext>
+              </p:extLst>
+            </p:nvPr>
+          </p:nvSpPr>
+          <p:spPr>
+            <a:xfrm>
+              <a:off x="438068" y="601201"/>
+              <a:ext cx="3702134" cy="5791132"/>
+            </a:xfrm>
+            <a:prstGeom prst="rect">
+              <a:avLst/>
+            </a:prstGeom>
+            <a:solidFill>
+              <a:srgbClr val="465359">
+                <a:alpha val="97000"/>
+              </a:srgbClr>
+            </a:solidFill>
+            <a:ln w="6350" cmpd="sng">
+              <a:noFill/>
+            </a:ln>
+            <a:effectLst/>
+          </p:spPr>
+          <p:style>
+            <a:lnRef idx="1">
+              <a:schemeClr val="accent1"/>
+            </a:lnRef>
+            <a:fillRef idx="3">
+              <a:schemeClr val="accent1"/>
+            </a:fillRef>
+            <a:effectRef idx="2">
+              <a:schemeClr val="accent1"/>
+            </a:effectRef>
+            <a:fontRef idx="minor">
+              <a:schemeClr val="lt1"/>
+            </a:fontRef>
+          </p:style>
+          <p:txBody>
+            <a:bodyPr/>
+            <a:lstStyle/>
+            <a:p>
+              <a:endParaRPr lang="en-US"/>
+            </a:p>
+          </p:txBody>
+        </p:sp>
+        <p:sp>
+          <p:nvSpPr>
+            <p:cNvPr id="73" name="Rectangle 72">
+              <a:extLst>
+                <a:ext uri="{FF2B5EF4-FFF2-40B4-BE49-F238E27FC236}">
+                  <a16:creationId xmlns:a16="http://schemas.microsoft.com/office/drawing/2014/main" id="{64C13BAB-7C00-4D21-A857-E3D41C0A2A66}"/>
+                </a:ext>
+                <a:ext uri="{C183D7F6-B498-43B3-948B-1728B52AA6E4}">
+                  <adec:decorative xmlns:adec="http://schemas.microsoft.com/office/drawing/2017/decorative" val="1"/>
+                </a:ext>
+              </a:extLst>
+            </p:cNvPr>
+            <p:cNvSpPr/>
+            <p:nvPr>
+              <p:extLst>
+                <p:ext uri="{386F3935-93C4-4BCD-93E2-E3B085C9AB24}">
+                  <p16:designElem xmlns:p16="http://schemas.microsoft.com/office/powerpoint/2015/main" val="1"/>
+                </p:ext>
+              </p:extLst>
+            </p:nvPr>
+          </p:nvSpPr>
+          <p:spPr>
+            <a:xfrm>
+              <a:off x="438068" y="457200"/>
+              <a:ext cx="3703320" cy="94997"/>
+            </a:xfrm>
+            <a:prstGeom prst="rect">
+              <a:avLst/>
+            </a:prstGeom>
+            <a:solidFill>
+              <a:srgbClr val="465359"/>
+            </a:solidFill>
+            <a:ln>
+              <a:noFill/>
+            </a:ln>
+            <a:effectLst/>
+          </p:spPr>
+          <p:style>
+            <a:lnRef idx="1">
+              <a:schemeClr val="accent1"/>
+            </a:lnRef>
+            <a:fillRef idx="3">
+              <a:schemeClr val="accent1"/>
+            </a:fillRef>
+            <a:effectRef idx="2">
+              <a:schemeClr val="accent1"/>
+            </a:effectRef>
+            <a:fontRef idx="minor">
+              <a:schemeClr val="lt1"/>
+            </a:fontRef>
+          </p:style>
+          <p:txBody>
+            <a:bodyPr/>
+            <a:lstStyle/>
+            <a:p>
+              <a:endParaRPr lang="en-US"/>
+            </a:p>
+          </p:txBody>
+        </p:sp>
+      </p:grpSp>
+      <p:sp>
+        <p:nvSpPr>
+          <p:cNvPr id="2" name="Title 1">
+            <a:extLst>
+              <a:ext uri="{FF2B5EF4-FFF2-40B4-BE49-F238E27FC236}">
                 <a16:creationId xmlns:a16="http://schemas.microsoft.com/office/drawing/2014/main" id="{550A79B6-0814-57FB-65E6-887AC286E127}"/>
               </a:ext>
             </a:extLst>
@@ -15955,10 +16352,10 @@
       </p:sp>
       <p:pic>
         <p:nvPicPr>
-          <p:cNvPr id="7" name="Content Placeholder 6" descr="A graph of growth in the year&#10;&#10;Description automatically generated">
+          <p:cNvPr id="6" name="Content Placeholder 5" descr="A graph with a line and a red line&#10;&#10;Description automatically generated">
             <a:extLst>
               <a:ext uri="{FF2B5EF4-FFF2-40B4-BE49-F238E27FC236}">
-                <a16:creationId xmlns:a16="http://schemas.microsoft.com/office/drawing/2014/main" id="{DA87C518-2EE9-69AD-C90A-2950A1C9436D}"/>
+                <a16:creationId xmlns:a16="http://schemas.microsoft.com/office/drawing/2014/main" id="{84ECD5A2-4E09-A2C1-1056-77144FD3661A}"/>
               </a:ext>
             </a:extLst>
           </p:cNvPr>
@@ -15983,8 +16380,8 @@
         </p:blipFill>
         <p:spPr>
           <a:xfrm>
-            <a:off x="4765053" y="931058"/>
-            <a:ext cx="6764864" cy="4972175"/>
+            <a:off x="4765053" y="947970"/>
+            <a:ext cx="6764864" cy="4938350"/>
           </a:xfrm>
           <a:prstGeom prst="rect">
             <a:avLst/>
@@ -16123,10 +16520,10 @@
       </p:grpSpPr>
       <p:sp>
         <p:nvSpPr>
-          <p:cNvPr id="95" name="Rectangle 94">
+          <p:cNvPr id="285" name="Rectangle 284">
             <a:extLst>
               <a:ext uri="{FF2B5EF4-FFF2-40B4-BE49-F238E27FC236}">
-                <a16:creationId xmlns:a16="http://schemas.microsoft.com/office/drawing/2014/main" id="{77F2BB43-1E8B-40A7-9733-9AEE76BFE22A}"/>
+                <a16:creationId xmlns:a16="http://schemas.microsoft.com/office/drawing/2014/main" id="{910015B9-6046-41B8-83BD-71778D2F9798}"/>
               </a:ext>
               <a:ext uri="{C183D7F6-B498-43B3-948B-1728B52AA6E4}">
                 <adec:decorative xmlns:adec="http://schemas.microsoft.com/office/drawing/2017/decorative" val="1"/>
@@ -16184,10 +16581,10 @@
       </p:sp>
       <p:sp>
         <p:nvSpPr>
-          <p:cNvPr id="97" name="Rectangle 96">
+          <p:cNvPr id="287" name="Rectangle 286">
             <a:extLst>
               <a:ext uri="{FF2B5EF4-FFF2-40B4-BE49-F238E27FC236}">
-                <a16:creationId xmlns:a16="http://schemas.microsoft.com/office/drawing/2014/main" id="{2F2499BD-C67D-4CD4-9747-4DCC7EF1FC2F}"/>
+                <a16:creationId xmlns:a16="http://schemas.microsoft.com/office/drawing/2014/main" id="{53908232-52E2-4794-A6C1-54300FB98919}"/>
               </a:ext>
               <a:ext uri="{C183D7F6-B498-43B3-948B-1728B52AA6E4}">
                 <adec:decorative xmlns:adec="http://schemas.microsoft.com/office/drawing/2017/decorative" val="1"/>
@@ -16245,10 +16642,10 @@
       </p:sp>
       <p:sp>
         <p:nvSpPr>
-          <p:cNvPr id="99" name="Rectangle 98">
+          <p:cNvPr id="289" name="Rectangle 288">
             <a:extLst>
               <a:ext uri="{FF2B5EF4-FFF2-40B4-BE49-F238E27FC236}">
-                <a16:creationId xmlns:a16="http://schemas.microsoft.com/office/drawing/2014/main" id="{80D02CAC-A533-4E24-84A6-B3171E16A274}"/>
+                <a16:creationId xmlns:a16="http://schemas.microsoft.com/office/drawing/2014/main" id="{D2B9299F-BED7-44C5-9CC5-E542F9193C2F}"/>
               </a:ext>
               <a:ext uri="{C183D7F6-B498-43B3-948B-1728B52AA6E4}">
                 <adec:decorative xmlns:adec="http://schemas.microsoft.com/office/drawing/2017/decorative" val="1"/>
@@ -16306,10 +16703,10 @@
       </p:sp>
       <p:sp>
         <p:nvSpPr>
-          <p:cNvPr id="101" name="Rectangle 100">
+          <p:cNvPr id="291" name="Rectangle 290">
             <a:extLst>
               <a:ext uri="{FF2B5EF4-FFF2-40B4-BE49-F238E27FC236}">
-                <a16:creationId xmlns:a16="http://schemas.microsoft.com/office/drawing/2014/main" id="{44DBAF48-B17B-4AA7-9E99-4EC0C9905827}"/>
+                <a16:creationId xmlns:a16="http://schemas.microsoft.com/office/drawing/2014/main" id="{E9DDF273-E040-4765-AD05-872458E1370A}"/>
               </a:ext>
               <a:ext uri="{C183D7F6-B498-43B3-948B-1728B52AA6E4}">
                 <adec:decorative xmlns:adec="http://schemas.microsoft.com/office/drawing/2017/decorative" val="1"/>
@@ -16365,44 +16762,72 @@
           </a:p>
         </p:txBody>
       </p:sp>
-      <p:pic>
-        <p:nvPicPr>
-          <p:cNvPr id="4" name="Picture 3" descr="A car parked in front of a building&#10;&#10;Description automatically generated">
+      <p:sp>
+        <p:nvSpPr>
+          <p:cNvPr id="293" name="Rectangle 292">
             <a:extLst>
               <a:ext uri="{FF2B5EF4-FFF2-40B4-BE49-F238E27FC236}">
-                <a16:creationId xmlns:a16="http://schemas.microsoft.com/office/drawing/2014/main" id="{104FF15C-54D6-FC4B-8C06-AA2D0023696E}"/>
+                <a16:creationId xmlns:a16="http://schemas.microsoft.com/office/drawing/2014/main" id="{EE997D3B-4ECD-4397-A989-D5882BB322B6}"/>
+              </a:ext>
+              <a:ext uri="{C183D7F6-B498-43B3-948B-1728B52AA6E4}">
+                <adec:decorative xmlns:adec="http://schemas.microsoft.com/office/drawing/2017/decorative" val="1"/>
               </a:ext>
             </a:extLst>
           </p:cNvPr>
-          <p:cNvPicPr>
-            <a:picLocks noChangeAspect="1"/>
-          </p:cNvPicPr>
-          <p:nvPr/>
-        </p:nvPicPr>
-        <p:blipFill>
-          <a:blip r:embed="rId3">
-            <a:extLst>
-              <a:ext uri="{28A0092B-C50C-407E-A947-70E740481C1C}">
-                <a14:useLocalDpi xmlns:a14="http://schemas.microsoft.com/office/drawing/2010/main" val="0"/>
-              </a:ext>
-            </a:extLst>
-          </a:blip>
-          <a:srcRect t="7760" r="-1" b="7968"/>
-          <a:stretch/>
-        </p:blipFill>
+          <p:cNvSpPr>
+            <a:spLocks noGrp="1" noRot="1" noChangeAspect="1" noMove="1" noResize="1" noEditPoints="1" noAdjustHandles="1" noChangeArrowheads="1" noChangeShapeType="1" noTextEdit="1"/>
+          </p:cNvSpPr>
+          <p:nvPr>
+            <p:extLst>
+              <p:ext uri="{386F3935-93C4-4BCD-93E2-E3B085C9AB24}">
+                <p16:designElem xmlns:p16="http://schemas.microsoft.com/office/powerpoint/2015/main" val="1"/>
+              </p:ext>
+            </p:extLst>
+          </p:nvPr>
+        </p:nvSpPr>
         <p:spPr>
           <a:xfrm>
-            <a:off x="1" y="-1"/>
-            <a:ext cx="12191695" cy="6858000"/>
+            <a:off x="0" y="0"/>
+            <a:ext cx="12192000" cy="6858000"/>
           </a:xfrm>
           <a:prstGeom prst="rect">
             <a:avLst/>
           </a:prstGeom>
+          <a:solidFill>
+            <a:schemeClr val="tx1"/>
+          </a:solidFill>
+          <a:ln>
+            <a:noFill/>
+          </a:ln>
         </p:spPr>
-      </p:pic>
+        <p:style>
+          <a:lnRef idx="2">
+            <a:schemeClr val="accent1">
+              <a:shade val="50000"/>
+            </a:schemeClr>
+          </a:lnRef>
+          <a:fillRef idx="1">
+            <a:schemeClr val="accent1"/>
+          </a:fillRef>
+          <a:effectRef idx="0">
+            <a:schemeClr val="accent1"/>
+          </a:effectRef>
+          <a:fontRef idx="minor">
+            <a:schemeClr val="lt1"/>
+          </a:fontRef>
+        </p:style>
+        <p:txBody>
+          <a:bodyPr rtlCol="0" anchor="ctr"/>
+          <a:lstStyle/>
+          <a:p>
+            <a:pPr algn="ctr"/>
+            <a:endParaRPr lang="en-US"/>
+          </a:p>
+        </p:txBody>
+      </p:sp>
       <p:grpSp>
         <p:nvGrpSpPr>
-          <p:cNvPr id="103" name="Group 102">
+          <p:cNvPr id="295" name="Group 294">
             <a:extLst>
               <a:ext uri="{FF2B5EF4-FFF2-40B4-BE49-F238E27FC236}">
                 <a16:creationId xmlns:a16="http://schemas.microsoft.com/office/drawing/2014/main" id="{3A852E5D-96B2-47B5-AB0F-426F231FBD41}"/>
@@ -16433,7 +16858,7 @@
         </p:grpSpPr>
         <p:sp>
           <p:nvSpPr>
-            <p:cNvPr id="104" name="Rectangle 103">
+            <p:cNvPr id="296" name="Rectangle 295">
               <a:extLst>
                 <a:ext uri="{FF2B5EF4-FFF2-40B4-BE49-F238E27FC236}">
                   <a16:creationId xmlns:a16="http://schemas.microsoft.com/office/drawing/2014/main" id="{FBEA2C8A-CA20-494E-8DAA-985E842EDB7F}"/>
@@ -16494,7 +16919,7 @@
         </p:sp>
         <p:sp>
           <p:nvSpPr>
-            <p:cNvPr id="105" name="Rectangle 104">
+            <p:cNvPr id="297" name="Rectangle 296">
               <a:extLst>
                 <a:ext uri="{FF2B5EF4-FFF2-40B4-BE49-F238E27FC236}">
                   <a16:creationId xmlns:a16="http://schemas.microsoft.com/office/drawing/2014/main" id="{DBAE429C-3A94-4C39-B88C-596F1E4C0AB0}"/>
@@ -16637,10 +17062,46 @@
       </p:sp>
       <p:pic>
         <p:nvPicPr>
-          <p:cNvPr id="7" name="Picture 6" descr="A map of a city&#10;&#10;Description automatically generated">
+          <p:cNvPr id="14" name="Picture 13" descr="A car parked in front of a building&#10;&#10;Description automatically generated">
             <a:extLst>
               <a:ext uri="{FF2B5EF4-FFF2-40B4-BE49-F238E27FC236}">
-                <a16:creationId xmlns:a16="http://schemas.microsoft.com/office/drawing/2014/main" id="{5178FBCE-C1F5-FEF7-DAE0-B2B18D362B37}"/>
+                <a16:creationId xmlns:a16="http://schemas.microsoft.com/office/drawing/2014/main" id="{493135EE-AA4A-EB3F-D640-03F663F36F6E}"/>
+              </a:ext>
+            </a:extLst>
+          </p:cNvPr>
+          <p:cNvPicPr>
+            <a:picLocks noChangeAspect="1"/>
+          </p:cNvPicPr>
+          <p:nvPr/>
+        </p:nvPicPr>
+        <p:blipFill>
+          <a:blip r:embed="rId3">
+            <a:extLst>
+              <a:ext uri="{28A0092B-C50C-407E-A947-70E740481C1C}">
+                <a14:useLocalDpi xmlns:a14="http://schemas.microsoft.com/office/drawing/2010/main" val="0"/>
+              </a:ext>
+            </a:extLst>
+          </a:blip>
+          <a:stretch>
+            <a:fillRect/>
+          </a:stretch>
+        </p:blipFill>
+        <p:spPr>
+          <a:xfrm>
+            <a:off x="931168" y="1052795"/>
+            <a:ext cx="2693188" cy="1797703"/>
+          </a:xfrm>
+          <a:prstGeom prst="rect">
+            <a:avLst/>
+          </a:prstGeom>
+        </p:spPr>
+      </p:pic>
+      <p:pic>
+        <p:nvPicPr>
+          <p:cNvPr id="18" name="Picture 17" descr="A graph of graduation rates&#10;&#10;Description automatically generated">
+            <a:extLst>
+              <a:ext uri="{FF2B5EF4-FFF2-40B4-BE49-F238E27FC236}">
+                <a16:creationId xmlns:a16="http://schemas.microsoft.com/office/drawing/2014/main" id="{E975ACC1-420E-AF38-294C-C10E99157708}"/>
               </a:ext>
             </a:extLst>
           </p:cNvPr>
@@ -16657,13 +17118,14 @@
               </a:ext>
             </a:extLst>
           </a:blip>
-          <a:srcRect t="9349" r="-5" b="-5"/>
-          <a:stretch/>
+          <a:stretch>
+            <a:fillRect/>
+          </a:stretch>
         </p:blipFill>
         <p:spPr>
           <a:xfrm>
-            <a:off x="532463" y="731077"/>
-            <a:ext cx="3515763" cy="2119422"/>
+            <a:off x="4586736" y="863136"/>
+            <a:ext cx="7316221" cy="4906060"/>
           </a:xfrm>
           <a:prstGeom prst="rect">
             <a:avLst/>
@@ -16781,7 +17243,7 @@
     <p:bg>
       <p:bgPr>
         <a:solidFill>
-          <a:schemeClr val="bg2"/>
+          <a:schemeClr val="bg1"/>
         </a:solidFill>
         <a:effectLst/>
       </p:bgPr>
@@ -16802,10 +17264,10 @@
       </p:grpSpPr>
       <p:sp>
         <p:nvSpPr>
-          <p:cNvPr id="25" name="Rectangle 24">
+          <p:cNvPr id="58" name="Rectangle 57">
             <a:extLst>
               <a:ext uri="{FF2B5EF4-FFF2-40B4-BE49-F238E27FC236}">
-                <a16:creationId xmlns:a16="http://schemas.microsoft.com/office/drawing/2014/main" id="{1BB56EB9-078F-4952-AC1F-149C7A0AE4D5}"/>
+                <a16:creationId xmlns:a16="http://schemas.microsoft.com/office/drawing/2014/main" id="{3CED7894-4F62-4A6C-8DB5-DB5BE08E9C03}"/>
               </a:ext>
               <a:ext uri="{C183D7F6-B498-43B3-948B-1728B52AA6E4}">
                 <adec:decorative xmlns:adec="http://schemas.microsoft.com/office/drawing/2017/decorative" val="1"/>
@@ -16832,130 +17294,10 @@
             <a:avLst/>
           </a:prstGeom>
           <a:solidFill>
-            <a:schemeClr val="tx1"/>
-          </a:solidFill>
-          <a:ln>
-            <a:noFill/>
-          </a:ln>
-        </p:spPr>
-        <p:style>
-          <a:lnRef idx="2">
-            <a:schemeClr val="accent1">
-              <a:shade val="50000"/>
+            <a:schemeClr val="bg1">
+              <a:lumMod val="75000"/>
+              <a:lumOff val="25000"/>
             </a:schemeClr>
-          </a:lnRef>
-          <a:fillRef idx="1">
-            <a:schemeClr val="accent1"/>
-          </a:fillRef>
-          <a:effectRef idx="0">
-            <a:schemeClr val="accent1"/>
-          </a:effectRef>
-          <a:fontRef idx="minor">
-            <a:schemeClr val="lt1"/>
-          </a:fontRef>
-        </p:style>
-        <p:txBody>
-          <a:bodyPr rtlCol="0" anchor="ctr"/>
-          <a:lstStyle/>
-          <a:p>
-            <a:pPr algn="ctr"/>
-            <a:endParaRPr lang="en-US"/>
-          </a:p>
-        </p:txBody>
-      </p:sp>
-      <p:sp>
-        <p:nvSpPr>
-          <p:cNvPr id="2" name="Title 1">
-            <a:extLst>
-              <a:ext uri="{FF2B5EF4-FFF2-40B4-BE49-F238E27FC236}">
-                <a16:creationId xmlns:a16="http://schemas.microsoft.com/office/drawing/2014/main" id="{5047AA93-0184-6D69-45C2-A51151E34A1C}"/>
-              </a:ext>
-            </a:extLst>
-          </p:cNvPr>
-          <p:cNvSpPr>
-            <a:spLocks noGrp="1"/>
-          </p:cNvSpPr>
-          <p:nvPr>
-            <p:ph type="title"/>
-          </p:nvPr>
-        </p:nvSpPr>
-        <p:spPr>
-          <a:xfrm>
-            <a:off x="672280" y="944752"/>
-            <a:ext cx="3259016" cy="1462692"/>
-          </a:xfrm>
-        </p:spPr>
-        <p:txBody>
-          <a:bodyPr>
-            <a:normAutofit/>
-          </a:bodyPr>
-          <a:lstStyle/>
-          <a:p>
-            <a:r>
-              <a:rPr lang="en-US" sz="2400" dirty="0">
-                <a:solidFill>
-                  <a:schemeClr val="bg1">
-                    <a:lumMod val="75000"/>
-                    <a:lumOff val="25000"/>
-                  </a:schemeClr>
-                </a:solidFill>
-              </a:rPr>
-              <a:t>Lowest Graduation rates in 2023</a:t>
-            </a:r>
-            <a:br>
-              <a:rPr lang="en-US" sz="2400" dirty="0">
-                <a:solidFill>
-                  <a:schemeClr val="bg1">
-                    <a:lumMod val="75000"/>
-                    <a:lumOff val="25000"/>
-                  </a:schemeClr>
-                </a:solidFill>
-              </a:rPr>
-            </a:br>
-            <a:endParaRPr lang="en-US" sz="2400" dirty="0">
-              <a:solidFill>
-                <a:schemeClr val="bg1">
-                  <a:lumMod val="75000"/>
-                  <a:lumOff val="25000"/>
-                </a:schemeClr>
-              </a:solidFill>
-            </a:endParaRPr>
-          </a:p>
-        </p:txBody>
-      </p:sp>
-      <p:sp>
-        <p:nvSpPr>
-          <p:cNvPr id="27" name="Rectangle 26">
-            <a:extLst>
-              <a:ext uri="{FF2B5EF4-FFF2-40B4-BE49-F238E27FC236}">
-                <a16:creationId xmlns:a16="http://schemas.microsoft.com/office/drawing/2014/main" id="{10058680-D07C-4893-B2B7-91543F18AB32}"/>
-              </a:ext>
-              <a:ext uri="{C183D7F6-B498-43B3-948B-1728B52AA6E4}">
-                <adec:decorative xmlns:adec="http://schemas.microsoft.com/office/drawing/2017/decorative" val="1"/>
-              </a:ext>
-            </a:extLst>
-          </p:cNvPr>
-          <p:cNvSpPr>
-            <a:spLocks noGrp="1" noRot="1" noChangeAspect="1" noMove="1" noResize="1" noEditPoints="1" noAdjustHandles="1" noChangeArrowheads="1" noChangeShapeType="1" noTextEdit="1"/>
-          </p:cNvSpPr>
-          <p:nvPr>
-            <p:extLst>
-              <p:ext uri="{386F3935-93C4-4BCD-93E2-E3B085C9AB24}">
-                <p16:designElem xmlns:p16="http://schemas.microsoft.com/office/powerpoint/2015/main" val="1"/>
-              </p:ext>
-            </p:extLst>
-          </p:nvPr>
-        </p:nvSpPr>
-        <p:spPr>
-          <a:xfrm>
-            <a:off x="446534" y="457200"/>
-            <a:ext cx="3703320" cy="94997"/>
-          </a:xfrm>
-          <a:prstGeom prst="rect">
-            <a:avLst/>
-          </a:prstGeom>
-          <a:solidFill>
-            <a:srgbClr val="465359"/>
           </a:solidFill>
           <a:ln>
             <a:noFill/>
@@ -16986,132 +17328,10 @@
       </p:sp>
       <p:sp>
         <p:nvSpPr>
-          <p:cNvPr id="39" name="Rectangle 38">
+          <p:cNvPr id="2" name="Title 1">
             <a:extLst>
               <a:ext uri="{FF2B5EF4-FFF2-40B4-BE49-F238E27FC236}">
-                <a16:creationId xmlns:a16="http://schemas.microsoft.com/office/drawing/2014/main" id="{7B42427A-0A1F-4A55-8705-D9179F1E0CFB}"/>
-              </a:ext>
-              <a:ext uri="{C183D7F6-B498-43B3-948B-1728B52AA6E4}">
-                <adec:decorative xmlns:adec="http://schemas.microsoft.com/office/drawing/2017/decorative" val="1"/>
-              </a:ext>
-            </a:extLst>
-          </p:cNvPr>
-          <p:cNvSpPr>
-            <a:spLocks noGrp="1" noRot="1" noChangeAspect="1" noMove="1" noResize="1" noEditPoints="1" noAdjustHandles="1" noChangeArrowheads="1" noChangeShapeType="1" noTextEdit="1"/>
-          </p:cNvSpPr>
-          <p:nvPr>
-            <p:extLst>
-              <p:ext uri="{386F3935-93C4-4BCD-93E2-E3B085C9AB24}">
-                <p16:designElem xmlns:p16="http://schemas.microsoft.com/office/powerpoint/2015/main" val="1"/>
-              </p:ext>
-            </p:extLst>
-          </p:nvPr>
-        </p:nvSpPr>
-        <p:spPr>
-          <a:xfrm>
-            <a:off x="4241830" y="457200"/>
-            <a:ext cx="3703320" cy="91440"/>
-          </a:xfrm>
-          <a:prstGeom prst="rect">
-            <a:avLst/>
-          </a:prstGeom>
-          <a:solidFill>
-            <a:schemeClr val="accent1"/>
-          </a:solidFill>
-          <a:ln>
-            <a:noFill/>
-          </a:ln>
-          <a:effectLst/>
-        </p:spPr>
-        <p:style>
-          <a:lnRef idx="1">
-            <a:schemeClr val="accent1"/>
-          </a:lnRef>
-          <a:fillRef idx="3">
-            <a:schemeClr val="accent1"/>
-          </a:fillRef>
-          <a:effectRef idx="2">
-            <a:schemeClr val="accent1"/>
-          </a:effectRef>
-          <a:fontRef idx="minor">
-            <a:schemeClr val="lt1"/>
-          </a:fontRef>
-        </p:style>
-        <p:txBody>
-          <a:bodyPr/>
-          <a:lstStyle/>
-          <a:p>
-            <a:endParaRPr lang="en-US" dirty="0"/>
-          </a:p>
-        </p:txBody>
-      </p:sp>
-      <p:sp>
-        <p:nvSpPr>
-          <p:cNvPr id="40" name="Rectangle 39">
-            <a:extLst>
-              <a:ext uri="{FF2B5EF4-FFF2-40B4-BE49-F238E27FC236}">
-                <a16:creationId xmlns:a16="http://schemas.microsoft.com/office/drawing/2014/main" id="{EE54A6FE-D8CB-48A3-900B-053D4EBD3B85}"/>
-              </a:ext>
-              <a:ext uri="{C183D7F6-B498-43B3-948B-1728B52AA6E4}">
-                <adec:decorative xmlns:adec="http://schemas.microsoft.com/office/drawing/2017/decorative" val="1"/>
-              </a:ext>
-            </a:extLst>
-          </p:cNvPr>
-          <p:cNvSpPr>
-            <a:spLocks noGrp="1" noRot="1" noChangeAspect="1" noMove="1" noResize="1" noEditPoints="1" noAdjustHandles="1" noChangeArrowheads="1" noChangeShapeType="1" noTextEdit="1"/>
-          </p:cNvSpPr>
-          <p:nvPr>
-            <p:extLst>
-              <p:ext uri="{386F3935-93C4-4BCD-93E2-E3B085C9AB24}">
-                <p16:designElem xmlns:p16="http://schemas.microsoft.com/office/powerpoint/2015/main" val="1"/>
-              </p:ext>
-            </p:extLst>
-          </p:nvPr>
-        </p:nvSpPr>
-        <p:spPr>
-          <a:xfrm>
-            <a:off x="8042147" y="453643"/>
-            <a:ext cx="3703320" cy="98554"/>
-          </a:xfrm>
-          <a:prstGeom prst="rect">
-            <a:avLst/>
-          </a:prstGeom>
-          <a:solidFill>
-            <a:srgbClr val="969FA7"/>
-          </a:solidFill>
-          <a:ln>
-            <a:noFill/>
-          </a:ln>
-          <a:effectLst/>
-        </p:spPr>
-        <p:style>
-          <a:lnRef idx="1">
-            <a:schemeClr val="accent1"/>
-          </a:lnRef>
-          <a:fillRef idx="3">
-            <a:schemeClr val="accent1"/>
-          </a:fillRef>
-          <a:effectRef idx="2">
-            <a:schemeClr val="accent1"/>
-          </a:effectRef>
-          <a:fontRef idx="minor">
-            <a:schemeClr val="lt1"/>
-          </a:fontRef>
-        </p:style>
-        <p:txBody>
-          <a:bodyPr/>
-          <a:lstStyle/>
-          <a:p>
-            <a:endParaRPr lang="en-US"/>
-          </a:p>
-        </p:txBody>
-      </p:sp>
-      <p:sp>
-        <p:nvSpPr>
-          <p:cNvPr id="9" name="Content Placeholder 8">
-            <a:extLst>
-              <a:ext uri="{FF2B5EF4-FFF2-40B4-BE49-F238E27FC236}">
-                <a16:creationId xmlns:a16="http://schemas.microsoft.com/office/drawing/2014/main" id="{674567D5-4058-3C2C-31B1-97D72A7EDC81}"/>
+                <a16:creationId xmlns:a16="http://schemas.microsoft.com/office/drawing/2014/main" id="{5047AA93-0184-6D69-45C2-A51151E34A1C}"/>
               </a:ext>
             </a:extLst>
           </p:cNvPr>
@@ -17119,104 +17339,29 @@
             <a:spLocks noGrp="1"/>
           </p:cNvSpPr>
           <p:nvPr>
-            <p:ph idx="1"/>
+            <p:ph type="title"/>
           </p:nvPr>
         </p:nvSpPr>
         <p:spPr>
           <a:xfrm>
-            <a:off x="671513" y="2536031"/>
-            <a:ext cx="3123783" cy="3671936"/>
+            <a:off x="8013433" y="702156"/>
+            <a:ext cx="3568661" cy="1188720"/>
           </a:xfrm>
         </p:spPr>
         <p:txBody>
-          <a:bodyPr anchor="t">
+          <a:bodyPr>
             <a:normAutofit/>
           </a:bodyPr>
           <a:lstStyle/>
           <a:p>
             <a:r>
-              <a:rPr lang="en-US" dirty="0">
-                <a:solidFill>
-                  <a:schemeClr val="bg1">
-                    <a:lumMod val="75000"/>
-                    <a:lumOff val="25000"/>
-                  </a:schemeClr>
-                </a:solidFill>
-              </a:rPr>
-              <a:t>Maplewood High – 37216</a:t>
+              <a:rPr lang="en-US" sz="2400"/>
+              <a:t>Lowest Graduation rates in 2023</a:t>
             </a:r>
-          </a:p>
-          <a:p>
-            <a:r>
-              <a:rPr lang="en-US" dirty="0">
-                <a:solidFill>
-                  <a:schemeClr val="bg1">
-                    <a:lumMod val="75000"/>
-                    <a:lumOff val="25000"/>
-                  </a:schemeClr>
-                </a:solidFill>
-              </a:rPr>
-              <a:t>Glencliff High – 37211</a:t>
-            </a:r>
-          </a:p>
-          <a:p>
-            <a:r>
-              <a:rPr lang="en-US" dirty="0">
-                <a:solidFill>
-                  <a:schemeClr val="bg1">
-                    <a:lumMod val="75000"/>
-                    <a:lumOff val="25000"/>
-                  </a:schemeClr>
-                </a:solidFill>
-              </a:rPr>
-              <a:t>Antioch High – 37013</a:t>
-            </a:r>
-          </a:p>
-          <a:p>
-            <a:r>
-              <a:rPr lang="en-US" dirty="0">
-                <a:solidFill>
-                  <a:schemeClr val="bg1">
-                    <a:lumMod val="75000"/>
-                    <a:lumOff val="25000"/>
-                  </a:schemeClr>
-                </a:solidFill>
-              </a:rPr>
-              <a:t>McGavock High – 37214</a:t>
-            </a:r>
-          </a:p>
-          <a:p>
-            <a:r>
-              <a:rPr lang="en-US" dirty="0">
-                <a:solidFill>
-                  <a:schemeClr val="bg1">
-                    <a:lumMod val="75000"/>
-                    <a:lumOff val="25000"/>
-                  </a:schemeClr>
-                </a:solidFill>
-              </a:rPr>
-              <a:t>John Overton High – 37220</a:t>
-            </a:r>
-          </a:p>
-          <a:p>
-            <a:endParaRPr lang="en-US" dirty="0">
-              <a:solidFill>
-                <a:schemeClr val="bg1">
-                  <a:lumMod val="75000"/>
-                  <a:lumOff val="25000"/>
-                </a:schemeClr>
-              </a:solidFill>
-            </a:endParaRPr>
-          </a:p>
-          <a:p>
-            <a:endParaRPr lang="en-US" dirty="0">
-              <a:solidFill>
-                <a:schemeClr val="bg1">
-                  <a:lumMod val="75000"/>
-                  <a:lumOff val="25000"/>
-                </a:schemeClr>
-              </a:solidFill>
-            </a:endParaRPr>
+            <a:br>
+              <a:rPr lang="en-US" sz="2400"/>
+            </a:br>
+            <a:endParaRPr lang="en-US" sz="2400"/>
           </a:p>
         </p:txBody>
       </p:sp>
@@ -17242,19 +17387,145 @@
               </a:ext>
             </a:extLst>
           </a:blip>
-          <a:srcRect b="4748"/>
+          <a:srcRect l="5482" r="5492" b="2"/>
           <a:stretch/>
         </p:blipFill>
         <p:spPr>
           <a:xfrm>
-            <a:off x="4241830" y="601200"/>
-            <a:ext cx="7503636" cy="5789365"/>
+            <a:off x="20" y="10"/>
+            <a:ext cx="7537685" cy="6857990"/>
           </a:xfrm>
           <a:prstGeom prst="rect">
             <a:avLst/>
           </a:prstGeom>
         </p:spPr>
       </p:pic>
+      <p:sp>
+        <p:nvSpPr>
+          <p:cNvPr id="59" name="Rectangle 58">
+            <a:extLst>
+              <a:ext uri="{FF2B5EF4-FFF2-40B4-BE49-F238E27FC236}">
+                <a16:creationId xmlns:a16="http://schemas.microsoft.com/office/drawing/2014/main" id="{E536F3B4-50F6-4C52-8F76-4EB1214719DC}"/>
+              </a:ext>
+              <a:ext uri="{C183D7F6-B498-43B3-948B-1728B52AA6E4}">
+                <adec:decorative xmlns:adec="http://schemas.microsoft.com/office/drawing/2017/decorative" val="1"/>
+              </a:ext>
+            </a:extLst>
+          </p:cNvPr>
+          <p:cNvSpPr>
+            <a:spLocks noGrp="1" noRot="1" noChangeAspect="1" noMove="1" noResize="1" noEditPoints="1" noAdjustHandles="1" noChangeArrowheads="1" noChangeShapeType="1" noTextEdit="1"/>
+          </p:cNvSpPr>
+          <p:nvPr>
+            <p:extLst>
+              <p:ext uri="{386F3935-93C4-4BCD-93E2-E3B085C9AB24}">
+                <p16:designElem xmlns:p16="http://schemas.microsoft.com/office/powerpoint/2015/main" val="1"/>
+              </p:ext>
+            </p:extLst>
+          </p:nvPr>
+        </p:nvSpPr>
+        <p:spPr>
+          <a:xfrm>
+            <a:off x="8042147" y="457200"/>
+            <a:ext cx="3511233" cy="91439"/>
+          </a:xfrm>
+          <a:prstGeom prst="rect">
+            <a:avLst/>
+          </a:prstGeom>
+          <a:solidFill>
+            <a:schemeClr val="accent1"/>
+          </a:solidFill>
+          <a:ln>
+            <a:noFill/>
+          </a:ln>
+          <a:effectLst/>
+        </p:spPr>
+        <p:style>
+          <a:lnRef idx="1">
+            <a:schemeClr val="accent1"/>
+          </a:lnRef>
+          <a:fillRef idx="3">
+            <a:schemeClr val="accent1"/>
+          </a:fillRef>
+          <a:effectRef idx="2">
+            <a:schemeClr val="accent1"/>
+          </a:effectRef>
+          <a:fontRef idx="minor">
+            <a:schemeClr val="lt1"/>
+          </a:fontRef>
+        </p:style>
+        <p:txBody>
+          <a:bodyPr/>
+          <a:lstStyle/>
+          <a:p>
+            <a:endParaRPr lang="en-US"/>
+          </a:p>
+        </p:txBody>
+      </p:sp>
+      <p:sp>
+        <p:nvSpPr>
+          <p:cNvPr id="9" name="Content Placeholder 8">
+            <a:extLst>
+              <a:ext uri="{FF2B5EF4-FFF2-40B4-BE49-F238E27FC236}">
+                <a16:creationId xmlns:a16="http://schemas.microsoft.com/office/drawing/2014/main" id="{674567D5-4058-3C2C-31B1-97D72A7EDC81}"/>
+              </a:ext>
+            </a:extLst>
+          </p:cNvPr>
+          <p:cNvSpPr>
+            <a:spLocks noGrp="1"/>
+          </p:cNvSpPr>
+          <p:nvPr>
+            <p:ph idx="1"/>
+          </p:nvPr>
+        </p:nvSpPr>
+        <p:spPr>
+          <a:xfrm>
+            <a:off x="8013433" y="2340864"/>
+            <a:ext cx="3568661" cy="3634486"/>
+          </a:xfrm>
+        </p:spPr>
+        <p:txBody>
+          <a:bodyPr>
+            <a:normAutofit/>
+          </a:bodyPr>
+          <a:lstStyle/>
+          <a:p>
+            <a:r>
+              <a:rPr lang="en-US"/>
+              <a:t>Maplewood High – 37216</a:t>
+            </a:r>
+          </a:p>
+          <a:p>
+            <a:r>
+              <a:rPr lang="en-US"/>
+              <a:t>Glencliff High – 37211</a:t>
+            </a:r>
+          </a:p>
+          <a:p>
+            <a:r>
+              <a:rPr lang="en-US"/>
+              <a:t>Antioch High – 37013</a:t>
+            </a:r>
+          </a:p>
+          <a:p>
+            <a:r>
+              <a:rPr lang="en-US"/>
+              <a:t>McGavock High – 37214</a:t>
+            </a:r>
+          </a:p>
+          <a:p>
+            <a:r>
+              <a:rPr lang="en-US"/>
+              <a:t>John Overton High – 37220</a:t>
+            </a:r>
+          </a:p>
+          <a:p>
+            <a:endParaRPr lang="en-US"/>
+          </a:p>
+          <a:p>
+            <a:endParaRPr lang="en-US"/>
+          </a:p>
+        </p:txBody>
+      </p:sp>
     </p:spTree>
     <p:extLst>
       <p:ext uri="{BB962C8B-B14F-4D97-AF65-F5344CB8AC3E}">
@@ -17263,7 +17534,7 @@
     </p:extLst>
   </p:cSld>
   <p:clrMapOvr>
-    <a:overrideClrMapping bg1="dk1" tx1="lt1" bg2="dk2" tx2="lt2" accent1="accent1" accent2="accent2" accent3="accent3" accent4="accent4" accent5="accent5" accent6="accent6" hlink="hlink" folHlink="folHlink"/>
+    <a:overrideClrMapping bg1="lt1" tx1="dk1" bg2="lt2" tx2="dk2" accent1="accent1" accent2="accent2" accent3="accent3" accent4="accent4" accent5="accent5" accent6="accent6" hlink="hlink" folHlink="folHlink"/>
   </p:clrMapOvr>
 </p:sld>
 </file>
@@ -17837,10 +18108,10 @@
       </p:sp>
       <p:pic>
         <p:nvPicPr>
-          <p:cNvPr id="5" name="Picture 4" descr="A graph with blue and white stripes&#10;&#10;Description automatically generated">
+          <p:cNvPr id="6" name="Picture 5" descr="A bar chart with numbers and a bar&#10;&#10;Description automatically generated with medium confidence">
             <a:extLst>
               <a:ext uri="{FF2B5EF4-FFF2-40B4-BE49-F238E27FC236}">
-                <a16:creationId xmlns:a16="http://schemas.microsoft.com/office/drawing/2014/main" id="{782CCE60-EBA6-692B-B257-CD98A238864B}"/>
+                <a16:creationId xmlns:a16="http://schemas.microsoft.com/office/drawing/2014/main" id="{D8C56853-52F2-1C84-0692-E5D36ECF362C}"/>
               </a:ext>
             </a:extLst>
           </p:cNvPr>
@@ -17863,8 +18134,8 @@
         </p:blipFill>
         <p:spPr>
           <a:xfrm>
-            <a:off x="4765053" y="1252389"/>
-            <a:ext cx="6764864" cy="4329512"/>
+            <a:off x="4987056" y="1005840"/>
+            <a:ext cx="6830378" cy="4715533"/>
           </a:xfrm>
           <a:prstGeom prst="rect">
             <a:avLst/>
